--- a/納品レポート/ホテル別レポート/chisan_口コミ分析レポート.pptx
+++ b/納品レポート/ホテル別レポート/chisan_口コミ分析レポート.pptx
@@ -217,7 +217,7 @@
                   <c:v>7</c:v>
                 </c:pt>
                 <c:pt idx="3">
-                  <c:v>6.86</c:v>
+                  <c:v>7</c:v>
                 </c:pt>
                 <c:pt idx="4">
                   <c:v>6.62</c:v>
@@ -566,7 +566,7 @@
               <c:numCache>
                 <c:ptCount val="3"/>
                 <c:pt idx="0">
-                  <c:v>37</c:v>
+                  <c:v>38</c:v>
                 </c:pt>
                 <c:pt idx="1">
                   <c:v>15</c:v>
@@ -815,7 +815,7 @@
                   <c:v>2</c:v>
                 </c:pt>
                 <c:pt idx="2">
-                  <c:v>22</c:v>
+                  <c:v>23</c:v>
                 </c:pt>
                 <c:pt idx="3">
                   <c:v>1</c:v>
@@ -2781,7 +2781,7 @@
                 <a:ea typeface="Arial" pitchFamily="34" charset="-122"/>
                 <a:cs typeface="Arial" pitchFamily="34" charset="-120"/>
               </a:rPr>
-              <a:t>レビュー総数：65件（6サイト）</a:t>
+              <a:t>レビュー総数：66件（6サイト）</a:t>
             </a:r>
             <a:endParaRPr lang="en-US" sz="1000" dirty="0"/>
           </a:p>
@@ -2801,7 +2801,7 @@
                 <a:ea typeface="Arial" pitchFamily="34" charset="-122"/>
                 <a:cs typeface="Arial" pitchFamily="34" charset="-120"/>
               </a:rPr>
-              <a:t>作成日：2026年3月17日</a:t>
+              <a:t>作成日：2026年3月18日</a:t>
             </a:r>
             <a:endParaRPr lang="en-US" sz="1000" dirty="0"/>
           </a:p>
@@ -3347,7 +3347,7 @@
                           <a:ea typeface="Arial" pitchFamily="34" charset="-122"/>
                           <a:cs typeface="Arial" pitchFamily="34" charset="-120"/>
                         </a:rPr>
-                        <a:t>7.02点</a:t>
+                        <a:t>7.03点</a:t>
                       </a:r>
                       <a:endParaRPr lang="en-US" sz="1000" dirty="0">
                         <a:latin typeface="Arial" charset="0"/>
@@ -3621,7 +3621,7 @@
                           <a:ea typeface="Arial" pitchFamily="34" charset="-122"/>
                           <a:cs typeface="Arial" pitchFamily="34" charset="-120"/>
                         </a:rPr>
-                        <a:t>56.9%</a:t>
+                        <a:t>57.6%</a:t>
                       </a:r>
                       <a:endParaRPr lang="en-US" sz="1000" dirty="0">
                         <a:latin typeface="Arial" charset="0"/>
@@ -3689,7 +3689,7 @@
                           <a:ea typeface="Arial" pitchFamily="34" charset="-122"/>
                           <a:cs typeface="Arial" pitchFamily="34" charset="-120"/>
                         </a:rPr>
-                        <a:t>67%以上</a:t>
+                        <a:t>68%以上</a:t>
                       </a:r>
                       <a:endParaRPr lang="en-US" sz="1000" dirty="0">
                         <a:latin typeface="Arial" charset="0"/>
@@ -3895,7 +3895,7 @@
                           <a:ea typeface="Arial" pitchFamily="34" charset="-122"/>
                           <a:cs typeface="Arial" pitchFamily="34" charset="-120"/>
                         </a:rPr>
-                        <a:t>20.0%</a:t>
+                        <a:t>19.7%</a:t>
                       </a:r>
                       <a:endParaRPr lang="en-US" sz="1000" dirty="0">
                         <a:latin typeface="Arial" charset="0"/>
@@ -5082,7 +5082,7 @@
                 <a:ea typeface="Arial" pitchFamily="34" charset="-122"/>
                 <a:cs typeface="Arial" pitchFamily="34" charset="-120"/>
               </a:rPr>
-              <a:t>7.02</a:t>
+              <a:t>7.03</a:t>
             </a:r>
             <a:endParaRPr lang="en-US" sz="3200" dirty="0"/>
           </a:p>
@@ -5207,7 +5207,7 @@
                 <a:ea typeface="Arial" pitchFamily="34" charset="-122"/>
                 <a:cs typeface="Arial" pitchFamily="34" charset="-120"/>
               </a:rPr>
-              <a:t>56.9%</a:t>
+              <a:t>57.6%</a:t>
             </a:r>
             <a:endParaRPr lang="en-US" sz="3200" dirty="0"/>
           </a:p>
@@ -5332,7 +5332,7 @@
                 <a:ea typeface="Arial" pitchFamily="34" charset="-122"/>
                 <a:cs typeface="Arial" pitchFamily="34" charset="-120"/>
               </a:rPr>
-              <a:t>20.0%</a:t>
+              <a:t>19.7%</a:t>
             </a:r>
             <a:endParaRPr lang="en-US" sz="3200" dirty="0"/>
           </a:p>
@@ -5457,7 +5457,7 @@
                 <a:ea typeface="Arial" pitchFamily="34" charset="-122"/>
                 <a:cs typeface="Arial" pitchFamily="34" charset="-120"/>
               </a:rPr>
-              <a:t>65件</a:t>
+              <a:t>66件</a:t>
             </a:r>
             <a:endParaRPr lang="en-US" sz="3200" dirty="0"/>
           </a:p>
@@ -6266,7 +6266,7 @@
                 <a:ea typeface="Arial" pitchFamily="34" charset="-122"/>
                 <a:cs typeface="Arial" pitchFamily="34" charset="-120"/>
               </a:rPr>
-              <a:t>7.02</a:t>
+              <a:t>7.03</a:t>
             </a:r>
             <a:endParaRPr lang="en-US" sz="3200" dirty="0"/>
           </a:p>
@@ -6391,7 +6391,7 @@
                 <a:ea typeface="Arial" pitchFamily="34" charset="-122"/>
                 <a:cs typeface="Arial" pitchFamily="34" charset="-120"/>
               </a:rPr>
-              <a:t>56.9%</a:t>
+              <a:t>57.6%</a:t>
             </a:r>
             <a:endParaRPr lang="en-US" sz="3200" dirty="0"/>
           </a:p>
@@ -6516,7 +6516,7 @@
                 <a:ea typeface="Arial" pitchFamily="34" charset="-122"/>
                 <a:cs typeface="Arial" pitchFamily="34" charset="-120"/>
               </a:rPr>
-              <a:t>20.0%</a:t>
+              <a:t>19.7%</a:t>
             </a:r>
             <a:endParaRPr lang="en-US" sz="3200" dirty="0"/>
           </a:p>
@@ -6641,7 +6641,7 @@
                 <a:ea typeface="Arial" pitchFamily="34" charset="-122"/>
                 <a:cs typeface="Arial" pitchFamily="34" charset="-120"/>
               </a:rPr>
-              <a:t>65件</a:t>
+              <a:t>66件</a:t>
             </a:r>
             <a:endParaRPr lang="en-US" sz="3200" dirty="0"/>
           </a:p>
@@ -8597,7 +8597,7 @@
                           <a:ea typeface="Arial" pitchFamily="34" charset="-122"/>
                           <a:cs typeface="Arial" pitchFamily="34" charset="-120"/>
                         </a:rPr>
-                        <a:t>7</a:t>
+                        <a:t>8</a:t>
                       </a:r>
                       <a:endParaRPr lang="en-US" sz="900" dirty="0">
                         <a:latin typeface="Arial" charset="0"/>
@@ -8665,7 +8665,7 @@
                           <a:ea typeface="Arial" pitchFamily="34" charset="-122"/>
                           <a:cs typeface="Arial" pitchFamily="34" charset="-120"/>
                         </a:rPr>
-                        <a:t>3.43</a:t>
+                        <a:t>3.5</a:t>
                       </a:r>
                       <a:endParaRPr lang="en-US" sz="900" dirty="0">
                         <a:latin typeface="Arial" charset="0"/>
@@ -8801,7 +8801,7 @@
                           <a:ea typeface="Arial" pitchFamily="34" charset="-122"/>
                           <a:cs typeface="Arial" pitchFamily="34" charset="-120"/>
                         </a:rPr>
-                        <a:t>6.86</a:t>
+                        <a:t>7</a:t>
                       </a:r>
                       <a:endParaRPr lang="en-US" sz="900" dirty="0">
                         <a:latin typeface="Arial" charset="0"/>
@@ -9893,7 +9893,7 @@
                 <a:ea typeface="Arial" pitchFamily="34" charset="-122"/>
                 <a:cs typeface="Arial" pitchFamily="34" charset="-120"/>
               </a:rPr>
-              <a:t>37件（56.9%）</a:t>
+              <a:t>38件（57.6%）</a:t>
             </a:r>
             <a:endParaRPr lang="en-US" sz="1100" dirty="0"/>
           </a:p>
@@ -9991,7 +9991,7 @@
                 <a:ea typeface="Arial" pitchFamily="34" charset="-122"/>
                 <a:cs typeface="Arial" pitchFamily="34" charset="-120"/>
               </a:rPr>
-              <a:t>15件（23.1%）</a:t>
+              <a:t>15件（22.7%）</a:t>
             </a:r>
             <a:endParaRPr lang="en-US" sz="1100" dirty="0"/>
           </a:p>
@@ -10089,7 +10089,7 @@
                 <a:ea typeface="Arial" pitchFamily="34" charset="-122"/>
                 <a:cs typeface="Arial" pitchFamily="34" charset="-120"/>
               </a:rPr>
-              <a:t>13件（20.0%）</a:t>
+              <a:t>13件（19.7%）</a:t>
             </a:r>
             <a:endParaRPr lang="en-US" sz="1100" dirty="0"/>
           </a:p>
@@ -11315,7 +11315,7 @@
                 <a:ea typeface="Arial" pitchFamily="34" charset="-122"/>
                 <a:cs typeface="Arial" pitchFamily="34" charset="-120"/>
               </a:rPr>
-              <a:t>8件</a:t>
+              <a:t>9件</a:t>
             </a:r>
             <a:endParaRPr lang="en-US" sz="900" dirty="0"/>
           </a:p>
@@ -11393,7 +11393,7 @@
                 <a:ea typeface="Arial" pitchFamily="34" charset="-122"/>
                 <a:cs typeface="Arial" pitchFamily="34" charset="-120"/>
               </a:rPr>
-              <a:t>喫煙で予約してたが禁煙シングルを希望したら柔軟に対応頂けた</a:t>
+              <a:t>接客はとても良くて大浴場は広くてサウナもあるから嬉しかった</a:t>
             </a:r>
             <a:endParaRPr lang="en-US" sz="900" dirty="0"/>
           </a:p>
@@ -11432,7 +11432,7 @@
                 <a:ea typeface="Arial" pitchFamily="34" charset="-122"/>
                 <a:cs typeface="Arial" pitchFamily="34" charset="-120"/>
               </a:rPr>
-              <a:t>「設備刷新できないなら、例えばエアドッグを貸しますーとか、フロントでプレステ5貸してくれるーとか、そんなに有名じゃあ...」</a:t>
+              <a:t>「喫煙で予約してたが禁煙シングルを希望したら柔軟に対応頂けた」</a:t>
             </a:r>
             <a:endParaRPr lang="en-US" sz="900" dirty="0"/>
           </a:p>
@@ -13167,7 +13167,7 @@
                           <a:ea typeface="Arial" pitchFamily="34" charset="-122"/>
                           <a:cs typeface="Arial" pitchFamily="34" charset="-120"/>
                         </a:rPr>
-                        <a:t>たぶん直線距離は大した事ないのかもしれませんけど、狭い路地をぐにゃぐにゃ歩いて、屋形船の前をとおり、謎の高架の下を...</a:t>
+                        <a:t>駐車場はとにかく狭い間に停めるのはいいけど端とかはほんと狭くて危うくぶつけそうになるから大きい車で来る際は注意が必要</a:t>
                       </a:r>
                       <a:endParaRPr lang="en-US" sz="900" dirty="0">
                         <a:latin typeface="Arial" charset="0"/>
@@ -13235,7 +13235,7 @@
                           <a:ea typeface="Arial" pitchFamily="34" charset="-122"/>
                           <a:cs typeface="Arial" pitchFamily="34" charset="-120"/>
                         </a:rPr>
-                        <a:t>3件</a:t>
+                        <a:t>4件</a:t>
                       </a:r>
                       <a:endParaRPr lang="en-US" sz="900" dirty="0">
                         <a:latin typeface="Arial" charset="0"/>
@@ -13373,7 +13373,7 @@
                           <a:ea typeface="Arial" pitchFamily="34" charset="-122"/>
                           <a:cs typeface="Arial" pitchFamily="34" charset="-120"/>
                         </a:rPr>
-                        <a:t>エアコン・空調</a:t>
+                        <a:t>臭い・匂い</a:t>
                       </a:r>
                       <a:endParaRPr lang="en-US" sz="900" dirty="0">
                         <a:latin typeface="Arial" charset="0"/>
@@ -13441,7 +13441,7 @@
                           <a:ea typeface="Arial" pitchFamily="34" charset="-122"/>
                           <a:cs typeface="Arial" pitchFamily="34" charset="-120"/>
                         </a:rPr>
-                        <a:t>共同エアコン、、、 暑かったです</a:t>
+                        <a:t>宿は禁煙ルームにも関わらずタバコのような匂いがしたのは残念だった</a:t>
                       </a:r>
                       <a:endParaRPr lang="en-US" sz="900" dirty="0">
                         <a:latin typeface="Arial" charset="0"/>
@@ -13647,7 +13647,7 @@
                           <a:ea typeface="Arial" pitchFamily="34" charset="-122"/>
                           <a:cs typeface="Arial" pitchFamily="34" charset="-120"/>
                         </a:rPr>
-                        <a:t>臭い・匂い</a:t>
+                        <a:t>エアコン・空調</a:t>
                       </a:r>
                       <a:endParaRPr lang="en-US" sz="900" dirty="0">
                         <a:latin typeface="Arial" charset="0"/>
@@ -13715,7 +13715,7 @@
                           <a:ea typeface="Arial" pitchFamily="34" charset="-122"/>
                           <a:cs typeface="Arial" pitchFamily="34" charset="-120"/>
                         </a:rPr>
-                        <a:t>少し残念だったのは禁煙ルームを取りましたが、同じ階に喫煙ルームもある様でエレベーターを降りて廊下中に染みついている...</a:t>
+                        <a:t>共同エアコン、、、 暑かったです</a:t>
                       </a:r>
                       <a:endParaRPr lang="en-US" sz="900" dirty="0">
                         <a:latin typeface="Arial" charset="0"/>
@@ -13783,7 +13783,7 @@
                           <a:ea typeface="Arial" pitchFamily="34" charset="-122"/>
                           <a:cs typeface="Arial" pitchFamily="34" charset="-120"/>
                         </a:rPr>
-                        <a:t>2件</a:t>
+                        <a:t>3件</a:t>
                       </a:r>
                       <a:endParaRPr lang="en-US" sz="900" dirty="0">
                         <a:latin typeface="Arial" charset="0"/>
@@ -13921,7 +13921,7 @@
                           <a:ea typeface="Arial" pitchFamily="34" charset="-122"/>
                           <a:cs typeface="Arial" pitchFamily="34" charset="-120"/>
                         </a:rPr>
-                        <a:t>朝食の改善要望</a:t>
+                        <a:t>対応・サービスの不満</a:t>
                       </a:r>
                       <a:endParaRPr lang="en-US" sz="900" dirty="0">
                         <a:latin typeface="Arial" charset="0"/>
@@ -13989,7 +13989,7 @@
                           <a:ea typeface="Arial" pitchFamily="34" charset="-122"/>
                           <a:cs typeface="Arial" pitchFamily="34" charset="-120"/>
                         </a:rPr>
-                        <a:t>ごはんは品数はほどほどであるが、どれも美味しい お風呂は大浴場はなく、汚くはないが綺麗でもない ごはんは品数はほど...</a:t>
+                        <a:t>宿は禁煙ルームにも関わらずタバコのような匂いがしたのは残念だった</a:t>
                       </a:r>
                       <a:endParaRPr lang="en-US" sz="900" dirty="0">
                         <a:latin typeface="Arial" charset="0"/>
@@ -14057,7 +14057,7 @@
                           <a:ea typeface="Arial" pitchFamily="34" charset="-122"/>
                           <a:cs typeface="Arial" pitchFamily="34" charset="-120"/>
                         </a:rPr>
-                        <a:t>2件</a:t>
+                        <a:t>3件</a:t>
                       </a:r>
                       <a:endParaRPr lang="en-US" sz="900" dirty="0">
                         <a:latin typeface="Arial" charset="0"/>
@@ -14195,7 +14195,7 @@
                           <a:ea typeface="Arial" pitchFamily="34" charset="-122"/>
                           <a:cs typeface="Arial" pitchFamily="34" charset="-120"/>
                         </a:rPr>
-                        <a:t>窓・採光</a:t>
+                        <a:t>朝食の改善要望</a:t>
                       </a:r>
                       <a:endParaRPr lang="en-US" sz="900" dirty="0">
                         <a:latin typeface="Arial" charset="0"/>
@@ -14263,7 +14263,7 @@
                           <a:ea typeface="Arial" pitchFamily="34" charset="-122"/>
                           <a:cs typeface="Arial" pitchFamily="34" charset="-120"/>
                         </a:rPr>
-                        <a:t>換気をしようと窓を開けると、清掃されてないようなサッシ部分</a:t>
+                        <a:t>ごはんは品数はほどほどであるが、どれも美味しい お風呂は大浴場はなく、汚くはないが綺麗でもない ごはんは品数はほど...</a:t>
                       </a:r>
                       <a:endParaRPr lang="en-US" sz="900" dirty="0">
                         <a:latin typeface="Arial" charset="0"/>
@@ -14469,7 +14469,7 @@
                           <a:ea typeface="Arial" pitchFamily="34" charset="-122"/>
                           <a:cs typeface="Arial" pitchFamily="34" charset="-120"/>
                         </a:rPr>
-                        <a:t>対応・サービスの不満</a:t>
+                        <a:t>窓・採光</a:t>
                       </a:r>
                       <a:endParaRPr lang="en-US" sz="900" dirty="0">
                         <a:latin typeface="Arial" charset="0"/>
@@ -14537,7 +14537,7 @@
                           <a:ea typeface="Arial" pitchFamily="34" charset="-122"/>
                           <a:cs typeface="Arial" pitchFamily="34" charset="-120"/>
                         </a:rPr>
-                        <a:t>少し残念だったのは禁煙ルームを取りましたが、同じ階に喫煙ルームもある様でエレベーターを降りて廊下中に染みついている...</a:t>
+                        <a:t>換気をしようと窓を開けると、清掃されてないようなサッシ部分</a:t>
                       </a:r>
                       <a:endParaRPr lang="en-US" sz="900" dirty="0">
                         <a:latin typeface="Arial" charset="0"/>

--- a/納品レポート/ホテル別レポート/chisan_口コミ分析レポート.pptx
+++ b/納品レポート/ホテル別レポート/chisan_口コミ分析レポート.pptx
@@ -220,7 +220,7 @@
                   <c:v>7</c:v>
                 </c:pt>
                 <c:pt idx="4">
-                  <c:v>6.62</c:v>
+                  <c:v>6.82</c:v>
                 </c:pt>
                 <c:pt idx="5">
                   <c:v>6.59</c:v>
@@ -566,7 +566,7 @@
               <c:numCache>
                 <c:ptCount val="3"/>
                 <c:pt idx="0">
-                  <c:v>38</c:v>
+                  <c:v>39</c:v>
                 </c:pt>
                 <c:pt idx="1">
                   <c:v>15</c:v>
@@ -809,7 +809,7 @@
                 <c:formatCode>General</c:formatCode>
                 <c:ptCount val="8"/>
                 <c:pt idx="0">
-                  <c:v>13</c:v>
+                  <c:v>14</c:v>
                 </c:pt>
                 <c:pt idx="1">
                   <c:v>2</c:v>
@@ -2781,7 +2781,7 @@
                 <a:ea typeface="Arial" pitchFamily="34" charset="-122"/>
                 <a:cs typeface="Arial" pitchFamily="34" charset="-120"/>
               </a:rPr>
-              <a:t>レビュー総数：66件（6サイト）</a:t>
+              <a:t>レビュー総数：67件（6サイト）</a:t>
             </a:r>
             <a:endParaRPr lang="en-US" sz="1000" dirty="0"/>
           </a:p>
@@ -2801,7 +2801,7 @@
                 <a:ea typeface="Arial" pitchFamily="34" charset="-122"/>
                 <a:cs typeface="Arial" pitchFamily="34" charset="-120"/>
               </a:rPr>
-              <a:t>作成日：2026年3月18日</a:t>
+              <a:t>作成日：2026年3月19日</a:t>
             </a:r>
             <a:endParaRPr lang="en-US" sz="1000" dirty="0"/>
           </a:p>
@@ -3347,7 +3347,7 @@
                           <a:ea typeface="Arial" pitchFamily="34" charset="-122"/>
                           <a:cs typeface="Arial" pitchFamily="34" charset="-120"/>
                         </a:rPr>
-                        <a:t>7.03点</a:t>
+                        <a:t>7.07点</a:t>
                       </a:r>
                       <a:endParaRPr lang="en-US" sz="1000" dirty="0">
                         <a:latin typeface="Arial" charset="0"/>
@@ -3415,7 +3415,7 @@
                           <a:ea typeface="Arial" pitchFamily="34" charset="-122"/>
                           <a:cs typeface="Arial" pitchFamily="34" charset="-120"/>
                         </a:rPr>
-                        <a:t>7.5点以上</a:t>
+                        <a:t>7.6点以上</a:t>
                       </a:r>
                       <a:endParaRPr lang="en-US" sz="1000" dirty="0">
                         <a:latin typeface="Arial" charset="0"/>
@@ -3621,7 +3621,7 @@
                           <a:ea typeface="Arial" pitchFamily="34" charset="-122"/>
                           <a:cs typeface="Arial" pitchFamily="34" charset="-120"/>
                         </a:rPr>
-                        <a:t>57.6%</a:t>
+                        <a:t>58.2%</a:t>
                       </a:r>
                       <a:endParaRPr lang="en-US" sz="1000" dirty="0">
                         <a:latin typeface="Arial" charset="0"/>
@@ -3895,7 +3895,7 @@
                           <a:ea typeface="Arial" pitchFamily="34" charset="-122"/>
                           <a:cs typeface="Arial" pitchFamily="34" charset="-120"/>
                         </a:rPr>
-                        <a:t>19.7%</a:t>
+                        <a:t>19.4%</a:t>
                       </a:r>
                       <a:endParaRPr lang="en-US" sz="1000" dirty="0">
                         <a:latin typeface="Arial" charset="0"/>
@@ -3963,7 +3963,7 @@
                           <a:ea typeface="Arial" pitchFamily="34" charset="-122"/>
                           <a:cs typeface="Arial" pitchFamily="34" charset="-120"/>
                         </a:rPr>
-                        <a:t>15%以下</a:t>
+                        <a:t>14%以下</a:t>
                       </a:r>
                       <a:endParaRPr lang="en-US" sz="1000" dirty="0">
                         <a:latin typeface="Arial" charset="0"/>
@@ -5082,7 +5082,7 @@
                 <a:ea typeface="Arial" pitchFamily="34" charset="-122"/>
                 <a:cs typeface="Arial" pitchFamily="34" charset="-120"/>
               </a:rPr>
-              <a:t>7.03</a:t>
+              <a:t>7.07</a:t>
             </a:r>
             <a:endParaRPr lang="en-US" sz="3200" dirty="0"/>
           </a:p>
@@ -5207,7 +5207,7 @@
                 <a:ea typeface="Arial" pitchFamily="34" charset="-122"/>
                 <a:cs typeface="Arial" pitchFamily="34" charset="-120"/>
               </a:rPr>
-              <a:t>57.6%</a:t>
+              <a:t>58.2%</a:t>
             </a:r>
             <a:endParaRPr lang="en-US" sz="3200" dirty="0"/>
           </a:p>
@@ -5332,7 +5332,7 @@
                 <a:ea typeface="Arial" pitchFamily="34" charset="-122"/>
                 <a:cs typeface="Arial" pitchFamily="34" charset="-120"/>
               </a:rPr>
-              <a:t>19.7%</a:t>
+              <a:t>19.4%</a:t>
             </a:r>
             <a:endParaRPr lang="en-US" sz="3200" dirty="0"/>
           </a:p>
@@ -5457,7 +5457,7 @@
                 <a:ea typeface="Arial" pitchFamily="34" charset="-122"/>
                 <a:cs typeface="Arial" pitchFamily="34" charset="-120"/>
               </a:rPr>
-              <a:t>66件</a:t>
+              <a:t>67件</a:t>
             </a:r>
             <a:endParaRPr lang="en-US" sz="3200" dirty="0"/>
           </a:p>
@@ -6266,7 +6266,7 @@
                 <a:ea typeface="Arial" pitchFamily="34" charset="-122"/>
                 <a:cs typeface="Arial" pitchFamily="34" charset="-120"/>
               </a:rPr>
-              <a:t>7.03</a:t>
+              <a:t>7.07</a:t>
             </a:r>
             <a:endParaRPr lang="en-US" sz="3200" dirty="0"/>
           </a:p>
@@ -6391,7 +6391,7 @@
                 <a:ea typeface="Arial" pitchFamily="34" charset="-122"/>
                 <a:cs typeface="Arial" pitchFamily="34" charset="-120"/>
               </a:rPr>
-              <a:t>57.6%</a:t>
+              <a:t>58.2%</a:t>
             </a:r>
             <a:endParaRPr lang="en-US" sz="3200" dirty="0"/>
           </a:p>
@@ -6516,7 +6516,7 @@
                 <a:ea typeface="Arial" pitchFamily="34" charset="-122"/>
                 <a:cs typeface="Arial" pitchFamily="34" charset="-120"/>
               </a:rPr>
-              <a:t>19.7%</a:t>
+              <a:t>19.4%</a:t>
             </a:r>
             <a:endParaRPr lang="en-US" sz="3200" dirty="0"/>
           </a:p>
@@ -6641,7 +6641,7 @@
                 <a:ea typeface="Arial" pitchFamily="34" charset="-122"/>
                 <a:cs typeface="Arial" pitchFamily="34" charset="-120"/>
               </a:rPr>
-              <a:t>66件</a:t>
+              <a:t>67件</a:t>
             </a:r>
             <a:endParaRPr lang="en-US" sz="3200" dirty="0"/>
           </a:p>
@@ -8939,7 +8939,7 @@
                           <a:ea typeface="Arial" pitchFamily="34" charset="-122"/>
                           <a:cs typeface="Arial" pitchFamily="34" charset="-120"/>
                         </a:rPr>
-                        <a:t>16</a:t>
+                        <a:t>17</a:t>
                       </a:r>
                       <a:endParaRPr lang="en-US" sz="900" dirty="0">
                         <a:latin typeface="Arial" charset="0"/>
@@ -9007,7 +9007,7 @@
                           <a:ea typeface="Arial" pitchFamily="34" charset="-122"/>
                           <a:cs typeface="Arial" pitchFamily="34" charset="-120"/>
                         </a:rPr>
-                        <a:t>3.31</a:t>
+                        <a:t>3.41</a:t>
                       </a:r>
                       <a:endParaRPr lang="en-US" sz="900" dirty="0">
                         <a:latin typeface="Arial" charset="0"/>
@@ -9143,7 +9143,7 @@
                           <a:ea typeface="Arial" pitchFamily="34" charset="-122"/>
                           <a:cs typeface="Arial" pitchFamily="34" charset="-120"/>
                         </a:rPr>
-                        <a:t>6.62</a:t>
+                        <a:t>6.82</a:t>
                       </a:r>
                       <a:endParaRPr lang="en-US" sz="900" dirty="0">
                         <a:latin typeface="Arial" charset="0"/>
@@ -9893,7 +9893,7 @@
                 <a:ea typeface="Arial" pitchFamily="34" charset="-122"/>
                 <a:cs typeface="Arial" pitchFamily="34" charset="-120"/>
               </a:rPr>
-              <a:t>38件（57.6%）</a:t>
+              <a:t>39件（58.2%）</a:t>
             </a:r>
             <a:endParaRPr lang="en-US" sz="1100" dirty="0"/>
           </a:p>
@@ -9991,7 +9991,7 @@
                 <a:ea typeface="Arial" pitchFamily="34" charset="-122"/>
                 <a:cs typeface="Arial" pitchFamily="34" charset="-120"/>
               </a:rPr>
-              <a:t>15件（22.7%）</a:t>
+              <a:t>15件（22.4%）</a:t>
             </a:r>
             <a:endParaRPr lang="en-US" sz="1100" dirty="0"/>
           </a:p>
@@ -10089,7 +10089,7 @@
                 <a:ea typeface="Arial" pitchFamily="34" charset="-122"/>
                 <a:cs typeface="Arial" pitchFamily="34" charset="-120"/>
               </a:rPr>
-              <a:t>13件（19.7%）</a:t>
+              <a:t>13件（19.4%）</a:t>
             </a:r>
             <a:endParaRPr lang="en-US" sz="1100" dirty="0"/>
           </a:p>

--- a/納品レポート/ホテル別レポート/chisan_口コミ分析レポート.pptx
+++ b/納品レポート/ホテル別レポート/chisan_口コミ分析レポート.pptx
@@ -2801,7 +2801,7 @@
                 <a:ea typeface="Arial" pitchFamily="34" charset="-122"/>
                 <a:cs typeface="Arial" pitchFamily="34" charset="-120"/>
               </a:rPr>
-              <a:t>作成日：2026年3月19日</a:t>
+              <a:t>作成日：2026年3月20日</a:t>
             </a:r>
             <a:endParaRPr lang="en-US" sz="1000" dirty="0"/>
           </a:p>

--- a/納品レポート/ホテル別レポート/chisan_口コミ分析レポート.pptx
+++ b/納品レポート/ホテル別レポート/chisan_口コミ分析レポート.pptx
@@ -223,7 +223,7 @@
                   <c:v>6.82</c:v>
                 </c:pt>
                 <c:pt idx="5">
-                  <c:v>6.59</c:v>
+                  <c:v>6.73</c:v>
                 </c:pt>
               </c:numCache>
             </c:numRef>
@@ -566,10 +566,10 @@
               <c:numCache>
                 <c:ptCount val="3"/>
                 <c:pt idx="0">
-                  <c:v>39</c:v>
+                  <c:v>41</c:v>
                 </c:pt>
                 <c:pt idx="1">
-                  <c:v>15</c:v>
+                  <c:v>16</c:v>
                 </c:pt>
                 <c:pt idx="2">
                   <c:v>13</c:v>
@@ -809,19 +809,19 @@
                 <c:formatCode>General</c:formatCode>
                 <c:ptCount val="8"/>
                 <c:pt idx="0">
-                  <c:v>14</c:v>
+                  <c:v>15</c:v>
                 </c:pt>
                 <c:pt idx="1">
                   <c:v>2</c:v>
                 </c:pt>
                 <c:pt idx="2">
-                  <c:v>23</c:v>
+                  <c:v>24</c:v>
                 </c:pt>
                 <c:pt idx="3">
                   <c:v>1</c:v>
                 </c:pt>
                 <c:pt idx="4">
-                  <c:v>13</c:v>
+                  <c:v>14</c:v>
                 </c:pt>
                 <c:pt idx="5">
                   <c:v>1</c:v>
@@ -2781,7 +2781,7 @@
                 <a:ea typeface="Arial" pitchFamily="34" charset="-122"/>
                 <a:cs typeface="Arial" pitchFamily="34" charset="-120"/>
               </a:rPr>
-              <a:t>レビュー総数：67件（6サイト）</a:t>
+              <a:t>レビュー総数：70件（6サイト）</a:t>
             </a:r>
             <a:endParaRPr lang="en-US" sz="1000" dirty="0"/>
           </a:p>
@@ -2801,7 +2801,7 @@
                 <a:ea typeface="Arial" pitchFamily="34" charset="-122"/>
                 <a:cs typeface="Arial" pitchFamily="34" charset="-120"/>
               </a:rPr>
-              <a:t>作成日：2026年3月20日</a:t>
+              <a:t>作成日：2026年3月21日</a:t>
             </a:r>
             <a:endParaRPr lang="en-US" sz="1000" dirty="0"/>
           </a:p>
@@ -3347,7 +3347,7 @@
                           <a:ea typeface="Arial" pitchFamily="34" charset="-122"/>
                           <a:cs typeface="Arial" pitchFamily="34" charset="-120"/>
                         </a:rPr>
-                        <a:t>7.07点</a:t>
+                        <a:t>7.11点</a:t>
                       </a:r>
                       <a:endParaRPr lang="en-US" sz="1000" dirty="0">
                         <a:latin typeface="Arial" charset="0"/>
@@ -3621,7 +3621,7 @@
                           <a:ea typeface="Arial" pitchFamily="34" charset="-122"/>
                           <a:cs typeface="Arial" pitchFamily="34" charset="-120"/>
                         </a:rPr>
-                        <a:t>58.2%</a:t>
+                        <a:t>58.6%</a:t>
                       </a:r>
                       <a:endParaRPr lang="en-US" sz="1000" dirty="0">
                         <a:latin typeface="Arial" charset="0"/>
@@ -3689,7 +3689,7 @@
                           <a:ea typeface="Arial" pitchFamily="34" charset="-122"/>
                           <a:cs typeface="Arial" pitchFamily="34" charset="-120"/>
                         </a:rPr>
-                        <a:t>68%以上</a:t>
+                        <a:t>69%以上</a:t>
                       </a:r>
                       <a:endParaRPr lang="en-US" sz="1000" dirty="0">
                         <a:latin typeface="Arial" charset="0"/>
@@ -3895,7 +3895,7 @@
                           <a:ea typeface="Arial" pitchFamily="34" charset="-122"/>
                           <a:cs typeface="Arial" pitchFamily="34" charset="-120"/>
                         </a:rPr>
-                        <a:t>19.4%</a:t>
+                        <a:t>18.6%</a:t>
                       </a:r>
                       <a:endParaRPr lang="en-US" sz="1000" dirty="0">
                         <a:latin typeface="Arial" charset="0"/>
@@ -4375,7 +4375,7 @@
                           <a:ea typeface="Arial" pitchFamily="34" charset="-122"/>
                           <a:cs typeface="Arial" pitchFamily="34" charset="-120"/>
                         </a:rPr>
-                        <a:t>防音性能クレーム</a:t>
+                        <a:t>設備の老朽化クレーム</a:t>
                       </a:r>
                       <a:endParaRPr lang="en-US" sz="1000" dirty="0">
                         <a:latin typeface="Arial" charset="0"/>
@@ -4443,7 +4443,7 @@
                           <a:ea typeface="Arial" pitchFamily="34" charset="-122"/>
                           <a:cs typeface="Arial" pitchFamily="34" charset="-120"/>
                         </a:rPr>
-                        <a:t>約11件/期間</a:t>
+                        <a:t>約12件/期間</a:t>
                       </a:r>
                       <a:endParaRPr lang="en-US" sz="1000" dirty="0">
                         <a:latin typeface="Arial" charset="0"/>
@@ -4511,7 +4511,7 @@
                           <a:ea typeface="Arial" pitchFamily="34" charset="-122"/>
                           <a:cs typeface="Arial" pitchFamily="34" charset="-120"/>
                         </a:rPr>
-                        <a:t>5件以下</a:t>
+                        <a:t>6件以下</a:t>
                       </a:r>
                       <a:endParaRPr lang="en-US" sz="1000" dirty="0">
                         <a:latin typeface="Arial" charset="0"/>
@@ -5082,7 +5082,7 @@
                 <a:ea typeface="Arial" pitchFamily="34" charset="-122"/>
                 <a:cs typeface="Arial" pitchFamily="34" charset="-120"/>
               </a:rPr>
-              <a:t>7.07</a:t>
+              <a:t>7.11</a:t>
             </a:r>
             <a:endParaRPr lang="en-US" sz="3200" dirty="0"/>
           </a:p>
@@ -5207,7 +5207,7 @@
                 <a:ea typeface="Arial" pitchFamily="34" charset="-122"/>
                 <a:cs typeface="Arial" pitchFamily="34" charset="-120"/>
               </a:rPr>
-              <a:t>58.2%</a:t>
+              <a:t>58.6%</a:t>
             </a:r>
             <a:endParaRPr lang="en-US" sz="3200" dirty="0"/>
           </a:p>
@@ -5332,7 +5332,7 @@
                 <a:ea typeface="Arial" pitchFamily="34" charset="-122"/>
                 <a:cs typeface="Arial" pitchFamily="34" charset="-120"/>
               </a:rPr>
-              <a:t>19.4%</a:t>
+              <a:t>18.6%</a:t>
             </a:r>
             <a:endParaRPr lang="en-US" sz="3200" dirty="0"/>
           </a:p>
@@ -5457,7 +5457,7 @@
                 <a:ea typeface="Arial" pitchFamily="34" charset="-122"/>
                 <a:cs typeface="Arial" pitchFamily="34" charset="-120"/>
               </a:rPr>
-              <a:t>67件</a:t>
+              <a:t>70件</a:t>
             </a:r>
             <a:endParaRPr lang="en-US" sz="3200" dirty="0"/>
           </a:p>
@@ -5605,7 +5605,7 @@
                 <a:ea typeface="Arial" pitchFamily="34" charset="-122"/>
                 <a:cs typeface="Arial" pitchFamily="34" charset="-120"/>
               </a:rPr>
-              <a:t>  立地が良く便利 立地が良く便利</a:t>
+              <a:t>  駅に近く、隣のビル一階にコンビニやドラッグストア、マクドも入って利便性は非常に良いです</a:t>
             </a:r>
             <a:endParaRPr lang="en-US" sz="1100" dirty="0"/>
           </a:p>
@@ -5645,7 +5645,7 @@
                 <a:ea typeface="Arial" pitchFamily="34" charset="-122"/>
                 <a:cs typeface="Arial" pitchFamily="34" charset="-120"/>
               </a:rPr>
-              <a:t>  部屋のWi-Fiが弱く且つ安定してなかった</a:t>
+              <a:t>  設備は若干古いですが特に過不足なく不便は感じませんでした</a:t>
             </a:r>
             <a:endParaRPr lang="en-US" sz="1100" dirty="0"/>
           </a:p>
@@ -5685,7 +5685,7 @@
                 <a:ea typeface="Arial" pitchFamily="34" charset="-122"/>
                 <a:cs typeface="Arial" pitchFamily="34" charset="-120"/>
               </a:rPr>
-              <a:t>  朝食のバイキングも、種類も沢山あるので、連泊でも飽きないです</a:t>
+              <a:t>  そして、何より朝食が美味しいのが、最大の魅力です</a:t>
             </a:r>
             <a:endParaRPr lang="en-US" sz="1100" dirty="0"/>
           </a:p>
@@ -5813,7 +5813,7 @@
                 <a:ea typeface="Arial" pitchFamily="34" charset="-122"/>
                 <a:cs typeface="Arial" pitchFamily="34" charset="-120"/>
               </a:rPr>
-              <a:t>防音性能 </a:t>
+              <a:t>設備の老朽化 </a:t>
             </a:r>
             <a:endParaRPr lang="en-US" sz="1100" dirty="0"/>
           </a:p>
@@ -5833,7 +5833,7 @@
                 <a:ea typeface="Arial" pitchFamily="34" charset="-122"/>
                 <a:cs typeface="Arial" pitchFamily="34" charset="-120"/>
               </a:rPr>
-              <a:t>  古くてずっと音が鳴ってて怖かったです</a:t>
+              <a:t>  設備は若干古いですが特に過不足なく不便は感じませんでした</a:t>
             </a:r>
             <a:endParaRPr lang="en-US" sz="1100" dirty="0"/>
           </a:p>
@@ -5853,7 +5853,7 @@
                 <a:ea typeface="Arial" pitchFamily="34" charset="-122"/>
                 <a:cs typeface="Arial" pitchFamily="34" charset="-120"/>
               </a:rPr>
-              <a:t>設備の老朽化 </a:t>
+              <a:t>防音性能 </a:t>
             </a:r>
             <a:endParaRPr lang="en-US" sz="1100" dirty="0"/>
           </a:p>
@@ -5873,7 +5873,7 @@
                 <a:ea typeface="Arial" pitchFamily="34" charset="-122"/>
                 <a:cs typeface="Arial" pitchFamily="34" charset="-120"/>
               </a:rPr>
-              <a:t>  施設が古いのは仕方ないですね</a:t>
+              <a:t>  一方で、駅に近い分部屋によっては常に電車が行き来する音がするのと、水回りの音がやや響きやすい点が気になりました</a:t>
             </a:r>
             <a:endParaRPr lang="en-US" sz="1100" dirty="0"/>
           </a:p>
@@ -5913,7 +5913,7 @@
                 <a:ea typeface="Arial" pitchFamily="34" charset="-122"/>
                 <a:cs typeface="Arial" pitchFamily="34" charset="-120"/>
               </a:rPr>
-              <a:t>  ユニットバスに関しては、とても古く便座も冷たいので座るのに要注意</a:t>
+              <a:t>  一方で、駅に近い分部屋によっては常に電車が行き来する音がするのと、水回りの音がやや響きやすい点が気になりました</a:t>
             </a:r>
             <a:endParaRPr lang="en-US" sz="1100" dirty="0"/>
           </a:p>
@@ -6266,7 +6266,7 @@
                 <a:ea typeface="Arial" pitchFamily="34" charset="-122"/>
                 <a:cs typeface="Arial" pitchFamily="34" charset="-120"/>
               </a:rPr>
-              <a:t>7.07</a:t>
+              <a:t>7.11</a:t>
             </a:r>
             <a:endParaRPr lang="en-US" sz="3200" dirty="0"/>
           </a:p>
@@ -6391,7 +6391,7 @@
                 <a:ea typeface="Arial" pitchFamily="34" charset="-122"/>
                 <a:cs typeface="Arial" pitchFamily="34" charset="-120"/>
               </a:rPr>
-              <a:t>58.2%</a:t>
+              <a:t>58.6%</a:t>
             </a:r>
             <a:endParaRPr lang="en-US" sz="3200" dirty="0"/>
           </a:p>
@@ -6516,7 +6516,7 @@
                 <a:ea typeface="Arial" pitchFamily="34" charset="-122"/>
                 <a:cs typeface="Arial" pitchFamily="34" charset="-120"/>
               </a:rPr>
-              <a:t>19.4%</a:t>
+              <a:t>18.6%</a:t>
             </a:r>
             <a:endParaRPr lang="en-US" sz="3200" dirty="0"/>
           </a:p>
@@ -6641,7 +6641,7 @@
                 <a:ea typeface="Arial" pitchFamily="34" charset="-122"/>
                 <a:cs typeface="Arial" pitchFamily="34" charset="-120"/>
               </a:rPr>
-              <a:t>67件</a:t>
+              <a:t>70件</a:t>
             </a:r>
             <a:endParaRPr lang="en-US" sz="3200" dirty="0"/>
           </a:p>
@@ -9281,7 +9281,7 @@
                           <a:ea typeface="Arial" pitchFamily="34" charset="-122"/>
                           <a:cs typeface="Arial" pitchFamily="34" charset="-120"/>
                         </a:rPr>
-                        <a:t>27</a:t>
+                        <a:t>30</a:t>
                       </a:r>
                       <a:endParaRPr lang="en-US" sz="900" dirty="0">
                         <a:latin typeface="Arial" charset="0"/>
@@ -9349,7 +9349,7 @@
                           <a:ea typeface="Arial" pitchFamily="34" charset="-122"/>
                           <a:cs typeface="Arial" pitchFamily="34" charset="-120"/>
                         </a:rPr>
-                        <a:t>3.3</a:t>
+                        <a:t>3.37</a:t>
                       </a:r>
                       <a:endParaRPr lang="en-US" sz="900" dirty="0">
                         <a:latin typeface="Arial" charset="0"/>
@@ -9485,7 +9485,7 @@
                           <a:ea typeface="Arial" pitchFamily="34" charset="-122"/>
                           <a:cs typeface="Arial" pitchFamily="34" charset="-120"/>
                         </a:rPr>
-                        <a:t>6.59</a:t>
+                        <a:t>6.73</a:t>
                       </a:r>
                       <a:endParaRPr lang="en-US" sz="900" dirty="0">
                         <a:latin typeface="Arial" charset="0"/>
@@ -9893,7 +9893,7 @@
                 <a:ea typeface="Arial" pitchFamily="34" charset="-122"/>
                 <a:cs typeface="Arial" pitchFamily="34" charset="-120"/>
               </a:rPr>
-              <a:t>39件（58.2%）</a:t>
+              <a:t>41件（58.6%）</a:t>
             </a:r>
             <a:endParaRPr lang="en-US" sz="1100" dirty="0"/>
           </a:p>
@@ -9991,7 +9991,7 @@
                 <a:ea typeface="Arial" pitchFamily="34" charset="-122"/>
                 <a:cs typeface="Arial" pitchFamily="34" charset="-120"/>
               </a:rPr>
-              <a:t>15件（22.4%）</a:t>
+              <a:t>16件（22.9%）</a:t>
             </a:r>
             <a:endParaRPr lang="en-US" sz="1100" dirty="0"/>
           </a:p>
@@ -10089,7 +10089,7 @@
                 <a:ea typeface="Arial" pitchFamily="34" charset="-122"/>
                 <a:cs typeface="Arial" pitchFamily="34" charset="-120"/>
               </a:rPr>
-              <a:t>13件（19.4%）</a:t>
+              <a:t>13件（18.6%）</a:t>
             </a:r>
             <a:endParaRPr lang="en-US" sz="1100" dirty="0"/>
           </a:p>
@@ -10501,7 +10501,7 @@
                 <a:ea typeface="Arial" pitchFamily="34" charset="-122"/>
                 <a:cs typeface="Arial" pitchFamily="34" charset="-120"/>
               </a:rPr>
-              <a:t>立地が良く便利 立地が良く便利</a:t>
+              <a:t>駅に近く、隣のビル一階にコンビニやドラッグストア、マクドも入って利便性は非常に良いです</a:t>
             </a:r>
             <a:endParaRPr lang="en-US" sz="900" dirty="0"/>
           </a:p>
@@ -10540,7 +10540,7 @@
                 <a:ea typeface="Arial" pitchFamily="34" charset="-122"/>
                 <a:cs typeface="Arial" pitchFamily="34" charset="-120"/>
               </a:rPr>
-              <a:t>「国際展示場や都心のアクセスがよかったです」</a:t>
+              <a:t>「また、近くにコンビニがあるので、足りないと思うものは買いに行けるのも良いです」</a:t>
             </a:r>
             <a:endParaRPr lang="en-US" sz="900" dirty="0"/>
           </a:p>
@@ -10724,7 +10724,7 @@
                 <a:ea typeface="Arial" pitchFamily="34" charset="-122"/>
                 <a:cs typeface="Arial" pitchFamily="34" charset="-120"/>
               </a:rPr>
-              <a:t>部屋のWi-Fiが弱く且つ安定してなかった</a:t>
+              <a:t>設備は若干古いですが特に過不足なく不便は感じませんでした</a:t>
             </a:r>
             <a:endParaRPr lang="en-US" sz="900" dirty="0"/>
           </a:p>
@@ -10763,7 +10763,7 @@
                 <a:ea typeface="Arial" pitchFamily="34" charset="-122"/>
                 <a:cs typeface="Arial" pitchFamily="34" charset="-120"/>
               </a:rPr>
-              <a:t>「駅から近くコスパ良き 設備が古い 設備が古い」</a:t>
+              <a:t>「設備は最近のものに比べれば、やや古い感はありますが、必要にして多すぎず、かつキレイ整えられてるので、良い印象が増します」</a:t>
             </a:r>
             <a:endParaRPr lang="en-US" sz="900" dirty="0"/>
           </a:p>
@@ -10947,7 +10947,7 @@
                 <a:ea typeface="Arial" pitchFamily="34" charset="-122"/>
                 <a:cs typeface="Arial" pitchFamily="34" charset="-120"/>
               </a:rPr>
-              <a:t>朝食のバイキングも、種類も沢山あるので、連泊でも飽きないです</a:t>
+              <a:t>そして、何より朝食が美味しいのが、最大の魅力です</a:t>
             </a:r>
             <a:endParaRPr lang="en-US" sz="900" dirty="0"/>
           </a:p>
@@ -10986,7 +10986,7 @@
                 <a:ea typeface="Arial" pitchFamily="34" charset="-122"/>
                 <a:cs typeface="Arial" pitchFamily="34" charset="-120"/>
               </a:rPr>
-              <a:t>「朝食はバリエーション豊富で楽しめました 部屋のWi-Fiが弱く且つ安定してなかった」</a:t>
+              <a:t>「朝食のバイキングも、種類も沢山あるので、連泊でも飽きないです」</a:t>
             </a:r>
             <a:endParaRPr lang="en-US" sz="900" dirty="0"/>
           </a:p>
@@ -11170,7 +11170,7 @@
                 <a:ea typeface="Arial" pitchFamily="34" charset="-122"/>
                 <a:cs typeface="Arial" pitchFamily="34" charset="-120"/>
               </a:rPr>
-              <a:t>ごはんは品数はほどほどであるが、どれも美味しい お風呂は大浴場はなく、汚くはないが綺麗でもない ごはんは品数はほど...</a:t>
+              <a:t>部屋はとてもきれいでした</a:t>
             </a:r>
             <a:endParaRPr lang="en-US" sz="900" dirty="0"/>
           </a:p>
@@ -11209,7 +11209,7 @@
                 <a:ea typeface="Arial" pitchFamily="34" charset="-122"/>
                 <a:cs typeface="Arial" pitchFamily="34" charset="-120"/>
               </a:rPr>
-              <a:t>「換気をしようと窓を開けると、清掃されてないようなサッシ部分」</a:t>
+              <a:t>「設備は最近のものに比べれば、やや古い感はありますが、必要にして多すぎず、かつキレイ整えられてるので、良い印象が増します」</a:t>
             </a:r>
             <a:endParaRPr lang="en-US" sz="900" dirty="0"/>
           </a:p>
@@ -12277,7 +12277,7 @@
                           <a:ea typeface="Arial" pitchFamily="34" charset="-122"/>
                           <a:cs typeface="Arial" pitchFamily="34" charset="-120"/>
                         </a:rPr>
-                        <a:t>防音性能</a:t>
+                        <a:t>設備の老朽化</a:t>
                       </a:r>
                       <a:endParaRPr lang="en-US" sz="900" dirty="0">
                         <a:latin typeface="Arial" charset="0"/>
@@ -12345,7 +12345,7 @@
                           <a:ea typeface="Arial" pitchFamily="34" charset="-122"/>
                           <a:cs typeface="Arial" pitchFamily="34" charset="-120"/>
                         </a:rPr>
-                        <a:t>古くてずっと音が鳴ってて怖かったです</a:t>
+                        <a:t>設備は若干古いですが特に過不足なく不便は感じませんでした</a:t>
                       </a:r>
                       <a:endParaRPr lang="en-US" sz="900" dirty="0">
                         <a:latin typeface="Arial" charset="0"/>
@@ -12413,7 +12413,7 @@
                           <a:ea typeface="Arial" pitchFamily="34" charset="-122"/>
                           <a:cs typeface="Arial" pitchFamily="34" charset="-120"/>
                         </a:rPr>
-                        <a:t>11件</a:t>
+                        <a:t>12件</a:t>
                       </a:r>
                       <a:endParaRPr lang="en-US" sz="900" dirty="0">
                         <a:latin typeface="Arial" charset="0"/>
@@ -12551,7 +12551,7 @@
                           <a:ea typeface="Arial" pitchFamily="34" charset="-122"/>
                           <a:cs typeface="Arial" pitchFamily="34" charset="-120"/>
                         </a:rPr>
-                        <a:t>設備の老朽化</a:t>
+                        <a:t>防音性能</a:t>
                       </a:r>
                       <a:endParaRPr lang="en-US" sz="900" dirty="0">
                         <a:latin typeface="Arial" charset="0"/>
@@ -12619,7 +12619,7 @@
                           <a:ea typeface="Arial" pitchFamily="34" charset="-122"/>
                           <a:cs typeface="Arial" pitchFamily="34" charset="-120"/>
                         </a:rPr>
-                        <a:t>施設が古いのは仕方ないですね</a:t>
+                        <a:t>一方で、駅に近い分部屋によっては常に電車が行き来する音がするのと、水回りの音がやや響きやすい点が気になりました</a:t>
                       </a:r>
                       <a:endParaRPr lang="en-US" sz="900" dirty="0">
                         <a:latin typeface="Arial" charset="0"/>
@@ -12687,7 +12687,7 @@
                           <a:ea typeface="Arial" pitchFamily="34" charset="-122"/>
                           <a:cs typeface="Arial" pitchFamily="34" charset="-120"/>
                         </a:rPr>
-                        <a:t>10件</a:t>
+                        <a:t>12件</a:t>
                       </a:r>
                       <a:endParaRPr lang="en-US" sz="900" dirty="0">
                         <a:latin typeface="Arial" charset="0"/>
@@ -12893,7 +12893,7 @@
                           <a:ea typeface="Arial" pitchFamily="34" charset="-122"/>
                           <a:cs typeface="Arial" pitchFamily="34" charset="-120"/>
                         </a:rPr>
-                        <a:t>ユニットバスに関しては、とても古く便座も冷たいので座るのに要注意</a:t>
+                        <a:t>一方で、駅に近い分部屋によっては常に電車が行き来する音がするのと、水回りの音がやや響きやすい点が気になりました</a:t>
                       </a:r>
                       <a:endParaRPr lang="en-US" sz="900" dirty="0">
                         <a:latin typeface="Arial" charset="0"/>
@@ -12961,7 +12961,7 @@
                           <a:ea typeface="Arial" pitchFamily="34" charset="-122"/>
                           <a:cs typeface="Arial" pitchFamily="34" charset="-120"/>
                         </a:rPr>
-                        <a:t>8件</a:t>
+                        <a:t>9件</a:t>
                       </a:r>
                       <a:endParaRPr lang="en-US" sz="900" dirty="0">
                         <a:latin typeface="Arial" charset="0"/>

--- a/納品レポート/ホテル別レポート/chisan_口コミ分析レポート.pptx
+++ b/納品レポート/ホテル別レポート/chisan_口コミ分析レポート.pptx
@@ -208,7 +208,7 @@
                 <c:formatCode>General</c:formatCode>
                 <c:ptCount val="6"/>
                 <c:pt idx="0">
-                  <c:v>8.73</c:v>
+                  <c:v>8.67</c:v>
                 </c:pt>
                 <c:pt idx="1">
                   <c:v>7</c:v>
@@ -217,10 +217,10 @@
                   <c:v>7</c:v>
                 </c:pt>
                 <c:pt idx="3">
-                  <c:v>7</c:v>
+                  <c:v>6.89</c:v>
                 </c:pt>
                 <c:pt idx="4">
-                  <c:v>6.82</c:v>
+                  <c:v>6.74</c:v>
                 </c:pt>
                 <c:pt idx="5">
                   <c:v>6.73</c:v>
@@ -566,13 +566,13 @@
               <c:numCache>
                 <c:ptCount val="3"/>
                 <c:pt idx="0">
-                  <c:v>41</c:v>
+                  <c:v>43</c:v>
                 </c:pt>
                 <c:pt idx="1">
-                  <c:v>16</c:v>
+                  <c:v>18</c:v>
                 </c:pt>
                 <c:pt idx="2">
-                  <c:v>13</c:v>
+                  <c:v>14</c:v>
                 </c:pt>
               </c:numCache>
             </c:numRef>
@@ -815,19 +815,19 @@
                   <c:v>2</c:v>
                 </c:pt>
                 <c:pt idx="2">
-                  <c:v>24</c:v>
+                  <c:v>26</c:v>
                 </c:pt>
                 <c:pt idx="3">
-                  <c:v>1</c:v>
+                  <c:v>2</c:v>
                 </c:pt>
                 <c:pt idx="4">
-                  <c:v>14</c:v>
+                  <c:v>15</c:v>
                 </c:pt>
                 <c:pt idx="5">
                   <c:v>1</c:v>
                 </c:pt>
                 <c:pt idx="6">
-                  <c:v>8</c:v>
+                  <c:v>9</c:v>
                 </c:pt>
                 <c:pt idx="7">
                   <c:v>5</c:v>
@@ -2781,7 +2781,7 @@
                 <a:ea typeface="Arial" pitchFamily="34" charset="-122"/>
                 <a:cs typeface="Arial" pitchFamily="34" charset="-120"/>
               </a:rPr>
-              <a:t>レビュー総数：70件（6サイト）</a:t>
+              <a:t>レビュー総数：75件（6サイト）</a:t>
             </a:r>
             <a:endParaRPr lang="en-US" sz="1000" dirty="0"/>
           </a:p>
@@ -2801,7 +2801,7 @@
                 <a:ea typeface="Arial" pitchFamily="34" charset="-122"/>
                 <a:cs typeface="Arial" pitchFamily="34" charset="-120"/>
               </a:rPr>
-              <a:t>作成日：2026年3月21日</a:t>
+              <a:t>作成日：2026年3月23日</a:t>
             </a:r>
             <a:endParaRPr lang="en-US" sz="1000" dirty="0"/>
           </a:p>
@@ -3347,7 +3347,7 @@
                           <a:ea typeface="Arial" pitchFamily="34" charset="-122"/>
                           <a:cs typeface="Arial" pitchFamily="34" charset="-120"/>
                         </a:rPr>
-                        <a:t>7.11点</a:t>
+                        <a:t>7.08点</a:t>
                       </a:r>
                       <a:endParaRPr lang="en-US" sz="1000" dirty="0">
                         <a:latin typeface="Arial" charset="0"/>
@@ -3621,7 +3621,7 @@
                           <a:ea typeface="Arial" pitchFamily="34" charset="-122"/>
                           <a:cs typeface="Arial" pitchFamily="34" charset="-120"/>
                         </a:rPr>
-                        <a:t>58.6%</a:t>
+                        <a:t>57.3%</a:t>
                       </a:r>
                       <a:endParaRPr lang="en-US" sz="1000" dirty="0">
                         <a:latin typeface="Arial" charset="0"/>
@@ -3689,7 +3689,7 @@
                           <a:ea typeface="Arial" pitchFamily="34" charset="-122"/>
                           <a:cs typeface="Arial" pitchFamily="34" charset="-120"/>
                         </a:rPr>
-                        <a:t>69%以上</a:t>
+                        <a:t>67%以上</a:t>
                       </a:r>
                       <a:endParaRPr lang="en-US" sz="1000" dirty="0">
                         <a:latin typeface="Arial" charset="0"/>
@@ -3895,7 +3895,7 @@
                           <a:ea typeface="Arial" pitchFamily="34" charset="-122"/>
                           <a:cs typeface="Arial" pitchFamily="34" charset="-120"/>
                         </a:rPr>
-                        <a:t>18.6%</a:t>
+                        <a:t>18.7%</a:t>
                       </a:r>
                       <a:endParaRPr lang="en-US" sz="1000" dirty="0">
                         <a:latin typeface="Arial" charset="0"/>
@@ -4375,7 +4375,7 @@
                           <a:ea typeface="Arial" pitchFamily="34" charset="-122"/>
                           <a:cs typeface="Arial" pitchFamily="34" charset="-120"/>
                         </a:rPr>
-                        <a:t>設備の老朽化クレーム</a:t>
+                        <a:t>防音性能クレーム</a:t>
                       </a:r>
                       <a:endParaRPr lang="en-US" sz="1000" dirty="0">
                         <a:latin typeface="Arial" charset="0"/>
@@ -4443,7 +4443,7 @@
                           <a:ea typeface="Arial" pitchFamily="34" charset="-122"/>
                           <a:cs typeface="Arial" pitchFamily="34" charset="-120"/>
                         </a:rPr>
-                        <a:t>約12件/期間</a:t>
+                        <a:t>約14件/期間</a:t>
                       </a:r>
                       <a:endParaRPr lang="en-US" sz="1000" dirty="0">
                         <a:latin typeface="Arial" charset="0"/>
@@ -4511,7 +4511,7 @@
                           <a:ea typeface="Arial" pitchFamily="34" charset="-122"/>
                           <a:cs typeface="Arial" pitchFamily="34" charset="-120"/>
                         </a:rPr>
-                        <a:t>6件以下</a:t>
+                        <a:t>7件以下</a:t>
                       </a:r>
                       <a:endParaRPr lang="en-US" sz="1000" dirty="0">
                         <a:latin typeface="Arial" charset="0"/>
@@ -5082,7 +5082,7 @@
                 <a:ea typeface="Arial" pitchFamily="34" charset="-122"/>
                 <a:cs typeface="Arial" pitchFamily="34" charset="-120"/>
               </a:rPr>
-              <a:t>7.11</a:t>
+              <a:t>7.08</a:t>
             </a:r>
             <a:endParaRPr lang="en-US" sz="3200" dirty="0"/>
           </a:p>
@@ -5207,7 +5207,7 @@
                 <a:ea typeface="Arial" pitchFamily="34" charset="-122"/>
                 <a:cs typeface="Arial" pitchFamily="34" charset="-120"/>
               </a:rPr>
-              <a:t>58.6%</a:t>
+              <a:t>57.3%</a:t>
             </a:r>
             <a:endParaRPr lang="en-US" sz="3200" dirty="0"/>
           </a:p>
@@ -5332,7 +5332,7 @@
                 <a:ea typeface="Arial" pitchFamily="34" charset="-122"/>
                 <a:cs typeface="Arial" pitchFamily="34" charset="-120"/>
               </a:rPr>
-              <a:t>18.6%</a:t>
+              <a:t>18.7%</a:t>
             </a:r>
             <a:endParaRPr lang="en-US" sz="3200" dirty="0"/>
           </a:p>
@@ -5457,7 +5457,7 @@
                 <a:ea typeface="Arial" pitchFamily="34" charset="-122"/>
                 <a:cs typeface="Arial" pitchFamily="34" charset="-120"/>
               </a:rPr>
-              <a:t>70件</a:t>
+              <a:t>75件</a:t>
             </a:r>
             <a:endParaRPr lang="en-US" sz="3200" dirty="0"/>
           </a:p>
@@ -5605,7 +5605,7 @@
                 <a:ea typeface="Arial" pitchFamily="34" charset="-122"/>
                 <a:cs typeface="Arial" pitchFamily="34" charset="-120"/>
               </a:rPr>
-              <a:t>  駅に近く、隣のビル一階にコンビニやドラッグストア、マクドも入って利便性は非常に良いです</a:t>
+              <a:t>  近くにイオンのスーパーがあり便利 近くにイオンのスーパーがあり便利</a:t>
             </a:r>
             <a:endParaRPr lang="en-US" sz="1100" dirty="0"/>
           </a:p>
@@ -5685,7 +5685,7 @@
                 <a:ea typeface="Arial" pitchFamily="34" charset="-122"/>
                 <a:cs typeface="Arial" pitchFamily="34" charset="-120"/>
               </a:rPr>
-              <a:t>  そして、何より朝食が美味しいのが、最大の魅力です</a:t>
+              <a:t>  近くの中華もリーズナブルで美味しかった</a:t>
             </a:r>
             <a:endParaRPr lang="en-US" sz="1100" dirty="0"/>
           </a:p>
@@ -5813,6 +5813,46 @@
                 <a:ea typeface="Arial" pitchFamily="34" charset="-122"/>
                 <a:cs typeface="Arial" pitchFamily="34" charset="-120"/>
               </a:rPr>
+              <a:t>防音性能 </a:t>
+            </a:r>
+            <a:endParaRPr lang="en-US" sz="1100" dirty="0"/>
+          </a:p>
+          <a:p>
+            <a:pPr indent="0" marL="0">
+              <a:spcAft>
+                <a:spcPts val="200"/>
+              </a:spcAft>
+              <a:buNone/>
+            </a:pPr>
+            <a:r>
+              <a:rPr lang="en-US" sz="900" dirty="0">
+                <a:solidFill>
+                  <a:srgbClr val="64748B"/>
+                </a:solidFill>
+                <a:latin typeface="Arial" pitchFamily="34" charset="0"/>
+                <a:ea typeface="Arial" pitchFamily="34" charset="-122"/>
+                <a:cs typeface="Arial" pitchFamily="34" charset="-120"/>
+              </a:rPr>
+              <a:t>  電車の音が気になり、眠れませんでした</a:t>
+            </a:r>
+            <a:endParaRPr lang="en-US" sz="1100" dirty="0"/>
+          </a:p>
+          <a:p>
+            <a:pPr indent="0" marL="0">
+              <a:spcAft>
+                <a:spcPts val="200"/>
+              </a:spcAft>
+              <a:buNone/>
+            </a:pPr>
+            <a:r>
+              <a:rPr lang="en-US" sz="1100" b="1" dirty="0">
+                <a:solidFill>
+                  <a:srgbClr val="334155"/>
+                </a:solidFill>
+                <a:latin typeface="Arial" pitchFamily="34" charset="0"/>
+                <a:ea typeface="Arial" pitchFamily="34" charset="-122"/>
+                <a:cs typeface="Arial" pitchFamily="34" charset="-120"/>
+              </a:rPr>
               <a:t>設備の老朽化 </a:t>
             </a:r>
             <a:endParaRPr lang="en-US" sz="1100" dirty="0"/>
@@ -5853,7 +5893,7 @@
                 <a:ea typeface="Arial" pitchFamily="34" charset="-122"/>
                 <a:cs typeface="Arial" pitchFamily="34" charset="-120"/>
               </a:rPr>
-              <a:t>防音性能 </a:t>
+              <a:t>浴室・水回り </a:t>
             </a:r>
             <a:endParaRPr lang="en-US" sz="1100" dirty="0"/>
           </a:p>
@@ -5873,47 +5913,7 @@
                 <a:ea typeface="Arial" pitchFamily="34" charset="-122"/>
                 <a:cs typeface="Arial" pitchFamily="34" charset="-120"/>
               </a:rPr>
-              <a:t>  一方で、駅に近い分部屋によっては常に電車が行き来する音がするのと、水回りの音がやや響きやすい点が気になりました</a:t>
-            </a:r>
-            <a:endParaRPr lang="en-US" sz="1100" dirty="0"/>
-          </a:p>
-          <a:p>
-            <a:pPr indent="0" marL="0">
-              <a:spcAft>
-                <a:spcPts val="200"/>
-              </a:spcAft>
-              <a:buNone/>
-            </a:pPr>
-            <a:r>
-              <a:rPr lang="en-US" sz="1100" b="1" dirty="0">
-                <a:solidFill>
-                  <a:srgbClr val="334155"/>
-                </a:solidFill>
-                <a:latin typeface="Arial" pitchFamily="34" charset="0"/>
-                <a:ea typeface="Arial" pitchFamily="34" charset="-122"/>
-                <a:cs typeface="Arial" pitchFamily="34" charset="-120"/>
-              </a:rPr>
-              <a:t>浴室・水回り </a:t>
-            </a:r>
-            <a:endParaRPr lang="en-US" sz="1100" dirty="0"/>
-          </a:p>
-          <a:p>
-            <a:pPr indent="0" marL="0">
-              <a:spcAft>
-                <a:spcPts val="200"/>
-              </a:spcAft>
-              <a:buNone/>
-            </a:pPr>
-            <a:r>
-              <a:rPr lang="en-US" sz="900" dirty="0">
-                <a:solidFill>
-                  <a:srgbClr val="64748B"/>
-                </a:solidFill>
-                <a:latin typeface="Arial" pitchFamily="34" charset="0"/>
-                <a:ea typeface="Arial" pitchFamily="34" charset="-122"/>
-                <a:cs typeface="Arial" pitchFamily="34" charset="-120"/>
-              </a:rPr>
-              <a:t>  一方で、駅に近い分部屋によっては常に電車が行き来する音がするのと、水回りの音がやや響きやすい点が気になりました</a:t>
+              <a:t>  トイレの換気扇が効いてない感じでした</a:t>
             </a:r>
             <a:endParaRPr lang="en-US" sz="1100" dirty="0"/>
           </a:p>
@@ -6266,7 +6266,7 @@
                 <a:ea typeface="Arial" pitchFamily="34" charset="-122"/>
                 <a:cs typeface="Arial" pitchFamily="34" charset="-120"/>
               </a:rPr>
-              <a:t>7.11</a:t>
+              <a:t>7.08</a:t>
             </a:r>
             <a:endParaRPr lang="en-US" sz="3200" dirty="0"/>
           </a:p>
@@ -6391,7 +6391,7 @@
                 <a:ea typeface="Arial" pitchFamily="34" charset="-122"/>
                 <a:cs typeface="Arial" pitchFamily="34" charset="-120"/>
               </a:rPr>
-              <a:t>58.6%</a:t>
+              <a:t>57.3%</a:t>
             </a:r>
             <a:endParaRPr lang="en-US" sz="3200" dirty="0"/>
           </a:p>
@@ -6516,7 +6516,7 @@
                 <a:ea typeface="Arial" pitchFamily="34" charset="-122"/>
                 <a:cs typeface="Arial" pitchFamily="34" charset="-120"/>
               </a:rPr>
-              <a:t>18.6%</a:t>
+              <a:t>18.7%</a:t>
             </a:r>
             <a:endParaRPr lang="en-US" sz="3200" dirty="0"/>
           </a:p>
@@ -6641,7 +6641,7 @@
                 <a:ea typeface="Arial" pitchFamily="34" charset="-122"/>
                 <a:cs typeface="Arial" pitchFamily="34" charset="-120"/>
               </a:rPr>
-              <a:t>70件</a:t>
+              <a:t>75件</a:t>
             </a:r>
             <a:endParaRPr lang="en-US" sz="3200" dirty="0"/>
           </a:p>
@@ -7062,7 +7062,7 @@
                 <a:ea typeface="Arial" pitchFamily="34" charset="-122"/>
                 <a:cs typeface="Arial" pitchFamily="34" charset="-120"/>
               </a:rPr>
-              <a:t>Agoda(8.73)が最高スコア。</a:t>
+              <a:t>Agoda(8.67)が最高スコア。</a:t>
             </a:r>
             <a:endParaRPr lang="en-US" sz="1100" dirty="0"/>
           </a:p>
@@ -7571,7 +7571,7 @@
                           <a:ea typeface="Arial" pitchFamily="34" charset="-122"/>
                           <a:cs typeface="Arial" pitchFamily="34" charset="-120"/>
                         </a:rPr>
-                        <a:t>11</a:t>
+                        <a:t>12</a:t>
                       </a:r>
                       <a:endParaRPr lang="en-US" sz="900" dirty="0">
                         <a:latin typeface="Arial" charset="0"/>
@@ -7639,7 +7639,7 @@
                           <a:ea typeface="Arial" pitchFamily="34" charset="-122"/>
                           <a:cs typeface="Arial" pitchFamily="34" charset="-120"/>
                         </a:rPr>
-                        <a:t>8.73</a:t>
+                        <a:t>8.67</a:t>
                       </a:r>
                       <a:endParaRPr lang="en-US" sz="900" dirty="0">
                         <a:latin typeface="Arial" charset="0"/>
@@ -7775,7 +7775,7 @@
                           <a:ea typeface="Arial" pitchFamily="34" charset="-122"/>
                           <a:cs typeface="Arial" pitchFamily="34" charset="-120"/>
                         </a:rPr>
-                        <a:t>8.73</a:t>
+                        <a:t>8.67</a:t>
                       </a:r>
                       <a:endParaRPr lang="en-US" sz="900" dirty="0">
                         <a:latin typeface="Arial" charset="0"/>
@@ -7913,7 +7913,7 @@
                           <a:ea typeface="Arial" pitchFamily="34" charset="-122"/>
                           <a:cs typeface="Arial" pitchFamily="34" charset="-120"/>
                         </a:rPr>
-                        <a:t>3</a:t>
+                        <a:t>4</a:t>
                       </a:r>
                       <a:endParaRPr lang="en-US" sz="900" dirty="0">
                         <a:latin typeface="Arial" charset="0"/>
@@ -8597,7 +8597,7 @@
                           <a:ea typeface="Arial" pitchFamily="34" charset="-122"/>
                           <a:cs typeface="Arial" pitchFamily="34" charset="-120"/>
                         </a:rPr>
-                        <a:t>8</a:t>
+                        <a:t>9</a:t>
                       </a:r>
                       <a:endParaRPr lang="en-US" sz="900" dirty="0">
                         <a:latin typeface="Arial" charset="0"/>
@@ -8665,7 +8665,7 @@
                           <a:ea typeface="Arial" pitchFamily="34" charset="-122"/>
                           <a:cs typeface="Arial" pitchFamily="34" charset="-120"/>
                         </a:rPr>
-                        <a:t>3.5</a:t>
+                        <a:t>3.44</a:t>
                       </a:r>
                       <a:endParaRPr lang="en-US" sz="900" dirty="0">
                         <a:latin typeface="Arial" charset="0"/>
@@ -8801,7 +8801,7 @@
                           <a:ea typeface="Arial" pitchFamily="34" charset="-122"/>
                           <a:cs typeface="Arial" pitchFamily="34" charset="-120"/>
                         </a:rPr>
-                        <a:t>7</a:t>
+                        <a:t>6.89</a:t>
                       </a:r>
                       <a:endParaRPr lang="en-US" sz="900" dirty="0">
                         <a:latin typeface="Arial" charset="0"/>
@@ -8939,7 +8939,7 @@
                           <a:ea typeface="Arial" pitchFamily="34" charset="-122"/>
                           <a:cs typeface="Arial" pitchFamily="34" charset="-120"/>
                         </a:rPr>
-                        <a:t>17</a:t>
+                        <a:t>19</a:t>
                       </a:r>
                       <a:endParaRPr lang="en-US" sz="900" dirty="0">
                         <a:latin typeface="Arial" charset="0"/>
@@ -9007,7 +9007,7 @@
                           <a:ea typeface="Arial" pitchFamily="34" charset="-122"/>
                           <a:cs typeface="Arial" pitchFamily="34" charset="-120"/>
                         </a:rPr>
-                        <a:t>3.41</a:t>
+                        <a:t>3.37</a:t>
                       </a:r>
                       <a:endParaRPr lang="en-US" sz="900" dirty="0">
                         <a:latin typeface="Arial" charset="0"/>
@@ -9143,7 +9143,7 @@
                           <a:ea typeface="Arial" pitchFamily="34" charset="-122"/>
                           <a:cs typeface="Arial" pitchFamily="34" charset="-120"/>
                         </a:rPr>
-                        <a:t>6.82</a:t>
+                        <a:t>6.74</a:t>
                       </a:r>
                       <a:endParaRPr lang="en-US" sz="900" dirty="0">
                         <a:latin typeface="Arial" charset="0"/>
@@ -9893,7 +9893,7 @@
                 <a:ea typeface="Arial" pitchFamily="34" charset="-122"/>
                 <a:cs typeface="Arial" pitchFamily="34" charset="-120"/>
               </a:rPr>
-              <a:t>41件（58.6%）</a:t>
+              <a:t>43件（57.3%）</a:t>
             </a:r>
             <a:endParaRPr lang="en-US" sz="1100" dirty="0"/>
           </a:p>
@@ -9991,7 +9991,7 @@
                 <a:ea typeface="Arial" pitchFamily="34" charset="-122"/>
                 <a:cs typeface="Arial" pitchFamily="34" charset="-120"/>
               </a:rPr>
-              <a:t>16件（22.9%）</a:t>
+              <a:t>18件（24.0%）</a:t>
             </a:r>
             <a:endParaRPr lang="en-US" sz="1100" dirty="0"/>
           </a:p>
@@ -10089,7 +10089,7 @@
                 <a:ea typeface="Arial" pitchFamily="34" charset="-122"/>
                 <a:cs typeface="Arial" pitchFamily="34" charset="-120"/>
               </a:rPr>
-              <a:t>13件（18.6%）</a:t>
+              <a:t>14件（18.7%）</a:t>
             </a:r>
             <a:endParaRPr lang="en-US" sz="1100" dirty="0"/>
           </a:p>
@@ -10501,7 +10501,7 @@
                 <a:ea typeface="Arial" pitchFamily="34" charset="-122"/>
                 <a:cs typeface="Arial" pitchFamily="34" charset="-120"/>
               </a:rPr>
-              <a:t>駅に近く、隣のビル一階にコンビニやドラッグストア、マクドも入って利便性は非常に良いです</a:t>
+              <a:t>近くにイオンのスーパーがあり便利 近くにイオンのスーパーがあり便利</a:t>
             </a:r>
             <a:endParaRPr lang="en-US" sz="900" dirty="0"/>
           </a:p>
@@ -10540,7 +10540,7 @@
                 <a:ea typeface="Arial" pitchFamily="34" charset="-122"/>
                 <a:cs typeface="Arial" pitchFamily="34" charset="-120"/>
               </a:rPr>
-              <a:t>「また、近くにコンビニがあるので、足りないと思うものは買いに行けるのも良いです」</a:t>
+              <a:t>「立地がとてもよくあらゆる方面に移動がものすごい楽」</a:t>
             </a:r>
             <a:endParaRPr lang="en-US" sz="900" dirty="0"/>
           </a:p>
@@ -10947,7 +10947,7 @@
                 <a:ea typeface="Arial" pitchFamily="34" charset="-122"/>
                 <a:cs typeface="Arial" pitchFamily="34" charset="-120"/>
               </a:rPr>
-              <a:t>そして、何より朝食が美味しいのが、最大の魅力です</a:t>
+              <a:t>近くの中華もリーズナブルで美味しかった</a:t>
             </a:r>
             <a:endParaRPr lang="en-US" sz="900" dirty="0"/>
           </a:p>
@@ -10986,7 +10986,7 @@
                 <a:ea typeface="Arial" pitchFamily="34" charset="-122"/>
                 <a:cs typeface="Arial" pitchFamily="34" charset="-120"/>
               </a:rPr>
-              <a:t>「朝食のバイキングも、種類も沢山あるので、連泊でも飽きないです」</a:t>
+              <a:t>「朝ごはんは美味しかったですが、メインのタンパク質が少ない気がした」</a:t>
             </a:r>
             <a:endParaRPr lang="en-US" sz="900" dirty="0"/>
           </a:p>
@@ -11170,7 +11170,7 @@
                 <a:ea typeface="Arial" pitchFamily="34" charset="-122"/>
                 <a:cs typeface="Arial" pitchFamily="34" charset="-120"/>
               </a:rPr>
-              <a:t>部屋はとてもきれいでした</a:t>
+              <a:t>ホテルや客室内は綺麗に保たれています</a:t>
             </a:r>
             <a:endParaRPr lang="en-US" sz="900" dirty="0"/>
           </a:p>
@@ -11209,7 +11209,7 @@
                 <a:ea typeface="Arial" pitchFamily="34" charset="-122"/>
                 <a:cs typeface="Arial" pitchFamily="34" charset="-120"/>
               </a:rPr>
-              <a:t>「設備は最近のものに比べれば、やや古い感はありますが、必要にして多すぎず、かつキレイ整えられてるので、良い印象が増します」</a:t>
+              <a:t>「部屋はとてもきれいでした」</a:t>
             </a:r>
             <a:endParaRPr lang="en-US" sz="900" dirty="0"/>
           </a:p>
@@ -11291,6 +11291,229 @@
         <p:spPr>
           <a:xfrm>
             <a:off x="5120640" y="2953512"/>
+            <a:ext cx="658368" cy="228600"/>
+          </a:xfrm>
+          <a:prstGeom prst="rect">
+            <a:avLst/>
+          </a:prstGeom>
+          <a:noFill/>
+          <a:ln/>
+        </p:spPr>
+        <p:txBody>
+          <a:bodyPr wrap="square" lIns="0" tIns="0" rIns="0" bIns="0" rtlCol="0" anchor="ctr"/>
+          <a:lstStyle/>
+          <a:p>
+            <a:pPr algn="ctr" indent="0" marL="0">
+              <a:buNone/>
+            </a:pPr>
+            <a:r>
+              <a:rPr lang="en-US" sz="900" b="1" dirty="0">
+                <a:solidFill>
+                  <a:srgbClr val="16A34A"/>
+                </a:solidFill>
+                <a:latin typeface="Arial" pitchFamily="34" charset="0"/>
+                <a:ea typeface="Arial" pitchFamily="34" charset="-122"/>
+                <a:cs typeface="Arial" pitchFamily="34" charset="-120"/>
+              </a:rPr>
+              <a:t>10件+</a:t>
+            </a:r>
+            <a:endParaRPr lang="en-US" sz="900" dirty="0"/>
+          </a:p>
+        </p:txBody>
+      </p:sp>
+      <p:sp>
+        <p:nvSpPr>
+          <p:cNvPr id="37" name="Text 35"/>
+          <p:cNvSpPr/>
+          <p:nvPr/>
+        </p:nvSpPr>
+        <p:spPr>
+          <a:xfrm>
+            <a:off x="3429000" y="2953512"/>
+            <a:ext cx="1645920" cy="274320"/>
+          </a:xfrm>
+          <a:prstGeom prst="rect">
+            <a:avLst/>
+          </a:prstGeom>
+          <a:noFill/>
+          <a:ln/>
+        </p:spPr>
+        <p:txBody>
+          <a:bodyPr wrap="square" lIns="0" tIns="0" rIns="0" bIns="0" rtlCol="0" anchor="ctr"/>
+          <a:lstStyle/>
+          <a:p>
+            <a:pPr indent="0" marL="0">
+              <a:buNone/>
+            </a:pPr>
+            <a:r>
+              <a:rPr lang="en-US" sz="1300" b="1" dirty="0">
+                <a:solidFill>
+                  <a:srgbClr val="1A2744"/>
+                </a:solidFill>
+                <a:latin typeface="Arial" pitchFamily="34" charset="0"/>
+                <a:ea typeface="Arial" pitchFamily="34" charset="-122"/>
+                <a:cs typeface="Arial" pitchFamily="34" charset="-120"/>
+              </a:rPr>
+              <a:t>スタッフの対応</a:t>
+            </a:r>
+            <a:endParaRPr lang="en-US" sz="1300" dirty="0"/>
+          </a:p>
+        </p:txBody>
+      </p:sp>
+      <p:sp>
+        <p:nvSpPr>
+          <p:cNvPr id="38" name="Text 36"/>
+          <p:cNvSpPr/>
+          <p:nvPr/>
+        </p:nvSpPr>
+        <p:spPr>
+          <a:xfrm>
+            <a:off x="3429000" y="3246120"/>
+            <a:ext cx="2377440" cy="365760"/>
+          </a:xfrm>
+          <a:prstGeom prst="rect">
+            <a:avLst/>
+          </a:prstGeom>
+          <a:noFill/>
+          <a:ln/>
+        </p:spPr>
+        <p:txBody>
+          <a:bodyPr wrap="square" lIns="0" tIns="0" rIns="0" bIns="0" rtlCol="0" anchor="ctr"/>
+          <a:lstStyle/>
+          <a:p>
+            <a:pPr indent="0" marL="0">
+              <a:buNone/>
+            </a:pPr>
+            <a:r>
+              <a:rPr lang="en-US" sz="900" dirty="0">
+                <a:solidFill>
+                  <a:srgbClr val="64748B"/>
+                </a:solidFill>
+                <a:latin typeface="Arial" pitchFamily="34" charset="0"/>
+                <a:ea typeface="Arial" pitchFamily="34" charset="-122"/>
+                <a:cs typeface="Arial" pitchFamily="34" charset="-120"/>
+              </a:rPr>
+              <a:t>父（78）私（48）息子（21）の3世代でおそらく最初で最後の家族旅行をしました｡ 駅からも近く立地よく、サービス...</a:t>
+            </a:r>
+            <a:endParaRPr lang="en-US" sz="900" dirty="0"/>
+          </a:p>
+        </p:txBody>
+      </p:sp>
+      <p:sp>
+        <p:nvSpPr>
+          <p:cNvPr id="39" name="Text 37"/>
+          <p:cNvSpPr/>
+          <p:nvPr/>
+        </p:nvSpPr>
+        <p:spPr>
+          <a:xfrm>
+            <a:off x="3429000" y="3657600"/>
+            <a:ext cx="2377440" cy="640080"/>
+          </a:xfrm>
+          <a:prstGeom prst="rect">
+            <a:avLst/>
+          </a:prstGeom>
+          <a:noFill/>
+          <a:ln/>
+        </p:spPr>
+        <p:txBody>
+          <a:bodyPr wrap="square" lIns="0" tIns="0" rIns="0" bIns="0" rtlCol="0" anchor="ctr"/>
+          <a:lstStyle/>
+          <a:p>
+            <a:pPr indent="0" marL="0">
+              <a:buNone/>
+            </a:pPr>
+            <a:r>
+              <a:rPr lang="en-US" sz="900" i="1" dirty="0">
+                <a:solidFill>
+                  <a:srgbClr val="3B7DD8"/>
+                </a:solidFill>
+                <a:latin typeface="Arial" pitchFamily="34" charset="0"/>
+                <a:ea typeface="Arial" pitchFamily="34" charset="-122"/>
+                <a:cs typeface="Arial" pitchFamily="34" charset="-120"/>
+              </a:rPr>
+              <a:t>「スタッフの対応が良かったです」</a:t>
+            </a:r>
+            <a:endParaRPr lang="en-US" sz="900" dirty="0"/>
+          </a:p>
+        </p:txBody>
+      </p:sp>
+      <p:sp>
+        <p:nvSpPr>
+          <p:cNvPr id="40" name="Shape 38"/>
+          <p:cNvSpPr/>
+          <p:nvPr/>
+        </p:nvSpPr>
+        <p:spPr>
+          <a:xfrm>
+            <a:off x="6126480" y="2880360"/>
+            <a:ext cx="2651760" cy="1600200"/>
+          </a:xfrm>
+          <a:prstGeom prst="rect">
+            <a:avLst/>
+          </a:prstGeom>
+          <a:solidFill>
+            <a:srgbClr val="FFFFFF"/>
+          </a:solidFill>
+          <a:ln/>
+          <a:effectLst>
+            <a:outerShdw sx="100000" sy="100000" kx="0" ky="0" algn="bl" rotWithShape="0" blurRad="50800" dist="25400" dir="8100000">
+              <a:srgbClr val="000000">
+                <a:alpha val="10000"/>
+              </a:srgbClr>
+            </a:outerShdw>
+          </a:effectLst>
+        </p:spPr>
+      </p:sp>
+      <p:sp>
+        <p:nvSpPr>
+          <p:cNvPr id="41" name="Shape 39"/>
+          <p:cNvSpPr/>
+          <p:nvPr/>
+        </p:nvSpPr>
+        <p:spPr>
+          <a:xfrm>
+            <a:off x="6126480" y="2880360"/>
+            <a:ext cx="54864" cy="1600200"/>
+          </a:xfrm>
+          <a:prstGeom prst="rect">
+            <a:avLst/>
+          </a:prstGeom>
+          <a:solidFill>
+            <a:srgbClr val="16A34A"/>
+          </a:solidFill>
+          <a:ln/>
+        </p:spPr>
+      </p:sp>
+      <p:sp>
+        <p:nvSpPr>
+          <p:cNvPr id="42" name="Shape 40"/>
+          <p:cNvSpPr/>
+          <p:nvPr/>
+        </p:nvSpPr>
+        <p:spPr>
+          <a:xfrm>
+            <a:off x="7955280" y="2953512"/>
+            <a:ext cx="658368" cy="228600"/>
+          </a:xfrm>
+          <a:prstGeom prst="rect">
+            <a:avLst/>
+          </a:prstGeom>
+          <a:solidFill>
+            <a:srgbClr val="DCFCE7"/>
+          </a:solidFill>
+          <a:ln/>
+        </p:spPr>
+      </p:sp>
+      <p:sp>
+        <p:nvSpPr>
+          <p:cNvPr id="43" name="Text 41"/>
+          <p:cNvSpPr/>
+          <p:nvPr/>
+        </p:nvSpPr>
+        <p:spPr>
+          <a:xfrm>
+            <a:off x="7955280" y="2953512"/>
             <a:ext cx="658368" cy="228600"/>
           </a:xfrm>
           <a:prstGeom prst="rect">
@@ -11323,13 +11546,13 @@
       </p:sp>
       <p:sp>
         <p:nvSpPr>
-          <p:cNvPr id="37" name="Text 35"/>
-          <p:cNvSpPr/>
-          <p:nvPr/>
-        </p:nvSpPr>
-        <p:spPr>
-          <a:xfrm>
-            <a:off x="3429000" y="2953512"/>
+          <p:cNvPr id="44" name="Text 42"/>
+          <p:cNvSpPr/>
+          <p:nvPr/>
+        </p:nvSpPr>
+        <p:spPr>
+          <a:xfrm>
+            <a:off x="6263640" y="2953512"/>
             <a:ext cx="1645920" cy="274320"/>
           </a:xfrm>
           <a:prstGeom prst="rect">
@@ -11354,7 +11577,7 @@
                 <a:ea typeface="Arial" pitchFamily="34" charset="-122"/>
                 <a:cs typeface="Arial" pitchFamily="34" charset="-120"/>
               </a:rPr>
-              <a:t>スタッフの対応</a:t>
+              <a:t>コンビニ・周辺施設</a:t>
             </a:r>
             <a:endParaRPr lang="en-US" sz="1300" dirty="0"/>
           </a:p>
@@ -11362,13 +11585,13 @@
       </p:sp>
       <p:sp>
         <p:nvSpPr>
-          <p:cNvPr id="38" name="Text 36"/>
-          <p:cNvSpPr/>
-          <p:nvPr/>
-        </p:nvSpPr>
-        <p:spPr>
-          <a:xfrm>
-            <a:off x="3429000" y="3246120"/>
+          <p:cNvPr id="45" name="Text 43"/>
+          <p:cNvSpPr/>
+          <p:nvPr/>
+        </p:nvSpPr>
+        <p:spPr>
+          <a:xfrm>
+            <a:off x="6263640" y="3246120"/>
             <a:ext cx="2377440" cy="365760"/>
           </a:xfrm>
           <a:prstGeom prst="rect">
@@ -11393,7 +11616,7 @@
                 <a:ea typeface="Arial" pitchFamily="34" charset="-122"/>
                 <a:cs typeface="Arial" pitchFamily="34" charset="-120"/>
               </a:rPr>
-              <a:t>接客はとても良くて大浴場は広くてサウナもあるから嬉しかった</a:t>
+              <a:t>近くにイオンのスーパーがあり便利 近くにイオンのスーパーがあり便利</a:t>
             </a:r>
             <a:endParaRPr lang="en-US" sz="900" dirty="0"/>
           </a:p>
@@ -11401,13 +11624,13 @@
       </p:sp>
       <p:sp>
         <p:nvSpPr>
-          <p:cNvPr id="39" name="Text 37"/>
-          <p:cNvSpPr/>
-          <p:nvPr/>
-        </p:nvSpPr>
-        <p:spPr>
-          <a:xfrm>
-            <a:off x="3429000" y="3657600"/>
+          <p:cNvPr id="46" name="Text 44"/>
+          <p:cNvSpPr/>
+          <p:nvPr/>
+        </p:nvSpPr>
+        <p:spPr>
+          <a:xfrm>
+            <a:off x="6263640" y="3657600"/>
             <a:ext cx="2377440" cy="640080"/>
           </a:xfrm>
           <a:prstGeom prst="rect">
@@ -11432,230 +11655,7 @@
                 <a:ea typeface="Arial" pitchFamily="34" charset="-122"/>
                 <a:cs typeface="Arial" pitchFamily="34" charset="-120"/>
               </a:rPr>
-              <a:t>「喫煙で予約してたが禁煙シングルを希望したら柔軟に対応頂けた」</a:t>
-            </a:r>
-            <a:endParaRPr lang="en-US" sz="900" dirty="0"/>
-          </a:p>
-        </p:txBody>
-      </p:sp>
-      <p:sp>
-        <p:nvSpPr>
-          <p:cNvPr id="40" name="Shape 38"/>
-          <p:cNvSpPr/>
-          <p:nvPr/>
-        </p:nvSpPr>
-        <p:spPr>
-          <a:xfrm>
-            <a:off x="6126480" y="2880360"/>
-            <a:ext cx="2651760" cy="1600200"/>
-          </a:xfrm>
-          <a:prstGeom prst="rect">
-            <a:avLst/>
-          </a:prstGeom>
-          <a:solidFill>
-            <a:srgbClr val="FFFFFF"/>
-          </a:solidFill>
-          <a:ln/>
-          <a:effectLst>
-            <a:outerShdw sx="100000" sy="100000" kx="0" ky="0" algn="bl" rotWithShape="0" blurRad="50800" dist="25400" dir="8100000">
-              <a:srgbClr val="000000">
-                <a:alpha val="10000"/>
-              </a:srgbClr>
-            </a:outerShdw>
-          </a:effectLst>
-        </p:spPr>
-      </p:sp>
-      <p:sp>
-        <p:nvSpPr>
-          <p:cNvPr id="41" name="Shape 39"/>
-          <p:cNvSpPr/>
-          <p:nvPr/>
-        </p:nvSpPr>
-        <p:spPr>
-          <a:xfrm>
-            <a:off x="6126480" y="2880360"/>
-            <a:ext cx="54864" cy="1600200"/>
-          </a:xfrm>
-          <a:prstGeom prst="rect">
-            <a:avLst/>
-          </a:prstGeom>
-          <a:solidFill>
-            <a:srgbClr val="16A34A"/>
-          </a:solidFill>
-          <a:ln/>
-        </p:spPr>
-      </p:sp>
-      <p:sp>
-        <p:nvSpPr>
-          <p:cNvPr id="42" name="Shape 40"/>
-          <p:cNvSpPr/>
-          <p:nvPr/>
-        </p:nvSpPr>
-        <p:spPr>
-          <a:xfrm>
-            <a:off x="7955280" y="2953512"/>
-            <a:ext cx="658368" cy="228600"/>
-          </a:xfrm>
-          <a:prstGeom prst="rect">
-            <a:avLst/>
-          </a:prstGeom>
-          <a:solidFill>
-            <a:srgbClr val="DCFCE7"/>
-          </a:solidFill>
-          <a:ln/>
-        </p:spPr>
-      </p:sp>
-      <p:sp>
-        <p:nvSpPr>
-          <p:cNvPr id="43" name="Text 41"/>
-          <p:cNvSpPr/>
-          <p:nvPr/>
-        </p:nvSpPr>
-        <p:spPr>
-          <a:xfrm>
-            <a:off x="7955280" y="2953512"/>
-            <a:ext cx="658368" cy="228600"/>
-          </a:xfrm>
-          <a:prstGeom prst="rect">
-            <a:avLst/>
-          </a:prstGeom>
-          <a:noFill/>
-          <a:ln/>
-        </p:spPr>
-        <p:txBody>
-          <a:bodyPr wrap="square" lIns="0" tIns="0" rIns="0" bIns="0" rtlCol="0" anchor="ctr"/>
-          <a:lstStyle/>
-          <a:p>
-            <a:pPr algn="ctr" indent="0" marL="0">
-              <a:buNone/>
-            </a:pPr>
-            <a:r>
-              <a:rPr lang="en-US" sz="900" b="1" dirty="0">
-                <a:solidFill>
-                  <a:srgbClr val="16A34A"/>
-                </a:solidFill>
-                <a:latin typeface="Arial" pitchFamily="34" charset="0"/>
-                <a:ea typeface="Arial" pitchFamily="34" charset="-122"/>
-                <a:cs typeface="Arial" pitchFamily="34" charset="-120"/>
-              </a:rPr>
-              <a:t>7件</a:t>
-            </a:r>
-            <a:endParaRPr lang="en-US" sz="900" dirty="0"/>
-          </a:p>
-        </p:txBody>
-      </p:sp>
-      <p:sp>
-        <p:nvSpPr>
-          <p:cNvPr id="44" name="Text 42"/>
-          <p:cNvSpPr/>
-          <p:nvPr/>
-        </p:nvSpPr>
-        <p:spPr>
-          <a:xfrm>
-            <a:off x="6263640" y="2953512"/>
-            <a:ext cx="1645920" cy="274320"/>
-          </a:xfrm>
-          <a:prstGeom prst="rect">
-            <a:avLst/>
-          </a:prstGeom>
-          <a:noFill/>
-          <a:ln/>
-        </p:spPr>
-        <p:txBody>
-          <a:bodyPr wrap="square" lIns="0" tIns="0" rIns="0" bIns="0" rtlCol="0" anchor="ctr"/>
-          <a:lstStyle/>
-          <a:p>
-            <a:pPr indent="0" marL="0">
-              <a:buNone/>
-            </a:pPr>
-            <a:r>
-              <a:rPr lang="en-US" sz="1300" b="1" dirty="0">
-                <a:solidFill>
-                  <a:srgbClr val="1A2744"/>
-                </a:solidFill>
-                <a:latin typeface="Arial" pitchFamily="34" charset="0"/>
-                <a:ea typeface="Arial" pitchFamily="34" charset="-122"/>
-                <a:cs typeface="Arial" pitchFamily="34" charset="-120"/>
-              </a:rPr>
-              <a:t>コストパフォーマンス</a:t>
-            </a:r>
-            <a:endParaRPr lang="en-US" sz="1300" dirty="0"/>
-          </a:p>
-        </p:txBody>
-      </p:sp>
-      <p:sp>
-        <p:nvSpPr>
-          <p:cNvPr id="45" name="Text 43"/>
-          <p:cNvSpPr/>
-          <p:nvPr/>
-        </p:nvSpPr>
-        <p:spPr>
-          <a:xfrm>
-            <a:off x="6263640" y="3246120"/>
-            <a:ext cx="2377440" cy="365760"/>
-          </a:xfrm>
-          <a:prstGeom prst="rect">
-            <a:avLst/>
-          </a:prstGeom>
-          <a:noFill/>
-          <a:ln/>
-        </p:spPr>
-        <p:txBody>
-          <a:bodyPr wrap="square" lIns="0" tIns="0" rIns="0" bIns="0" rtlCol="0" anchor="ctr"/>
-          <a:lstStyle/>
-          <a:p>
-            <a:pPr indent="0" marL="0">
-              <a:buNone/>
-            </a:pPr>
-            <a:r>
-              <a:rPr lang="en-US" sz="900" dirty="0">
-                <a:solidFill>
-                  <a:srgbClr val="64748B"/>
-                </a:solidFill>
-                <a:latin typeface="Arial" pitchFamily="34" charset="0"/>
-                <a:ea typeface="Arial" pitchFamily="34" charset="-122"/>
-                <a:cs typeface="Arial" pitchFamily="34" charset="-120"/>
-              </a:rPr>
-              <a:t>コスパ最高</a:t>
-            </a:r>
-            <a:endParaRPr lang="en-US" sz="900" dirty="0"/>
-          </a:p>
-        </p:txBody>
-      </p:sp>
-      <p:sp>
-        <p:nvSpPr>
-          <p:cNvPr id="46" name="Text 44"/>
-          <p:cNvSpPr/>
-          <p:nvPr/>
-        </p:nvSpPr>
-        <p:spPr>
-          <a:xfrm>
-            <a:off x="6263640" y="3657600"/>
-            <a:ext cx="2377440" cy="640080"/>
-          </a:xfrm>
-          <a:prstGeom prst="rect">
-            <a:avLst/>
-          </a:prstGeom>
-          <a:noFill/>
-          <a:ln/>
-        </p:spPr>
-        <p:txBody>
-          <a:bodyPr wrap="square" lIns="0" tIns="0" rIns="0" bIns="0" rtlCol="0" anchor="ctr"/>
-          <a:lstStyle/>
-          <a:p>
-            <a:pPr indent="0" marL="0">
-              <a:buNone/>
-            </a:pPr>
-            <a:r>
-              <a:rPr lang="en-US" sz="900" i="1" dirty="0">
-                <a:solidFill>
-                  <a:srgbClr val="3B7DD8"/>
-                </a:solidFill>
-                <a:latin typeface="Arial" pitchFamily="34" charset="0"/>
-                <a:ea typeface="Arial" pitchFamily="34" charset="-122"/>
-                <a:cs typeface="Arial" pitchFamily="34" charset="-120"/>
-              </a:rPr>
-              <a:t>「コスパ良しです」</a:t>
+              <a:t>「近くの三田駅まで徒歩8分程度、近くのコンビニも深夜帯は閉まっているので徒歩7分程度かかるので、ホテルにチェックイン...」</a:t>
             </a:r>
             <a:endParaRPr lang="en-US" sz="900" dirty="0"/>
           </a:p>
@@ -12277,7 +12277,7 @@
                           <a:ea typeface="Arial" pitchFamily="34" charset="-122"/>
                           <a:cs typeface="Arial" pitchFamily="34" charset="-120"/>
                         </a:rPr>
-                        <a:t>設備の老朽化</a:t>
+                        <a:t>防音性能</a:t>
                       </a:r>
                       <a:endParaRPr lang="en-US" sz="900" dirty="0">
                         <a:latin typeface="Arial" charset="0"/>
@@ -12345,7 +12345,7 @@
                           <a:ea typeface="Arial" pitchFamily="34" charset="-122"/>
                           <a:cs typeface="Arial" pitchFamily="34" charset="-120"/>
                         </a:rPr>
-                        <a:t>設備は若干古いですが特に過不足なく不便は感じませんでした</a:t>
+                        <a:t>電車の音が気になり、眠れませんでした</a:t>
                       </a:r>
                       <a:endParaRPr lang="en-US" sz="900" dirty="0">
                         <a:latin typeface="Arial" charset="0"/>
@@ -12413,7 +12413,7 @@
                           <a:ea typeface="Arial" pitchFamily="34" charset="-122"/>
                           <a:cs typeface="Arial" pitchFamily="34" charset="-120"/>
                         </a:rPr>
-                        <a:t>12件</a:t>
+                        <a:t>14件</a:t>
                       </a:r>
                       <a:endParaRPr lang="en-US" sz="900" dirty="0">
                         <a:latin typeface="Arial" charset="0"/>
@@ -12551,7 +12551,7 @@
                           <a:ea typeface="Arial" pitchFamily="34" charset="-122"/>
                           <a:cs typeface="Arial" pitchFamily="34" charset="-120"/>
                         </a:rPr>
-                        <a:t>防音性能</a:t>
+                        <a:t>設備の老朽化</a:t>
                       </a:r>
                       <a:endParaRPr lang="en-US" sz="900" dirty="0">
                         <a:latin typeface="Arial" charset="0"/>
@@ -12619,7 +12619,7 @@
                           <a:ea typeface="Arial" pitchFamily="34" charset="-122"/>
                           <a:cs typeface="Arial" pitchFamily="34" charset="-120"/>
                         </a:rPr>
-                        <a:t>一方で、駅に近い分部屋によっては常に電車が行き来する音がするのと、水回りの音がやや響きやすい点が気になりました</a:t>
+                        <a:t>設備は若干古いですが特に過不足なく不便は感じませんでした</a:t>
                       </a:r>
                       <a:endParaRPr lang="en-US" sz="900" dirty="0">
                         <a:latin typeface="Arial" charset="0"/>
@@ -12893,7 +12893,7 @@
                           <a:ea typeface="Arial" pitchFamily="34" charset="-122"/>
                           <a:cs typeface="Arial" pitchFamily="34" charset="-120"/>
                         </a:rPr>
-                        <a:t>一方で、駅に近い分部屋によっては常に電車が行き来する音がするのと、水回りの音がやや響きやすい点が気になりました</a:t>
+                        <a:t>トイレの換気扇が効いてない感じでした</a:t>
                       </a:r>
                       <a:endParaRPr lang="en-US" sz="900" dirty="0">
                         <a:latin typeface="Arial" charset="0"/>
@@ -12961,7 +12961,7 @@
                           <a:ea typeface="Arial" pitchFamily="34" charset="-122"/>
                           <a:cs typeface="Arial" pitchFamily="34" charset="-120"/>
                         </a:rPr>
-                        <a:t>9件</a:t>
+                        <a:t>10件</a:t>
                       </a:r>
                       <a:endParaRPr lang="en-US" sz="900" dirty="0">
                         <a:latin typeface="Arial" charset="0"/>
@@ -13921,7 +13921,7 @@
                           <a:ea typeface="Arial" pitchFamily="34" charset="-122"/>
                           <a:cs typeface="Arial" pitchFamily="34" charset="-120"/>
                         </a:rPr>
-                        <a:t>対応・サービスの不満</a:t>
+                        <a:t>窓・採光</a:t>
                       </a:r>
                       <a:endParaRPr lang="en-US" sz="900" dirty="0">
                         <a:latin typeface="Arial" charset="0"/>
@@ -13989,7 +13989,7 @@
                           <a:ea typeface="Arial" pitchFamily="34" charset="-122"/>
                           <a:cs typeface="Arial" pitchFamily="34" charset="-120"/>
                         </a:rPr>
-                        <a:t>宿は禁煙ルームにも関わらずタバコのような匂いがしたのは残念だった</a:t>
+                        <a:t>線路沿線なので、騒音が苦手な方は耳栓が必要かもしれませんが、窓にふすまが付いており、ふすまを閉めれば、私は気になら...</a:t>
                       </a:r>
                       <a:endParaRPr lang="en-US" sz="900" dirty="0">
                         <a:latin typeface="Arial" charset="0"/>
@@ -14195,7 +14195,7 @@
                           <a:ea typeface="Arial" pitchFamily="34" charset="-122"/>
                           <a:cs typeface="Arial" pitchFamily="34" charset="-120"/>
                         </a:rPr>
-                        <a:t>朝食の改善要望</a:t>
+                        <a:t>対応・サービスの不満</a:t>
                       </a:r>
                       <a:endParaRPr lang="en-US" sz="900" dirty="0">
                         <a:latin typeface="Arial" charset="0"/>
@@ -14263,7 +14263,7 @@
                           <a:ea typeface="Arial" pitchFamily="34" charset="-122"/>
                           <a:cs typeface="Arial" pitchFamily="34" charset="-120"/>
                         </a:rPr>
-                        <a:t>ごはんは品数はほどほどであるが、どれも美味しい お風呂は大浴場はなく、汚くはないが綺麗でもない ごはんは品数はほど...</a:t>
+                        <a:t>宿は禁煙ルームにも関わらずタバコのような匂いがしたのは残念だった</a:t>
                       </a:r>
                       <a:endParaRPr lang="en-US" sz="900" dirty="0">
                         <a:latin typeface="Arial" charset="0"/>
@@ -14331,7 +14331,7 @@
                           <a:ea typeface="Arial" pitchFamily="34" charset="-122"/>
                           <a:cs typeface="Arial" pitchFamily="34" charset="-120"/>
                         </a:rPr>
-                        <a:t>2件</a:t>
+                        <a:t>3件</a:t>
                       </a:r>
                       <a:endParaRPr lang="en-US" sz="900" dirty="0">
                         <a:latin typeface="Arial" charset="0"/>
@@ -14469,7 +14469,7 @@
                           <a:ea typeface="Arial" pitchFamily="34" charset="-122"/>
                           <a:cs typeface="Arial" pitchFamily="34" charset="-120"/>
                         </a:rPr>
-                        <a:t>窓・採光</a:t>
+                        <a:t>朝食の改善要望</a:t>
                       </a:r>
                       <a:endParaRPr lang="en-US" sz="900" dirty="0">
                         <a:latin typeface="Arial" charset="0"/>
@@ -14537,7 +14537,7 @@
                           <a:ea typeface="Arial" pitchFamily="34" charset="-122"/>
                           <a:cs typeface="Arial" pitchFamily="34" charset="-120"/>
                         </a:rPr>
-                        <a:t>換気をしようと窓を開けると、清掃されてないようなサッシ部分</a:t>
+                        <a:t>ごはんは品数はほどほどであるが、どれも美味しい お風呂は大浴場はなく、汚くはないが綺麗でもない ごはんは品数はほど...</a:t>
                       </a:r>
                       <a:endParaRPr lang="en-US" sz="900" dirty="0">
                         <a:latin typeface="Arial" charset="0"/>

--- a/納品レポート/ホテル別レポート/chisan_口コミ分析レポート.pptx
+++ b/納品レポート/ホテル別レポート/chisan_口コミ分析レポート.pptx
@@ -192,10 +192,10 @@
                     <c:v>じゃらん</c:v>
                   </c:pt>
                   <c:pt idx="4">
-                    <c:v>Google</c:v>
+                    <c:v>楽天トラベル</c:v>
                   </c:pt>
                   <c:pt idx="5">
-                    <c:v>楽天トラベル</c:v>
+                    <c:v>Google</c:v>
                   </c:pt>
                 </c:lvl>
               </c:multiLvlStrCache>
@@ -220,10 +220,10 @@
                   <c:v>6.89</c:v>
                 </c:pt>
                 <c:pt idx="4">
-                  <c:v>6.74</c:v>
+                  <c:v>6.81</c:v>
                 </c:pt>
                 <c:pt idx="5">
-                  <c:v>6.73</c:v>
+                  <c:v>6.74</c:v>
                 </c:pt>
               </c:numCache>
             </c:numRef>
@@ -566,7 +566,7 @@
               <c:numCache>
                 <c:ptCount val="3"/>
                 <c:pt idx="0">
-                  <c:v>43</c:v>
+                  <c:v>45</c:v>
                 </c:pt>
                 <c:pt idx="1">
                   <c:v>18</c:v>
@@ -815,7 +815,7 @@
                   <c:v>2</c:v>
                 </c:pt>
                 <c:pt idx="2">
-                  <c:v>26</c:v>
+                  <c:v>28</c:v>
                 </c:pt>
                 <c:pt idx="3">
                   <c:v>2</c:v>
@@ -2781,7 +2781,7 @@
                 <a:ea typeface="Arial" pitchFamily="34" charset="-122"/>
                 <a:cs typeface="Arial" pitchFamily="34" charset="-120"/>
               </a:rPr>
-              <a:t>レビュー総数：75件（6サイト）</a:t>
+              <a:t>レビュー総数：77件（6サイト）</a:t>
             </a:r>
             <a:endParaRPr lang="en-US" sz="1000" dirty="0"/>
           </a:p>
@@ -2801,7 +2801,7 @@
                 <a:ea typeface="Arial" pitchFamily="34" charset="-122"/>
                 <a:cs typeface="Arial" pitchFamily="34" charset="-120"/>
               </a:rPr>
-              <a:t>作成日：2026年3月23日</a:t>
+              <a:t>作成日：2026年3月24日</a:t>
             </a:r>
             <a:endParaRPr lang="en-US" sz="1000" dirty="0"/>
           </a:p>
@@ -3347,7 +3347,7 @@
                           <a:ea typeface="Arial" pitchFamily="34" charset="-122"/>
                           <a:cs typeface="Arial" pitchFamily="34" charset="-120"/>
                         </a:rPr>
-                        <a:t>7.08点</a:t>
+                        <a:t>7.10点</a:t>
                       </a:r>
                       <a:endParaRPr lang="en-US" sz="1000" dirty="0">
                         <a:latin typeface="Arial" charset="0"/>
@@ -3621,7 +3621,7 @@
                           <a:ea typeface="Arial" pitchFamily="34" charset="-122"/>
                           <a:cs typeface="Arial" pitchFamily="34" charset="-120"/>
                         </a:rPr>
-                        <a:t>57.3%</a:t>
+                        <a:t>58.4%</a:t>
                       </a:r>
                       <a:endParaRPr lang="en-US" sz="1000" dirty="0">
                         <a:latin typeface="Arial" charset="0"/>
@@ -3689,7 +3689,7 @@
                           <a:ea typeface="Arial" pitchFamily="34" charset="-122"/>
                           <a:cs typeface="Arial" pitchFamily="34" charset="-120"/>
                         </a:rPr>
-                        <a:t>67%以上</a:t>
+                        <a:t>68%以上</a:t>
                       </a:r>
                       <a:endParaRPr lang="en-US" sz="1000" dirty="0">
                         <a:latin typeface="Arial" charset="0"/>
@@ -3895,7 +3895,7 @@
                           <a:ea typeface="Arial" pitchFamily="34" charset="-122"/>
                           <a:cs typeface="Arial" pitchFamily="34" charset="-120"/>
                         </a:rPr>
-                        <a:t>18.7%</a:t>
+                        <a:t>18.2%</a:t>
                       </a:r>
                       <a:endParaRPr lang="en-US" sz="1000" dirty="0">
                         <a:latin typeface="Arial" charset="0"/>
@@ -3963,7 +3963,7 @@
                           <a:ea typeface="Arial" pitchFamily="34" charset="-122"/>
                           <a:cs typeface="Arial" pitchFamily="34" charset="-120"/>
                         </a:rPr>
-                        <a:t>14%以下</a:t>
+                        <a:t>13%以下</a:t>
                       </a:r>
                       <a:endParaRPr lang="en-US" sz="1000" dirty="0">
                         <a:latin typeface="Arial" charset="0"/>
@@ -5082,7 +5082,7 @@
                 <a:ea typeface="Arial" pitchFamily="34" charset="-122"/>
                 <a:cs typeface="Arial" pitchFamily="34" charset="-120"/>
               </a:rPr>
-              <a:t>7.08</a:t>
+              <a:t>7.10</a:t>
             </a:r>
             <a:endParaRPr lang="en-US" sz="3200" dirty="0"/>
           </a:p>
@@ -5207,7 +5207,7 @@
                 <a:ea typeface="Arial" pitchFamily="34" charset="-122"/>
                 <a:cs typeface="Arial" pitchFamily="34" charset="-120"/>
               </a:rPr>
-              <a:t>57.3%</a:t>
+              <a:t>58.4%</a:t>
             </a:r>
             <a:endParaRPr lang="en-US" sz="3200" dirty="0"/>
           </a:p>
@@ -5332,7 +5332,7 @@
                 <a:ea typeface="Arial" pitchFamily="34" charset="-122"/>
                 <a:cs typeface="Arial" pitchFamily="34" charset="-120"/>
               </a:rPr>
-              <a:t>18.7%</a:t>
+              <a:t>18.2%</a:t>
             </a:r>
             <a:endParaRPr lang="en-US" sz="3200" dirty="0"/>
           </a:p>
@@ -5457,7 +5457,7 @@
                 <a:ea typeface="Arial" pitchFamily="34" charset="-122"/>
                 <a:cs typeface="Arial" pitchFamily="34" charset="-120"/>
               </a:rPr>
-              <a:t>75件</a:t>
+              <a:t>77件</a:t>
             </a:r>
             <a:endParaRPr lang="en-US" sz="3200" dirty="0"/>
           </a:p>
@@ -6266,7 +6266,7 @@
                 <a:ea typeface="Arial" pitchFamily="34" charset="-122"/>
                 <a:cs typeface="Arial" pitchFamily="34" charset="-120"/>
               </a:rPr>
-              <a:t>7.08</a:t>
+              <a:t>7.10</a:t>
             </a:r>
             <a:endParaRPr lang="en-US" sz="3200" dirty="0"/>
           </a:p>
@@ -6391,7 +6391,7 @@
                 <a:ea typeface="Arial" pitchFamily="34" charset="-122"/>
                 <a:cs typeface="Arial" pitchFamily="34" charset="-120"/>
               </a:rPr>
-              <a:t>57.3%</a:t>
+              <a:t>58.4%</a:t>
             </a:r>
             <a:endParaRPr lang="en-US" sz="3200" dirty="0"/>
           </a:p>
@@ -6516,7 +6516,7 @@
                 <a:ea typeface="Arial" pitchFamily="34" charset="-122"/>
                 <a:cs typeface="Arial" pitchFamily="34" charset="-120"/>
               </a:rPr>
-              <a:t>18.7%</a:t>
+              <a:t>18.2%</a:t>
             </a:r>
             <a:endParaRPr lang="en-US" sz="3200" dirty="0"/>
           </a:p>
@@ -6641,7 +6641,7 @@
                 <a:ea typeface="Arial" pitchFamily="34" charset="-122"/>
                 <a:cs typeface="Arial" pitchFamily="34" charset="-120"/>
               </a:rPr>
-              <a:t>75件</a:t>
+              <a:t>77件</a:t>
             </a:r>
             <a:endParaRPr lang="en-US" sz="3200" dirty="0"/>
           </a:p>
@@ -8871,7 +8871,7 @@
                           <a:ea typeface="Arial" pitchFamily="34" charset="-122"/>
                           <a:cs typeface="Arial" pitchFamily="34" charset="-120"/>
                         </a:rPr>
-                        <a:t>Google</a:t>
+                        <a:t>楽天トラベル</a:t>
                       </a:r>
                       <a:endParaRPr lang="en-US" sz="900" dirty="0">
                         <a:latin typeface="Arial" charset="0"/>
@@ -8939,7 +8939,7 @@
                           <a:ea typeface="Arial" pitchFamily="34" charset="-122"/>
                           <a:cs typeface="Arial" pitchFamily="34" charset="-120"/>
                         </a:rPr>
-                        <a:t>19</a:t>
+                        <a:t>32</a:t>
                       </a:r>
                       <a:endParaRPr lang="en-US" sz="900" dirty="0">
                         <a:latin typeface="Arial" charset="0"/>
@@ -9007,7 +9007,7 @@
                           <a:ea typeface="Arial" pitchFamily="34" charset="-122"/>
                           <a:cs typeface="Arial" pitchFamily="34" charset="-120"/>
                         </a:rPr>
-                        <a:t>3.37</a:t>
+                        <a:t>3.41</a:t>
                       </a:r>
                       <a:endParaRPr lang="en-US" sz="900" dirty="0">
                         <a:latin typeface="Arial" charset="0"/>
@@ -9143,7 +9143,7 @@
                           <a:ea typeface="Arial" pitchFamily="34" charset="-122"/>
                           <a:cs typeface="Arial" pitchFamily="34" charset="-120"/>
                         </a:rPr>
-                        <a:t>6.74</a:t>
+                        <a:t>6.81</a:t>
                       </a:r>
                       <a:endParaRPr lang="en-US" sz="900" dirty="0">
                         <a:latin typeface="Arial" charset="0"/>
@@ -9213,7 +9213,7 @@
                           <a:ea typeface="Arial" pitchFamily="34" charset="-122"/>
                           <a:cs typeface="Arial" pitchFamily="34" charset="-120"/>
                         </a:rPr>
-                        <a:t>楽天トラベル</a:t>
+                        <a:t>Google</a:t>
                       </a:r>
                       <a:endParaRPr lang="en-US" sz="900" dirty="0">
                         <a:latin typeface="Arial" charset="0"/>
@@ -9281,7 +9281,7 @@
                           <a:ea typeface="Arial" pitchFamily="34" charset="-122"/>
                           <a:cs typeface="Arial" pitchFamily="34" charset="-120"/>
                         </a:rPr>
-                        <a:t>30</a:t>
+                        <a:t>19</a:t>
                       </a:r>
                       <a:endParaRPr lang="en-US" sz="900" dirty="0">
                         <a:latin typeface="Arial" charset="0"/>
@@ -9485,7 +9485,7 @@
                           <a:ea typeface="Arial" pitchFamily="34" charset="-122"/>
                           <a:cs typeface="Arial" pitchFamily="34" charset="-120"/>
                         </a:rPr>
-                        <a:t>6.73</a:t>
+                        <a:t>6.74</a:t>
                       </a:r>
                       <a:endParaRPr lang="en-US" sz="900" dirty="0">
                         <a:latin typeface="Arial" charset="0"/>
@@ -9893,7 +9893,7 @@
                 <a:ea typeface="Arial" pitchFamily="34" charset="-122"/>
                 <a:cs typeface="Arial" pitchFamily="34" charset="-120"/>
               </a:rPr>
-              <a:t>43件（57.3%）</a:t>
+              <a:t>45件（58.4%）</a:t>
             </a:r>
             <a:endParaRPr lang="en-US" sz="1100" dirty="0"/>
           </a:p>
@@ -9991,7 +9991,7 @@
                 <a:ea typeface="Arial" pitchFamily="34" charset="-122"/>
                 <a:cs typeface="Arial" pitchFamily="34" charset="-120"/>
               </a:rPr>
-              <a:t>18件（24.0%）</a:t>
+              <a:t>18件（23.4%）</a:t>
             </a:r>
             <a:endParaRPr lang="en-US" sz="1100" dirty="0"/>
           </a:p>
@@ -10089,7 +10089,7 @@
                 <a:ea typeface="Arial" pitchFamily="34" charset="-122"/>
                 <a:cs typeface="Arial" pitchFamily="34" charset="-120"/>
               </a:rPr>
-              <a:t>14件（18.7%）</a:t>
+              <a:t>14件（18.2%）</a:t>
             </a:r>
             <a:endParaRPr lang="en-US" sz="1100" dirty="0"/>
           </a:p>

--- a/納品レポート/ホテル別レポート/chisan_口コミ分析レポート.pptx
+++ b/納品レポート/ホテル別レポート/chisan_口コミ分析レポート.pptx
@@ -208,7 +208,7 @@
                 <c:formatCode>General</c:formatCode>
                 <c:ptCount val="6"/>
                 <c:pt idx="0">
-                  <c:v>8.67</c:v>
+                  <c:v>8.46</c:v>
                 </c:pt>
                 <c:pt idx="1">
                   <c:v>7</c:v>
@@ -569,7 +569,7 @@
                   <c:v>45</c:v>
                 </c:pt>
                 <c:pt idx="1">
-                  <c:v>18</c:v>
+                  <c:v>20</c:v>
                 </c:pt>
                 <c:pt idx="2">
                   <c:v>14</c:v>
@@ -818,10 +818,10 @@
                   <c:v>28</c:v>
                 </c:pt>
                 <c:pt idx="3">
-                  <c:v>2</c:v>
+                  <c:v>3</c:v>
                 </c:pt>
                 <c:pt idx="4">
-                  <c:v>15</c:v>
+                  <c:v>16</c:v>
                 </c:pt>
                 <c:pt idx="5">
                   <c:v>1</c:v>
@@ -2781,7 +2781,7 @@
                 <a:ea typeface="Arial" pitchFamily="34" charset="-122"/>
                 <a:cs typeface="Arial" pitchFamily="34" charset="-120"/>
               </a:rPr>
-              <a:t>レビュー総数：77件（6サイト）</a:t>
+              <a:t>レビュー総数：79件（6サイト）</a:t>
             </a:r>
             <a:endParaRPr lang="en-US" sz="1000" dirty="0"/>
           </a:p>
@@ -2801,7 +2801,7 @@
                 <a:ea typeface="Arial" pitchFamily="34" charset="-122"/>
                 <a:cs typeface="Arial" pitchFamily="34" charset="-120"/>
               </a:rPr>
-              <a:t>作成日：2026年3月24日</a:t>
+              <a:t>作成日：2026年3月25日</a:t>
             </a:r>
             <a:endParaRPr lang="en-US" sz="1000" dirty="0"/>
           </a:p>
@@ -3347,7 +3347,7 @@
                           <a:ea typeface="Arial" pitchFamily="34" charset="-122"/>
                           <a:cs typeface="Arial" pitchFamily="34" charset="-120"/>
                         </a:rPr>
-                        <a:t>7.10点</a:t>
+                        <a:t>7.09点</a:t>
                       </a:r>
                       <a:endParaRPr lang="en-US" sz="1000" dirty="0">
                         <a:latin typeface="Arial" charset="0"/>
@@ -3621,7 +3621,7 @@
                           <a:ea typeface="Arial" pitchFamily="34" charset="-122"/>
                           <a:cs typeface="Arial" pitchFamily="34" charset="-120"/>
                         </a:rPr>
-                        <a:t>58.4%</a:t>
+                        <a:t>57.0%</a:t>
                       </a:r>
                       <a:endParaRPr lang="en-US" sz="1000" dirty="0">
                         <a:latin typeface="Arial" charset="0"/>
@@ -3689,7 +3689,7 @@
                           <a:ea typeface="Arial" pitchFamily="34" charset="-122"/>
                           <a:cs typeface="Arial" pitchFamily="34" charset="-120"/>
                         </a:rPr>
-                        <a:t>68%以上</a:t>
+                        <a:t>67%以上</a:t>
                       </a:r>
                       <a:endParaRPr lang="en-US" sz="1000" dirty="0">
                         <a:latin typeface="Arial" charset="0"/>
@@ -3895,7 +3895,7 @@
                           <a:ea typeface="Arial" pitchFamily="34" charset="-122"/>
                           <a:cs typeface="Arial" pitchFamily="34" charset="-120"/>
                         </a:rPr>
-                        <a:t>18.2%</a:t>
+                        <a:t>17.7%</a:t>
                       </a:r>
                       <a:endParaRPr lang="en-US" sz="1000" dirty="0">
                         <a:latin typeface="Arial" charset="0"/>
@@ -4443,7 +4443,7 @@
                           <a:ea typeface="Arial" pitchFamily="34" charset="-122"/>
                           <a:cs typeface="Arial" pitchFamily="34" charset="-120"/>
                         </a:rPr>
-                        <a:t>約14件/期間</a:t>
+                        <a:t>約15件/期間</a:t>
                       </a:r>
                       <a:endParaRPr lang="en-US" sz="1000" dirty="0">
                         <a:latin typeface="Arial" charset="0"/>
@@ -5082,7 +5082,7 @@
                 <a:ea typeface="Arial" pitchFamily="34" charset="-122"/>
                 <a:cs typeface="Arial" pitchFamily="34" charset="-120"/>
               </a:rPr>
-              <a:t>7.10</a:t>
+              <a:t>7.09</a:t>
             </a:r>
             <a:endParaRPr lang="en-US" sz="3200" dirty="0"/>
           </a:p>
@@ -5207,7 +5207,7 @@
                 <a:ea typeface="Arial" pitchFamily="34" charset="-122"/>
                 <a:cs typeface="Arial" pitchFamily="34" charset="-120"/>
               </a:rPr>
-              <a:t>58.4%</a:t>
+              <a:t>57.0%</a:t>
             </a:r>
             <a:endParaRPr lang="en-US" sz="3200" dirty="0"/>
           </a:p>
@@ -5332,7 +5332,7 @@
                 <a:ea typeface="Arial" pitchFamily="34" charset="-122"/>
                 <a:cs typeface="Arial" pitchFamily="34" charset="-120"/>
               </a:rPr>
-              <a:t>18.2%</a:t>
+              <a:t>17.7%</a:t>
             </a:r>
             <a:endParaRPr lang="en-US" sz="3200" dirty="0"/>
           </a:p>
@@ -5457,7 +5457,7 @@
                 <a:ea typeface="Arial" pitchFamily="34" charset="-122"/>
                 <a:cs typeface="Arial" pitchFamily="34" charset="-120"/>
               </a:rPr>
-              <a:t>77件</a:t>
+              <a:t>79件</a:t>
             </a:r>
             <a:endParaRPr lang="en-US" sz="3200" dirty="0"/>
           </a:p>
@@ -5645,7 +5645,7 @@
                 <a:ea typeface="Arial" pitchFamily="34" charset="-122"/>
                 <a:cs typeface="Arial" pitchFamily="34" charset="-120"/>
               </a:rPr>
-              <a:t>  設備は若干古いですが特に過不足なく不便は感じませんでした</a:t>
+              <a:t>  口コミを見ていて覚悟はしていたが、設備としては古めのホテルでした</a:t>
             </a:r>
             <a:endParaRPr lang="en-US" sz="1100" dirty="0"/>
           </a:p>
@@ -5833,7 +5833,7 @@
                 <a:ea typeface="Arial" pitchFamily="34" charset="-122"/>
                 <a:cs typeface="Arial" pitchFamily="34" charset="-120"/>
               </a:rPr>
-              <a:t>  電車の音が気になり、眠れませんでした</a:t>
+              <a:t>  今回留まった部屋だけかもしれないが、ベットのスプリングが壊れているのかわからないが、寝返りする度にキーキーと音を立...</a:t>
             </a:r>
             <a:endParaRPr lang="en-US" sz="1100" dirty="0"/>
           </a:p>
@@ -5873,7 +5873,7 @@
                 <a:ea typeface="Arial" pitchFamily="34" charset="-122"/>
                 <a:cs typeface="Arial" pitchFamily="34" charset="-120"/>
               </a:rPr>
-              <a:t>  設備は若干古いですが特に過不足なく不便は感じませんでした</a:t>
+              <a:t>  口コミを見ていて覚悟はしていたが、設備としては古めのホテルでした</a:t>
             </a:r>
             <a:endParaRPr lang="en-US" sz="1100" dirty="0"/>
           </a:p>
@@ -6266,7 +6266,7 @@
                 <a:ea typeface="Arial" pitchFamily="34" charset="-122"/>
                 <a:cs typeface="Arial" pitchFamily="34" charset="-120"/>
               </a:rPr>
-              <a:t>7.10</a:t>
+              <a:t>7.09</a:t>
             </a:r>
             <a:endParaRPr lang="en-US" sz="3200" dirty="0"/>
           </a:p>
@@ -6391,7 +6391,7 @@
                 <a:ea typeface="Arial" pitchFamily="34" charset="-122"/>
                 <a:cs typeface="Arial" pitchFamily="34" charset="-120"/>
               </a:rPr>
-              <a:t>58.4%</a:t>
+              <a:t>57.0%</a:t>
             </a:r>
             <a:endParaRPr lang="en-US" sz="3200" dirty="0"/>
           </a:p>
@@ -6516,7 +6516,7 @@
                 <a:ea typeface="Arial" pitchFamily="34" charset="-122"/>
                 <a:cs typeface="Arial" pitchFamily="34" charset="-120"/>
               </a:rPr>
-              <a:t>18.2%</a:t>
+              <a:t>17.7%</a:t>
             </a:r>
             <a:endParaRPr lang="en-US" sz="3200" dirty="0"/>
           </a:p>
@@ -6641,7 +6641,7 @@
                 <a:ea typeface="Arial" pitchFamily="34" charset="-122"/>
                 <a:cs typeface="Arial" pitchFamily="34" charset="-120"/>
               </a:rPr>
-              <a:t>77件</a:t>
+              <a:t>79件</a:t>
             </a:r>
             <a:endParaRPr lang="en-US" sz="3200" dirty="0"/>
           </a:p>
@@ -7062,7 +7062,7 @@
                 <a:ea typeface="Arial" pitchFamily="34" charset="-122"/>
                 <a:cs typeface="Arial" pitchFamily="34" charset="-120"/>
               </a:rPr>
-              <a:t>Agoda(8.67)が最高スコア。</a:t>
+              <a:t>Agoda(8.46)が最高スコア。</a:t>
             </a:r>
             <a:endParaRPr lang="en-US" sz="1100" dirty="0"/>
           </a:p>
@@ -7571,7 +7571,7 @@
                           <a:ea typeface="Arial" pitchFamily="34" charset="-122"/>
                           <a:cs typeface="Arial" pitchFamily="34" charset="-120"/>
                         </a:rPr>
-                        <a:t>12</a:t>
+                        <a:t>13</a:t>
                       </a:r>
                       <a:endParaRPr lang="en-US" sz="900" dirty="0">
                         <a:latin typeface="Arial" charset="0"/>
@@ -7639,7 +7639,7 @@
                           <a:ea typeface="Arial" pitchFamily="34" charset="-122"/>
                           <a:cs typeface="Arial" pitchFamily="34" charset="-120"/>
                         </a:rPr>
-                        <a:t>8.67</a:t>
+                        <a:t>8.46</a:t>
                       </a:r>
                       <a:endParaRPr lang="en-US" sz="900" dirty="0">
                         <a:latin typeface="Arial" charset="0"/>
@@ -7775,7 +7775,7 @@
                           <a:ea typeface="Arial" pitchFamily="34" charset="-122"/>
                           <a:cs typeface="Arial" pitchFamily="34" charset="-120"/>
                         </a:rPr>
-                        <a:t>8.67</a:t>
+                        <a:t>8.46</a:t>
                       </a:r>
                       <a:endParaRPr lang="en-US" sz="900" dirty="0">
                         <a:latin typeface="Arial" charset="0"/>
@@ -8255,7 +8255,7 @@
                           <a:ea typeface="Arial" pitchFamily="34" charset="-122"/>
                           <a:cs typeface="Arial" pitchFamily="34" charset="-120"/>
                         </a:rPr>
-                        <a:t>1</a:t>
+                        <a:t>2</a:t>
                       </a:r>
                       <a:endParaRPr lang="en-US" sz="900" dirty="0">
                         <a:latin typeface="Arial" charset="0"/>
@@ -9893,7 +9893,7 @@
                 <a:ea typeface="Arial" pitchFamily="34" charset="-122"/>
                 <a:cs typeface="Arial" pitchFamily="34" charset="-120"/>
               </a:rPr>
-              <a:t>45件（58.4%）</a:t>
+              <a:t>45件（57.0%）</a:t>
             </a:r>
             <a:endParaRPr lang="en-US" sz="1100" dirty="0"/>
           </a:p>
@@ -9991,7 +9991,7 @@
                 <a:ea typeface="Arial" pitchFamily="34" charset="-122"/>
                 <a:cs typeface="Arial" pitchFamily="34" charset="-120"/>
               </a:rPr>
-              <a:t>18件（23.4%）</a:t>
+              <a:t>20件（25.3%）</a:t>
             </a:r>
             <a:endParaRPr lang="en-US" sz="1100" dirty="0"/>
           </a:p>
@@ -10089,7 +10089,7 @@
                 <a:ea typeface="Arial" pitchFamily="34" charset="-122"/>
                 <a:cs typeface="Arial" pitchFamily="34" charset="-120"/>
               </a:rPr>
-              <a:t>14件（18.2%）</a:t>
+              <a:t>14件（17.7%）</a:t>
             </a:r>
             <a:endParaRPr lang="en-US" sz="1100" dirty="0"/>
           </a:p>
@@ -10646,7 +10646,7 @@
                 <a:ea typeface="Arial" pitchFamily="34" charset="-122"/>
                 <a:cs typeface="Arial" pitchFamily="34" charset="-120"/>
               </a:rPr>
-              <a:t>10件+</a:t>
+              <a:t>20件+</a:t>
             </a:r>
             <a:endParaRPr lang="en-US" sz="900" dirty="0"/>
           </a:p>
@@ -10724,7 +10724,7 @@
                 <a:ea typeface="Arial" pitchFamily="34" charset="-122"/>
                 <a:cs typeface="Arial" pitchFamily="34" charset="-120"/>
               </a:rPr>
-              <a:t>設備は若干古いですが特に過不足なく不便は感じませんでした</a:t>
+              <a:t>口コミを見ていて覚悟はしていたが、設備としては古めのホテルでした</a:t>
             </a:r>
             <a:endParaRPr lang="en-US" sz="900" dirty="0"/>
           </a:p>
@@ -10763,7 +10763,7 @@
                 <a:ea typeface="Arial" pitchFamily="34" charset="-122"/>
                 <a:cs typeface="Arial" pitchFamily="34" charset="-120"/>
               </a:rPr>
-              <a:t>「設備は最近のものに比べれば、やや古い感はありますが、必要にして多すぎず、かつキレイ整えられてるので、良い印象が増します」</a:t>
+              <a:t>「設備は若干古いですが特に過不足なく不便は感じませんでした」</a:t>
             </a:r>
             <a:endParaRPr lang="en-US" sz="900" dirty="0"/>
           </a:p>
@@ -12345,7 +12345,7 @@
                           <a:ea typeface="Arial" pitchFamily="34" charset="-122"/>
                           <a:cs typeface="Arial" pitchFamily="34" charset="-120"/>
                         </a:rPr>
-                        <a:t>電車の音が気になり、眠れませんでした</a:t>
+                        <a:t>今回留まった部屋だけかもしれないが、ベットのスプリングが壊れているのかわからないが、寝返りする度にキーキーと音を立...</a:t>
                       </a:r>
                       <a:endParaRPr lang="en-US" sz="900" dirty="0">
                         <a:latin typeface="Arial" charset="0"/>
@@ -12413,7 +12413,7 @@
                           <a:ea typeface="Arial" pitchFamily="34" charset="-122"/>
                           <a:cs typeface="Arial" pitchFamily="34" charset="-120"/>
                         </a:rPr>
-                        <a:t>14件</a:t>
+                        <a:t>15件</a:t>
                       </a:r>
                       <a:endParaRPr lang="en-US" sz="900" dirty="0">
                         <a:latin typeface="Arial" charset="0"/>
@@ -12619,7 +12619,7 @@
                           <a:ea typeface="Arial" pitchFamily="34" charset="-122"/>
                           <a:cs typeface="Arial" pitchFamily="34" charset="-120"/>
                         </a:rPr>
-                        <a:t>設備は若干古いですが特に過不足なく不便は感じませんでした</a:t>
+                        <a:t>口コミを見ていて覚悟はしていたが、設備としては古めのホテルでした</a:t>
                       </a:r>
                       <a:endParaRPr lang="en-US" sz="900" dirty="0">
                         <a:latin typeface="Arial" charset="0"/>
@@ -12687,7 +12687,7 @@
                           <a:ea typeface="Arial" pitchFamily="34" charset="-122"/>
                           <a:cs typeface="Arial" pitchFamily="34" charset="-120"/>
                         </a:rPr>
-                        <a:t>12件</a:t>
+                        <a:t>13件</a:t>
                       </a:r>
                       <a:endParaRPr lang="en-US" sz="900" dirty="0">
                         <a:latin typeface="Arial" charset="0"/>

--- a/納品レポート/ホテル別レポート/chisan_口コミ分析レポート.pptx
+++ b/納品レポート/ホテル別レポート/chisan_口コミ分析レポート.pptx
@@ -211,7 +211,7 @@
                   <c:v>8.46</c:v>
                 </c:pt>
                 <c:pt idx="1">
-                  <c:v>7</c:v>
+                  <c:v>7.6</c:v>
                 </c:pt>
                 <c:pt idx="2">
                   <c:v>7</c:v>
@@ -566,7 +566,7 @@
               <c:numCache>
                 <c:ptCount val="3"/>
                 <c:pt idx="0">
-                  <c:v>45</c:v>
+                  <c:v>46</c:v>
                 </c:pt>
                 <c:pt idx="1">
                   <c:v>20</c:v>
@@ -809,7 +809,7 @@
                 <c:formatCode>General</c:formatCode>
                 <c:ptCount val="8"/>
                 <c:pt idx="0">
-                  <c:v>15</c:v>
+                  <c:v>16</c:v>
                 </c:pt>
                 <c:pt idx="1">
                   <c:v>2</c:v>
@@ -2781,7 +2781,7 @@
                 <a:ea typeface="Arial" pitchFamily="34" charset="-122"/>
                 <a:cs typeface="Arial" pitchFamily="34" charset="-120"/>
               </a:rPr>
-              <a:t>レビュー総数：79件（6サイト）</a:t>
+              <a:t>レビュー総数：80件（6サイト）</a:t>
             </a:r>
             <a:endParaRPr lang="en-US" sz="1000" dirty="0"/>
           </a:p>
@@ -2801,7 +2801,7 @@
                 <a:ea typeface="Arial" pitchFamily="34" charset="-122"/>
                 <a:cs typeface="Arial" pitchFamily="34" charset="-120"/>
               </a:rPr>
-              <a:t>作成日：2026年3月25日</a:t>
+              <a:t>作成日：2026年3月26日</a:t>
             </a:r>
             <a:endParaRPr lang="en-US" sz="1000" dirty="0"/>
           </a:p>
@@ -3347,7 +3347,7 @@
                           <a:ea typeface="Arial" pitchFamily="34" charset="-122"/>
                           <a:cs typeface="Arial" pitchFamily="34" charset="-120"/>
                         </a:rPr>
-                        <a:t>7.09点</a:t>
+                        <a:t>7.12点</a:t>
                       </a:r>
                       <a:endParaRPr lang="en-US" sz="1000" dirty="0">
                         <a:latin typeface="Arial" charset="0"/>
@@ -3621,7 +3621,7 @@
                           <a:ea typeface="Arial" pitchFamily="34" charset="-122"/>
                           <a:cs typeface="Arial" pitchFamily="34" charset="-120"/>
                         </a:rPr>
-                        <a:t>57.0%</a:t>
+                        <a:t>57.5%</a:t>
                       </a:r>
                       <a:endParaRPr lang="en-US" sz="1000" dirty="0">
                         <a:latin typeface="Arial" charset="0"/>
@@ -3689,7 +3689,7 @@
                           <a:ea typeface="Arial" pitchFamily="34" charset="-122"/>
                           <a:cs typeface="Arial" pitchFamily="34" charset="-120"/>
                         </a:rPr>
-                        <a:t>67%以上</a:t>
+                        <a:t>68%以上</a:t>
                       </a:r>
                       <a:endParaRPr lang="en-US" sz="1000" dirty="0">
                         <a:latin typeface="Arial" charset="0"/>
@@ -3895,7 +3895,7 @@
                           <a:ea typeface="Arial" pitchFamily="34" charset="-122"/>
                           <a:cs typeface="Arial" pitchFamily="34" charset="-120"/>
                         </a:rPr>
-                        <a:t>17.7%</a:t>
+                        <a:t>17.5%</a:t>
                       </a:r>
                       <a:endParaRPr lang="en-US" sz="1000" dirty="0">
                         <a:latin typeface="Arial" charset="0"/>
@@ -5082,7 +5082,7 @@
                 <a:ea typeface="Arial" pitchFamily="34" charset="-122"/>
                 <a:cs typeface="Arial" pitchFamily="34" charset="-120"/>
               </a:rPr>
-              <a:t>7.09</a:t>
+              <a:t>7.12</a:t>
             </a:r>
             <a:endParaRPr lang="en-US" sz="3200" dirty="0"/>
           </a:p>
@@ -5207,7 +5207,7 @@
                 <a:ea typeface="Arial" pitchFamily="34" charset="-122"/>
                 <a:cs typeface="Arial" pitchFamily="34" charset="-120"/>
               </a:rPr>
-              <a:t>57.0%</a:t>
+              <a:t>57.5%</a:t>
             </a:r>
             <a:endParaRPr lang="en-US" sz="3200" dirty="0"/>
           </a:p>
@@ -5332,7 +5332,7 @@
                 <a:ea typeface="Arial" pitchFamily="34" charset="-122"/>
                 <a:cs typeface="Arial" pitchFamily="34" charset="-120"/>
               </a:rPr>
-              <a:t>17.7%</a:t>
+              <a:t>17.5%</a:t>
             </a:r>
             <a:endParaRPr lang="en-US" sz="3200" dirty="0"/>
           </a:p>
@@ -5457,7 +5457,7 @@
                 <a:ea typeface="Arial" pitchFamily="34" charset="-122"/>
                 <a:cs typeface="Arial" pitchFamily="34" charset="-120"/>
               </a:rPr>
-              <a:t>79件</a:t>
+              <a:t>80件</a:t>
             </a:r>
             <a:endParaRPr lang="en-US" sz="3200" dirty="0"/>
           </a:p>
@@ -6266,7 +6266,7 @@
                 <a:ea typeface="Arial" pitchFamily="34" charset="-122"/>
                 <a:cs typeface="Arial" pitchFamily="34" charset="-120"/>
               </a:rPr>
-              <a:t>7.09</a:t>
+              <a:t>7.12</a:t>
             </a:r>
             <a:endParaRPr lang="en-US" sz="3200" dirty="0"/>
           </a:p>
@@ -6391,7 +6391,7 @@
                 <a:ea typeface="Arial" pitchFamily="34" charset="-122"/>
                 <a:cs typeface="Arial" pitchFamily="34" charset="-120"/>
               </a:rPr>
-              <a:t>57.0%</a:t>
+              <a:t>57.5%</a:t>
             </a:r>
             <a:endParaRPr lang="en-US" sz="3200" dirty="0"/>
           </a:p>
@@ -6516,7 +6516,7 @@
                 <a:ea typeface="Arial" pitchFamily="34" charset="-122"/>
                 <a:cs typeface="Arial" pitchFamily="34" charset="-120"/>
               </a:rPr>
-              <a:t>17.7%</a:t>
+              <a:t>17.5%</a:t>
             </a:r>
             <a:endParaRPr lang="en-US" sz="3200" dirty="0"/>
           </a:p>
@@ -6641,7 +6641,7 @@
                 <a:ea typeface="Arial" pitchFamily="34" charset="-122"/>
                 <a:cs typeface="Arial" pitchFamily="34" charset="-120"/>
               </a:rPr>
-              <a:t>79件</a:t>
+              <a:t>80件</a:t>
             </a:r>
             <a:endParaRPr lang="en-US" sz="3200" dirty="0"/>
           </a:p>
@@ -7913,7 +7913,7 @@
                           <a:ea typeface="Arial" pitchFamily="34" charset="-122"/>
                           <a:cs typeface="Arial" pitchFamily="34" charset="-120"/>
                         </a:rPr>
-                        <a:t>4</a:t>
+                        <a:t>5</a:t>
                       </a:r>
                       <a:endParaRPr lang="en-US" sz="900" dirty="0">
                         <a:latin typeface="Arial" charset="0"/>
@@ -7981,7 +7981,7 @@
                           <a:ea typeface="Arial" pitchFamily="34" charset="-122"/>
                           <a:cs typeface="Arial" pitchFamily="34" charset="-120"/>
                         </a:rPr>
-                        <a:t>7</a:t>
+                        <a:t>7.6</a:t>
                       </a:r>
                       <a:endParaRPr lang="en-US" sz="900" dirty="0">
                         <a:latin typeface="Arial" charset="0"/>
@@ -8117,7 +8117,7 @@
                           <a:ea typeface="Arial" pitchFamily="34" charset="-122"/>
                           <a:cs typeface="Arial" pitchFamily="34" charset="-120"/>
                         </a:rPr>
-                        <a:t>7</a:t>
+                        <a:t>7.6</a:t>
                       </a:r>
                       <a:endParaRPr lang="en-US" sz="900" dirty="0">
                         <a:latin typeface="Arial" charset="0"/>
@@ -9893,7 +9893,7 @@
                 <a:ea typeface="Arial" pitchFamily="34" charset="-122"/>
                 <a:cs typeface="Arial" pitchFamily="34" charset="-120"/>
               </a:rPr>
-              <a:t>45件（57.0%）</a:t>
+              <a:t>46件（57.5%）</a:t>
             </a:r>
             <a:endParaRPr lang="en-US" sz="1100" dirty="0"/>
           </a:p>
@@ -9991,7 +9991,7 @@
                 <a:ea typeface="Arial" pitchFamily="34" charset="-122"/>
                 <a:cs typeface="Arial" pitchFamily="34" charset="-120"/>
               </a:rPr>
-              <a:t>20件（25.3%）</a:t>
+              <a:t>20件（25.0%）</a:t>
             </a:r>
             <a:endParaRPr lang="en-US" sz="1100" dirty="0"/>
           </a:p>
@@ -10089,7 +10089,7 @@
                 <a:ea typeface="Arial" pitchFamily="34" charset="-122"/>
                 <a:cs typeface="Arial" pitchFamily="34" charset="-120"/>
               </a:rPr>
-              <a:t>14件（17.7%）</a:t>
+              <a:t>14件（17.5%）</a:t>
             </a:r>
             <a:endParaRPr lang="en-US" sz="1100" dirty="0"/>
           </a:p>

--- a/納品レポート/ホテル別レポート/chisan_口コミ分析レポート.pptx
+++ b/納品レポート/ホテル別レポート/chisan_口コミ分析レポート.pptx
@@ -186,16 +186,16 @@
                     <c:v>Booking.com</c:v>
                   </c:pt>
                   <c:pt idx="2">
-                    <c:v>Trip.com</c:v>
+                    <c:v>じゃらん</c:v>
                   </c:pt>
                   <c:pt idx="3">
-                    <c:v>じゃらん</c:v>
+                    <c:v>Google</c:v>
                   </c:pt>
                   <c:pt idx="4">
                     <c:v>楽天トラベル</c:v>
                   </c:pt>
                   <c:pt idx="5">
-                    <c:v>Google</c:v>
+                    <c:v>Trip.com</c:v>
                   </c:pt>
                 </c:lvl>
               </c:multiLvlStrCache>
@@ -217,13 +217,13 @@
                   <c:v>7</c:v>
                 </c:pt>
                 <c:pt idx="3">
-                  <c:v>6.89</c:v>
+                  <c:v>6.74</c:v>
                 </c:pt>
                 <c:pt idx="4">
-                  <c:v>6.81</c:v>
+                  <c:v>6.67</c:v>
                 </c:pt>
                 <c:pt idx="5">
-                  <c:v>6.74</c:v>
+                  <c:v>6</c:v>
                 </c:pt>
               </c:numCache>
             </c:numRef>
@@ -566,13 +566,13 @@
               <c:numCache>
                 <c:ptCount val="3"/>
                 <c:pt idx="0">
-                  <c:v>46</c:v>
+                  <c:v>47</c:v>
                 </c:pt>
                 <c:pt idx="1">
                   <c:v>20</c:v>
                 </c:pt>
                 <c:pt idx="2">
-                  <c:v>14</c:v>
+                  <c:v>16</c:v>
                 </c:pt>
               </c:numCache>
             </c:numRef>
@@ -815,7 +815,7 @@
                   <c:v>2</c:v>
                 </c:pt>
                 <c:pt idx="2">
-                  <c:v>28</c:v>
+                  <c:v>29</c:v>
                 </c:pt>
                 <c:pt idx="3">
                   <c:v>3</c:v>
@@ -827,10 +827,10 @@
                   <c:v>1</c:v>
                 </c:pt>
                 <c:pt idx="6">
-                  <c:v>9</c:v>
+                  <c:v>10</c:v>
                 </c:pt>
                 <c:pt idx="7">
-                  <c:v>5</c:v>
+                  <c:v>6</c:v>
                 </c:pt>
               </c:numCache>
             </c:numRef>
@@ -2781,7 +2781,7 @@
                 <a:ea typeface="Arial" pitchFamily="34" charset="-122"/>
                 <a:cs typeface="Arial" pitchFamily="34" charset="-120"/>
               </a:rPr>
-              <a:t>レビュー総数：80件（6サイト）</a:t>
+              <a:t>レビュー総数：83件（6サイト）</a:t>
             </a:r>
             <a:endParaRPr lang="en-US" sz="1000" dirty="0"/>
           </a:p>
@@ -2801,7 +2801,7 @@
                 <a:ea typeface="Arial" pitchFamily="34" charset="-122"/>
                 <a:cs typeface="Arial" pitchFamily="34" charset="-120"/>
               </a:rPr>
-              <a:t>作成日：2026年3月26日</a:t>
+              <a:t>作成日：2026年3月27日</a:t>
             </a:r>
             <a:endParaRPr lang="en-US" sz="1000" dirty="0"/>
           </a:p>
@@ -3347,7 +3347,7 @@
                           <a:ea typeface="Arial" pitchFamily="34" charset="-122"/>
                           <a:cs typeface="Arial" pitchFamily="34" charset="-120"/>
                         </a:rPr>
-                        <a:t>7.12点</a:t>
+                        <a:t>7.04点</a:t>
                       </a:r>
                       <a:endParaRPr lang="en-US" sz="1000" dirty="0">
                         <a:latin typeface="Arial" charset="0"/>
@@ -3415,7 +3415,7 @@
                           <a:ea typeface="Arial" pitchFamily="34" charset="-122"/>
                           <a:cs typeface="Arial" pitchFamily="34" charset="-120"/>
                         </a:rPr>
-                        <a:t>7.6点以上</a:t>
+                        <a:t>7.5点以上</a:t>
                       </a:r>
                       <a:endParaRPr lang="en-US" sz="1000" dirty="0">
                         <a:latin typeface="Arial" charset="0"/>
@@ -3621,7 +3621,7 @@
                           <a:ea typeface="Arial" pitchFamily="34" charset="-122"/>
                           <a:cs typeface="Arial" pitchFamily="34" charset="-120"/>
                         </a:rPr>
-                        <a:t>57.5%</a:t>
+                        <a:t>56.6%</a:t>
                       </a:r>
                       <a:endParaRPr lang="en-US" sz="1000" dirty="0">
                         <a:latin typeface="Arial" charset="0"/>
@@ -3689,7 +3689,7 @@
                           <a:ea typeface="Arial" pitchFamily="34" charset="-122"/>
                           <a:cs typeface="Arial" pitchFamily="34" charset="-120"/>
                         </a:rPr>
-                        <a:t>68%以上</a:t>
+                        <a:t>67%以上</a:t>
                       </a:r>
                       <a:endParaRPr lang="en-US" sz="1000" dirty="0">
                         <a:latin typeface="Arial" charset="0"/>
@@ -3895,7 +3895,7 @@
                           <a:ea typeface="Arial" pitchFamily="34" charset="-122"/>
                           <a:cs typeface="Arial" pitchFamily="34" charset="-120"/>
                         </a:rPr>
-                        <a:t>17.5%</a:t>
+                        <a:t>19.3%</a:t>
                       </a:r>
                       <a:endParaRPr lang="en-US" sz="1000" dirty="0">
                         <a:latin typeface="Arial" charset="0"/>
@@ -3963,7 +3963,7 @@
                           <a:ea typeface="Arial" pitchFamily="34" charset="-122"/>
                           <a:cs typeface="Arial" pitchFamily="34" charset="-120"/>
                         </a:rPr>
-                        <a:t>13%以下</a:t>
+                        <a:t>14%以下</a:t>
                       </a:r>
                       <a:endParaRPr lang="en-US" sz="1000" dirty="0">
                         <a:latin typeface="Arial" charset="0"/>
@@ -4101,6 +4101,280 @@
                           <a:ea typeface="Arial" pitchFamily="34" charset="-122"/>
                           <a:cs typeface="Arial" pitchFamily="34" charset="-120"/>
                         </a:rPr>
+                        <a:t>Trip.com平均評価</a:t>
+                      </a:r>
+                      <a:endParaRPr lang="en-US" sz="1000" dirty="0">
+                        <a:latin typeface="Arial" charset="0"/>
+                        <a:ea typeface="Arial" charset="0"/>
+                        <a:cs typeface="Arial" charset="0"/>
+                      </a:endParaRPr>
+                    </a:p>
+                  </a:txBody>
+                  <a:tcPr marL="91440" marR="91440" marT="45720" marB="45720">
+                    <a:lnL w="6350" cap="flat" cmpd="sng" algn="ctr">
+                      <a:solidFill>
+                        <a:srgbClr val="CBD5E1"/>
+                      </a:solidFill>
+                      <a:prstDash val="solid"/>
+                      <a:round/>
+                      <a:headEnd type="none" w="med" len="med"/>
+                      <a:tailEnd type="none" w="med" len="med"/>
+                    </a:lnL>
+                    <a:lnR w="6350" cap="flat" cmpd="sng" algn="ctr">
+                      <a:solidFill>
+                        <a:srgbClr val="CBD5E1"/>
+                      </a:solidFill>
+                      <a:prstDash val="solid"/>
+                      <a:round/>
+                      <a:headEnd type="none" w="med" len="med"/>
+                      <a:tailEnd type="none" w="med" len="med"/>
+                    </a:lnR>
+                    <a:lnT w="6350" cap="flat" cmpd="sng" algn="ctr">
+                      <a:solidFill>
+                        <a:srgbClr val="CBD5E1"/>
+                      </a:solidFill>
+                      <a:prstDash val="solid"/>
+                      <a:round/>
+                      <a:headEnd type="none" w="med" len="med"/>
+                      <a:tailEnd type="none" w="med" len="med"/>
+                    </a:lnT>
+                    <a:lnB w="6350" cap="flat" cmpd="sng" algn="ctr">
+                      <a:solidFill>
+                        <a:srgbClr val="CBD5E1"/>
+                      </a:solidFill>
+                      <a:prstDash val="solid"/>
+                      <a:round/>
+                      <a:headEnd type="none" w="med" len="med"/>
+                      <a:tailEnd type="none" w="med" len="med"/>
+                    </a:lnB>
+                    <a:solidFill>
+                      <a:srgbClr val="FFFFFF"/>
+                    </a:solidFill>
+                  </a:tcPr>
+                </a:tc>
+                <a:tc>
+                  <a:txBody>
+                    <a:bodyPr/>
+                    <a:lstStyle/>
+                    <a:p>
+                      <a:pPr algn="ctr" indent="0" marL="0">
+                        <a:buNone/>
+                      </a:pPr>
+                      <a:r>
+                        <a:rPr lang="en-US" sz="1000" dirty="0">
+                          <a:solidFill>
+                            <a:srgbClr val="64748B"/>
+                          </a:solidFill>
+                          <a:latin typeface="Arial" pitchFamily="34" charset="0"/>
+                          <a:ea typeface="Arial" pitchFamily="34" charset="-122"/>
+                          <a:cs typeface="Arial" pitchFamily="34" charset="-120"/>
+                        </a:rPr>
+                        <a:t>6.0点</a:t>
+                      </a:r>
+                      <a:endParaRPr lang="en-US" sz="1000" dirty="0">
+                        <a:latin typeface="Arial" charset="0"/>
+                        <a:ea typeface="Arial" charset="0"/>
+                        <a:cs typeface="Arial" charset="0"/>
+                      </a:endParaRPr>
+                    </a:p>
+                  </a:txBody>
+                  <a:tcPr marL="91440" marR="91440" marT="45720" marB="45720">
+                    <a:lnL w="6350" cap="flat" cmpd="sng" algn="ctr">
+                      <a:solidFill>
+                        <a:srgbClr val="CBD5E1"/>
+                      </a:solidFill>
+                      <a:prstDash val="solid"/>
+                      <a:round/>
+                      <a:headEnd type="none" w="med" len="med"/>
+                      <a:tailEnd type="none" w="med" len="med"/>
+                    </a:lnL>
+                    <a:lnR w="6350" cap="flat" cmpd="sng" algn="ctr">
+                      <a:solidFill>
+                        <a:srgbClr val="CBD5E1"/>
+                      </a:solidFill>
+                      <a:prstDash val="solid"/>
+                      <a:round/>
+                      <a:headEnd type="none" w="med" len="med"/>
+                      <a:tailEnd type="none" w="med" len="med"/>
+                    </a:lnR>
+                    <a:lnT w="6350" cap="flat" cmpd="sng" algn="ctr">
+                      <a:solidFill>
+                        <a:srgbClr val="CBD5E1"/>
+                      </a:solidFill>
+                      <a:prstDash val="solid"/>
+                      <a:round/>
+                      <a:headEnd type="none" w="med" len="med"/>
+                      <a:tailEnd type="none" w="med" len="med"/>
+                    </a:lnT>
+                    <a:lnB w="6350" cap="flat" cmpd="sng" algn="ctr">
+                      <a:solidFill>
+                        <a:srgbClr val="CBD5E1"/>
+                      </a:solidFill>
+                      <a:prstDash val="solid"/>
+                      <a:round/>
+                      <a:headEnd type="none" w="med" len="med"/>
+                      <a:tailEnd type="none" w="med" len="med"/>
+                    </a:lnB>
+                    <a:solidFill>
+                      <a:srgbClr val="FFFFFF"/>
+                    </a:solidFill>
+                  </a:tcPr>
+                </a:tc>
+                <a:tc>
+                  <a:txBody>
+                    <a:bodyPr/>
+                    <a:lstStyle/>
+                    <a:p>
+                      <a:pPr algn="ctr" indent="0" marL="0">
+                        <a:buNone/>
+                      </a:pPr>
+                      <a:r>
+                        <a:rPr lang="en-US" sz="1000" b="1" dirty="0">
+                          <a:solidFill>
+                            <a:srgbClr val="16A34A"/>
+                          </a:solidFill>
+                          <a:latin typeface="Arial" pitchFamily="34" charset="0"/>
+                          <a:ea typeface="Arial" pitchFamily="34" charset="-122"/>
+                          <a:cs typeface="Arial" pitchFamily="34" charset="-120"/>
+                        </a:rPr>
+                        <a:t>7.0点以上</a:t>
+                      </a:r>
+                      <a:endParaRPr lang="en-US" sz="1000" dirty="0">
+                        <a:latin typeface="Arial" charset="0"/>
+                        <a:ea typeface="Arial" charset="0"/>
+                        <a:cs typeface="Arial" charset="0"/>
+                      </a:endParaRPr>
+                    </a:p>
+                  </a:txBody>
+                  <a:tcPr marL="91440" marR="91440" marT="45720" marB="45720">
+                    <a:lnL w="6350" cap="flat" cmpd="sng" algn="ctr">
+                      <a:solidFill>
+                        <a:srgbClr val="CBD5E1"/>
+                      </a:solidFill>
+                      <a:prstDash val="solid"/>
+                      <a:round/>
+                      <a:headEnd type="none" w="med" len="med"/>
+                      <a:tailEnd type="none" w="med" len="med"/>
+                    </a:lnL>
+                    <a:lnR w="6350" cap="flat" cmpd="sng" algn="ctr">
+                      <a:solidFill>
+                        <a:srgbClr val="CBD5E1"/>
+                      </a:solidFill>
+                      <a:prstDash val="solid"/>
+                      <a:round/>
+                      <a:headEnd type="none" w="med" len="med"/>
+                      <a:tailEnd type="none" w="med" len="med"/>
+                    </a:lnR>
+                    <a:lnT w="6350" cap="flat" cmpd="sng" algn="ctr">
+                      <a:solidFill>
+                        <a:srgbClr val="CBD5E1"/>
+                      </a:solidFill>
+                      <a:prstDash val="solid"/>
+                      <a:round/>
+                      <a:headEnd type="none" w="med" len="med"/>
+                      <a:tailEnd type="none" w="med" len="med"/>
+                    </a:lnT>
+                    <a:lnB w="6350" cap="flat" cmpd="sng" algn="ctr">
+                      <a:solidFill>
+                        <a:srgbClr val="CBD5E1"/>
+                      </a:solidFill>
+                      <a:prstDash val="solid"/>
+                      <a:round/>
+                      <a:headEnd type="none" w="med" len="med"/>
+                      <a:tailEnd type="none" w="med" len="med"/>
+                    </a:lnB>
+                    <a:solidFill>
+                      <a:srgbClr val="FFFFFF"/>
+                    </a:solidFill>
+                  </a:tcPr>
+                </a:tc>
+                <a:tc>
+                  <a:txBody>
+                    <a:bodyPr/>
+                    <a:lstStyle/>
+                    <a:p>
+                      <a:pPr algn="ctr" indent="0" marL="0">
+                        <a:buNone/>
+                      </a:pPr>
+                      <a:r>
+                        <a:rPr lang="en-US" sz="1000" dirty="0">
+                          <a:solidFill>
+                            <a:srgbClr val="64748B"/>
+                          </a:solidFill>
+                          <a:latin typeface="Arial" pitchFamily="34" charset="0"/>
+                          <a:ea typeface="Arial" pitchFamily="34" charset="-122"/>
+                          <a:cs typeface="Arial" pitchFamily="34" charset="-120"/>
+                        </a:rPr>
+                        <a:t>2026年9月</a:t>
+                      </a:r>
+                      <a:endParaRPr lang="en-US" sz="1000" dirty="0">
+                        <a:latin typeface="Arial" charset="0"/>
+                        <a:ea typeface="Arial" charset="0"/>
+                        <a:cs typeface="Arial" charset="0"/>
+                      </a:endParaRPr>
+                    </a:p>
+                  </a:txBody>
+                  <a:tcPr marL="91440" marR="91440" marT="45720" marB="45720">
+                    <a:lnL w="6350" cap="flat" cmpd="sng" algn="ctr">
+                      <a:solidFill>
+                        <a:srgbClr val="CBD5E1"/>
+                      </a:solidFill>
+                      <a:prstDash val="solid"/>
+                      <a:round/>
+                      <a:headEnd type="none" w="med" len="med"/>
+                      <a:tailEnd type="none" w="med" len="med"/>
+                    </a:lnL>
+                    <a:lnR w="6350" cap="flat" cmpd="sng" algn="ctr">
+                      <a:solidFill>
+                        <a:srgbClr val="CBD5E1"/>
+                      </a:solidFill>
+                      <a:prstDash val="solid"/>
+                      <a:round/>
+                      <a:headEnd type="none" w="med" len="med"/>
+                      <a:tailEnd type="none" w="med" len="med"/>
+                    </a:lnR>
+                    <a:lnT w="6350" cap="flat" cmpd="sng" algn="ctr">
+                      <a:solidFill>
+                        <a:srgbClr val="CBD5E1"/>
+                      </a:solidFill>
+                      <a:prstDash val="solid"/>
+                      <a:round/>
+                      <a:headEnd type="none" w="med" len="med"/>
+                      <a:tailEnd type="none" w="med" len="med"/>
+                    </a:lnT>
+                    <a:lnB w="6350" cap="flat" cmpd="sng" algn="ctr">
+                      <a:solidFill>
+                        <a:srgbClr val="CBD5E1"/>
+                      </a:solidFill>
+                      <a:prstDash val="solid"/>
+                      <a:round/>
+                      <a:headEnd type="none" w="med" len="med"/>
+                      <a:tailEnd type="none" w="med" len="med"/>
+                    </a:lnB>
+                    <a:solidFill>
+                      <a:srgbClr val="FFFFFF"/>
+                    </a:solidFill>
+                  </a:tcPr>
+                </a:tc>
+              </a:tr>
+              <a:tr h="320040">
+                <a:tc>
+                  <a:txBody>
+                    <a:bodyPr/>
+                    <a:lstStyle/>
+                    <a:p>
+                      <a:pPr indent="0" marL="0">
+                        <a:buNone/>
+                      </a:pPr>
+                      <a:r>
+                        <a:rPr lang="en-US" sz="1000" b="1" dirty="0">
+                          <a:solidFill>
+                            <a:srgbClr val="334155"/>
+                          </a:solidFill>
+                          <a:latin typeface="Arial" pitchFamily="34" charset="0"/>
+                          <a:ea typeface="Arial" pitchFamily="34" charset="-122"/>
+                          <a:cs typeface="Arial" pitchFamily="34" charset="-120"/>
+                        </a:rPr>
                         <a:t>口コミ返信率</a:t>
                       </a:r>
                       <a:endParaRPr lang="en-US" sz="1000" dirty="0">
@@ -4148,7 +4422,7 @@
                       <a:tailEnd type="none" w="med" len="med"/>
                     </a:lnB>
                     <a:solidFill>
-                      <a:srgbClr val="FFFFFF"/>
+                      <a:srgbClr val="E8EFF8"/>
                     </a:solidFill>
                   </a:tcPr>
                 </a:tc>
@@ -4216,7 +4490,7 @@
                       <a:tailEnd type="none" w="med" len="med"/>
                     </a:lnB>
                     <a:solidFill>
-                      <a:srgbClr val="FFFFFF"/>
+                      <a:srgbClr val="E8EFF8"/>
                     </a:solidFill>
                   </a:tcPr>
                 </a:tc>
@@ -4284,7 +4558,7 @@
                       <a:tailEnd type="none" w="med" len="med"/>
                     </a:lnB>
                     <a:solidFill>
-                      <a:srgbClr val="FFFFFF"/>
+                      <a:srgbClr val="E8EFF8"/>
                     </a:solidFill>
                   </a:tcPr>
                 </a:tc>
@@ -4352,7 +4626,7 @@
                       <a:tailEnd type="none" w="med" len="med"/>
                     </a:lnB>
                     <a:solidFill>
-                      <a:srgbClr val="FFFFFF"/>
+                      <a:srgbClr val="E8EFF8"/>
                     </a:solidFill>
                   </a:tcPr>
                 </a:tc>
@@ -4422,7 +4696,7 @@
                       <a:tailEnd type="none" w="med" len="med"/>
                     </a:lnB>
                     <a:solidFill>
-                      <a:srgbClr val="E8EFF8"/>
+                      <a:srgbClr val="FFFFFF"/>
                     </a:solidFill>
                   </a:tcPr>
                 </a:tc>
@@ -4443,7 +4717,7 @@
                           <a:ea typeface="Arial" pitchFamily="34" charset="-122"/>
                           <a:cs typeface="Arial" pitchFamily="34" charset="-120"/>
                         </a:rPr>
-                        <a:t>約15件/期間</a:t>
+                        <a:t>約16件/期間</a:t>
                       </a:r>
                       <a:endParaRPr lang="en-US" sz="1000" dirty="0">
                         <a:latin typeface="Arial" charset="0"/>
@@ -4490,7 +4764,7 @@
                       <a:tailEnd type="none" w="med" len="med"/>
                     </a:lnB>
                     <a:solidFill>
-                      <a:srgbClr val="E8EFF8"/>
+                      <a:srgbClr val="FFFFFF"/>
                     </a:solidFill>
                   </a:tcPr>
                 </a:tc>
@@ -4511,7 +4785,7 @@
                           <a:ea typeface="Arial" pitchFamily="34" charset="-122"/>
                           <a:cs typeface="Arial" pitchFamily="34" charset="-120"/>
                         </a:rPr>
-                        <a:t>7件以下</a:t>
+                        <a:t>8件以下</a:t>
                       </a:r>
                       <a:endParaRPr lang="en-US" sz="1000" dirty="0">
                         <a:latin typeface="Arial" charset="0"/>
@@ -4558,7 +4832,7 @@
                       <a:tailEnd type="none" w="med" len="med"/>
                     </a:lnB>
                     <a:solidFill>
-                      <a:srgbClr val="E8EFF8"/>
+                      <a:srgbClr val="FFFFFF"/>
                     </a:solidFill>
                   </a:tcPr>
                 </a:tc>
@@ -4626,7 +4900,7 @@
                       <a:tailEnd type="none" w="med" len="med"/>
                     </a:lnB>
                     <a:solidFill>
-                      <a:srgbClr val="E8EFF8"/>
+                      <a:srgbClr val="FFFFFF"/>
                     </a:solidFill>
                   </a:tcPr>
                 </a:tc>
@@ -4643,7 +4917,7 @@
         </p:nvSpPr>
         <p:spPr>
           <a:xfrm>
-            <a:off x="457200" y="3108960"/>
+            <a:off x="457200" y="3429000"/>
             <a:ext cx="8229600" cy="640080"/>
           </a:xfrm>
           <a:prstGeom prst="rect">
@@ -4670,7 +4944,7 @@
         </p:nvSpPr>
         <p:spPr>
           <a:xfrm>
-            <a:off x="457200" y="3108960"/>
+            <a:off x="457200" y="3429000"/>
             <a:ext cx="54864" cy="640080"/>
           </a:xfrm>
           <a:prstGeom prst="rect">
@@ -4690,7 +4964,7 @@
         </p:nvSpPr>
         <p:spPr>
           <a:xfrm>
-            <a:off x="640080" y="3108960"/>
+            <a:off x="640080" y="3429000"/>
             <a:ext cx="7863840" cy="640080"/>
           </a:xfrm>
           <a:prstGeom prst="rect">
@@ -5082,7 +5356,7 @@
                 <a:ea typeface="Arial" pitchFamily="34" charset="-122"/>
                 <a:cs typeface="Arial" pitchFamily="34" charset="-120"/>
               </a:rPr>
-              <a:t>7.12</a:t>
+              <a:t>7.04</a:t>
             </a:r>
             <a:endParaRPr lang="en-US" sz="3200" dirty="0"/>
           </a:p>
@@ -5207,7 +5481,7 @@
                 <a:ea typeface="Arial" pitchFamily="34" charset="-122"/>
                 <a:cs typeface="Arial" pitchFamily="34" charset="-120"/>
               </a:rPr>
-              <a:t>57.5%</a:t>
+              <a:t>56.6%</a:t>
             </a:r>
             <a:endParaRPr lang="en-US" sz="3200" dirty="0"/>
           </a:p>
@@ -5332,7 +5606,7 @@
                 <a:ea typeface="Arial" pitchFamily="34" charset="-122"/>
                 <a:cs typeface="Arial" pitchFamily="34" charset="-120"/>
               </a:rPr>
-              <a:t>17.5%</a:t>
+              <a:t>19.3%</a:t>
             </a:r>
             <a:endParaRPr lang="en-US" sz="3200" dirty="0"/>
           </a:p>
@@ -5457,7 +5731,7 @@
                 <a:ea typeface="Arial" pitchFamily="34" charset="-122"/>
                 <a:cs typeface="Arial" pitchFamily="34" charset="-120"/>
               </a:rPr>
-              <a:t>80件</a:t>
+              <a:t>83件</a:t>
             </a:r>
             <a:endParaRPr lang="en-US" sz="3200" dirty="0"/>
           </a:p>
@@ -5605,7 +5879,7 @@
                 <a:ea typeface="Arial" pitchFamily="34" charset="-122"/>
                 <a:cs typeface="Arial" pitchFamily="34" charset="-120"/>
               </a:rPr>
-              <a:t>  近くにイオンのスーパーがあり便利 近くにイオンのスーパーがあり便利</a:t>
+              <a:t>  古さは感じますが、綺麗に清掃がなされ、立地的に静かで良かったです</a:t>
             </a:r>
             <a:endParaRPr lang="en-US" sz="1100" dirty="0"/>
           </a:p>
@@ -5833,7 +6107,7 @@
                 <a:ea typeface="Arial" pitchFamily="34" charset="-122"/>
                 <a:cs typeface="Arial" pitchFamily="34" charset="-120"/>
               </a:rPr>
-              <a:t>  今回留まった部屋だけかもしれないが、ベットのスプリングが壊れているのかわからないが、寝返りする度にキーキーと音を立...</a:t>
+              <a:t>  壁は凄く薄くて隣の人の物音などがハッキリと聞こえる</a:t>
             </a:r>
             <a:endParaRPr lang="en-US" sz="1100" dirty="0"/>
           </a:p>
@@ -5873,7 +6147,7 @@
                 <a:ea typeface="Arial" pitchFamily="34" charset="-122"/>
                 <a:cs typeface="Arial" pitchFamily="34" charset="-120"/>
               </a:rPr>
-              <a:t>  口コミを見ていて覚悟はしていたが、設備としては古めのホテルでした</a:t>
+              <a:t>  古さは感じますが、綺麗に清掃がなされ、立地的に静かで良かったです</a:t>
             </a:r>
             <a:endParaRPr lang="en-US" sz="1100" dirty="0"/>
           </a:p>
@@ -5913,7 +6187,7 @@
                 <a:ea typeface="Arial" pitchFamily="34" charset="-122"/>
                 <a:cs typeface="Arial" pitchFamily="34" charset="-120"/>
               </a:rPr>
-              <a:t>  トイレの換気扇が効いてない感じでした</a:t>
+              <a:t>  お風呂やトイレの老朽化も凄く… もう泊まらないと思います…</a:t>
             </a:r>
             <a:endParaRPr lang="en-US" sz="1100" dirty="0"/>
           </a:p>
@@ -6266,7 +6540,7 @@
                 <a:ea typeface="Arial" pitchFamily="34" charset="-122"/>
                 <a:cs typeface="Arial" pitchFamily="34" charset="-120"/>
               </a:rPr>
-              <a:t>7.12</a:t>
+              <a:t>7.04</a:t>
             </a:r>
             <a:endParaRPr lang="en-US" sz="3200" dirty="0"/>
           </a:p>
@@ -6391,7 +6665,7 @@
                 <a:ea typeface="Arial" pitchFamily="34" charset="-122"/>
                 <a:cs typeface="Arial" pitchFamily="34" charset="-120"/>
               </a:rPr>
-              <a:t>57.5%</a:t>
+              <a:t>56.6%</a:t>
             </a:r>
             <a:endParaRPr lang="en-US" sz="3200" dirty="0"/>
           </a:p>
@@ -6516,7 +6790,7 @@
                 <a:ea typeface="Arial" pitchFamily="34" charset="-122"/>
                 <a:cs typeface="Arial" pitchFamily="34" charset="-120"/>
               </a:rPr>
-              <a:t>17.5%</a:t>
+              <a:t>19.3%</a:t>
             </a:r>
             <a:endParaRPr lang="en-US" sz="3200" dirty="0"/>
           </a:p>
@@ -6641,7 +6915,7 @@
                 <a:ea typeface="Arial" pitchFamily="34" charset="-122"/>
                 <a:cs typeface="Arial" pitchFamily="34" charset="-120"/>
               </a:rPr>
-              <a:t>80件</a:t>
+              <a:t>83件</a:t>
             </a:r>
             <a:endParaRPr lang="en-US" sz="3200" dirty="0"/>
           </a:p>
@@ -7063,6 +7337,55 @@
                 <a:cs typeface="Arial" pitchFamily="34" charset="-120"/>
               </a:rPr>
               <a:t>Agoda(8.46)が最高スコア。</a:t>
+            </a:r>
+            <a:endParaRPr lang="en-US" sz="1100" dirty="0"/>
+          </a:p>
+          <a:p>
+            <a:pPr indent="0" marL="0">
+              <a:spcAft>
+                <a:spcPts val="200"/>
+              </a:spcAft>
+              <a:buNone/>
+            </a:pPr>
+            <a:endParaRPr lang="en-US" sz="1100" dirty="0"/>
+          </a:p>
+          <a:p>
+            <a:pPr indent="0" marL="0">
+              <a:spcAft>
+                <a:spcPts val="200"/>
+              </a:spcAft>
+              <a:buNone/>
+            </a:pPr>
+            <a:r>
+              <a:rPr lang="en-US" sz="1100" b="1" dirty="0">
+                <a:solidFill>
+                  <a:srgbClr val="DC2626"/>
+                </a:solidFill>
+                <a:latin typeface="Arial" pitchFamily="34" charset="0"/>
+                <a:ea typeface="Arial" pitchFamily="34" charset="-122"/>
+                <a:cs typeface="Arial" pitchFamily="34" charset="-120"/>
+              </a:rPr>
+              <a:t>改善対象サイト</a:t>
+            </a:r>
+            <a:endParaRPr lang="en-US" sz="1100" dirty="0"/>
+          </a:p>
+          <a:p>
+            <a:pPr indent="0" marL="0">
+              <a:spcAft>
+                <a:spcPts val="200"/>
+              </a:spcAft>
+              <a:buNone/>
+            </a:pPr>
+            <a:r>
+              <a:rPr lang="en-US" sz="900" dirty="0">
+                <a:solidFill>
+                  <a:srgbClr val="64748B"/>
+                </a:solidFill>
+                <a:latin typeface="Arial" pitchFamily="34" charset="0"/>
+                <a:ea typeface="Arial" pitchFamily="34" charset="-122"/>
+                <a:cs typeface="Arial" pitchFamily="34" charset="-120"/>
+              </a:rPr>
+              <a:t>Trip.com(6.0)が相対的に低い。口コミ返信の強化が急務</a:t>
             </a:r>
             <a:endParaRPr lang="en-US" sz="1100" dirty="0"/>
           </a:p>
@@ -8187,7 +8510,7 @@
                           <a:ea typeface="Arial" pitchFamily="34" charset="-122"/>
                           <a:cs typeface="Arial" pitchFamily="34" charset="-120"/>
                         </a:rPr>
-                        <a:t>Trip.com</a:t>
+                        <a:t>じゃらん</a:t>
                       </a:r>
                       <a:endParaRPr lang="en-US" sz="900" dirty="0">
                         <a:latin typeface="Arial" charset="0"/>
@@ -8255,7 +8578,143 @@
                           <a:ea typeface="Arial" pitchFamily="34" charset="-122"/>
                           <a:cs typeface="Arial" pitchFamily="34" charset="-120"/>
                         </a:rPr>
-                        <a:t>2</a:t>
+                        <a:t>10</a:t>
+                      </a:r>
+                      <a:endParaRPr lang="en-US" sz="900" dirty="0">
+                        <a:latin typeface="Arial" charset="0"/>
+                        <a:ea typeface="Arial" charset="0"/>
+                        <a:cs typeface="Arial" charset="0"/>
+                      </a:endParaRPr>
+                    </a:p>
+                  </a:txBody>
+                  <a:tcPr marL="91440" marR="91440" marT="45720" marB="45720">
+                    <a:lnL w="6350" cap="flat" cmpd="sng" algn="ctr">
+                      <a:solidFill>
+                        <a:srgbClr val="CBD5E1"/>
+                      </a:solidFill>
+                      <a:prstDash val="solid"/>
+                      <a:round/>
+                      <a:headEnd type="none" w="med" len="med"/>
+                      <a:tailEnd type="none" w="med" len="med"/>
+                    </a:lnL>
+                    <a:lnR w="6350" cap="flat" cmpd="sng" algn="ctr">
+                      <a:solidFill>
+                        <a:srgbClr val="CBD5E1"/>
+                      </a:solidFill>
+                      <a:prstDash val="solid"/>
+                      <a:round/>
+                      <a:headEnd type="none" w="med" len="med"/>
+                      <a:tailEnd type="none" w="med" len="med"/>
+                    </a:lnR>
+                    <a:lnT w="6350" cap="flat" cmpd="sng" algn="ctr">
+                      <a:solidFill>
+                        <a:srgbClr val="CBD5E1"/>
+                      </a:solidFill>
+                      <a:prstDash val="solid"/>
+                      <a:round/>
+                      <a:headEnd type="none" w="med" len="med"/>
+                      <a:tailEnd type="none" w="med" len="med"/>
+                    </a:lnT>
+                    <a:lnB w="6350" cap="flat" cmpd="sng" algn="ctr">
+                      <a:solidFill>
+                        <a:srgbClr val="CBD5E1"/>
+                      </a:solidFill>
+                      <a:prstDash val="solid"/>
+                      <a:round/>
+                      <a:headEnd type="none" w="med" len="med"/>
+                      <a:tailEnd type="none" w="med" len="med"/>
+                    </a:lnB>
+                    <a:solidFill>
+                      <a:srgbClr val="E8EFF8"/>
+                    </a:solidFill>
+                  </a:tcPr>
+                </a:tc>
+                <a:tc>
+                  <a:txBody>
+                    <a:bodyPr/>
+                    <a:lstStyle/>
+                    <a:p>
+                      <a:pPr algn="ctr" indent="0" marL="0">
+                        <a:buNone/>
+                      </a:pPr>
+                      <a:r>
+                        <a:rPr lang="en-US" sz="900" dirty="0">
+                          <a:solidFill>
+                            <a:srgbClr val="000000"/>
+                          </a:solidFill>
+                          <a:latin typeface="Arial" pitchFamily="34" charset="0"/>
+                          <a:ea typeface="Arial" pitchFamily="34" charset="-122"/>
+                          <a:cs typeface="Arial" pitchFamily="34" charset="-120"/>
+                        </a:rPr>
+                        <a:t>3.5</a:t>
+                      </a:r>
+                      <a:endParaRPr lang="en-US" sz="900" dirty="0">
+                        <a:latin typeface="Arial" charset="0"/>
+                        <a:ea typeface="Arial" charset="0"/>
+                        <a:cs typeface="Arial" charset="0"/>
+                      </a:endParaRPr>
+                    </a:p>
+                  </a:txBody>
+                  <a:tcPr marL="91440" marR="91440" marT="45720" marB="45720">
+                    <a:lnL w="6350" cap="flat" cmpd="sng" algn="ctr">
+                      <a:solidFill>
+                        <a:srgbClr val="CBD5E1"/>
+                      </a:solidFill>
+                      <a:prstDash val="solid"/>
+                      <a:round/>
+                      <a:headEnd type="none" w="med" len="med"/>
+                      <a:tailEnd type="none" w="med" len="med"/>
+                    </a:lnL>
+                    <a:lnR w="6350" cap="flat" cmpd="sng" algn="ctr">
+                      <a:solidFill>
+                        <a:srgbClr val="CBD5E1"/>
+                      </a:solidFill>
+                      <a:prstDash val="solid"/>
+                      <a:round/>
+                      <a:headEnd type="none" w="med" len="med"/>
+                      <a:tailEnd type="none" w="med" len="med"/>
+                    </a:lnR>
+                    <a:lnT w="6350" cap="flat" cmpd="sng" algn="ctr">
+                      <a:solidFill>
+                        <a:srgbClr val="CBD5E1"/>
+                      </a:solidFill>
+                      <a:prstDash val="solid"/>
+                      <a:round/>
+                      <a:headEnd type="none" w="med" len="med"/>
+                      <a:tailEnd type="none" w="med" len="med"/>
+                    </a:lnT>
+                    <a:lnB w="6350" cap="flat" cmpd="sng" algn="ctr">
+                      <a:solidFill>
+                        <a:srgbClr val="CBD5E1"/>
+                      </a:solidFill>
+                      <a:prstDash val="solid"/>
+                      <a:round/>
+                      <a:headEnd type="none" w="med" len="med"/>
+                      <a:tailEnd type="none" w="med" len="med"/>
+                    </a:lnB>
+                    <a:solidFill>
+                      <a:srgbClr val="E8EFF8"/>
+                    </a:solidFill>
+                  </a:tcPr>
+                </a:tc>
+                <a:tc>
+                  <a:txBody>
+                    <a:bodyPr/>
+                    <a:lstStyle/>
+                    <a:p>
+                      <a:pPr algn="ctr" indent="0" marL="0">
+                        <a:buNone/>
+                      </a:pPr>
+                      <a:r>
+                        <a:rPr lang="en-US" sz="900" dirty="0">
+                          <a:solidFill>
+                            <a:srgbClr val="000000"/>
+                          </a:solidFill>
+                          <a:latin typeface="Arial" pitchFamily="34" charset="0"/>
+                          <a:ea typeface="Arial" pitchFamily="34" charset="-122"/>
+                          <a:cs typeface="Arial" pitchFamily="34" charset="-120"/>
+                        </a:rPr>
+                        <a:t>/5 (×2)</a:t>
                       </a:r>
                       <a:endParaRPr lang="en-US" sz="900" dirty="0">
                         <a:latin typeface="Arial" charset="0"/>
@@ -8374,142 +8833,6 @@
                     </a:solidFill>
                   </a:tcPr>
                 </a:tc>
-                <a:tc>
-                  <a:txBody>
-                    <a:bodyPr/>
-                    <a:lstStyle/>
-                    <a:p>
-                      <a:pPr algn="ctr" indent="0" marL="0">
-                        <a:buNone/>
-                      </a:pPr>
-                      <a:r>
-                        <a:rPr lang="en-US" sz="900" dirty="0">
-                          <a:solidFill>
-                            <a:srgbClr val="000000"/>
-                          </a:solidFill>
-                          <a:latin typeface="Arial" pitchFamily="34" charset="0"/>
-                          <a:ea typeface="Arial" pitchFamily="34" charset="-122"/>
-                          <a:cs typeface="Arial" pitchFamily="34" charset="-120"/>
-                        </a:rPr>
-                        <a:t>/10</a:t>
-                      </a:r>
-                      <a:endParaRPr lang="en-US" sz="900" dirty="0">
-                        <a:latin typeface="Arial" charset="0"/>
-                        <a:ea typeface="Arial" charset="0"/>
-                        <a:cs typeface="Arial" charset="0"/>
-                      </a:endParaRPr>
-                    </a:p>
-                  </a:txBody>
-                  <a:tcPr marL="91440" marR="91440" marT="45720" marB="45720">
-                    <a:lnL w="6350" cap="flat" cmpd="sng" algn="ctr">
-                      <a:solidFill>
-                        <a:srgbClr val="CBD5E1"/>
-                      </a:solidFill>
-                      <a:prstDash val="solid"/>
-                      <a:round/>
-                      <a:headEnd type="none" w="med" len="med"/>
-                      <a:tailEnd type="none" w="med" len="med"/>
-                    </a:lnL>
-                    <a:lnR w="6350" cap="flat" cmpd="sng" algn="ctr">
-                      <a:solidFill>
-                        <a:srgbClr val="CBD5E1"/>
-                      </a:solidFill>
-                      <a:prstDash val="solid"/>
-                      <a:round/>
-                      <a:headEnd type="none" w="med" len="med"/>
-                      <a:tailEnd type="none" w="med" len="med"/>
-                    </a:lnR>
-                    <a:lnT w="6350" cap="flat" cmpd="sng" algn="ctr">
-                      <a:solidFill>
-                        <a:srgbClr val="CBD5E1"/>
-                      </a:solidFill>
-                      <a:prstDash val="solid"/>
-                      <a:round/>
-                      <a:headEnd type="none" w="med" len="med"/>
-                      <a:tailEnd type="none" w="med" len="med"/>
-                    </a:lnT>
-                    <a:lnB w="6350" cap="flat" cmpd="sng" algn="ctr">
-                      <a:solidFill>
-                        <a:srgbClr val="CBD5E1"/>
-                      </a:solidFill>
-                      <a:prstDash val="solid"/>
-                      <a:round/>
-                      <a:headEnd type="none" w="med" len="med"/>
-                      <a:tailEnd type="none" w="med" len="med"/>
-                    </a:lnB>
-                    <a:solidFill>
-                      <a:srgbClr val="E8EFF8"/>
-                    </a:solidFill>
-                  </a:tcPr>
-                </a:tc>
-                <a:tc>
-                  <a:txBody>
-                    <a:bodyPr/>
-                    <a:lstStyle/>
-                    <a:p>
-                      <a:pPr algn="ctr" indent="0" marL="0">
-                        <a:buNone/>
-                      </a:pPr>
-                      <a:r>
-                        <a:rPr lang="en-US" sz="900" dirty="0">
-                          <a:solidFill>
-                            <a:srgbClr val="000000"/>
-                          </a:solidFill>
-                          <a:latin typeface="Arial" pitchFamily="34" charset="0"/>
-                          <a:ea typeface="Arial" pitchFamily="34" charset="-122"/>
-                          <a:cs typeface="Arial" pitchFamily="34" charset="-120"/>
-                        </a:rPr>
-                        <a:t>7</a:t>
-                      </a:r>
-                      <a:endParaRPr lang="en-US" sz="900" dirty="0">
-                        <a:latin typeface="Arial" charset="0"/>
-                        <a:ea typeface="Arial" charset="0"/>
-                        <a:cs typeface="Arial" charset="0"/>
-                      </a:endParaRPr>
-                    </a:p>
-                  </a:txBody>
-                  <a:tcPr marL="91440" marR="91440" marT="45720" marB="45720">
-                    <a:lnL w="6350" cap="flat" cmpd="sng" algn="ctr">
-                      <a:solidFill>
-                        <a:srgbClr val="CBD5E1"/>
-                      </a:solidFill>
-                      <a:prstDash val="solid"/>
-                      <a:round/>
-                      <a:headEnd type="none" w="med" len="med"/>
-                      <a:tailEnd type="none" w="med" len="med"/>
-                    </a:lnL>
-                    <a:lnR w="6350" cap="flat" cmpd="sng" algn="ctr">
-                      <a:solidFill>
-                        <a:srgbClr val="CBD5E1"/>
-                      </a:solidFill>
-                      <a:prstDash val="solid"/>
-                      <a:round/>
-                      <a:headEnd type="none" w="med" len="med"/>
-                      <a:tailEnd type="none" w="med" len="med"/>
-                    </a:lnR>
-                    <a:lnT w="6350" cap="flat" cmpd="sng" algn="ctr">
-                      <a:solidFill>
-                        <a:srgbClr val="CBD5E1"/>
-                      </a:solidFill>
-                      <a:prstDash val="solid"/>
-                      <a:round/>
-                      <a:headEnd type="none" w="med" len="med"/>
-                      <a:tailEnd type="none" w="med" len="med"/>
-                    </a:lnT>
-                    <a:lnB w="6350" cap="flat" cmpd="sng" algn="ctr">
-                      <a:solidFill>
-                        <a:srgbClr val="CBD5E1"/>
-                      </a:solidFill>
-                      <a:prstDash val="solid"/>
-                      <a:round/>
-                      <a:headEnd type="none" w="med" len="med"/>
-                      <a:tailEnd type="none" w="med" len="med"/>
-                    </a:lnB>
-                    <a:solidFill>
-                      <a:srgbClr val="E8EFF8"/>
-                    </a:solidFill>
-                  </a:tcPr>
-                </a:tc>
               </a:tr>
               <a:tr h="201168">
                 <a:tc>
@@ -8529,7 +8852,7 @@
                           <a:ea typeface="Arial" pitchFamily="34" charset="-122"/>
                           <a:cs typeface="Arial" pitchFamily="34" charset="-120"/>
                         </a:rPr>
-                        <a:t>じゃらん</a:t>
+                        <a:t>Google</a:t>
                       </a:r>
                       <a:endParaRPr lang="en-US" sz="900" dirty="0">
                         <a:latin typeface="Arial" charset="0"/>
@@ -8597,7 +8920,7 @@
                           <a:ea typeface="Arial" pitchFamily="34" charset="-122"/>
                           <a:cs typeface="Arial" pitchFamily="34" charset="-120"/>
                         </a:rPr>
-                        <a:t>9</a:t>
+                        <a:t>19</a:t>
                       </a:r>
                       <a:endParaRPr lang="en-US" sz="900" dirty="0">
                         <a:latin typeface="Arial" charset="0"/>
@@ -8665,7 +8988,7 @@
                           <a:ea typeface="Arial" pitchFamily="34" charset="-122"/>
                           <a:cs typeface="Arial" pitchFamily="34" charset="-120"/>
                         </a:rPr>
-                        <a:t>3.44</a:t>
+                        <a:t>3.37</a:t>
                       </a:r>
                       <a:endParaRPr lang="en-US" sz="900" dirty="0">
                         <a:latin typeface="Arial" charset="0"/>
@@ -8801,7 +9124,7 @@
                           <a:ea typeface="Arial" pitchFamily="34" charset="-122"/>
                           <a:cs typeface="Arial" pitchFamily="34" charset="-120"/>
                         </a:rPr>
-                        <a:t>6.89</a:t>
+                        <a:t>6.74</a:t>
                       </a:r>
                       <a:endParaRPr lang="en-US" sz="900" dirty="0">
                         <a:latin typeface="Arial" charset="0"/>
@@ -8939,7 +9262,7 @@
                           <a:ea typeface="Arial" pitchFamily="34" charset="-122"/>
                           <a:cs typeface="Arial" pitchFamily="34" charset="-120"/>
                         </a:rPr>
-                        <a:t>32</a:t>
+                        <a:t>33</a:t>
                       </a:r>
                       <a:endParaRPr lang="en-US" sz="900" dirty="0">
                         <a:latin typeface="Arial" charset="0"/>
@@ -9007,7 +9330,7 @@
                           <a:ea typeface="Arial" pitchFamily="34" charset="-122"/>
                           <a:cs typeface="Arial" pitchFamily="34" charset="-120"/>
                         </a:rPr>
-                        <a:t>3.41</a:t>
+                        <a:t>3.33</a:t>
                       </a:r>
                       <a:endParaRPr lang="en-US" sz="900" dirty="0">
                         <a:latin typeface="Arial" charset="0"/>
@@ -9143,7 +9466,7 @@
                           <a:ea typeface="Arial" pitchFamily="34" charset="-122"/>
                           <a:cs typeface="Arial" pitchFamily="34" charset="-120"/>
                         </a:rPr>
-                        <a:t>6.81</a:t>
+                        <a:t>6.67</a:t>
                       </a:r>
                       <a:endParaRPr lang="en-US" sz="900" dirty="0">
                         <a:latin typeface="Arial" charset="0"/>
@@ -9213,7 +9536,7 @@
                           <a:ea typeface="Arial" pitchFamily="34" charset="-122"/>
                           <a:cs typeface="Arial" pitchFamily="34" charset="-120"/>
                         </a:rPr>
-                        <a:t>Google</a:t>
+                        <a:t>Trip.com</a:t>
                       </a:r>
                       <a:endParaRPr lang="en-US" sz="900" dirty="0">
                         <a:latin typeface="Arial" charset="0"/>
@@ -9281,7 +9604,7 @@
                           <a:ea typeface="Arial" pitchFamily="34" charset="-122"/>
                           <a:cs typeface="Arial" pitchFamily="34" charset="-120"/>
                         </a:rPr>
-                        <a:t>19</a:t>
+                        <a:t>3</a:t>
                       </a:r>
                       <a:endParaRPr lang="en-US" sz="900" dirty="0">
                         <a:latin typeface="Arial" charset="0"/>
@@ -9349,7 +9672,7 @@
                           <a:ea typeface="Arial" pitchFamily="34" charset="-122"/>
                           <a:cs typeface="Arial" pitchFamily="34" charset="-120"/>
                         </a:rPr>
-                        <a:t>3.37</a:t>
+                        <a:t>6</a:t>
                       </a:r>
                       <a:endParaRPr lang="en-US" sz="900" dirty="0">
                         <a:latin typeface="Arial" charset="0"/>
@@ -9417,7 +9740,7 @@
                           <a:ea typeface="Arial" pitchFamily="34" charset="-122"/>
                           <a:cs typeface="Arial" pitchFamily="34" charset="-120"/>
                         </a:rPr>
-                        <a:t>/5 (×2)</a:t>
+                        <a:t>/10</a:t>
                       </a:r>
                       <a:endParaRPr lang="en-US" sz="900" dirty="0">
                         <a:latin typeface="Arial" charset="0"/>
@@ -9485,7 +9808,7 @@
                           <a:ea typeface="Arial" pitchFamily="34" charset="-122"/>
                           <a:cs typeface="Arial" pitchFamily="34" charset="-120"/>
                         </a:rPr>
-                        <a:t>6.74</a:t>
+                        <a:t>6</a:t>
                       </a:r>
                       <a:endParaRPr lang="en-US" sz="900" dirty="0">
                         <a:latin typeface="Arial" charset="0"/>
@@ -9893,7 +10216,7 @@
                 <a:ea typeface="Arial" pitchFamily="34" charset="-122"/>
                 <a:cs typeface="Arial" pitchFamily="34" charset="-120"/>
               </a:rPr>
-              <a:t>46件（57.5%）</a:t>
+              <a:t>47件（56.6%）</a:t>
             </a:r>
             <a:endParaRPr lang="en-US" sz="1100" dirty="0"/>
           </a:p>
@@ -9991,7 +10314,7 @@
                 <a:ea typeface="Arial" pitchFamily="34" charset="-122"/>
                 <a:cs typeface="Arial" pitchFamily="34" charset="-120"/>
               </a:rPr>
-              <a:t>20件（25.0%）</a:t>
+              <a:t>20件（24.1%）</a:t>
             </a:r>
             <a:endParaRPr lang="en-US" sz="1100" dirty="0"/>
           </a:p>
@@ -10089,7 +10412,7 @@
                 <a:ea typeface="Arial" pitchFamily="34" charset="-122"/>
                 <a:cs typeface="Arial" pitchFamily="34" charset="-120"/>
               </a:rPr>
-              <a:t>14件（17.5%）</a:t>
+              <a:t>16件（19.3%）</a:t>
             </a:r>
             <a:endParaRPr lang="en-US" sz="1100" dirty="0"/>
           </a:p>
@@ -10501,7 +10824,7 @@
                 <a:ea typeface="Arial" pitchFamily="34" charset="-122"/>
                 <a:cs typeface="Arial" pitchFamily="34" charset="-120"/>
               </a:rPr>
-              <a:t>近くにイオンのスーパーがあり便利 近くにイオンのスーパーがあり便利</a:t>
+              <a:t>古さは感じますが、綺麗に清掃がなされ、立地的に静かで良かったです</a:t>
             </a:r>
             <a:endParaRPr lang="en-US" sz="900" dirty="0"/>
           </a:p>
@@ -10540,7 +10863,7 @@
                 <a:ea typeface="Arial" pitchFamily="34" charset="-122"/>
                 <a:cs typeface="Arial" pitchFamily="34" charset="-120"/>
               </a:rPr>
-              <a:t>「立地がとてもよくあらゆる方面に移動がものすごい楽」</a:t>
+              <a:t>「近くにイオンのスーパーがあり便利 近くにイオンのスーパーがあり便利」</a:t>
             </a:r>
             <a:endParaRPr lang="en-US" sz="900" dirty="0"/>
           </a:p>
@@ -11170,7 +11493,7 @@
                 <a:ea typeface="Arial" pitchFamily="34" charset="-122"/>
                 <a:cs typeface="Arial" pitchFamily="34" charset="-120"/>
               </a:rPr>
-              <a:t>ホテルや客室内は綺麗に保たれています</a:t>
+              <a:t>古さは感じますが、綺麗に清掃がなされ、立地的に静かで良かったです</a:t>
             </a:r>
             <a:endParaRPr lang="en-US" sz="900" dirty="0"/>
           </a:p>
@@ -11209,7 +11532,7 @@
                 <a:ea typeface="Arial" pitchFamily="34" charset="-122"/>
                 <a:cs typeface="Arial" pitchFamily="34" charset="-120"/>
               </a:rPr>
-              <a:t>「部屋はとてもきれいでした」</a:t>
+              <a:t>「ホテルや客室内は綺麗に保たれています」</a:t>
             </a:r>
             <a:endParaRPr lang="en-US" sz="900" dirty="0"/>
           </a:p>
@@ -12345,7 +12668,7 @@
                           <a:ea typeface="Arial" pitchFamily="34" charset="-122"/>
                           <a:cs typeface="Arial" pitchFamily="34" charset="-120"/>
                         </a:rPr>
-                        <a:t>今回留まった部屋だけかもしれないが、ベットのスプリングが壊れているのかわからないが、寝返りする度にキーキーと音を立...</a:t>
+                        <a:t>壁は凄く薄くて隣の人の物音などがハッキリと聞こえる</a:t>
                       </a:r>
                       <a:endParaRPr lang="en-US" sz="900" dirty="0">
                         <a:latin typeface="Arial" charset="0"/>
@@ -12413,7 +12736,7 @@
                           <a:ea typeface="Arial" pitchFamily="34" charset="-122"/>
                           <a:cs typeface="Arial" pitchFamily="34" charset="-120"/>
                         </a:rPr>
-                        <a:t>15件</a:t>
+                        <a:t>16件</a:t>
                       </a:r>
                       <a:endParaRPr lang="en-US" sz="900" dirty="0">
                         <a:latin typeface="Arial" charset="0"/>
@@ -12619,7 +12942,7 @@
                           <a:ea typeface="Arial" pitchFamily="34" charset="-122"/>
                           <a:cs typeface="Arial" pitchFamily="34" charset="-120"/>
                         </a:rPr>
-                        <a:t>口コミを見ていて覚悟はしていたが、設備としては古めのホテルでした</a:t>
+                        <a:t>古さは感じますが、綺麗に清掃がなされ、立地的に静かで良かったです</a:t>
                       </a:r>
                       <a:endParaRPr lang="en-US" sz="900" dirty="0">
                         <a:latin typeface="Arial" charset="0"/>
@@ -12687,7 +13010,7 @@
                           <a:ea typeface="Arial" pitchFamily="34" charset="-122"/>
                           <a:cs typeface="Arial" pitchFamily="34" charset="-120"/>
                         </a:rPr>
-                        <a:t>13件</a:t>
+                        <a:t>15件</a:t>
                       </a:r>
                       <a:endParaRPr lang="en-US" sz="900" dirty="0">
                         <a:latin typeface="Arial" charset="0"/>
@@ -12893,7 +13216,7 @@
                           <a:ea typeface="Arial" pitchFamily="34" charset="-122"/>
                           <a:cs typeface="Arial" pitchFamily="34" charset="-120"/>
                         </a:rPr>
-                        <a:t>トイレの換気扇が効いてない感じでした</a:t>
+                        <a:t>お風呂やトイレの老朽化も凄く… もう泊まらないと思います…</a:t>
                       </a:r>
                       <a:endParaRPr lang="en-US" sz="900" dirty="0">
                         <a:latin typeface="Arial" charset="0"/>
@@ -12961,7 +13284,7 @@
                           <a:ea typeface="Arial" pitchFamily="34" charset="-122"/>
                           <a:cs typeface="Arial" pitchFamily="34" charset="-120"/>
                         </a:rPr>
-                        <a:t>10件</a:t>
+                        <a:t>11件</a:t>
                       </a:r>
                       <a:endParaRPr lang="en-US" sz="900" dirty="0">
                         <a:latin typeface="Arial" charset="0"/>

--- a/納品レポート/ホテル別レポート/chisan_口コミ分析レポート.pptx
+++ b/納品レポート/ホテル別レポート/chisan_口コミ分析レポート.pptx
@@ -208,7 +208,7 @@
                 <c:formatCode>General</c:formatCode>
                 <c:ptCount val="6"/>
                 <c:pt idx="0">
-                  <c:v>8.46</c:v>
+                  <c:v>8.29</c:v>
                 </c:pt>
                 <c:pt idx="1">
                   <c:v>7.6</c:v>
@@ -569,7 +569,7 @@
                   <c:v>47</c:v>
                 </c:pt>
                 <c:pt idx="1">
-                  <c:v>20</c:v>
+                  <c:v>21</c:v>
                 </c:pt>
                 <c:pt idx="2">
                   <c:v>16</c:v>
@@ -821,7 +821,7 @@
                   <c:v>3</c:v>
                 </c:pt>
                 <c:pt idx="4">
-                  <c:v>16</c:v>
+                  <c:v>17</c:v>
                 </c:pt>
                 <c:pt idx="5">
                   <c:v>1</c:v>
@@ -2781,7 +2781,7 @@
                 <a:ea typeface="Arial" pitchFamily="34" charset="-122"/>
                 <a:cs typeface="Arial" pitchFamily="34" charset="-120"/>
               </a:rPr>
-              <a:t>レビュー総数：83件（6サイト）</a:t>
+              <a:t>レビュー総数：84件（6サイト）</a:t>
             </a:r>
             <a:endParaRPr lang="en-US" sz="1000" dirty="0"/>
           </a:p>
@@ -2801,7 +2801,7 @@
                 <a:ea typeface="Arial" pitchFamily="34" charset="-122"/>
                 <a:cs typeface="Arial" pitchFamily="34" charset="-120"/>
               </a:rPr>
-              <a:t>作成日：2026年3月27日</a:t>
+              <a:t>作成日：2026年3月28日</a:t>
             </a:r>
             <a:endParaRPr lang="en-US" sz="1000" dirty="0"/>
           </a:p>
@@ -3347,7 +3347,7 @@
                           <a:ea typeface="Arial" pitchFamily="34" charset="-122"/>
                           <a:cs typeface="Arial" pitchFamily="34" charset="-120"/>
                         </a:rPr>
-                        <a:t>7.04点</a:t>
+                        <a:t>7.02点</a:t>
                       </a:r>
                       <a:endParaRPr lang="en-US" sz="1000" dirty="0">
                         <a:latin typeface="Arial" charset="0"/>
@@ -3621,7 +3621,7 @@
                           <a:ea typeface="Arial" pitchFamily="34" charset="-122"/>
                           <a:cs typeface="Arial" pitchFamily="34" charset="-120"/>
                         </a:rPr>
-                        <a:t>56.6%</a:t>
+                        <a:t>56.0%</a:t>
                       </a:r>
                       <a:endParaRPr lang="en-US" sz="1000" dirty="0">
                         <a:latin typeface="Arial" charset="0"/>
@@ -3689,7 +3689,7 @@
                           <a:ea typeface="Arial" pitchFamily="34" charset="-122"/>
                           <a:cs typeface="Arial" pitchFamily="34" charset="-120"/>
                         </a:rPr>
-                        <a:t>67%以上</a:t>
+                        <a:t>66%以上</a:t>
                       </a:r>
                       <a:endParaRPr lang="en-US" sz="1000" dirty="0">
                         <a:latin typeface="Arial" charset="0"/>
@@ -3895,7 +3895,7 @@
                           <a:ea typeface="Arial" pitchFamily="34" charset="-122"/>
                           <a:cs typeface="Arial" pitchFamily="34" charset="-120"/>
                         </a:rPr>
-                        <a:t>19.3%</a:t>
+                        <a:t>19.0%</a:t>
                       </a:r>
                       <a:endParaRPr lang="en-US" sz="1000" dirty="0">
                         <a:latin typeface="Arial" charset="0"/>
@@ -4649,7 +4649,7 @@
                           <a:ea typeface="Arial" pitchFamily="34" charset="-122"/>
                           <a:cs typeface="Arial" pitchFamily="34" charset="-120"/>
                         </a:rPr>
-                        <a:t>防音性能クレーム</a:t>
+                        <a:t>設備の老朽化クレーム</a:t>
                       </a:r>
                       <a:endParaRPr lang="en-US" sz="1000" dirty="0">
                         <a:latin typeface="Arial" charset="0"/>
@@ -5356,7 +5356,7 @@
                 <a:ea typeface="Arial" pitchFamily="34" charset="-122"/>
                 <a:cs typeface="Arial" pitchFamily="34" charset="-120"/>
               </a:rPr>
-              <a:t>7.04</a:t>
+              <a:t>7.02</a:t>
             </a:r>
             <a:endParaRPr lang="en-US" sz="3200" dirty="0"/>
           </a:p>
@@ -5481,7 +5481,7 @@
                 <a:ea typeface="Arial" pitchFamily="34" charset="-122"/>
                 <a:cs typeface="Arial" pitchFamily="34" charset="-120"/>
               </a:rPr>
-              <a:t>56.6%</a:t>
+              <a:t>56.0%</a:t>
             </a:r>
             <a:endParaRPr lang="en-US" sz="3200" dirty="0"/>
           </a:p>
@@ -5606,7 +5606,7 @@
                 <a:ea typeface="Arial" pitchFamily="34" charset="-122"/>
                 <a:cs typeface="Arial" pitchFamily="34" charset="-120"/>
               </a:rPr>
-              <a:t>19.3%</a:t>
+              <a:t>19.0%</a:t>
             </a:r>
             <a:endParaRPr lang="en-US" sz="3200" dirty="0"/>
           </a:p>
@@ -5731,7 +5731,7 @@
                 <a:ea typeface="Arial" pitchFamily="34" charset="-122"/>
                 <a:cs typeface="Arial" pitchFamily="34" charset="-120"/>
               </a:rPr>
-              <a:t>83件</a:t>
+              <a:t>84件</a:t>
             </a:r>
             <a:endParaRPr lang="en-US" sz="3200" dirty="0"/>
           </a:p>
@@ -5879,7 +5879,7 @@
                 <a:ea typeface="Arial" pitchFamily="34" charset="-122"/>
                 <a:cs typeface="Arial" pitchFamily="34" charset="-120"/>
               </a:rPr>
-              <a:t>  古さは感じますが、綺麗に清掃がなされ、立地的に静かで良かったです</a:t>
+              <a:t>  浜松町駅から徒歩11分程度かかるところと、 年季がはいっている建物なので客室の壁に小さな穴が空いていたり浴室に落ち...</a:t>
             </a:r>
             <a:endParaRPr lang="en-US" sz="1100" dirty="0"/>
           </a:p>
@@ -5959,7 +5959,7 @@
                 <a:ea typeface="Arial" pitchFamily="34" charset="-122"/>
                 <a:cs typeface="Arial" pitchFamily="34" charset="-120"/>
               </a:rPr>
-              <a:t>  近くの中華もリーズナブルで美味しかった</a:t>
+              <a:t>  フロントの接客も概ね良好、 朝食会場のバイキングが他のビジネスホテルに比べて豪華な気がしました</a:t>
             </a:r>
             <a:endParaRPr lang="en-US" sz="1100" dirty="0"/>
           </a:p>
@@ -6071,6 +6071,46 @@
         <p:txBody>
           <a:bodyPr wrap="square" lIns="0" tIns="0" rIns="0" bIns="0" rtlCol="0" anchor="ctr"/>
           <a:lstStyle/>
+          <a:p>
+            <a:pPr indent="0" marL="0">
+              <a:spcAft>
+                <a:spcPts val="200"/>
+              </a:spcAft>
+              <a:buNone/>
+            </a:pPr>
+            <a:r>
+              <a:rPr lang="en-US" sz="1100" b="1" dirty="0">
+                <a:solidFill>
+                  <a:srgbClr val="334155"/>
+                </a:solidFill>
+                <a:latin typeface="Arial" pitchFamily="34" charset="0"/>
+                <a:ea typeface="Arial" pitchFamily="34" charset="-122"/>
+                <a:cs typeface="Arial" pitchFamily="34" charset="-120"/>
+              </a:rPr>
+              <a:t>設備の老朽化 </a:t>
+            </a:r>
+            <a:endParaRPr lang="en-US" sz="1100" dirty="0"/>
+          </a:p>
+          <a:p>
+            <a:pPr indent="0" marL="0">
+              <a:spcAft>
+                <a:spcPts val="200"/>
+              </a:spcAft>
+              <a:buNone/>
+            </a:pPr>
+            <a:r>
+              <a:rPr lang="en-US" sz="900" dirty="0">
+                <a:solidFill>
+                  <a:srgbClr val="64748B"/>
+                </a:solidFill>
+                <a:latin typeface="Arial" pitchFamily="34" charset="0"/>
+                <a:ea typeface="Arial" pitchFamily="34" charset="-122"/>
+                <a:cs typeface="Arial" pitchFamily="34" charset="-120"/>
+              </a:rPr>
+              <a:t>  浜松町駅から徒歩11分程度かかるところと、 年季がはいっている建物なので客室の壁に小さな穴が空いていたり浴室に落ち...</a:t>
+            </a:r>
+            <a:endParaRPr lang="en-US" sz="1100" dirty="0"/>
+          </a:p>
           <a:p>
             <a:pPr indent="0" marL="0">
               <a:spcAft>
@@ -6127,7 +6167,7 @@
                 <a:ea typeface="Arial" pitchFamily="34" charset="-122"/>
                 <a:cs typeface="Arial" pitchFamily="34" charset="-120"/>
               </a:rPr>
-              <a:t>設備の老朽化 </a:t>
+              <a:t>浴室・水回り </a:t>
             </a:r>
             <a:endParaRPr lang="en-US" sz="1100" dirty="0"/>
           </a:p>
@@ -6147,47 +6187,7 @@
                 <a:ea typeface="Arial" pitchFamily="34" charset="-122"/>
                 <a:cs typeface="Arial" pitchFamily="34" charset="-120"/>
               </a:rPr>
-              <a:t>  古さは感じますが、綺麗に清掃がなされ、立地的に静かで良かったです</a:t>
-            </a:r>
-            <a:endParaRPr lang="en-US" sz="1100" dirty="0"/>
-          </a:p>
-          <a:p>
-            <a:pPr indent="0" marL="0">
-              <a:spcAft>
-                <a:spcPts val="200"/>
-              </a:spcAft>
-              <a:buNone/>
-            </a:pPr>
-            <a:r>
-              <a:rPr lang="en-US" sz="1100" b="1" dirty="0">
-                <a:solidFill>
-                  <a:srgbClr val="334155"/>
-                </a:solidFill>
-                <a:latin typeface="Arial" pitchFamily="34" charset="0"/>
-                <a:ea typeface="Arial" pitchFamily="34" charset="-122"/>
-                <a:cs typeface="Arial" pitchFamily="34" charset="-120"/>
-              </a:rPr>
-              <a:t>浴室・水回り </a:t>
-            </a:r>
-            <a:endParaRPr lang="en-US" sz="1100" dirty="0"/>
-          </a:p>
-          <a:p>
-            <a:pPr indent="0" marL="0">
-              <a:spcAft>
-                <a:spcPts val="200"/>
-              </a:spcAft>
-              <a:buNone/>
-            </a:pPr>
-            <a:r>
-              <a:rPr lang="en-US" sz="900" dirty="0">
-                <a:solidFill>
-                  <a:srgbClr val="64748B"/>
-                </a:solidFill>
-                <a:latin typeface="Arial" pitchFamily="34" charset="0"/>
-                <a:ea typeface="Arial" pitchFamily="34" charset="-122"/>
-                <a:cs typeface="Arial" pitchFamily="34" charset="-120"/>
-              </a:rPr>
-              <a:t>  お風呂やトイレの老朽化も凄く… もう泊まらないと思います…</a:t>
+              <a:t>  浜松町駅から徒歩11分程度かかるところと、 年季がはいっている建物なので客室の壁に小さな穴が空いていたり浴室に落ち...</a:t>
             </a:r>
             <a:endParaRPr lang="en-US" sz="1100" dirty="0"/>
           </a:p>
@@ -6540,7 +6540,7 @@
                 <a:ea typeface="Arial" pitchFamily="34" charset="-122"/>
                 <a:cs typeface="Arial" pitchFamily="34" charset="-120"/>
               </a:rPr>
-              <a:t>7.04</a:t>
+              <a:t>7.02</a:t>
             </a:r>
             <a:endParaRPr lang="en-US" sz="3200" dirty="0"/>
           </a:p>
@@ -6665,7 +6665,7 @@
                 <a:ea typeface="Arial" pitchFamily="34" charset="-122"/>
                 <a:cs typeface="Arial" pitchFamily="34" charset="-120"/>
               </a:rPr>
-              <a:t>56.6%</a:t>
+              <a:t>56.0%</a:t>
             </a:r>
             <a:endParaRPr lang="en-US" sz="3200" dirty="0"/>
           </a:p>
@@ -6790,7 +6790,7 @@
                 <a:ea typeface="Arial" pitchFamily="34" charset="-122"/>
                 <a:cs typeface="Arial" pitchFamily="34" charset="-120"/>
               </a:rPr>
-              <a:t>19.3%</a:t>
+              <a:t>19.0%</a:t>
             </a:r>
             <a:endParaRPr lang="en-US" sz="3200" dirty="0"/>
           </a:p>
@@ -6915,7 +6915,7 @@
                 <a:ea typeface="Arial" pitchFamily="34" charset="-122"/>
                 <a:cs typeface="Arial" pitchFamily="34" charset="-120"/>
               </a:rPr>
-              <a:t>83件</a:t>
+              <a:t>84件</a:t>
             </a:r>
             <a:endParaRPr lang="en-US" sz="3200" dirty="0"/>
           </a:p>
@@ -7336,7 +7336,7 @@
                 <a:ea typeface="Arial" pitchFamily="34" charset="-122"/>
                 <a:cs typeface="Arial" pitchFamily="34" charset="-120"/>
               </a:rPr>
-              <a:t>Agoda(8.46)が最高スコア。</a:t>
+              <a:t>Agoda(8.29)が最高スコア。</a:t>
             </a:r>
             <a:endParaRPr lang="en-US" sz="1100" dirty="0"/>
           </a:p>
@@ -7894,7 +7894,7 @@
                           <a:ea typeface="Arial" pitchFamily="34" charset="-122"/>
                           <a:cs typeface="Arial" pitchFamily="34" charset="-120"/>
                         </a:rPr>
-                        <a:t>13</a:t>
+                        <a:t>14</a:t>
                       </a:r>
                       <a:endParaRPr lang="en-US" sz="900" dirty="0">
                         <a:latin typeface="Arial" charset="0"/>
@@ -7962,7 +7962,7 @@
                           <a:ea typeface="Arial" pitchFamily="34" charset="-122"/>
                           <a:cs typeface="Arial" pitchFamily="34" charset="-120"/>
                         </a:rPr>
-                        <a:t>8.46</a:t>
+                        <a:t>8.29</a:t>
                       </a:r>
                       <a:endParaRPr lang="en-US" sz="900" dirty="0">
                         <a:latin typeface="Arial" charset="0"/>
@@ -8098,7 +8098,7 @@
                           <a:ea typeface="Arial" pitchFamily="34" charset="-122"/>
                           <a:cs typeface="Arial" pitchFamily="34" charset="-120"/>
                         </a:rPr>
-                        <a:t>8.46</a:t>
+                        <a:t>8.29</a:t>
                       </a:r>
                       <a:endParaRPr lang="en-US" sz="900" dirty="0">
                         <a:latin typeface="Arial" charset="0"/>
@@ -10216,7 +10216,7 @@
                 <a:ea typeface="Arial" pitchFamily="34" charset="-122"/>
                 <a:cs typeface="Arial" pitchFamily="34" charset="-120"/>
               </a:rPr>
-              <a:t>47件（56.6%）</a:t>
+              <a:t>47件（56.0%）</a:t>
             </a:r>
             <a:endParaRPr lang="en-US" sz="1100" dirty="0"/>
           </a:p>
@@ -10314,7 +10314,7 @@
                 <a:ea typeface="Arial" pitchFamily="34" charset="-122"/>
                 <a:cs typeface="Arial" pitchFamily="34" charset="-120"/>
               </a:rPr>
-              <a:t>20件（24.1%）</a:t>
+              <a:t>21件（25.0%）</a:t>
             </a:r>
             <a:endParaRPr lang="en-US" sz="1100" dirty="0"/>
           </a:p>
@@ -10412,7 +10412,7 @@
                 <a:ea typeface="Arial" pitchFamily="34" charset="-122"/>
                 <a:cs typeface="Arial" pitchFamily="34" charset="-120"/>
               </a:rPr>
-              <a:t>16件（19.3%）</a:t>
+              <a:t>16件（19.0%）</a:t>
             </a:r>
             <a:endParaRPr lang="en-US" sz="1100" dirty="0"/>
           </a:p>
@@ -10824,7 +10824,7 @@
                 <a:ea typeface="Arial" pitchFamily="34" charset="-122"/>
                 <a:cs typeface="Arial" pitchFamily="34" charset="-120"/>
               </a:rPr>
-              <a:t>古さは感じますが、綺麗に清掃がなされ、立地的に静かで良かったです</a:t>
+              <a:t>浜松町駅から徒歩11分程度かかるところと、 年季がはいっている建物なので客室の壁に小さな穴が空いていたり浴室に落ち...</a:t>
             </a:r>
             <a:endParaRPr lang="en-US" sz="900" dirty="0"/>
           </a:p>
@@ -10863,7 +10863,7 @@
                 <a:ea typeface="Arial" pitchFamily="34" charset="-122"/>
                 <a:cs typeface="Arial" pitchFamily="34" charset="-120"/>
               </a:rPr>
-              <a:t>「近くにイオンのスーパーがあり便利 近くにイオンのスーパーがあり便利」</a:t>
+              <a:t>「古さは感じますが、綺麗に清掃がなされ、立地的に静かで良かったです」</a:t>
             </a:r>
             <a:endParaRPr lang="en-US" sz="900" dirty="0"/>
           </a:p>
@@ -11270,7 +11270,7 @@
                 <a:ea typeface="Arial" pitchFamily="34" charset="-122"/>
                 <a:cs typeface="Arial" pitchFamily="34" charset="-120"/>
               </a:rPr>
-              <a:t>近くの中華もリーズナブルで美味しかった</a:t>
+              <a:t>フロントの接客も概ね良好、 朝食会場のバイキングが他のビジネスホテルに比べて豪華な気がしました</a:t>
             </a:r>
             <a:endParaRPr lang="en-US" sz="900" dirty="0"/>
           </a:p>
@@ -11309,7 +11309,7 @@
                 <a:ea typeface="Arial" pitchFamily="34" charset="-122"/>
                 <a:cs typeface="Arial" pitchFamily="34" charset="-120"/>
               </a:rPr>
-              <a:t>「朝ごはんは美味しかったですが、メインのタンパク質が少ない気がした」</a:t>
+              <a:t>「近くの中華もリーズナブルで美味しかった」</a:t>
             </a:r>
             <a:endParaRPr lang="en-US" sz="900" dirty="0"/>
           </a:p>
@@ -11716,7 +11716,7 @@
                 <a:ea typeface="Arial" pitchFamily="34" charset="-122"/>
                 <a:cs typeface="Arial" pitchFamily="34" charset="-120"/>
               </a:rPr>
-              <a:t>父（78）私（48）息子（21）の3世代でおそらく最初で最後の家族旅行をしました｡ 駅からも近く立地よく、サービス...</a:t>
+              <a:t>フロントの接客も概ね良好、 朝食会場のバイキングが他のビジネスホテルに比べて豪華な気がしました</a:t>
             </a:r>
             <a:endParaRPr lang="en-US" sz="900" dirty="0"/>
           </a:p>
@@ -11755,7 +11755,7 @@
                 <a:ea typeface="Arial" pitchFamily="34" charset="-122"/>
                 <a:cs typeface="Arial" pitchFamily="34" charset="-120"/>
               </a:rPr>
-              <a:t>「スタッフの対応が良かったです」</a:t>
+              <a:t>「父（78）私（48）息子（21）の3世代でおそらく最初で最後の家族旅行をしました｡ 駅からも近く立地よく、サービス...」</a:t>
             </a:r>
             <a:endParaRPr lang="en-US" sz="900" dirty="0"/>
           </a:p>
@@ -11900,7 +11900,7 @@
                 <a:ea typeface="Arial" pitchFamily="34" charset="-122"/>
                 <a:cs typeface="Arial" pitchFamily="34" charset="-120"/>
               </a:rPr>
-              <a:t>コンビニ・周辺施設</a:t>
+              <a:t>コストパフォーマンス</a:t>
             </a:r>
             <a:endParaRPr lang="en-US" sz="1300" dirty="0"/>
           </a:p>
@@ -11939,7 +11939,7 @@
                 <a:ea typeface="Arial" pitchFamily="34" charset="-122"/>
                 <a:cs typeface="Arial" pitchFamily="34" charset="-120"/>
               </a:rPr>
-              <a:t>近くにイオンのスーパーがあり便利 近くにイオンのスーパーがあり便利</a:t>
+              <a:t>浜松町駅から徒歩11分程度かかるところと、 年季がはいっている建物なので客室の壁に小さな穴が空いていたり浴室に落ち...</a:t>
             </a:r>
             <a:endParaRPr lang="en-US" sz="900" dirty="0"/>
           </a:p>
@@ -11978,7 +11978,7 @@
                 <a:ea typeface="Arial" pitchFamily="34" charset="-122"/>
                 <a:cs typeface="Arial" pitchFamily="34" charset="-120"/>
               </a:rPr>
-              <a:t>「近くの三田駅まで徒歩8分程度、近くのコンビニも深夜帯は閉まっているので徒歩7分程度かかるので、ホテルにチェックイン...」</a:t>
+              <a:t>「近くの中華もリーズナブルで美味しかった」</a:t>
             </a:r>
             <a:endParaRPr lang="en-US" sz="900" dirty="0"/>
           </a:p>
@@ -12600,7 +12600,7 @@
                           <a:ea typeface="Arial" pitchFamily="34" charset="-122"/>
                           <a:cs typeface="Arial" pitchFamily="34" charset="-120"/>
                         </a:rPr>
-                        <a:t>防音性能</a:t>
+                        <a:t>設備の老朽化</a:t>
                       </a:r>
                       <a:endParaRPr lang="en-US" sz="900" dirty="0">
                         <a:latin typeface="Arial" charset="0"/>
@@ -12668,7 +12668,7 @@
                           <a:ea typeface="Arial" pitchFamily="34" charset="-122"/>
                           <a:cs typeface="Arial" pitchFamily="34" charset="-120"/>
                         </a:rPr>
-                        <a:t>壁は凄く薄くて隣の人の物音などがハッキリと聞こえる</a:t>
+                        <a:t>浜松町駅から徒歩11分程度かかるところと、 年季がはいっている建物なので客室の壁に小さな穴が空いていたり浴室に落ち...</a:t>
                       </a:r>
                       <a:endParaRPr lang="en-US" sz="900" dirty="0">
                         <a:latin typeface="Arial" charset="0"/>
@@ -12874,7 +12874,7 @@
                           <a:ea typeface="Arial" pitchFamily="34" charset="-122"/>
                           <a:cs typeface="Arial" pitchFamily="34" charset="-120"/>
                         </a:rPr>
-                        <a:t>設備の老朽化</a:t>
+                        <a:t>防音性能</a:t>
                       </a:r>
                       <a:endParaRPr lang="en-US" sz="900" dirty="0">
                         <a:latin typeface="Arial" charset="0"/>
@@ -12942,7 +12942,7 @@
                           <a:ea typeface="Arial" pitchFamily="34" charset="-122"/>
                           <a:cs typeface="Arial" pitchFamily="34" charset="-120"/>
                         </a:rPr>
-                        <a:t>古さは感じますが、綺麗に清掃がなされ、立地的に静かで良かったです</a:t>
+                        <a:t>壁は凄く薄くて隣の人の物音などがハッキリと聞こえる</a:t>
                       </a:r>
                       <a:endParaRPr lang="en-US" sz="900" dirty="0">
                         <a:latin typeface="Arial" charset="0"/>
@@ -13010,7 +13010,7 @@
                           <a:ea typeface="Arial" pitchFamily="34" charset="-122"/>
                           <a:cs typeface="Arial" pitchFamily="34" charset="-120"/>
                         </a:rPr>
-                        <a:t>15件</a:t>
+                        <a:t>16件</a:t>
                       </a:r>
                       <a:endParaRPr lang="en-US" sz="900" dirty="0">
                         <a:latin typeface="Arial" charset="0"/>
@@ -13216,7 +13216,7 @@
                           <a:ea typeface="Arial" pitchFamily="34" charset="-122"/>
                           <a:cs typeface="Arial" pitchFamily="34" charset="-120"/>
                         </a:rPr>
-                        <a:t>お風呂やトイレの老朽化も凄く… もう泊まらないと思います…</a:t>
+                        <a:t>浜松町駅から徒歩11分程度かかるところと、 年季がはいっている建物なので客室の壁に小さな穴が空いていたり浴室に落ち...</a:t>
                       </a:r>
                       <a:endParaRPr lang="en-US" sz="900" dirty="0">
                         <a:latin typeface="Arial" charset="0"/>
@@ -13284,7 +13284,7 @@
                           <a:ea typeface="Arial" pitchFamily="34" charset="-122"/>
                           <a:cs typeface="Arial" pitchFamily="34" charset="-120"/>
                         </a:rPr>
-                        <a:t>11件</a:t>
+                        <a:t>12件</a:t>
                       </a:r>
                       <a:endParaRPr lang="en-US" sz="900" dirty="0">
                         <a:latin typeface="Arial" charset="0"/>
@@ -14792,7 +14792,7 @@
                           <a:ea typeface="Arial" pitchFamily="34" charset="-122"/>
                           <a:cs typeface="Arial" pitchFamily="34" charset="-120"/>
                         </a:rPr>
-                        <a:t>朝食の改善要望</a:t>
+                        <a:t>清掃不備</a:t>
                       </a:r>
                       <a:endParaRPr lang="en-US" sz="900" dirty="0">
                         <a:latin typeface="Arial" charset="0"/>
@@ -14860,7 +14860,7 @@
                           <a:ea typeface="Arial" pitchFamily="34" charset="-122"/>
                           <a:cs typeface="Arial" pitchFamily="34" charset="-120"/>
                         </a:rPr>
-                        <a:t>ごはんは品数はほどほどであるが、どれも美味しい お風呂は大浴場はなく、汚くはないが綺麗でもない ごはんは品数はほど...</a:t>
+                        <a:t>浜松町駅から徒歩11分程度かかるところと、 年季がはいっている建物なので客室の壁に小さな穴が空いていたり浴室に落ち...</a:t>
                       </a:r>
                       <a:endParaRPr lang="en-US" sz="900" dirty="0">
                         <a:latin typeface="Arial" charset="0"/>
@@ -14928,7 +14928,7 @@
                           <a:ea typeface="Arial" pitchFamily="34" charset="-122"/>
                           <a:cs typeface="Arial" pitchFamily="34" charset="-120"/>
                         </a:rPr>
-                        <a:t>2件</a:t>
+                        <a:t>3件</a:t>
                       </a:r>
                       <a:endParaRPr lang="en-US" sz="900" dirty="0">
                         <a:latin typeface="Arial" charset="0"/>

--- a/納品レポート/ホテル別レポート/chisan_口コミ分析レポート.pptx
+++ b/納品レポート/ホテル別レポート/chisan_口コミ分析レポート.pptx
@@ -190,7 +190,7 @@
             <c:bubble3D val="0"/>
             <c:spPr>
               <a:solidFill>
-                <a:srgbClr val="16A34A"/>
+                <a:srgbClr val="EA580C"/>
               </a:solidFill>
               <a:effectLst/>
             </c:spPr>
@@ -228,11 +228,22 @@
               <a:effectLst/>
             </c:spPr>
           </c:dPt>
+          <c:dPt>
+            <c:idx val="5"/>
+            <c:invertIfNegative val="0"/>
+            <c:bubble3D val="0"/>
+            <c:spPr>
+              <a:solidFill>
+                <a:srgbClr val="DC2626"/>
+              </a:solidFill>
+              <a:effectLst/>
+            </c:spPr>
+          </c:dPt>
           <c:cat>
             <c:multiLvlStrRef>
-              <c:f>Sheet1!$A$2:$A$6</c:f>
+              <c:f>Sheet1!$A$2:$A$7</c:f>
               <c:multiLvlStrCache>
-                <c:ptCount val="5"/>
+                <c:ptCount val="6"/>
                 <c:lvl>
                   <c:pt idx="0">
                     <c:v>Agoda</c:v>
@@ -241,13 +252,16 @@
                     <c:v>Booking.com</c:v>
                   </c:pt>
                   <c:pt idx="2">
+                    <c:v>じゃらん</c:v>
+                  </c:pt>
+                  <c:pt idx="3">
+                    <c:v>Google</c:v>
+                  </c:pt>
+                  <c:pt idx="4">
                     <c:v>楽天トラベル</c:v>
                   </c:pt>
-                  <c:pt idx="3">
-                    <c:v>じゃらん</c:v>
-                  </c:pt>
-                  <c:pt idx="4">
-                    <c:v>Google</c:v>
+                  <c:pt idx="5">
+                    <c:v>Trip.com</c:v>
                   </c:pt>
                 </c:lvl>
               </c:multiLvlStrCache>
@@ -255,24 +269,27 @@
           </c:cat>
           <c:val>
             <c:numRef>
-              <c:f>Sheet1!$B$2:$B$6</c:f>
+              <c:f>Sheet1!$B$2:$B$7</c:f>
               <c:numCache>
                 <c:formatCode>General</c:formatCode>
-                <c:ptCount val="5"/>
+                <c:ptCount val="6"/>
                 <c:pt idx="0">
-                  <c:v>8.67</c:v>
+                  <c:v>8.29</c:v>
                 </c:pt>
                 <c:pt idx="1">
-                  <c:v>8</c:v>
+                  <c:v>7.6</c:v>
                 </c:pt>
                 <c:pt idx="2">
-                  <c:v>7.06</c:v>
+                  <c:v>7</c:v>
                 </c:pt>
                 <c:pt idx="3">
-                  <c:v>6.86</c:v>
+                  <c:v>6.95</c:v>
                 </c:pt>
                 <c:pt idx="4">
-                  <c:v>6.17</c:v>
+                  <c:v>6.65</c:v>
+                </c:pt>
+                <c:pt idx="5">
+                  <c:v>6</c:v>
                 </c:pt>
               </c:numCache>
             </c:numRef>
@@ -532,13 +549,35 @@
             <c:bubble3D val="0"/>
             <c:spPr>
               <a:solidFill>
+                <a:srgbClr val="EA580C"/>
+              </a:solidFill>
+              <a:effectLst/>
+            </c:spPr>
+          </c:dPt>
+          <c:dPt>
+            <c:idx val="5"/>
+            <c:invertIfNegative val="0"/>
+            <c:bubble3D val="0"/>
+            <c:spPr>
+              <a:solidFill>
+                <a:srgbClr val="EA580C"/>
+              </a:solidFill>
+              <a:effectLst/>
+            </c:spPr>
+          </c:dPt>
+          <c:dPt>
+            <c:idx val="6"/>
+            <c:invertIfNegative val="0"/>
+            <c:bubble3D val="0"/>
+            <c:spPr>
+              <a:solidFill>
                 <a:srgbClr val="DC2626"/>
               </a:solidFill>
               <a:effectLst/>
             </c:spPr>
           </c:dPt>
           <c:dPt>
-            <c:idx val="5"/>
+            <c:idx val="7"/>
             <c:invertIfNegative val="0"/>
             <c:bubble3D val="0"/>
             <c:spPr>
@@ -550,9 +589,9 @@
           </c:dPt>
           <c:cat>
             <c:multiLvlStrRef>
-              <c:f>Sheet1!$A$2:$A$7</c:f>
+              <c:f>Sheet1!$A$2:$A$9</c:f>
               <c:multiLvlStrCache>
-                <c:ptCount val="6"/>
+                <c:ptCount val="8"/>
                 <c:lvl>
                   <c:pt idx="0">
                     <c:v>10点</c:v>
@@ -564,12 +603,18 @@
                     <c:v>8点</c:v>
                   </c:pt>
                   <c:pt idx="3">
+                    <c:v>7点</c:v>
+                  </c:pt>
+                  <c:pt idx="4">
                     <c:v>6点</c:v>
                   </c:pt>
-                  <c:pt idx="4">
+                  <c:pt idx="5">
+                    <c:v>5点</c:v>
+                  </c:pt>
+                  <c:pt idx="6">
                     <c:v>4点</c:v>
                   </c:pt>
-                  <c:pt idx="5">
+                  <c:pt idx="7">
                     <c:v>2点</c:v>
                   </c:pt>
                 </c:lvl>
@@ -578,27 +623,33 @@
           </c:cat>
           <c:val>
             <c:numRef>
-              <c:f>Sheet1!$B$2:$B$7</c:f>
+              <c:f>Sheet1!$B$2:$B$9</c:f>
               <c:numCache>
                 <c:formatCode>General</c:formatCode>
-                <c:ptCount val="6"/>
+                <c:ptCount val="8"/>
                 <c:pt idx="0">
-                  <c:v>11</c:v>
+                  <c:v>17</c:v>
                 </c:pt>
                 <c:pt idx="1">
                   <c:v>2</c:v>
                 </c:pt>
                 <c:pt idx="2">
-                  <c:v>15</c:v>
+                  <c:v>30</c:v>
                 </c:pt>
                 <c:pt idx="3">
-                  <c:v>9</c:v>
+                  <c:v>3</c:v>
                 </c:pt>
                 <c:pt idx="4">
-                  <c:v>7</c:v>
+                  <c:v>19</c:v>
                 </c:pt>
                 <c:pt idx="5">
-                  <c:v>3</c:v>
+                  <c:v>1</c:v>
+                </c:pt>
+                <c:pt idx="6">
+                  <c:v>10</c:v>
+                </c:pt>
+                <c:pt idx="7">
+                  <c:v>6</c:v>
                 </c:pt>
               </c:numCache>
             </c:numRef>
@@ -2486,7 +2537,7 @@
                 <a:ea typeface="Arial" pitchFamily="34" charset="-122"/>
                 <a:cs typeface="Arial" pitchFamily="34" charset="-120"/>
               </a:rPr>
-              <a:t>レビュー総数：47件</a:t>
+              <a:t>レビュー総数：88件</a:t>
             </a:r>
             <a:endParaRPr lang="en-US" sz="1000" dirty="0"/>
           </a:p>
@@ -2766,7 +2817,7 @@
                 <a:ea typeface="Arial" pitchFamily="34" charset="-122"/>
                 <a:cs typeface="Arial" pitchFamily="34" charset="-120"/>
               </a:rPr>
-              <a:t>チサンホテル浜松町は全体平均7.15点（10pt換算）、高評価率59.6%を達成しています。本レポートで示した改善施策を段階的に実施することで、さらなる顧客満足度向上が期待できます。</a:t>
+              <a:t>チサンホテル浜松町は全体平均7.05点（10pt換算）、高評価率55.7%を達成しています。本レポートで示した改善施策を段階的に実施することで、さらなる顧客満足度向上が期待できます。</a:t>
             </a:r>
             <a:endParaRPr lang="en-US" sz="1200" dirty="0"/>
           </a:p>
@@ -3203,7 +3254,7 @@
                 <a:ea typeface="Arial" pitchFamily="34" charset="-122"/>
                 <a:cs typeface="Arial" pitchFamily="34" charset="-120"/>
               </a:rPr>
-              <a:t>7.15</a:t>
+              <a:t>7.05</a:t>
             </a:r>
             <a:endParaRPr lang="en-US" sz="2800" dirty="0"/>
           </a:p>
@@ -3321,7 +3372,7 @@
                 <a:ea typeface="Arial" pitchFamily="34" charset="-122"/>
                 <a:cs typeface="Arial" pitchFamily="34" charset="-120"/>
               </a:rPr>
-              <a:t>59.6%</a:t>
+              <a:t>55.7%</a:t>
             </a:r>
             <a:endParaRPr lang="en-US" sz="2800" dirty="0"/>
           </a:p>
@@ -3439,7 +3490,7 @@
                 <a:ea typeface="Arial" pitchFamily="34" charset="-122"/>
                 <a:cs typeface="Arial" pitchFamily="34" charset="-120"/>
               </a:rPr>
-              <a:t>21.3%</a:t>
+              <a:t>18.2%</a:t>
             </a:r>
             <a:endParaRPr lang="en-US" sz="2800" dirty="0"/>
           </a:p>
@@ -3557,7 +3608,7 @@
                 <a:ea typeface="Arial" pitchFamily="34" charset="-122"/>
                 <a:cs typeface="Arial" pitchFamily="34" charset="-120"/>
               </a:rPr>
-              <a:t>47件</a:t>
+              <a:t>88件</a:t>
             </a:r>
             <a:endParaRPr lang="en-US" sz="2800" dirty="0"/>
           </a:p>
@@ -4296,7 +4347,7 @@
                           <a:ea typeface="Arial" pitchFamily="34" charset="-122"/>
                           <a:cs typeface="Arial" pitchFamily="34" charset="-120"/>
                         </a:rPr>
-                        <a:t>9</a:t>
+                        <a:t>14</a:t>
                       </a:r>
                       <a:endParaRPr lang="en-US" sz="800" dirty="0">
                         <a:latin typeface="Arial" charset="0"/>
@@ -4364,7 +4415,7 @@
                           <a:ea typeface="Arial" pitchFamily="34" charset="-122"/>
                           <a:cs typeface="Arial" pitchFamily="34" charset="-120"/>
                         </a:rPr>
-                        <a:t>8.67/10</a:t>
+                        <a:t>8.29/10</a:t>
                       </a:r>
                       <a:endParaRPr lang="en-US" sz="800" dirty="0">
                         <a:latin typeface="Arial" charset="0"/>
@@ -4432,7 +4483,7 @@
                           <a:ea typeface="Arial" pitchFamily="34" charset="-122"/>
                           <a:cs typeface="Arial" pitchFamily="34" charset="-120"/>
                         </a:rPr>
-                        <a:t>8.67</a:t>
+                        <a:t>8.29</a:t>
                       </a:r>
                       <a:endParaRPr lang="en-US" sz="800" dirty="0">
                         <a:latin typeface="Arial" charset="0"/>
@@ -4638,7 +4689,7 @@
                           <a:ea typeface="Arial" pitchFamily="34" charset="-122"/>
                           <a:cs typeface="Arial" pitchFamily="34" charset="-120"/>
                         </a:rPr>
-                        <a:t>2</a:t>
+                        <a:t>5</a:t>
                       </a:r>
                       <a:endParaRPr lang="en-US" sz="800" dirty="0">
                         <a:latin typeface="Arial" charset="0"/>
@@ -4706,7 +4757,7 @@
                           <a:ea typeface="Arial" pitchFamily="34" charset="-122"/>
                           <a:cs typeface="Arial" pitchFamily="34" charset="-120"/>
                         </a:rPr>
-                        <a:t>8.00/10</a:t>
+                        <a:t>7.60/10</a:t>
                       </a:r>
                       <a:endParaRPr lang="en-US" sz="800" dirty="0">
                         <a:latin typeface="Arial" charset="0"/>
@@ -4774,7 +4825,7 @@
                           <a:ea typeface="Arial" pitchFamily="34" charset="-122"/>
                           <a:cs typeface="Arial" pitchFamily="34" charset="-120"/>
                         </a:rPr>
-                        <a:t>8.00</a:t>
+                        <a:t>7.60</a:t>
                       </a:r>
                       <a:endParaRPr lang="en-US" sz="800" dirty="0">
                         <a:latin typeface="Arial" charset="0"/>
@@ -4842,7 +4893,691 @@
                           <a:ea typeface="Arial" pitchFamily="34" charset="-122"/>
                           <a:cs typeface="Arial" pitchFamily="34" charset="-120"/>
                         </a:rPr>
-                        <a:t>良好</a:t>
+                        <a:t>概ね良好</a:t>
+                      </a:r>
+                      <a:endParaRPr lang="en-US" sz="800" dirty="0">
+                        <a:latin typeface="Arial" charset="0"/>
+                        <a:ea typeface="Arial" charset="0"/>
+                        <a:cs typeface="Arial" charset="0"/>
+                      </a:endParaRPr>
+                    </a:p>
+                  </a:txBody>
+                  <a:tcPr marL="91440" marR="91440" marT="45720" marB="45720">
+                    <a:lnL w="6350" cap="flat" cmpd="sng" algn="ctr">
+                      <a:solidFill>
+                        <a:srgbClr val="CCCCCC"/>
+                      </a:solidFill>
+                      <a:prstDash val="solid"/>
+                      <a:round/>
+                      <a:headEnd type="none" w="med" len="med"/>
+                      <a:tailEnd type="none" w="med" len="med"/>
+                    </a:lnL>
+                    <a:lnR w="6350" cap="flat" cmpd="sng" algn="ctr">
+                      <a:solidFill>
+                        <a:srgbClr val="CCCCCC"/>
+                      </a:solidFill>
+                      <a:prstDash val="solid"/>
+                      <a:round/>
+                      <a:headEnd type="none" w="med" len="med"/>
+                      <a:tailEnd type="none" w="med" len="med"/>
+                    </a:lnR>
+                    <a:lnT w="6350" cap="flat" cmpd="sng" algn="ctr">
+                      <a:solidFill>
+                        <a:srgbClr val="CCCCCC"/>
+                      </a:solidFill>
+                      <a:prstDash val="solid"/>
+                      <a:round/>
+                      <a:headEnd type="none" w="med" len="med"/>
+                      <a:tailEnd type="none" w="med" len="med"/>
+                    </a:lnT>
+                    <a:lnB w="6350" cap="flat" cmpd="sng" algn="ctr">
+                      <a:solidFill>
+                        <a:srgbClr val="CCCCCC"/>
+                      </a:solidFill>
+                      <a:prstDash val="solid"/>
+                      <a:round/>
+                      <a:headEnd type="none" w="med" len="med"/>
+                      <a:tailEnd type="none" w="med" len="med"/>
+                    </a:lnB>
+                    <a:solidFill>
+                      <a:srgbClr val="FFFFFF"/>
+                    </a:solidFill>
+                  </a:tcPr>
+                </a:tc>
+              </a:tr>
+              <a:tr h="0">
+                <a:tc>
+                  <a:txBody>
+                    <a:bodyPr/>
+                    <a:lstStyle/>
+                    <a:p>
+                      <a:pPr algn="ctr" indent="0" marL="0">
+                        <a:buNone/>
+                      </a:pPr>
+                      <a:r>
+                        <a:rPr lang="en-US" sz="800" dirty="0">
+                          <a:solidFill>
+                            <a:srgbClr val="000000"/>
+                          </a:solidFill>
+                          <a:latin typeface="Arial" pitchFamily="34" charset="0"/>
+                          <a:ea typeface="Arial" pitchFamily="34" charset="-122"/>
+                          <a:cs typeface="Arial" pitchFamily="34" charset="-120"/>
+                        </a:rPr>
+                        <a:t>じゃらん</a:t>
+                      </a:r>
+                      <a:endParaRPr lang="en-US" sz="800" dirty="0">
+                        <a:latin typeface="Arial" charset="0"/>
+                        <a:ea typeface="Arial" charset="0"/>
+                        <a:cs typeface="Arial" charset="0"/>
+                      </a:endParaRPr>
+                    </a:p>
+                  </a:txBody>
+                  <a:tcPr marL="91440" marR="91440" marT="45720" marB="45720">
+                    <a:lnL w="6350" cap="flat" cmpd="sng" algn="ctr">
+                      <a:solidFill>
+                        <a:srgbClr val="CCCCCC"/>
+                      </a:solidFill>
+                      <a:prstDash val="solid"/>
+                      <a:round/>
+                      <a:headEnd type="none" w="med" len="med"/>
+                      <a:tailEnd type="none" w="med" len="med"/>
+                    </a:lnL>
+                    <a:lnR w="6350" cap="flat" cmpd="sng" algn="ctr">
+                      <a:solidFill>
+                        <a:srgbClr val="CCCCCC"/>
+                      </a:solidFill>
+                      <a:prstDash val="solid"/>
+                      <a:round/>
+                      <a:headEnd type="none" w="med" len="med"/>
+                      <a:tailEnd type="none" w="med" len="med"/>
+                    </a:lnR>
+                    <a:lnT w="6350" cap="flat" cmpd="sng" algn="ctr">
+                      <a:solidFill>
+                        <a:srgbClr val="CCCCCC"/>
+                      </a:solidFill>
+                      <a:prstDash val="solid"/>
+                      <a:round/>
+                      <a:headEnd type="none" w="med" len="med"/>
+                      <a:tailEnd type="none" w="med" len="med"/>
+                    </a:lnT>
+                    <a:lnB w="6350" cap="flat" cmpd="sng" algn="ctr">
+                      <a:solidFill>
+                        <a:srgbClr val="CCCCCC"/>
+                      </a:solidFill>
+                      <a:prstDash val="solid"/>
+                      <a:round/>
+                      <a:headEnd type="none" w="med" len="med"/>
+                      <a:tailEnd type="none" w="med" len="med"/>
+                    </a:lnB>
+                    <a:solidFill>
+                      <a:srgbClr val="FFFFFF"/>
+                    </a:solidFill>
+                  </a:tcPr>
+                </a:tc>
+                <a:tc>
+                  <a:txBody>
+                    <a:bodyPr/>
+                    <a:lstStyle/>
+                    <a:p>
+                      <a:pPr algn="ctr" indent="0" marL="0">
+                        <a:buNone/>
+                      </a:pPr>
+                      <a:r>
+                        <a:rPr lang="en-US" sz="800" dirty="0">
+                          <a:solidFill>
+                            <a:srgbClr val="000000"/>
+                          </a:solidFill>
+                          <a:latin typeface="Arial" pitchFamily="34" charset="0"/>
+                          <a:ea typeface="Arial" pitchFamily="34" charset="-122"/>
+                          <a:cs typeface="Arial" pitchFamily="34" charset="-120"/>
+                        </a:rPr>
+                        <a:t>10</a:t>
+                      </a:r>
+                      <a:endParaRPr lang="en-US" sz="800" dirty="0">
+                        <a:latin typeface="Arial" charset="0"/>
+                        <a:ea typeface="Arial" charset="0"/>
+                        <a:cs typeface="Arial" charset="0"/>
+                      </a:endParaRPr>
+                    </a:p>
+                  </a:txBody>
+                  <a:tcPr marL="91440" marR="91440" marT="45720" marB="45720">
+                    <a:lnL w="6350" cap="flat" cmpd="sng" algn="ctr">
+                      <a:solidFill>
+                        <a:srgbClr val="CCCCCC"/>
+                      </a:solidFill>
+                      <a:prstDash val="solid"/>
+                      <a:round/>
+                      <a:headEnd type="none" w="med" len="med"/>
+                      <a:tailEnd type="none" w="med" len="med"/>
+                    </a:lnL>
+                    <a:lnR w="6350" cap="flat" cmpd="sng" algn="ctr">
+                      <a:solidFill>
+                        <a:srgbClr val="CCCCCC"/>
+                      </a:solidFill>
+                      <a:prstDash val="solid"/>
+                      <a:round/>
+                      <a:headEnd type="none" w="med" len="med"/>
+                      <a:tailEnd type="none" w="med" len="med"/>
+                    </a:lnR>
+                    <a:lnT w="6350" cap="flat" cmpd="sng" algn="ctr">
+                      <a:solidFill>
+                        <a:srgbClr val="CCCCCC"/>
+                      </a:solidFill>
+                      <a:prstDash val="solid"/>
+                      <a:round/>
+                      <a:headEnd type="none" w="med" len="med"/>
+                      <a:tailEnd type="none" w="med" len="med"/>
+                    </a:lnT>
+                    <a:lnB w="6350" cap="flat" cmpd="sng" algn="ctr">
+                      <a:solidFill>
+                        <a:srgbClr val="CCCCCC"/>
+                      </a:solidFill>
+                      <a:prstDash val="solid"/>
+                      <a:round/>
+                      <a:headEnd type="none" w="med" len="med"/>
+                      <a:tailEnd type="none" w="med" len="med"/>
+                    </a:lnB>
+                    <a:solidFill>
+                      <a:srgbClr val="FFFFFF"/>
+                    </a:solidFill>
+                  </a:tcPr>
+                </a:tc>
+                <a:tc>
+                  <a:txBody>
+                    <a:bodyPr/>
+                    <a:lstStyle/>
+                    <a:p>
+                      <a:pPr algn="ctr" indent="0" marL="0">
+                        <a:buNone/>
+                      </a:pPr>
+                      <a:r>
+                        <a:rPr lang="en-US" sz="800" dirty="0">
+                          <a:solidFill>
+                            <a:srgbClr val="000000"/>
+                          </a:solidFill>
+                          <a:latin typeface="Arial" pitchFamily="34" charset="0"/>
+                          <a:ea typeface="Arial" pitchFamily="34" charset="-122"/>
+                          <a:cs typeface="Arial" pitchFamily="34" charset="-120"/>
+                        </a:rPr>
+                        <a:t>3.50/5</a:t>
+                      </a:r>
+                      <a:endParaRPr lang="en-US" sz="800" dirty="0">
+                        <a:latin typeface="Arial" charset="0"/>
+                        <a:ea typeface="Arial" charset="0"/>
+                        <a:cs typeface="Arial" charset="0"/>
+                      </a:endParaRPr>
+                    </a:p>
+                  </a:txBody>
+                  <a:tcPr marL="91440" marR="91440" marT="45720" marB="45720">
+                    <a:lnL w="6350" cap="flat" cmpd="sng" algn="ctr">
+                      <a:solidFill>
+                        <a:srgbClr val="CCCCCC"/>
+                      </a:solidFill>
+                      <a:prstDash val="solid"/>
+                      <a:round/>
+                      <a:headEnd type="none" w="med" len="med"/>
+                      <a:tailEnd type="none" w="med" len="med"/>
+                    </a:lnL>
+                    <a:lnR w="6350" cap="flat" cmpd="sng" algn="ctr">
+                      <a:solidFill>
+                        <a:srgbClr val="CCCCCC"/>
+                      </a:solidFill>
+                      <a:prstDash val="solid"/>
+                      <a:round/>
+                      <a:headEnd type="none" w="med" len="med"/>
+                      <a:tailEnd type="none" w="med" len="med"/>
+                    </a:lnR>
+                    <a:lnT w="6350" cap="flat" cmpd="sng" algn="ctr">
+                      <a:solidFill>
+                        <a:srgbClr val="CCCCCC"/>
+                      </a:solidFill>
+                      <a:prstDash val="solid"/>
+                      <a:round/>
+                      <a:headEnd type="none" w="med" len="med"/>
+                      <a:tailEnd type="none" w="med" len="med"/>
+                    </a:lnT>
+                    <a:lnB w="6350" cap="flat" cmpd="sng" algn="ctr">
+                      <a:solidFill>
+                        <a:srgbClr val="CCCCCC"/>
+                      </a:solidFill>
+                      <a:prstDash val="solid"/>
+                      <a:round/>
+                      <a:headEnd type="none" w="med" len="med"/>
+                      <a:tailEnd type="none" w="med" len="med"/>
+                    </a:lnB>
+                    <a:solidFill>
+                      <a:srgbClr val="FFFFFF"/>
+                    </a:solidFill>
+                  </a:tcPr>
+                </a:tc>
+                <a:tc>
+                  <a:txBody>
+                    <a:bodyPr/>
+                    <a:lstStyle/>
+                    <a:p>
+                      <a:pPr algn="ctr" indent="0" marL="0">
+                        <a:buNone/>
+                      </a:pPr>
+                      <a:r>
+                        <a:rPr lang="en-US" sz="800" dirty="0">
+                          <a:solidFill>
+                            <a:srgbClr val="000000"/>
+                          </a:solidFill>
+                          <a:latin typeface="Arial" pitchFamily="34" charset="0"/>
+                          <a:ea typeface="Arial" pitchFamily="34" charset="-122"/>
+                          <a:cs typeface="Arial" pitchFamily="34" charset="-120"/>
+                        </a:rPr>
+                        <a:t>7.00</a:t>
+                      </a:r>
+                      <a:endParaRPr lang="en-US" sz="800" dirty="0">
+                        <a:latin typeface="Arial" charset="0"/>
+                        <a:ea typeface="Arial" charset="0"/>
+                        <a:cs typeface="Arial" charset="0"/>
+                      </a:endParaRPr>
+                    </a:p>
+                  </a:txBody>
+                  <a:tcPr marL="91440" marR="91440" marT="45720" marB="45720">
+                    <a:lnL w="6350" cap="flat" cmpd="sng" algn="ctr">
+                      <a:solidFill>
+                        <a:srgbClr val="CCCCCC"/>
+                      </a:solidFill>
+                      <a:prstDash val="solid"/>
+                      <a:round/>
+                      <a:headEnd type="none" w="med" len="med"/>
+                      <a:tailEnd type="none" w="med" len="med"/>
+                    </a:lnL>
+                    <a:lnR w="6350" cap="flat" cmpd="sng" algn="ctr">
+                      <a:solidFill>
+                        <a:srgbClr val="CCCCCC"/>
+                      </a:solidFill>
+                      <a:prstDash val="solid"/>
+                      <a:round/>
+                      <a:headEnd type="none" w="med" len="med"/>
+                      <a:tailEnd type="none" w="med" len="med"/>
+                    </a:lnR>
+                    <a:lnT w="6350" cap="flat" cmpd="sng" algn="ctr">
+                      <a:solidFill>
+                        <a:srgbClr val="CCCCCC"/>
+                      </a:solidFill>
+                      <a:prstDash val="solid"/>
+                      <a:round/>
+                      <a:headEnd type="none" w="med" len="med"/>
+                      <a:tailEnd type="none" w="med" len="med"/>
+                    </a:lnT>
+                    <a:lnB w="6350" cap="flat" cmpd="sng" algn="ctr">
+                      <a:solidFill>
+                        <a:srgbClr val="CCCCCC"/>
+                      </a:solidFill>
+                      <a:prstDash val="solid"/>
+                      <a:round/>
+                      <a:headEnd type="none" w="med" len="med"/>
+                      <a:tailEnd type="none" w="med" len="med"/>
+                    </a:lnB>
+                    <a:solidFill>
+                      <a:srgbClr val="FFFFFF"/>
+                    </a:solidFill>
+                  </a:tcPr>
+                </a:tc>
+                <a:tc>
+                  <a:txBody>
+                    <a:bodyPr/>
+                    <a:lstStyle/>
+                    <a:p>
+                      <a:pPr algn="ctr" indent="0" marL="0">
+                        <a:buNone/>
+                      </a:pPr>
+                      <a:r>
+                        <a:rPr lang="en-US" sz="800" dirty="0">
+                          <a:solidFill>
+                            <a:srgbClr val="000000"/>
+                          </a:solidFill>
+                          <a:latin typeface="Arial" pitchFamily="34" charset="0"/>
+                          <a:ea typeface="Arial" pitchFamily="34" charset="-122"/>
+                          <a:cs typeface="Arial" pitchFamily="34" charset="-120"/>
+                        </a:rPr>
+                        <a:t>概ね良好</a:t>
+                      </a:r>
+                      <a:endParaRPr lang="en-US" sz="800" dirty="0">
+                        <a:latin typeface="Arial" charset="0"/>
+                        <a:ea typeface="Arial" charset="0"/>
+                        <a:cs typeface="Arial" charset="0"/>
+                      </a:endParaRPr>
+                    </a:p>
+                  </a:txBody>
+                  <a:tcPr marL="91440" marR="91440" marT="45720" marB="45720">
+                    <a:lnL w="6350" cap="flat" cmpd="sng" algn="ctr">
+                      <a:solidFill>
+                        <a:srgbClr val="CCCCCC"/>
+                      </a:solidFill>
+                      <a:prstDash val="solid"/>
+                      <a:round/>
+                      <a:headEnd type="none" w="med" len="med"/>
+                      <a:tailEnd type="none" w="med" len="med"/>
+                    </a:lnL>
+                    <a:lnR w="6350" cap="flat" cmpd="sng" algn="ctr">
+                      <a:solidFill>
+                        <a:srgbClr val="CCCCCC"/>
+                      </a:solidFill>
+                      <a:prstDash val="solid"/>
+                      <a:round/>
+                      <a:headEnd type="none" w="med" len="med"/>
+                      <a:tailEnd type="none" w="med" len="med"/>
+                    </a:lnR>
+                    <a:lnT w="6350" cap="flat" cmpd="sng" algn="ctr">
+                      <a:solidFill>
+                        <a:srgbClr val="CCCCCC"/>
+                      </a:solidFill>
+                      <a:prstDash val="solid"/>
+                      <a:round/>
+                      <a:headEnd type="none" w="med" len="med"/>
+                      <a:tailEnd type="none" w="med" len="med"/>
+                    </a:lnT>
+                    <a:lnB w="6350" cap="flat" cmpd="sng" algn="ctr">
+                      <a:solidFill>
+                        <a:srgbClr val="CCCCCC"/>
+                      </a:solidFill>
+                      <a:prstDash val="solid"/>
+                      <a:round/>
+                      <a:headEnd type="none" w="med" len="med"/>
+                      <a:tailEnd type="none" w="med" len="med"/>
+                    </a:lnB>
+                    <a:solidFill>
+                      <a:srgbClr val="FFFFFF"/>
+                    </a:solidFill>
+                  </a:tcPr>
+                </a:tc>
+              </a:tr>
+              <a:tr h="0">
+                <a:tc>
+                  <a:txBody>
+                    <a:bodyPr/>
+                    <a:lstStyle/>
+                    <a:p>
+                      <a:pPr algn="ctr" indent="0" marL="0">
+                        <a:buNone/>
+                      </a:pPr>
+                      <a:r>
+                        <a:rPr lang="en-US" sz="800" dirty="0">
+                          <a:solidFill>
+                            <a:srgbClr val="000000"/>
+                          </a:solidFill>
+                          <a:latin typeface="Arial" pitchFamily="34" charset="0"/>
+                          <a:ea typeface="Arial" pitchFamily="34" charset="-122"/>
+                          <a:cs typeface="Arial" pitchFamily="34" charset="-120"/>
+                        </a:rPr>
+                        <a:t>Google</a:t>
+                      </a:r>
+                      <a:endParaRPr lang="en-US" sz="800" dirty="0">
+                        <a:latin typeface="Arial" charset="0"/>
+                        <a:ea typeface="Arial" charset="0"/>
+                        <a:cs typeface="Arial" charset="0"/>
+                      </a:endParaRPr>
+                    </a:p>
+                  </a:txBody>
+                  <a:tcPr marL="91440" marR="91440" marT="45720" marB="45720">
+                    <a:lnL w="6350" cap="flat" cmpd="sng" algn="ctr">
+                      <a:solidFill>
+                        <a:srgbClr val="CCCCCC"/>
+                      </a:solidFill>
+                      <a:prstDash val="solid"/>
+                      <a:round/>
+                      <a:headEnd type="none" w="med" len="med"/>
+                      <a:tailEnd type="none" w="med" len="med"/>
+                    </a:lnL>
+                    <a:lnR w="6350" cap="flat" cmpd="sng" algn="ctr">
+                      <a:solidFill>
+                        <a:srgbClr val="CCCCCC"/>
+                      </a:solidFill>
+                      <a:prstDash val="solid"/>
+                      <a:round/>
+                      <a:headEnd type="none" w="med" len="med"/>
+                      <a:tailEnd type="none" w="med" len="med"/>
+                    </a:lnR>
+                    <a:lnT w="6350" cap="flat" cmpd="sng" algn="ctr">
+                      <a:solidFill>
+                        <a:srgbClr val="CCCCCC"/>
+                      </a:solidFill>
+                      <a:prstDash val="solid"/>
+                      <a:round/>
+                      <a:headEnd type="none" w="med" len="med"/>
+                      <a:tailEnd type="none" w="med" len="med"/>
+                    </a:lnT>
+                    <a:lnB w="6350" cap="flat" cmpd="sng" algn="ctr">
+                      <a:solidFill>
+                        <a:srgbClr val="CCCCCC"/>
+                      </a:solidFill>
+                      <a:prstDash val="solid"/>
+                      <a:round/>
+                      <a:headEnd type="none" w="med" len="med"/>
+                      <a:tailEnd type="none" w="med" len="med"/>
+                    </a:lnB>
+                    <a:solidFill>
+                      <a:srgbClr val="FFFFFF"/>
+                    </a:solidFill>
+                  </a:tcPr>
+                </a:tc>
+                <a:tc>
+                  <a:txBody>
+                    <a:bodyPr/>
+                    <a:lstStyle/>
+                    <a:p>
+                      <a:pPr algn="ctr" indent="0" marL="0">
+                        <a:buNone/>
+                      </a:pPr>
+                      <a:r>
+                        <a:rPr lang="en-US" sz="800" dirty="0">
+                          <a:solidFill>
+                            <a:srgbClr val="000000"/>
+                          </a:solidFill>
+                          <a:latin typeface="Arial" pitchFamily="34" charset="0"/>
+                          <a:ea typeface="Arial" pitchFamily="34" charset="-122"/>
+                          <a:cs typeface="Arial" pitchFamily="34" charset="-120"/>
+                        </a:rPr>
+                        <a:t>21</a:t>
+                      </a:r>
+                      <a:endParaRPr lang="en-US" sz="800" dirty="0">
+                        <a:latin typeface="Arial" charset="0"/>
+                        <a:ea typeface="Arial" charset="0"/>
+                        <a:cs typeface="Arial" charset="0"/>
+                      </a:endParaRPr>
+                    </a:p>
+                  </a:txBody>
+                  <a:tcPr marL="91440" marR="91440" marT="45720" marB="45720">
+                    <a:lnL w="6350" cap="flat" cmpd="sng" algn="ctr">
+                      <a:solidFill>
+                        <a:srgbClr val="CCCCCC"/>
+                      </a:solidFill>
+                      <a:prstDash val="solid"/>
+                      <a:round/>
+                      <a:headEnd type="none" w="med" len="med"/>
+                      <a:tailEnd type="none" w="med" len="med"/>
+                    </a:lnL>
+                    <a:lnR w="6350" cap="flat" cmpd="sng" algn="ctr">
+                      <a:solidFill>
+                        <a:srgbClr val="CCCCCC"/>
+                      </a:solidFill>
+                      <a:prstDash val="solid"/>
+                      <a:round/>
+                      <a:headEnd type="none" w="med" len="med"/>
+                      <a:tailEnd type="none" w="med" len="med"/>
+                    </a:lnR>
+                    <a:lnT w="6350" cap="flat" cmpd="sng" algn="ctr">
+                      <a:solidFill>
+                        <a:srgbClr val="CCCCCC"/>
+                      </a:solidFill>
+                      <a:prstDash val="solid"/>
+                      <a:round/>
+                      <a:headEnd type="none" w="med" len="med"/>
+                      <a:tailEnd type="none" w="med" len="med"/>
+                    </a:lnT>
+                    <a:lnB w="6350" cap="flat" cmpd="sng" algn="ctr">
+                      <a:solidFill>
+                        <a:srgbClr val="CCCCCC"/>
+                      </a:solidFill>
+                      <a:prstDash val="solid"/>
+                      <a:round/>
+                      <a:headEnd type="none" w="med" len="med"/>
+                      <a:tailEnd type="none" w="med" len="med"/>
+                    </a:lnB>
+                    <a:solidFill>
+                      <a:srgbClr val="FFFFFF"/>
+                    </a:solidFill>
+                  </a:tcPr>
+                </a:tc>
+                <a:tc>
+                  <a:txBody>
+                    <a:bodyPr/>
+                    <a:lstStyle/>
+                    <a:p>
+                      <a:pPr algn="ctr" indent="0" marL="0">
+                        <a:buNone/>
+                      </a:pPr>
+                      <a:r>
+                        <a:rPr lang="en-US" sz="800" dirty="0">
+                          <a:solidFill>
+                            <a:srgbClr val="000000"/>
+                          </a:solidFill>
+                          <a:latin typeface="Arial" pitchFamily="34" charset="0"/>
+                          <a:ea typeface="Arial" pitchFamily="34" charset="-122"/>
+                          <a:cs typeface="Arial" pitchFamily="34" charset="-120"/>
+                        </a:rPr>
+                        <a:t>3.48/5</a:t>
+                      </a:r>
+                      <a:endParaRPr lang="en-US" sz="800" dirty="0">
+                        <a:latin typeface="Arial" charset="0"/>
+                        <a:ea typeface="Arial" charset="0"/>
+                        <a:cs typeface="Arial" charset="0"/>
+                      </a:endParaRPr>
+                    </a:p>
+                  </a:txBody>
+                  <a:tcPr marL="91440" marR="91440" marT="45720" marB="45720">
+                    <a:lnL w="6350" cap="flat" cmpd="sng" algn="ctr">
+                      <a:solidFill>
+                        <a:srgbClr val="CCCCCC"/>
+                      </a:solidFill>
+                      <a:prstDash val="solid"/>
+                      <a:round/>
+                      <a:headEnd type="none" w="med" len="med"/>
+                      <a:tailEnd type="none" w="med" len="med"/>
+                    </a:lnL>
+                    <a:lnR w="6350" cap="flat" cmpd="sng" algn="ctr">
+                      <a:solidFill>
+                        <a:srgbClr val="CCCCCC"/>
+                      </a:solidFill>
+                      <a:prstDash val="solid"/>
+                      <a:round/>
+                      <a:headEnd type="none" w="med" len="med"/>
+                      <a:tailEnd type="none" w="med" len="med"/>
+                    </a:lnR>
+                    <a:lnT w="6350" cap="flat" cmpd="sng" algn="ctr">
+                      <a:solidFill>
+                        <a:srgbClr val="CCCCCC"/>
+                      </a:solidFill>
+                      <a:prstDash val="solid"/>
+                      <a:round/>
+                      <a:headEnd type="none" w="med" len="med"/>
+                      <a:tailEnd type="none" w="med" len="med"/>
+                    </a:lnT>
+                    <a:lnB w="6350" cap="flat" cmpd="sng" algn="ctr">
+                      <a:solidFill>
+                        <a:srgbClr val="CCCCCC"/>
+                      </a:solidFill>
+                      <a:prstDash val="solid"/>
+                      <a:round/>
+                      <a:headEnd type="none" w="med" len="med"/>
+                      <a:tailEnd type="none" w="med" len="med"/>
+                    </a:lnB>
+                    <a:solidFill>
+                      <a:srgbClr val="FFFFFF"/>
+                    </a:solidFill>
+                  </a:tcPr>
+                </a:tc>
+                <a:tc>
+                  <a:txBody>
+                    <a:bodyPr/>
+                    <a:lstStyle/>
+                    <a:p>
+                      <a:pPr algn="ctr" indent="0" marL="0">
+                        <a:buNone/>
+                      </a:pPr>
+                      <a:r>
+                        <a:rPr lang="en-US" sz="800" dirty="0">
+                          <a:solidFill>
+                            <a:srgbClr val="000000"/>
+                          </a:solidFill>
+                          <a:latin typeface="Arial" pitchFamily="34" charset="0"/>
+                          <a:ea typeface="Arial" pitchFamily="34" charset="-122"/>
+                          <a:cs typeface="Arial" pitchFamily="34" charset="-120"/>
+                        </a:rPr>
+                        <a:t>6.95</a:t>
+                      </a:r>
+                      <a:endParaRPr lang="en-US" sz="800" dirty="0">
+                        <a:latin typeface="Arial" charset="0"/>
+                        <a:ea typeface="Arial" charset="0"/>
+                        <a:cs typeface="Arial" charset="0"/>
+                      </a:endParaRPr>
+                    </a:p>
+                  </a:txBody>
+                  <a:tcPr marL="91440" marR="91440" marT="45720" marB="45720">
+                    <a:lnL w="6350" cap="flat" cmpd="sng" algn="ctr">
+                      <a:solidFill>
+                        <a:srgbClr val="CCCCCC"/>
+                      </a:solidFill>
+                      <a:prstDash val="solid"/>
+                      <a:round/>
+                      <a:headEnd type="none" w="med" len="med"/>
+                      <a:tailEnd type="none" w="med" len="med"/>
+                    </a:lnL>
+                    <a:lnR w="6350" cap="flat" cmpd="sng" algn="ctr">
+                      <a:solidFill>
+                        <a:srgbClr val="CCCCCC"/>
+                      </a:solidFill>
+                      <a:prstDash val="solid"/>
+                      <a:round/>
+                      <a:headEnd type="none" w="med" len="med"/>
+                      <a:tailEnd type="none" w="med" len="med"/>
+                    </a:lnR>
+                    <a:lnT w="6350" cap="flat" cmpd="sng" algn="ctr">
+                      <a:solidFill>
+                        <a:srgbClr val="CCCCCC"/>
+                      </a:solidFill>
+                      <a:prstDash val="solid"/>
+                      <a:round/>
+                      <a:headEnd type="none" w="med" len="med"/>
+                      <a:tailEnd type="none" w="med" len="med"/>
+                    </a:lnT>
+                    <a:lnB w="6350" cap="flat" cmpd="sng" algn="ctr">
+                      <a:solidFill>
+                        <a:srgbClr val="CCCCCC"/>
+                      </a:solidFill>
+                      <a:prstDash val="solid"/>
+                      <a:round/>
+                      <a:headEnd type="none" w="med" len="med"/>
+                      <a:tailEnd type="none" w="med" len="med"/>
+                    </a:lnB>
+                    <a:solidFill>
+                      <a:srgbClr val="FFFFFF"/>
+                    </a:solidFill>
+                  </a:tcPr>
+                </a:tc>
+                <a:tc>
+                  <a:txBody>
+                    <a:bodyPr/>
+                    <a:lstStyle/>
+                    <a:p>
+                      <a:pPr algn="ctr" indent="0" marL="0">
+                        <a:buNone/>
+                      </a:pPr>
+                      <a:r>
+                        <a:rPr lang="en-US" sz="800" dirty="0">
+                          <a:solidFill>
+                            <a:srgbClr val="000000"/>
+                          </a:solidFill>
+                          <a:latin typeface="Arial" pitchFamily="34" charset="0"/>
+                          <a:ea typeface="Arial" pitchFamily="34" charset="-122"/>
+                          <a:cs typeface="Arial" pitchFamily="34" charset="-120"/>
+                        </a:rPr>
+                        <a:t>要改善</a:t>
                       </a:r>
                       <a:endParaRPr lang="en-US" sz="800" dirty="0">
                         <a:latin typeface="Arial" charset="0"/>
@@ -4980,7 +5715,7 @@
                           <a:ea typeface="Arial" pitchFamily="34" charset="-122"/>
                           <a:cs typeface="Arial" pitchFamily="34" charset="-120"/>
                         </a:rPr>
-                        <a:t>17</a:t>
+                        <a:t>34</a:t>
                       </a:r>
                       <a:endParaRPr lang="en-US" sz="800" dirty="0">
                         <a:latin typeface="Arial" charset="0"/>
@@ -5048,7 +5783,7 @@
                           <a:ea typeface="Arial" pitchFamily="34" charset="-122"/>
                           <a:cs typeface="Arial" pitchFamily="34" charset="-120"/>
                         </a:rPr>
-                        <a:t>3.53/5</a:t>
+                        <a:t>3.32/5</a:t>
                       </a:r>
                       <a:endParaRPr lang="en-US" sz="800" dirty="0">
                         <a:latin typeface="Arial" charset="0"/>
@@ -5116,349 +5851,7 @@
                           <a:ea typeface="Arial" pitchFamily="34" charset="-122"/>
                           <a:cs typeface="Arial" pitchFamily="34" charset="-120"/>
                         </a:rPr>
-                        <a:t>7.06</a:t>
-                      </a:r>
-                      <a:endParaRPr lang="en-US" sz="800" dirty="0">
-                        <a:latin typeface="Arial" charset="0"/>
-                        <a:ea typeface="Arial" charset="0"/>
-                        <a:cs typeface="Arial" charset="0"/>
-                      </a:endParaRPr>
-                    </a:p>
-                  </a:txBody>
-                  <a:tcPr marL="91440" marR="91440" marT="45720" marB="45720">
-                    <a:lnL w="6350" cap="flat" cmpd="sng" algn="ctr">
-                      <a:solidFill>
-                        <a:srgbClr val="CCCCCC"/>
-                      </a:solidFill>
-                      <a:prstDash val="solid"/>
-                      <a:round/>
-                      <a:headEnd type="none" w="med" len="med"/>
-                      <a:tailEnd type="none" w="med" len="med"/>
-                    </a:lnL>
-                    <a:lnR w="6350" cap="flat" cmpd="sng" algn="ctr">
-                      <a:solidFill>
-                        <a:srgbClr val="CCCCCC"/>
-                      </a:solidFill>
-                      <a:prstDash val="solid"/>
-                      <a:round/>
-                      <a:headEnd type="none" w="med" len="med"/>
-                      <a:tailEnd type="none" w="med" len="med"/>
-                    </a:lnR>
-                    <a:lnT w="6350" cap="flat" cmpd="sng" algn="ctr">
-                      <a:solidFill>
-                        <a:srgbClr val="CCCCCC"/>
-                      </a:solidFill>
-                      <a:prstDash val="solid"/>
-                      <a:round/>
-                      <a:headEnd type="none" w="med" len="med"/>
-                      <a:tailEnd type="none" w="med" len="med"/>
-                    </a:lnT>
-                    <a:lnB w="6350" cap="flat" cmpd="sng" algn="ctr">
-                      <a:solidFill>
-                        <a:srgbClr val="CCCCCC"/>
-                      </a:solidFill>
-                      <a:prstDash val="solid"/>
-                      <a:round/>
-                      <a:headEnd type="none" w="med" len="med"/>
-                      <a:tailEnd type="none" w="med" len="med"/>
-                    </a:lnB>
-                    <a:solidFill>
-                      <a:srgbClr val="FFFFFF"/>
-                    </a:solidFill>
-                  </a:tcPr>
-                </a:tc>
-                <a:tc>
-                  <a:txBody>
-                    <a:bodyPr/>
-                    <a:lstStyle/>
-                    <a:p>
-                      <a:pPr algn="ctr" indent="0" marL="0">
-                        <a:buNone/>
-                      </a:pPr>
-                      <a:r>
-                        <a:rPr lang="en-US" sz="800" dirty="0">
-                          <a:solidFill>
-                            <a:srgbClr val="000000"/>
-                          </a:solidFill>
-                          <a:latin typeface="Arial" pitchFamily="34" charset="0"/>
-                          <a:ea typeface="Arial" pitchFamily="34" charset="-122"/>
-                          <a:cs typeface="Arial" pitchFamily="34" charset="-120"/>
-                        </a:rPr>
-                        <a:t>概ね良好</a:t>
-                      </a:r>
-                      <a:endParaRPr lang="en-US" sz="800" dirty="0">
-                        <a:latin typeface="Arial" charset="0"/>
-                        <a:ea typeface="Arial" charset="0"/>
-                        <a:cs typeface="Arial" charset="0"/>
-                      </a:endParaRPr>
-                    </a:p>
-                  </a:txBody>
-                  <a:tcPr marL="91440" marR="91440" marT="45720" marB="45720">
-                    <a:lnL w="6350" cap="flat" cmpd="sng" algn="ctr">
-                      <a:solidFill>
-                        <a:srgbClr val="CCCCCC"/>
-                      </a:solidFill>
-                      <a:prstDash val="solid"/>
-                      <a:round/>
-                      <a:headEnd type="none" w="med" len="med"/>
-                      <a:tailEnd type="none" w="med" len="med"/>
-                    </a:lnL>
-                    <a:lnR w="6350" cap="flat" cmpd="sng" algn="ctr">
-                      <a:solidFill>
-                        <a:srgbClr val="CCCCCC"/>
-                      </a:solidFill>
-                      <a:prstDash val="solid"/>
-                      <a:round/>
-                      <a:headEnd type="none" w="med" len="med"/>
-                      <a:tailEnd type="none" w="med" len="med"/>
-                    </a:lnR>
-                    <a:lnT w="6350" cap="flat" cmpd="sng" algn="ctr">
-                      <a:solidFill>
-                        <a:srgbClr val="CCCCCC"/>
-                      </a:solidFill>
-                      <a:prstDash val="solid"/>
-                      <a:round/>
-                      <a:headEnd type="none" w="med" len="med"/>
-                      <a:tailEnd type="none" w="med" len="med"/>
-                    </a:lnT>
-                    <a:lnB w="6350" cap="flat" cmpd="sng" algn="ctr">
-                      <a:solidFill>
-                        <a:srgbClr val="CCCCCC"/>
-                      </a:solidFill>
-                      <a:prstDash val="solid"/>
-                      <a:round/>
-                      <a:headEnd type="none" w="med" len="med"/>
-                      <a:tailEnd type="none" w="med" len="med"/>
-                    </a:lnB>
-                    <a:solidFill>
-                      <a:srgbClr val="FFFFFF"/>
-                    </a:solidFill>
-                  </a:tcPr>
-                </a:tc>
-              </a:tr>
-              <a:tr h="0">
-                <a:tc>
-                  <a:txBody>
-                    <a:bodyPr/>
-                    <a:lstStyle/>
-                    <a:p>
-                      <a:pPr algn="ctr" indent="0" marL="0">
-                        <a:buNone/>
-                      </a:pPr>
-                      <a:r>
-                        <a:rPr lang="en-US" sz="800" dirty="0">
-                          <a:solidFill>
-                            <a:srgbClr val="000000"/>
-                          </a:solidFill>
-                          <a:latin typeface="Arial" pitchFamily="34" charset="0"/>
-                          <a:ea typeface="Arial" pitchFamily="34" charset="-122"/>
-                          <a:cs typeface="Arial" pitchFamily="34" charset="-120"/>
-                        </a:rPr>
-                        <a:t>じゃらん</a:t>
-                      </a:r>
-                      <a:endParaRPr lang="en-US" sz="800" dirty="0">
-                        <a:latin typeface="Arial" charset="0"/>
-                        <a:ea typeface="Arial" charset="0"/>
-                        <a:cs typeface="Arial" charset="0"/>
-                      </a:endParaRPr>
-                    </a:p>
-                  </a:txBody>
-                  <a:tcPr marL="91440" marR="91440" marT="45720" marB="45720">
-                    <a:lnL w="6350" cap="flat" cmpd="sng" algn="ctr">
-                      <a:solidFill>
-                        <a:srgbClr val="CCCCCC"/>
-                      </a:solidFill>
-                      <a:prstDash val="solid"/>
-                      <a:round/>
-                      <a:headEnd type="none" w="med" len="med"/>
-                      <a:tailEnd type="none" w="med" len="med"/>
-                    </a:lnL>
-                    <a:lnR w="6350" cap="flat" cmpd="sng" algn="ctr">
-                      <a:solidFill>
-                        <a:srgbClr val="CCCCCC"/>
-                      </a:solidFill>
-                      <a:prstDash val="solid"/>
-                      <a:round/>
-                      <a:headEnd type="none" w="med" len="med"/>
-                      <a:tailEnd type="none" w="med" len="med"/>
-                    </a:lnR>
-                    <a:lnT w="6350" cap="flat" cmpd="sng" algn="ctr">
-                      <a:solidFill>
-                        <a:srgbClr val="CCCCCC"/>
-                      </a:solidFill>
-                      <a:prstDash val="solid"/>
-                      <a:round/>
-                      <a:headEnd type="none" w="med" len="med"/>
-                      <a:tailEnd type="none" w="med" len="med"/>
-                    </a:lnT>
-                    <a:lnB w="6350" cap="flat" cmpd="sng" algn="ctr">
-                      <a:solidFill>
-                        <a:srgbClr val="CCCCCC"/>
-                      </a:solidFill>
-                      <a:prstDash val="solid"/>
-                      <a:round/>
-                      <a:headEnd type="none" w="med" len="med"/>
-                      <a:tailEnd type="none" w="med" len="med"/>
-                    </a:lnB>
-                    <a:solidFill>
-                      <a:srgbClr val="FFFFFF"/>
-                    </a:solidFill>
-                  </a:tcPr>
-                </a:tc>
-                <a:tc>
-                  <a:txBody>
-                    <a:bodyPr/>
-                    <a:lstStyle/>
-                    <a:p>
-                      <a:pPr algn="ctr" indent="0" marL="0">
-                        <a:buNone/>
-                      </a:pPr>
-                      <a:r>
-                        <a:rPr lang="en-US" sz="800" dirty="0">
-                          <a:solidFill>
-                            <a:srgbClr val="000000"/>
-                          </a:solidFill>
-                          <a:latin typeface="Arial" pitchFamily="34" charset="0"/>
-                          <a:ea typeface="Arial" pitchFamily="34" charset="-122"/>
-                          <a:cs typeface="Arial" pitchFamily="34" charset="-120"/>
-                        </a:rPr>
-                        <a:t>7</a:t>
-                      </a:r>
-                      <a:endParaRPr lang="en-US" sz="800" dirty="0">
-                        <a:latin typeface="Arial" charset="0"/>
-                        <a:ea typeface="Arial" charset="0"/>
-                        <a:cs typeface="Arial" charset="0"/>
-                      </a:endParaRPr>
-                    </a:p>
-                  </a:txBody>
-                  <a:tcPr marL="91440" marR="91440" marT="45720" marB="45720">
-                    <a:lnL w="6350" cap="flat" cmpd="sng" algn="ctr">
-                      <a:solidFill>
-                        <a:srgbClr val="CCCCCC"/>
-                      </a:solidFill>
-                      <a:prstDash val="solid"/>
-                      <a:round/>
-                      <a:headEnd type="none" w="med" len="med"/>
-                      <a:tailEnd type="none" w="med" len="med"/>
-                    </a:lnL>
-                    <a:lnR w="6350" cap="flat" cmpd="sng" algn="ctr">
-                      <a:solidFill>
-                        <a:srgbClr val="CCCCCC"/>
-                      </a:solidFill>
-                      <a:prstDash val="solid"/>
-                      <a:round/>
-                      <a:headEnd type="none" w="med" len="med"/>
-                      <a:tailEnd type="none" w="med" len="med"/>
-                    </a:lnR>
-                    <a:lnT w="6350" cap="flat" cmpd="sng" algn="ctr">
-                      <a:solidFill>
-                        <a:srgbClr val="CCCCCC"/>
-                      </a:solidFill>
-                      <a:prstDash val="solid"/>
-                      <a:round/>
-                      <a:headEnd type="none" w="med" len="med"/>
-                      <a:tailEnd type="none" w="med" len="med"/>
-                    </a:lnT>
-                    <a:lnB w="6350" cap="flat" cmpd="sng" algn="ctr">
-                      <a:solidFill>
-                        <a:srgbClr val="CCCCCC"/>
-                      </a:solidFill>
-                      <a:prstDash val="solid"/>
-                      <a:round/>
-                      <a:headEnd type="none" w="med" len="med"/>
-                      <a:tailEnd type="none" w="med" len="med"/>
-                    </a:lnB>
-                    <a:solidFill>
-                      <a:srgbClr val="FFFFFF"/>
-                    </a:solidFill>
-                  </a:tcPr>
-                </a:tc>
-                <a:tc>
-                  <a:txBody>
-                    <a:bodyPr/>
-                    <a:lstStyle/>
-                    <a:p>
-                      <a:pPr algn="ctr" indent="0" marL="0">
-                        <a:buNone/>
-                      </a:pPr>
-                      <a:r>
-                        <a:rPr lang="en-US" sz="800" dirty="0">
-                          <a:solidFill>
-                            <a:srgbClr val="000000"/>
-                          </a:solidFill>
-                          <a:latin typeface="Arial" pitchFamily="34" charset="0"/>
-                          <a:ea typeface="Arial" pitchFamily="34" charset="-122"/>
-                          <a:cs typeface="Arial" pitchFamily="34" charset="-120"/>
-                        </a:rPr>
-                        <a:t>3.43/5</a:t>
-                      </a:r>
-                      <a:endParaRPr lang="en-US" sz="800" dirty="0">
-                        <a:latin typeface="Arial" charset="0"/>
-                        <a:ea typeface="Arial" charset="0"/>
-                        <a:cs typeface="Arial" charset="0"/>
-                      </a:endParaRPr>
-                    </a:p>
-                  </a:txBody>
-                  <a:tcPr marL="91440" marR="91440" marT="45720" marB="45720">
-                    <a:lnL w="6350" cap="flat" cmpd="sng" algn="ctr">
-                      <a:solidFill>
-                        <a:srgbClr val="CCCCCC"/>
-                      </a:solidFill>
-                      <a:prstDash val="solid"/>
-                      <a:round/>
-                      <a:headEnd type="none" w="med" len="med"/>
-                      <a:tailEnd type="none" w="med" len="med"/>
-                    </a:lnL>
-                    <a:lnR w="6350" cap="flat" cmpd="sng" algn="ctr">
-                      <a:solidFill>
-                        <a:srgbClr val="CCCCCC"/>
-                      </a:solidFill>
-                      <a:prstDash val="solid"/>
-                      <a:round/>
-                      <a:headEnd type="none" w="med" len="med"/>
-                      <a:tailEnd type="none" w="med" len="med"/>
-                    </a:lnR>
-                    <a:lnT w="6350" cap="flat" cmpd="sng" algn="ctr">
-                      <a:solidFill>
-                        <a:srgbClr val="CCCCCC"/>
-                      </a:solidFill>
-                      <a:prstDash val="solid"/>
-                      <a:round/>
-                      <a:headEnd type="none" w="med" len="med"/>
-                      <a:tailEnd type="none" w="med" len="med"/>
-                    </a:lnT>
-                    <a:lnB w="6350" cap="flat" cmpd="sng" algn="ctr">
-                      <a:solidFill>
-                        <a:srgbClr val="CCCCCC"/>
-                      </a:solidFill>
-                      <a:prstDash val="solid"/>
-                      <a:round/>
-                      <a:headEnd type="none" w="med" len="med"/>
-                      <a:tailEnd type="none" w="med" len="med"/>
-                    </a:lnB>
-                    <a:solidFill>
-                      <a:srgbClr val="FFFFFF"/>
-                    </a:solidFill>
-                  </a:tcPr>
-                </a:tc>
-                <a:tc>
-                  <a:txBody>
-                    <a:bodyPr/>
-                    <a:lstStyle/>
-                    <a:p>
-                      <a:pPr algn="ctr" indent="0" marL="0">
-                        <a:buNone/>
-                      </a:pPr>
-                      <a:r>
-                        <a:rPr lang="en-US" sz="800" dirty="0">
-                          <a:solidFill>
-                            <a:srgbClr val="000000"/>
-                          </a:solidFill>
-                          <a:latin typeface="Arial" pitchFamily="34" charset="0"/>
-                          <a:ea typeface="Arial" pitchFamily="34" charset="-122"/>
-                          <a:cs typeface="Arial" pitchFamily="34" charset="-120"/>
-                        </a:rPr>
-                        <a:t>6.86</a:t>
+                        <a:t>6.65</a:t>
                       </a:r>
                       <a:endParaRPr lang="en-US" sz="800" dirty="0">
                         <a:latin typeface="Arial" charset="0"/>
@@ -5596,7 +5989,7 @@
                           <a:ea typeface="Arial" pitchFamily="34" charset="-122"/>
                           <a:cs typeface="Arial" pitchFamily="34" charset="-120"/>
                         </a:rPr>
-                        <a:t>Google</a:t>
+                        <a:t>Trip.com</a:t>
                       </a:r>
                       <a:endParaRPr lang="en-US" sz="800" dirty="0">
                         <a:latin typeface="Arial" charset="0"/>
@@ -5664,7 +6057,7 @@
                           <a:ea typeface="Arial" pitchFamily="34" charset="-122"/>
                           <a:cs typeface="Arial" pitchFamily="34" charset="-120"/>
                         </a:rPr>
-                        <a:t>12</a:t>
+                        <a:t>4</a:t>
                       </a:r>
                       <a:endParaRPr lang="en-US" sz="800" dirty="0">
                         <a:latin typeface="Arial" charset="0"/>
@@ -5732,7 +6125,7 @@
                           <a:ea typeface="Arial" pitchFamily="34" charset="-122"/>
                           <a:cs typeface="Arial" pitchFamily="34" charset="-120"/>
                         </a:rPr>
-                        <a:t>3.08/5</a:t>
+                        <a:t>6.00/10</a:t>
                       </a:r>
                       <a:endParaRPr lang="en-US" sz="800" dirty="0">
                         <a:latin typeface="Arial" charset="0"/>
@@ -5800,7 +6193,7 @@
                           <a:ea typeface="Arial" pitchFamily="34" charset="-122"/>
                           <a:cs typeface="Arial" pitchFamily="34" charset="-120"/>
                         </a:rPr>
-                        <a:t>6.17</a:t>
+                        <a:t>6.00</a:t>
                       </a:r>
                       <a:endParaRPr lang="en-US" sz="800" dirty="0">
                         <a:latin typeface="Arial" charset="0"/>
@@ -6253,7 +6646,7 @@
                 <a:ea typeface="Arial" pitchFamily="34" charset="-122"/>
                 <a:cs typeface="Arial" pitchFamily="34" charset="-120"/>
               </a:rPr>
-              <a:t>28件（59.6%）</a:t>
+              <a:t>49件（55.7%）</a:t>
             </a:r>
             <a:endParaRPr lang="en-US" sz="1600" dirty="0"/>
           </a:p>
@@ -6351,7 +6744,7 @@
                 <a:ea typeface="Arial" pitchFamily="34" charset="-122"/>
                 <a:cs typeface="Arial" pitchFamily="34" charset="-120"/>
               </a:rPr>
-              <a:t>9件（19.1%）</a:t>
+              <a:t>23件（26.1%）</a:t>
             </a:r>
             <a:endParaRPr lang="en-US" sz="1600" dirty="0"/>
           </a:p>
@@ -6449,7 +6842,7 @@
                 <a:ea typeface="Arial" pitchFamily="34" charset="-122"/>
                 <a:cs typeface="Arial" pitchFamily="34" charset="-120"/>
               </a:rPr>
-              <a:t>10件（21.3%）</a:t>
+              <a:t>16件（18.2%）</a:t>
             </a:r>
             <a:endParaRPr lang="en-US" sz="1600" dirty="0"/>
           </a:p>
@@ -6611,7 +7004,7 @@
                 <a:ea typeface="Arial" pitchFamily="34" charset="-122"/>
                 <a:cs typeface="Arial" pitchFamily="34" charset="-120"/>
               </a:rPr>
-              <a:t>高評価レビュー（8-10点: 28件）の分析から、主要な強みテーマを抽出しています。立地・アクセス、客室清潔感、スタッフ対応が高評価の中心的テーマです。</a:t>
+              <a:t>高評価レビュー（8-10点: 49件）の分析から、主要な強みテーマを抽出しています。立地・アクセス、客室清潔感、スタッフ対応が高評価の中心的テーマです。</a:t>
             </a:r>
             <a:endParaRPr lang="en-US" sz="1200" dirty="0"/>
           </a:p>
@@ -6871,7 +7264,7 @@
                 <a:ea typeface="Arial" pitchFamily="34" charset="-122"/>
                 <a:cs typeface="Arial" pitchFamily="34" charset="-120"/>
               </a:rPr>
-              <a:t>低評価・中評価レビュー（19件）から改善課題を優先度別に整理しています。S/A/B/Cの4段階で優先度を設定し、計画的な改善を推進します。</a:t>
+              <a:t>低評価・中評価レビュー（39件）から改善課題を優先度別に整理しています。S/A/B/Cの4段階で優先度を設定し、計画的な改善を推進します。</a:t>
             </a:r>
             <a:endParaRPr lang="en-US" sz="1200" dirty="0"/>
           </a:p>
@@ -7651,7 +8044,7 @@
                 <a:ea typeface="Arial" pitchFamily="34" charset="-122"/>
                 <a:cs typeface="Arial" pitchFamily="34" charset="-120"/>
               </a:rPr>
-              <a:t>全体平均 7.15点 → 目標 7.65点</a:t>
+              <a:t>全体平均 7.05点 → 目標 7.55点</a:t>
             </a:r>
             <a:endParaRPr lang="en-US" sz="1200" dirty="0"/>
           </a:p>
@@ -7668,7 +8061,7 @@
                 <a:ea typeface="Arial" pitchFamily="34" charset="-122"/>
                 <a:cs typeface="Arial" pitchFamily="34" charset="-120"/>
               </a:rPr>
-              <a:t>高評価率 59.6% → 目標 64.6%</a:t>
+              <a:t>高評価率 55.7% → 目標 60.7%</a:t>
             </a:r>
             <a:endParaRPr lang="en-US" sz="1200" dirty="0"/>
           </a:p>
@@ -7685,7 +8078,7 @@
                 <a:ea typeface="Arial" pitchFamily="34" charset="-122"/>
                 <a:cs typeface="Arial" pitchFamily="34" charset="-120"/>
               </a:rPr>
-              <a:t>低評価率 21.3% → 目標 19.3%</a:t>
+              <a:t>低評価率 18.2% → 目標 16.2%</a:t>
             </a:r>
             <a:endParaRPr lang="en-US" sz="1200" dirty="0"/>
           </a:p>

--- a/納品レポート/ホテル別レポート/chisan_口コミ分析レポート.pptx
+++ b/納品レポート/ホテル別レポート/chisan_口コミ分析レポート.pptx
@@ -201,7 +201,7 @@
             <c:bubble3D val="0"/>
             <c:spPr>
               <a:solidFill>
-                <a:srgbClr val="EA580C"/>
+                <a:srgbClr val="DC2626"/>
               </a:solidFill>
               <a:effectLst/>
             </c:spPr>
@@ -249,10 +249,10 @@
                     <c:v>Agoda</c:v>
                   </c:pt>
                   <c:pt idx="1">
-                    <c:v>Booking.com</c:v>
+                    <c:v>じゃらん</c:v>
                   </c:pt>
                   <c:pt idx="2">
-                    <c:v>じゃらん</c:v>
+                    <c:v>Booking.com</c:v>
                   </c:pt>
                   <c:pt idx="3">
                     <c:v>Google</c:v>
@@ -277,13 +277,13 @@
                   <c:v>8.29</c:v>
                 </c:pt>
                 <c:pt idx="1">
-                  <c:v>7.6</c:v>
+                  <c:v>7</c:v>
                 </c:pt>
                 <c:pt idx="2">
-                  <c:v>7</c:v>
+                  <c:v>6.83</c:v>
                 </c:pt>
                 <c:pt idx="3">
-                  <c:v>6.95</c:v>
+                  <c:v>6.73</c:v>
                 </c:pt>
                 <c:pt idx="4">
                   <c:v>6.65</c:v>
@@ -587,11 +587,22 @@
               <a:effectLst/>
             </c:spPr>
           </c:dPt>
+          <c:dPt>
+            <c:idx val="8"/>
+            <c:invertIfNegative val="0"/>
+            <c:bubble3D val="0"/>
+            <c:spPr>
+              <a:solidFill>
+                <a:srgbClr val="DC2626"/>
+              </a:solidFill>
+              <a:effectLst/>
+            </c:spPr>
+          </c:dPt>
           <c:cat>
             <c:multiLvlStrRef>
-              <c:f>Sheet1!$A$2:$A$9</c:f>
+              <c:f>Sheet1!$A$2:$A$10</c:f>
               <c:multiLvlStrCache>
-                <c:ptCount val="8"/>
+                <c:ptCount val="9"/>
                 <c:lvl>
                   <c:pt idx="0">
                     <c:v>10点</c:v>
@@ -615,6 +626,9 @@
                     <c:v>4点</c:v>
                   </c:pt>
                   <c:pt idx="7">
+                    <c:v>3点</c:v>
+                  </c:pt>
+                  <c:pt idx="8">
                     <c:v>2点</c:v>
                   </c:pt>
                 </c:lvl>
@@ -623,10 +637,10 @@
           </c:cat>
           <c:val>
             <c:numRef>
-              <c:f>Sheet1!$B$2:$B$9</c:f>
+              <c:f>Sheet1!$B$2:$B$10</c:f>
               <c:numCache>
                 <c:formatCode>General</c:formatCode>
-                <c:ptCount val="8"/>
+                <c:ptCount val="9"/>
                 <c:pt idx="0">
                   <c:v>17</c:v>
                 </c:pt>
@@ -649,7 +663,10 @@
                   <c:v>10</c:v>
                 </c:pt>
                 <c:pt idx="7">
-                  <c:v>6</c:v>
+                  <c:v>1</c:v>
+                </c:pt>
+                <c:pt idx="8">
+                  <c:v>7</c:v>
                 </c:pt>
               </c:numCache>
             </c:numRef>
@@ -2537,7 +2554,7 @@
                 <a:ea typeface="Arial" pitchFamily="34" charset="-122"/>
                 <a:cs typeface="Arial" pitchFamily="34" charset="-120"/>
               </a:rPr>
-              <a:t>レビュー総数：88件</a:t>
+              <a:t>レビュー総数：90件</a:t>
             </a:r>
             <a:endParaRPr lang="en-US" sz="1000" dirty="0"/>
           </a:p>
@@ -2817,7 +2834,7 @@
                 <a:ea typeface="Arial" pitchFamily="34" charset="-122"/>
                 <a:cs typeface="Arial" pitchFamily="34" charset="-120"/>
               </a:rPr>
-              <a:t>チサンホテル浜松町は全体平均7.05点（10pt換算）、高評価率55.7%を達成しています。本レポートで示した改善施策を段階的に実施することで、さらなる顧客満足度向上が期待できます。</a:t>
+              <a:t>チサンホテル浜松町は全体平均6.94点（10pt換算）、高評価率54.4%を達成しています。本レポートで示した改善施策を段階的に実施することで、さらなる顧客満足度向上が期待できます。</a:t>
             </a:r>
             <a:endParaRPr lang="en-US" sz="1200" dirty="0"/>
           </a:p>
@@ -3177,7 +3194,7 @@
             <a:avLst/>
           </a:prstGeom>
           <a:solidFill>
-            <a:srgbClr val="EA580C"/>
+            <a:srgbClr val="DC2626"/>
           </a:solidFill>
           <a:ln/>
         </p:spPr>
@@ -3248,13 +3265,13 @@
             <a:r>
               <a:rPr lang="en-US" sz="2800" b="1" dirty="0">
                 <a:solidFill>
-                  <a:srgbClr val="EA580C"/>
+                  <a:srgbClr val="DC2626"/>
                 </a:solidFill>
                 <a:latin typeface="Arial" pitchFamily="34" charset="0"/>
                 <a:ea typeface="Arial" pitchFamily="34" charset="-122"/>
                 <a:cs typeface="Arial" pitchFamily="34" charset="-120"/>
               </a:rPr>
-              <a:t>7.05</a:t>
+              <a:t>6.94</a:t>
             </a:r>
             <a:endParaRPr lang="en-US" sz="2800" dirty="0"/>
           </a:p>
@@ -3372,7 +3389,7 @@
                 <a:ea typeface="Arial" pitchFamily="34" charset="-122"/>
                 <a:cs typeface="Arial" pitchFamily="34" charset="-120"/>
               </a:rPr>
-              <a:t>55.7%</a:t>
+              <a:t>54.4%</a:t>
             </a:r>
             <a:endParaRPr lang="en-US" sz="2800" dirty="0"/>
           </a:p>
@@ -3490,7 +3507,7 @@
                 <a:ea typeface="Arial" pitchFamily="34" charset="-122"/>
                 <a:cs typeface="Arial" pitchFamily="34" charset="-120"/>
               </a:rPr>
-              <a:t>18.2%</a:t>
+              <a:t>20.0%</a:t>
             </a:r>
             <a:endParaRPr lang="en-US" sz="2800" dirty="0"/>
           </a:p>
@@ -3608,7 +3625,7 @@
                 <a:ea typeface="Arial" pitchFamily="34" charset="-122"/>
                 <a:cs typeface="Arial" pitchFamily="34" charset="-120"/>
               </a:rPr>
-              <a:t>88件</a:t>
+              <a:t>90件</a:t>
             </a:r>
             <a:endParaRPr lang="en-US" sz="2800" dirty="0"/>
           </a:p>
@@ -4621,7 +4638,7 @@
                           <a:ea typeface="Arial" pitchFamily="34" charset="-122"/>
                           <a:cs typeface="Arial" pitchFamily="34" charset="-120"/>
                         </a:rPr>
-                        <a:t>Booking.com</a:t>
+                        <a:t>じゃらん</a:t>
                       </a:r>
                       <a:endParaRPr lang="en-US" sz="800" dirty="0">
                         <a:latin typeface="Arial" charset="0"/>
@@ -4689,7 +4706,7 @@
                           <a:ea typeface="Arial" pitchFamily="34" charset="-122"/>
                           <a:cs typeface="Arial" pitchFamily="34" charset="-120"/>
                         </a:rPr>
-                        <a:t>5</a:t>
+                        <a:t>10</a:t>
                       </a:r>
                       <a:endParaRPr lang="en-US" sz="800" dirty="0">
                         <a:latin typeface="Arial" charset="0"/>
@@ -4757,7 +4774,7 @@
                           <a:ea typeface="Arial" pitchFamily="34" charset="-122"/>
                           <a:cs typeface="Arial" pitchFamily="34" charset="-120"/>
                         </a:rPr>
-                        <a:t>7.60/10</a:t>
+                        <a:t>3.50/5</a:t>
                       </a:r>
                       <a:endParaRPr lang="en-US" sz="800" dirty="0">
                         <a:latin typeface="Arial" charset="0"/>
@@ -4825,7 +4842,7 @@
                           <a:ea typeface="Arial" pitchFamily="34" charset="-122"/>
                           <a:cs typeface="Arial" pitchFamily="34" charset="-120"/>
                         </a:rPr>
-                        <a:t>7.60</a:t>
+                        <a:t>7.00</a:t>
                       </a:r>
                       <a:endParaRPr lang="en-US" sz="800" dirty="0">
                         <a:latin typeface="Arial" charset="0"/>
@@ -4963,7 +4980,7 @@
                           <a:ea typeface="Arial" pitchFamily="34" charset="-122"/>
                           <a:cs typeface="Arial" pitchFamily="34" charset="-120"/>
                         </a:rPr>
-                        <a:t>じゃらん</a:t>
+                        <a:t>Booking.com</a:t>
                       </a:r>
                       <a:endParaRPr lang="en-US" sz="800" dirty="0">
                         <a:latin typeface="Arial" charset="0"/>
@@ -5031,7 +5048,7 @@
                           <a:ea typeface="Arial" pitchFamily="34" charset="-122"/>
                           <a:cs typeface="Arial" pitchFamily="34" charset="-120"/>
                         </a:rPr>
-                        <a:t>10</a:t>
+                        <a:t>6</a:t>
                       </a:r>
                       <a:endParaRPr lang="en-US" sz="800" dirty="0">
                         <a:latin typeface="Arial" charset="0"/>
@@ -5099,7 +5116,7 @@
                           <a:ea typeface="Arial" pitchFamily="34" charset="-122"/>
                           <a:cs typeface="Arial" pitchFamily="34" charset="-120"/>
                         </a:rPr>
-                        <a:t>3.50/5</a:t>
+                        <a:t>6.83/10</a:t>
                       </a:r>
                       <a:endParaRPr lang="en-US" sz="800" dirty="0">
                         <a:latin typeface="Arial" charset="0"/>
@@ -5167,7 +5184,7 @@
                           <a:ea typeface="Arial" pitchFamily="34" charset="-122"/>
                           <a:cs typeface="Arial" pitchFamily="34" charset="-120"/>
                         </a:rPr>
-                        <a:t>7.00</a:t>
+                        <a:t>6.83</a:t>
                       </a:r>
                       <a:endParaRPr lang="en-US" sz="800" dirty="0">
                         <a:latin typeface="Arial" charset="0"/>
@@ -5235,7 +5252,7 @@
                           <a:ea typeface="Arial" pitchFamily="34" charset="-122"/>
                           <a:cs typeface="Arial" pitchFamily="34" charset="-120"/>
                         </a:rPr>
-                        <a:t>概ね良好</a:t>
+                        <a:t>要改善</a:t>
                       </a:r>
                       <a:endParaRPr lang="en-US" sz="800" dirty="0">
                         <a:latin typeface="Arial" charset="0"/>
@@ -5373,7 +5390,7 @@
                           <a:ea typeface="Arial" pitchFamily="34" charset="-122"/>
                           <a:cs typeface="Arial" pitchFamily="34" charset="-120"/>
                         </a:rPr>
-                        <a:t>21</a:t>
+                        <a:t>22</a:t>
                       </a:r>
                       <a:endParaRPr lang="en-US" sz="800" dirty="0">
                         <a:latin typeface="Arial" charset="0"/>
@@ -5441,7 +5458,7 @@
                           <a:ea typeface="Arial" pitchFamily="34" charset="-122"/>
                           <a:cs typeface="Arial" pitchFamily="34" charset="-120"/>
                         </a:rPr>
-                        <a:t>3.48/5</a:t>
+                        <a:t>3.36/5</a:t>
                       </a:r>
                       <a:endParaRPr lang="en-US" sz="800" dirty="0">
                         <a:latin typeface="Arial" charset="0"/>
@@ -5509,7 +5526,7 @@
                           <a:ea typeface="Arial" pitchFamily="34" charset="-122"/>
                           <a:cs typeface="Arial" pitchFamily="34" charset="-120"/>
                         </a:rPr>
-                        <a:t>6.95</a:t>
+                        <a:t>6.73</a:t>
                       </a:r>
                       <a:endParaRPr lang="en-US" sz="800" dirty="0">
                         <a:latin typeface="Arial" charset="0"/>
@@ -6646,7 +6663,7 @@
                 <a:ea typeface="Arial" pitchFamily="34" charset="-122"/>
                 <a:cs typeface="Arial" pitchFamily="34" charset="-120"/>
               </a:rPr>
-              <a:t>49件（55.7%）</a:t>
+              <a:t>49件（54.4%）</a:t>
             </a:r>
             <a:endParaRPr lang="en-US" sz="1600" dirty="0"/>
           </a:p>
@@ -6744,7 +6761,7 @@
                 <a:ea typeface="Arial" pitchFamily="34" charset="-122"/>
                 <a:cs typeface="Arial" pitchFamily="34" charset="-120"/>
               </a:rPr>
-              <a:t>23件（26.1%）</a:t>
+              <a:t>23件（25.6%）</a:t>
             </a:r>
             <a:endParaRPr lang="en-US" sz="1600" dirty="0"/>
           </a:p>
@@ -6842,7 +6859,7 @@
                 <a:ea typeface="Arial" pitchFamily="34" charset="-122"/>
                 <a:cs typeface="Arial" pitchFamily="34" charset="-120"/>
               </a:rPr>
-              <a:t>16件（18.2%）</a:t>
+              <a:t>18件（20.0%）</a:t>
             </a:r>
             <a:endParaRPr lang="en-US" sz="1600" dirty="0"/>
           </a:p>
@@ -7264,7 +7281,7 @@
                 <a:ea typeface="Arial" pitchFamily="34" charset="-122"/>
                 <a:cs typeface="Arial" pitchFamily="34" charset="-120"/>
               </a:rPr>
-              <a:t>低評価・中評価レビュー（39件）から改善課題を優先度別に整理しています。S/A/B/Cの4段階で優先度を設定し、計画的な改善を推進します。</a:t>
+              <a:t>低評価・中評価レビュー（41件）から改善課題を優先度別に整理しています。S/A/B/Cの4段階で優先度を設定し、計画的な改善を推進します。</a:t>
             </a:r>
             <a:endParaRPr lang="en-US" sz="1200" dirty="0"/>
           </a:p>
@@ -8044,7 +8061,7 @@
                 <a:ea typeface="Arial" pitchFamily="34" charset="-122"/>
                 <a:cs typeface="Arial" pitchFamily="34" charset="-120"/>
               </a:rPr>
-              <a:t>全体平均 7.05点 → 目標 7.55点</a:t>
+              <a:t>全体平均 6.94点 → 目標 7.44点</a:t>
             </a:r>
             <a:endParaRPr lang="en-US" sz="1200" dirty="0"/>
           </a:p>
@@ -8061,7 +8078,7 @@
                 <a:ea typeface="Arial" pitchFamily="34" charset="-122"/>
                 <a:cs typeface="Arial" pitchFamily="34" charset="-120"/>
               </a:rPr>
-              <a:t>高評価率 55.7% → 目標 60.7%</a:t>
+              <a:t>高評価率 54.4% → 目標 59.4%</a:t>
             </a:r>
             <a:endParaRPr lang="en-US" sz="1200" dirty="0"/>
           </a:p>
@@ -8078,7 +8095,7 @@
                 <a:ea typeface="Arial" pitchFamily="34" charset="-122"/>
                 <a:cs typeface="Arial" pitchFamily="34" charset="-120"/>
               </a:rPr>
-              <a:t>低評価率 18.2% → 目標 16.2%</a:t>
+              <a:t>低評価率 20.0% → 目標 18.0%</a:t>
             </a:r>
             <a:endParaRPr lang="en-US" sz="1200" dirty="0"/>
           </a:p>

--- a/納品レポート/ホテル別レポート/chisan_口コミ分析レポート.pptx
+++ b/納品レポート/ホテル別レポート/chisan_口コミ分析レポート.pptx
@@ -144,7 +144,7 @@
           </c:tx>
           <c:spPr>
             <a:solidFill>
-              <a:srgbClr val="16A34A"/>
+              <a:srgbClr val="EA580C"/>
             </a:solidFill>
             <a:effectLst/>
           </c:spPr>
@@ -179,7 +179,7 @@
             <c:bubble3D val="0"/>
             <c:spPr>
               <a:solidFill>
-                <a:srgbClr val="16A34A"/>
+                <a:srgbClr val="EA580C"/>
               </a:solidFill>
               <a:effectLst/>
             </c:spPr>
@@ -190,7 +190,7 @@
             <c:bubble3D val="0"/>
             <c:spPr>
               <a:solidFill>
-                <a:srgbClr val="EA580C"/>
+                <a:srgbClr val="DC2626"/>
               </a:solidFill>
               <a:effectLst/>
             </c:spPr>
@@ -274,10 +274,10 @@
                 <c:formatCode>General</c:formatCode>
                 <c:ptCount val="6"/>
                 <c:pt idx="0">
-                  <c:v>8.29</c:v>
+                  <c:v>7.93</c:v>
                 </c:pt>
                 <c:pt idx="1">
-                  <c:v>7</c:v>
+                  <c:v>6.91</c:v>
                 </c:pt>
                 <c:pt idx="2">
                   <c:v>6.83</c:v>
@@ -654,7 +654,7 @@
                   <c:v>3</c:v>
                 </c:pt>
                 <c:pt idx="4">
-                  <c:v>19</c:v>
+                  <c:v>20</c:v>
                 </c:pt>
                 <c:pt idx="5">
                   <c:v>1</c:v>
@@ -663,7 +663,7 @@
                   <c:v>10</c:v>
                 </c:pt>
                 <c:pt idx="7">
-                  <c:v>1</c:v>
+                  <c:v>2</c:v>
                 </c:pt>
                 <c:pt idx="8">
                   <c:v>7</c:v>
@@ -2554,7 +2554,7 @@
                 <a:ea typeface="Arial" pitchFamily="34" charset="-122"/>
                 <a:cs typeface="Arial" pitchFamily="34" charset="-120"/>
               </a:rPr>
-              <a:t>レビュー総数：90件</a:t>
+              <a:t>レビュー総数：92件</a:t>
             </a:r>
             <a:endParaRPr lang="en-US" sz="1000" dirty="0"/>
           </a:p>
@@ -2834,7 +2834,7 @@
                 <a:ea typeface="Arial" pitchFamily="34" charset="-122"/>
                 <a:cs typeface="Arial" pitchFamily="34" charset="-120"/>
               </a:rPr>
-              <a:t>チサンホテル浜松町は全体平均6.94点（10pt換算）、高評価率54.4%を達成しています。本レポートで示した改善施策を段階的に実施することで、さらなる顧客満足度向上が期待できます。</a:t>
+              <a:t>チサンホテル浜松町は全体平均6.89点（10pt換算）、高評価率53.3%を達成しています。本レポートで示した改善施策を段階的に実施することで、さらなる顧客満足度向上が期待できます。</a:t>
             </a:r>
             <a:endParaRPr lang="en-US" sz="1200" dirty="0"/>
           </a:p>
@@ -3271,7 +3271,7 @@
                 <a:ea typeface="Arial" pitchFamily="34" charset="-122"/>
                 <a:cs typeface="Arial" pitchFamily="34" charset="-120"/>
               </a:rPr>
-              <a:t>6.94</a:t>
+              <a:t>6.89</a:t>
             </a:r>
             <a:endParaRPr lang="en-US" sz="2800" dirty="0"/>
           </a:p>
@@ -3389,7 +3389,7 @@
                 <a:ea typeface="Arial" pitchFamily="34" charset="-122"/>
                 <a:cs typeface="Arial" pitchFamily="34" charset="-120"/>
               </a:rPr>
-              <a:t>54.4%</a:t>
+              <a:t>53.3%</a:t>
             </a:r>
             <a:endParaRPr lang="en-US" sz="2800" dirty="0"/>
           </a:p>
@@ -3507,7 +3507,7 @@
                 <a:ea typeface="Arial" pitchFamily="34" charset="-122"/>
                 <a:cs typeface="Arial" pitchFamily="34" charset="-120"/>
               </a:rPr>
-              <a:t>20.0%</a:t>
+              <a:t>20.7%</a:t>
             </a:r>
             <a:endParaRPr lang="en-US" sz="2800" dirty="0"/>
           </a:p>
@@ -3625,7 +3625,7 @@
                 <a:ea typeface="Arial" pitchFamily="34" charset="-122"/>
                 <a:cs typeface="Arial" pitchFamily="34" charset="-120"/>
               </a:rPr>
-              <a:t>90件</a:t>
+              <a:t>92件</a:t>
             </a:r>
             <a:endParaRPr lang="en-US" sz="2800" dirty="0"/>
           </a:p>
@@ -4364,7 +4364,7 @@
                           <a:ea typeface="Arial" pitchFamily="34" charset="-122"/>
                           <a:cs typeface="Arial" pitchFamily="34" charset="-120"/>
                         </a:rPr>
-                        <a:t>14</a:t>
+                        <a:t>15</a:t>
                       </a:r>
                       <a:endParaRPr lang="en-US" sz="800" dirty="0">
                         <a:latin typeface="Arial" charset="0"/>
@@ -4432,7 +4432,7 @@
                           <a:ea typeface="Arial" pitchFamily="34" charset="-122"/>
                           <a:cs typeface="Arial" pitchFamily="34" charset="-120"/>
                         </a:rPr>
-                        <a:t>8.29/10</a:t>
+                        <a:t>7.93/10</a:t>
                       </a:r>
                       <a:endParaRPr lang="en-US" sz="800" dirty="0">
                         <a:latin typeface="Arial" charset="0"/>
@@ -4500,7 +4500,7 @@
                           <a:ea typeface="Arial" pitchFamily="34" charset="-122"/>
                           <a:cs typeface="Arial" pitchFamily="34" charset="-120"/>
                         </a:rPr>
-                        <a:t>8.29</a:t>
+                        <a:t>7.93</a:t>
                       </a:r>
                       <a:endParaRPr lang="en-US" sz="800" dirty="0">
                         <a:latin typeface="Arial" charset="0"/>
@@ -4568,7 +4568,7 @@
                           <a:ea typeface="Arial" pitchFamily="34" charset="-122"/>
                           <a:cs typeface="Arial" pitchFamily="34" charset="-120"/>
                         </a:rPr>
-                        <a:t>良好</a:t>
+                        <a:t>概ね良好</a:t>
                       </a:r>
                       <a:endParaRPr lang="en-US" sz="800" dirty="0">
                         <a:latin typeface="Arial" charset="0"/>
@@ -4706,7 +4706,7 @@
                           <a:ea typeface="Arial" pitchFamily="34" charset="-122"/>
                           <a:cs typeface="Arial" pitchFamily="34" charset="-120"/>
                         </a:rPr>
-                        <a:t>10</a:t>
+                        <a:t>11</a:t>
                       </a:r>
                       <a:endParaRPr lang="en-US" sz="800" dirty="0">
                         <a:latin typeface="Arial" charset="0"/>
@@ -4774,7 +4774,7 @@
                           <a:ea typeface="Arial" pitchFamily="34" charset="-122"/>
                           <a:cs typeface="Arial" pitchFamily="34" charset="-120"/>
                         </a:rPr>
-                        <a:t>3.50/5</a:t>
+                        <a:t>3.45/5</a:t>
                       </a:r>
                       <a:endParaRPr lang="en-US" sz="800" dirty="0">
                         <a:latin typeface="Arial" charset="0"/>
@@ -4842,7 +4842,7 @@
                           <a:ea typeface="Arial" pitchFamily="34" charset="-122"/>
                           <a:cs typeface="Arial" pitchFamily="34" charset="-120"/>
                         </a:rPr>
-                        <a:t>7.00</a:t>
+                        <a:t>6.91</a:t>
                       </a:r>
                       <a:endParaRPr lang="en-US" sz="800" dirty="0">
                         <a:latin typeface="Arial" charset="0"/>
@@ -4910,7 +4910,7 @@
                           <a:ea typeface="Arial" pitchFamily="34" charset="-122"/>
                           <a:cs typeface="Arial" pitchFamily="34" charset="-120"/>
                         </a:rPr>
-                        <a:t>概ね良好</a:t>
+                        <a:t>要改善</a:t>
                       </a:r>
                       <a:endParaRPr lang="en-US" sz="800" dirty="0">
                         <a:latin typeface="Arial" charset="0"/>
@@ -6663,7 +6663,7 @@
                 <a:ea typeface="Arial" pitchFamily="34" charset="-122"/>
                 <a:cs typeface="Arial" pitchFamily="34" charset="-120"/>
               </a:rPr>
-              <a:t>49件（54.4%）</a:t>
+              <a:t>49件（53.3%）</a:t>
             </a:r>
             <a:endParaRPr lang="en-US" sz="1600" dirty="0"/>
           </a:p>
@@ -6761,7 +6761,7 @@
                 <a:ea typeface="Arial" pitchFamily="34" charset="-122"/>
                 <a:cs typeface="Arial" pitchFamily="34" charset="-120"/>
               </a:rPr>
-              <a:t>23件（25.6%）</a:t>
+              <a:t>24件（26.1%）</a:t>
             </a:r>
             <a:endParaRPr lang="en-US" sz="1600" dirty="0"/>
           </a:p>
@@ -6859,7 +6859,7 @@
                 <a:ea typeface="Arial" pitchFamily="34" charset="-122"/>
                 <a:cs typeface="Arial" pitchFamily="34" charset="-120"/>
               </a:rPr>
-              <a:t>18件（20.0%）</a:t>
+              <a:t>19件（20.7%）</a:t>
             </a:r>
             <a:endParaRPr lang="en-US" sz="1600" dirty="0"/>
           </a:p>
@@ -7281,7 +7281,7 @@
                 <a:ea typeface="Arial" pitchFamily="34" charset="-122"/>
                 <a:cs typeface="Arial" pitchFamily="34" charset="-120"/>
               </a:rPr>
-              <a:t>低評価・中評価レビュー（41件）から改善課題を優先度別に整理しています。S/A/B/Cの4段階で優先度を設定し、計画的な改善を推進します。</a:t>
+              <a:t>低評価・中評価レビュー（43件）から改善課題を優先度別に整理しています。S/A/B/Cの4段階で優先度を設定し、計画的な改善を推進します。</a:t>
             </a:r>
             <a:endParaRPr lang="en-US" sz="1200" dirty="0"/>
           </a:p>
@@ -8061,7 +8061,7 @@
                 <a:ea typeface="Arial" pitchFamily="34" charset="-122"/>
                 <a:cs typeface="Arial" pitchFamily="34" charset="-120"/>
               </a:rPr>
-              <a:t>全体平均 6.94点 → 目標 7.44点</a:t>
+              <a:t>全体平均 6.89点 → 目標 7.39点</a:t>
             </a:r>
             <a:endParaRPr lang="en-US" sz="1200" dirty="0"/>
           </a:p>
@@ -8078,7 +8078,7 @@
                 <a:ea typeface="Arial" pitchFamily="34" charset="-122"/>
                 <a:cs typeface="Arial" pitchFamily="34" charset="-120"/>
               </a:rPr>
-              <a:t>高評価率 54.4% → 目標 59.4%</a:t>
+              <a:t>高評価率 53.3% → 目標 58.3%</a:t>
             </a:r>
             <a:endParaRPr lang="en-US" sz="1200" dirty="0"/>
           </a:p>
@@ -8095,7 +8095,7 @@
                 <a:ea typeface="Arial" pitchFamily="34" charset="-122"/>
                 <a:cs typeface="Arial" pitchFamily="34" charset="-120"/>
               </a:rPr>
-              <a:t>低評価率 20.0% → 目標 18.0%</a:t>
+              <a:t>低評価率 20.7% → 目標 18.7%</a:t>
             </a:r>
             <a:endParaRPr lang="en-US" sz="1200" dirty="0"/>
           </a:p>

--- a/納品レポート/ホテル別レポート/chisan_口コミ分析レポート.pptx
+++ b/納品レポート/ホテル別レポート/chisan_口コミ分析レポート.pptx
@@ -183,16 +183,16 @@
                     <c:v>じゃらん</c:v>
                   </c:pt>
                   <c:pt idx="1">
-                    <c:v>Google</c:v>
+                    <c:v>Agoda</c:v>
                   </c:pt>
                   <c:pt idx="2">
-                    <c:v>Agoda</c:v>
+                    <c:v>Booking.com</c:v>
                   </c:pt>
                   <c:pt idx="3">
-                    <c:v>Booking.com</c:v>
+                    <c:v>楽天トラベル</c:v>
                   </c:pt>
                   <c:pt idx="4">
-                    <c:v>楽天トラベル</c:v>
+                    <c:v>Google</c:v>
                   </c:pt>
                   <c:pt idx="5">
                     <c:v>Trip.com</c:v>
@@ -208,19 +208,19 @@
                 <c:formatCode>General</c:formatCode>
                 <c:ptCount val="6"/>
                 <c:pt idx="0">
-                  <c:v>7</c:v>
+                  <c:v>7.43</c:v>
                 </c:pt>
                 <c:pt idx="1">
-                  <c:v>6.71</c:v>
+                  <c:v>6.67</c:v>
                 </c:pt>
                 <c:pt idx="2">
-                  <c:v>6.67</c:v>
+                  <c:v>6.6</c:v>
                 </c:pt>
                 <c:pt idx="3">
-                  <c:v>6.6</c:v>
+                  <c:v>6.4</c:v>
                 </c:pt>
                 <c:pt idx="4">
-                  <c:v>6.4</c:v>
+                  <c:v>6.38</c:v>
                 </c:pt>
                 <c:pt idx="5">
                   <c:v>6</c:v>
@@ -566,13 +566,13 @@
               <c:numCache>
                 <c:ptCount val="3"/>
                 <c:pt idx="0">
-                  <c:v>27</c:v>
+                  <c:v>29</c:v>
                 </c:pt>
                 <c:pt idx="1">
                   <c:v>19</c:v>
                 </c:pt>
                 <c:pt idx="2">
-                  <c:v>12</c:v>
+                  <c:v>15</c:v>
                 </c:pt>
               </c:numCache>
             </c:numRef>
@@ -809,7 +809,7 @@
                 <c:formatCode>General</c:formatCode>
                 <c:ptCount val="8"/>
                 <c:pt idx="0">
-                  <c:v>7</c:v>
+                  <c:v>9</c:v>
                 </c:pt>
                 <c:pt idx="1">
                   <c:v>20</c:v>
@@ -824,13 +824,13 @@
                   <c:v>2</c:v>
                 </c:pt>
                 <c:pt idx="5">
-                  <c:v>5</c:v>
+                  <c:v>7</c:v>
                 </c:pt>
                 <c:pt idx="6">
                   <c:v>2</c:v>
                 </c:pt>
                 <c:pt idx="7">
-                  <c:v>5</c:v>
+                  <c:v>6</c:v>
                 </c:pt>
               </c:numCache>
             </c:numRef>
@@ -2781,7 +2781,7 @@
                 <a:ea typeface="Arial" pitchFamily="34" charset="-122"/>
                 <a:cs typeface="Arial" pitchFamily="34" charset="-120"/>
               </a:rPr>
-              <a:t>レビュー総数：58件（6サイト）</a:t>
+              <a:t>レビュー総数：63件（6サイト）</a:t>
             </a:r>
             <a:endParaRPr lang="en-US" sz="1000" dirty="0"/>
           </a:p>
@@ -2801,7 +2801,7 @@
                 <a:ea typeface="Arial" pitchFamily="34" charset="-122"/>
                 <a:cs typeface="Arial" pitchFamily="34" charset="-120"/>
               </a:rPr>
-              <a:t>作成日：2026年4月2日</a:t>
+              <a:t>作成日：2026年4月5日</a:t>
             </a:r>
             <a:endParaRPr lang="en-US" sz="1000" dirty="0"/>
           </a:p>
@@ -3347,7 +3347,7 @@
                           <a:ea typeface="Arial" pitchFamily="34" charset="-122"/>
                           <a:cs typeface="Arial" pitchFamily="34" charset="-120"/>
                         </a:rPr>
-                        <a:t>6.57点</a:t>
+                        <a:t>6.52点</a:t>
                       </a:r>
                       <a:endParaRPr lang="en-US" sz="1000" dirty="0">
                         <a:latin typeface="Arial" charset="0"/>
@@ -3415,7 +3415,7 @@
                           <a:ea typeface="Arial" pitchFamily="34" charset="-122"/>
                           <a:cs typeface="Arial" pitchFamily="34" charset="-120"/>
                         </a:rPr>
-                        <a:t>7.1点以上</a:t>
+                        <a:t>7.0点以上</a:t>
                       </a:r>
                       <a:endParaRPr lang="en-US" sz="1000" dirty="0">
                         <a:latin typeface="Arial" charset="0"/>
@@ -3621,7 +3621,7 @@
                           <a:ea typeface="Arial" pitchFamily="34" charset="-122"/>
                           <a:cs typeface="Arial" pitchFamily="34" charset="-120"/>
                         </a:rPr>
-                        <a:t>46.6%</a:t>
+                        <a:t>46.0%</a:t>
                       </a:r>
                       <a:endParaRPr lang="en-US" sz="1000" dirty="0">
                         <a:latin typeface="Arial" charset="0"/>
@@ -3689,7 +3689,7 @@
                           <a:ea typeface="Arial" pitchFamily="34" charset="-122"/>
                           <a:cs typeface="Arial" pitchFamily="34" charset="-120"/>
                         </a:rPr>
-                        <a:t>57%以上</a:t>
+                        <a:t>56%以上</a:t>
                       </a:r>
                       <a:endParaRPr lang="en-US" sz="1000" dirty="0">
                         <a:latin typeface="Arial" charset="0"/>
@@ -3895,7 +3895,7 @@
                           <a:ea typeface="Arial" pitchFamily="34" charset="-122"/>
                           <a:cs typeface="Arial" pitchFamily="34" charset="-120"/>
                         </a:rPr>
-                        <a:t>20.7%</a:t>
+                        <a:t>23.8%</a:t>
                       </a:r>
                       <a:endParaRPr lang="en-US" sz="1000" dirty="0">
                         <a:latin typeface="Arial" charset="0"/>
@@ -3963,7 +3963,7 @@
                           <a:ea typeface="Arial" pitchFamily="34" charset="-122"/>
                           <a:cs typeface="Arial" pitchFamily="34" charset="-120"/>
                         </a:rPr>
-                        <a:t>16%以下</a:t>
+                        <a:t>19%以下</a:t>
                       </a:r>
                       <a:endParaRPr lang="en-US" sz="1000" dirty="0">
                         <a:latin typeface="Arial" charset="0"/>
@@ -5356,7 +5356,7 @@
                 <a:ea typeface="Arial" pitchFamily="34" charset="-122"/>
                 <a:cs typeface="Arial" pitchFamily="34" charset="-120"/>
               </a:rPr>
-              <a:t>6.57</a:t>
+              <a:t>6.52</a:t>
             </a:r>
             <a:endParaRPr lang="en-US" sz="3200" dirty="0"/>
           </a:p>
@@ -5481,7 +5481,7 @@
                 <a:ea typeface="Arial" pitchFamily="34" charset="-122"/>
                 <a:cs typeface="Arial" pitchFamily="34" charset="-120"/>
               </a:rPr>
-              <a:t>46.6%</a:t>
+              <a:t>46.0%</a:t>
             </a:r>
             <a:endParaRPr lang="en-US" sz="3200" dirty="0"/>
           </a:p>
@@ -5606,7 +5606,7 @@
                 <a:ea typeface="Arial" pitchFamily="34" charset="-122"/>
                 <a:cs typeface="Arial" pitchFamily="34" charset="-120"/>
               </a:rPr>
-              <a:t>20.7%</a:t>
+              <a:t>23.8%</a:t>
             </a:r>
             <a:endParaRPr lang="en-US" sz="3200" dirty="0"/>
           </a:p>
@@ -5731,7 +5731,7 @@
                 <a:ea typeface="Arial" pitchFamily="34" charset="-122"/>
                 <a:cs typeface="Arial" pitchFamily="34" charset="-120"/>
               </a:rPr>
-              <a:t>58件</a:t>
+              <a:t>63件</a:t>
             </a:r>
             <a:endParaRPr lang="en-US" sz="3200" dirty="0"/>
           </a:p>
@@ -5879,7 +5879,7 @@
                 <a:ea typeface="Arial" pitchFamily="34" charset="-122"/>
                 <a:cs typeface="Arial" pitchFamily="34" charset="-120"/>
               </a:rPr>
-              <a:t>  駅が近いのと、コンビニがすぐ近くにあるのが嬉しい</a:t>
+              <a:t>  การเดินทางสะดวกมากๆและที่พักอยู่มนทำเลที่ดี พนักงานบริการ...</a:t>
             </a:r>
             <a:endParaRPr lang="en-US" sz="1100" dirty="0"/>
           </a:p>
@@ -5959,7 +5959,7 @@
                 <a:ea typeface="Arial" pitchFamily="34" charset="-122"/>
                 <a:cs typeface="Arial" pitchFamily="34" charset="-120"/>
               </a:rPr>
-              <a:t>  最低限のアメニティで手頃な価格で宿泊できるので良い</a:t>
+              <a:t>  設備が古く、サービスも良くないです</a:t>
             </a:r>
             <a:endParaRPr lang="en-US" sz="1100" dirty="0"/>
           </a:p>
@@ -6540,7 +6540,7 @@
                 <a:ea typeface="Arial" pitchFamily="34" charset="-122"/>
                 <a:cs typeface="Arial" pitchFamily="34" charset="-120"/>
               </a:rPr>
-              <a:t>6.57</a:t>
+              <a:t>6.52</a:t>
             </a:r>
             <a:endParaRPr lang="en-US" sz="3200" dirty="0"/>
           </a:p>
@@ -6665,7 +6665,7 @@
                 <a:ea typeface="Arial" pitchFamily="34" charset="-122"/>
                 <a:cs typeface="Arial" pitchFamily="34" charset="-120"/>
               </a:rPr>
-              <a:t>46.6%</a:t>
+              <a:t>46.0%</a:t>
             </a:r>
             <a:endParaRPr lang="en-US" sz="3200" dirty="0"/>
           </a:p>
@@ -6790,7 +6790,7 @@
                 <a:ea typeface="Arial" pitchFamily="34" charset="-122"/>
                 <a:cs typeface="Arial" pitchFamily="34" charset="-120"/>
               </a:rPr>
-              <a:t>20.7%</a:t>
+              <a:t>23.8%</a:t>
             </a:r>
             <a:endParaRPr lang="en-US" sz="3200" dirty="0"/>
           </a:p>
@@ -6915,7 +6915,7 @@
                 <a:ea typeface="Arial" pitchFamily="34" charset="-122"/>
                 <a:cs typeface="Arial" pitchFamily="34" charset="-120"/>
               </a:rPr>
-              <a:t>58件</a:t>
+              <a:t>63件</a:t>
             </a:r>
             <a:endParaRPr lang="en-US" sz="3200" dirty="0"/>
           </a:p>
@@ -7336,7 +7336,7 @@
                 <a:ea typeface="Arial" pitchFamily="34" charset="-122"/>
                 <a:cs typeface="Arial" pitchFamily="34" charset="-120"/>
               </a:rPr>
-              <a:t>じゃらん(7.00)が最高スコア。</a:t>
+              <a:t>じゃらん(7.43)が最高スコア。</a:t>
             </a:r>
             <a:endParaRPr lang="en-US" sz="1100" dirty="0"/>
           </a:p>
@@ -7894,7 +7894,7 @@
                           <a:ea typeface="Arial" pitchFamily="34" charset="-122"/>
                           <a:cs typeface="Arial" pitchFamily="34" charset="-120"/>
                         </a:rPr>
-                        <a:t>6</a:t>
+                        <a:t>7</a:t>
                       </a:r>
                       <a:endParaRPr lang="en-US" sz="900" dirty="0">
                         <a:latin typeface="Arial" charset="0"/>
@@ -7962,7 +7962,7 @@
                           <a:ea typeface="Arial" pitchFamily="34" charset="-122"/>
                           <a:cs typeface="Arial" pitchFamily="34" charset="-120"/>
                         </a:rPr>
-                        <a:t>3.5</a:t>
+                        <a:t>3.71</a:t>
                       </a:r>
                       <a:endParaRPr lang="en-US" sz="900" dirty="0">
                         <a:latin typeface="Arial" charset="0"/>
@@ -8098,7 +8098,7 @@
                           <a:ea typeface="Arial" pitchFamily="34" charset="-122"/>
                           <a:cs typeface="Arial" pitchFamily="34" charset="-120"/>
                         </a:rPr>
-                        <a:t>7</a:t>
+                        <a:t>7.43</a:t>
                       </a:r>
                       <a:endParaRPr lang="en-US" sz="900" dirty="0">
                         <a:latin typeface="Arial" charset="0"/>
@@ -8168,7 +8168,7 @@
                           <a:ea typeface="Arial" pitchFamily="34" charset="-122"/>
                           <a:cs typeface="Arial" pitchFamily="34" charset="-120"/>
                         </a:rPr>
-                        <a:t>Google</a:t>
+                        <a:t>Agoda</a:t>
                       </a:r>
                       <a:endParaRPr lang="en-US" sz="900" dirty="0">
                         <a:latin typeface="Arial" charset="0"/>
@@ -8236,7 +8236,7 @@
                           <a:ea typeface="Arial" pitchFamily="34" charset="-122"/>
                           <a:cs typeface="Arial" pitchFamily="34" charset="-120"/>
                         </a:rPr>
-                        <a:t>14</a:t>
+                        <a:t>9</a:t>
                       </a:r>
                       <a:endParaRPr lang="en-US" sz="900" dirty="0">
                         <a:latin typeface="Arial" charset="0"/>
@@ -8304,7 +8304,691 @@
                           <a:ea typeface="Arial" pitchFamily="34" charset="-122"/>
                           <a:cs typeface="Arial" pitchFamily="34" charset="-120"/>
                         </a:rPr>
-                        <a:t>3.36</a:t>
+                        <a:t>6.67</a:t>
+                      </a:r>
+                      <a:endParaRPr lang="en-US" sz="900" dirty="0">
+                        <a:latin typeface="Arial" charset="0"/>
+                        <a:ea typeface="Arial" charset="0"/>
+                        <a:cs typeface="Arial" charset="0"/>
+                      </a:endParaRPr>
+                    </a:p>
+                  </a:txBody>
+                  <a:tcPr marL="91440" marR="91440" marT="45720" marB="45720">
+                    <a:lnL w="6350" cap="flat" cmpd="sng" algn="ctr">
+                      <a:solidFill>
+                        <a:srgbClr val="CBD5E1"/>
+                      </a:solidFill>
+                      <a:prstDash val="solid"/>
+                      <a:round/>
+                      <a:headEnd type="none" w="med" len="med"/>
+                      <a:tailEnd type="none" w="med" len="med"/>
+                    </a:lnL>
+                    <a:lnR w="6350" cap="flat" cmpd="sng" algn="ctr">
+                      <a:solidFill>
+                        <a:srgbClr val="CBD5E1"/>
+                      </a:solidFill>
+                      <a:prstDash val="solid"/>
+                      <a:round/>
+                      <a:headEnd type="none" w="med" len="med"/>
+                      <a:tailEnd type="none" w="med" len="med"/>
+                    </a:lnR>
+                    <a:lnT w="6350" cap="flat" cmpd="sng" algn="ctr">
+                      <a:solidFill>
+                        <a:srgbClr val="CBD5E1"/>
+                      </a:solidFill>
+                      <a:prstDash val="solid"/>
+                      <a:round/>
+                      <a:headEnd type="none" w="med" len="med"/>
+                      <a:tailEnd type="none" w="med" len="med"/>
+                    </a:lnT>
+                    <a:lnB w="6350" cap="flat" cmpd="sng" algn="ctr">
+                      <a:solidFill>
+                        <a:srgbClr val="CBD5E1"/>
+                      </a:solidFill>
+                      <a:prstDash val="solid"/>
+                      <a:round/>
+                      <a:headEnd type="none" w="med" len="med"/>
+                      <a:tailEnd type="none" w="med" len="med"/>
+                    </a:lnB>
+                    <a:solidFill>
+                      <a:srgbClr val="FFFFFF"/>
+                    </a:solidFill>
+                  </a:tcPr>
+                </a:tc>
+                <a:tc>
+                  <a:txBody>
+                    <a:bodyPr/>
+                    <a:lstStyle/>
+                    <a:p>
+                      <a:pPr algn="ctr" indent="0" marL="0">
+                        <a:buNone/>
+                      </a:pPr>
+                      <a:r>
+                        <a:rPr lang="en-US" sz="900" dirty="0">
+                          <a:solidFill>
+                            <a:srgbClr val="000000"/>
+                          </a:solidFill>
+                          <a:latin typeface="Arial" pitchFamily="34" charset="0"/>
+                          <a:ea typeface="Arial" pitchFamily="34" charset="-122"/>
+                          <a:cs typeface="Arial" pitchFamily="34" charset="-120"/>
+                        </a:rPr>
+                        <a:t>/10</a:t>
+                      </a:r>
+                      <a:endParaRPr lang="en-US" sz="900" dirty="0">
+                        <a:latin typeface="Arial" charset="0"/>
+                        <a:ea typeface="Arial" charset="0"/>
+                        <a:cs typeface="Arial" charset="0"/>
+                      </a:endParaRPr>
+                    </a:p>
+                  </a:txBody>
+                  <a:tcPr marL="91440" marR="91440" marT="45720" marB="45720">
+                    <a:lnL w="6350" cap="flat" cmpd="sng" algn="ctr">
+                      <a:solidFill>
+                        <a:srgbClr val="CBD5E1"/>
+                      </a:solidFill>
+                      <a:prstDash val="solid"/>
+                      <a:round/>
+                      <a:headEnd type="none" w="med" len="med"/>
+                      <a:tailEnd type="none" w="med" len="med"/>
+                    </a:lnL>
+                    <a:lnR w="6350" cap="flat" cmpd="sng" algn="ctr">
+                      <a:solidFill>
+                        <a:srgbClr val="CBD5E1"/>
+                      </a:solidFill>
+                      <a:prstDash val="solid"/>
+                      <a:round/>
+                      <a:headEnd type="none" w="med" len="med"/>
+                      <a:tailEnd type="none" w="med" len="med"/>
+                    </a:lnR>
+                    <a:lnT w="6350" cap="flat" cmpd="sng" algn="ctr">
+                      <a:solidFill>
+                        <a:srgbClr val="CBD5E1"/>
+                      </a:solidFill>
+                      <a:prstDash val="solid"/>
+                      <a:round/>
+                      <a:headEnd type="none" w="med" len="med"/>
+                      <a:tailEnd type="none" w="med" len="med"/>
+                    </a:lnT>
+                    <a:lnB w="6350" cap="flat" cmpd="sng" algn="ctr">
+                      <a:solidFill>
+                        <a:srgbClr val="CBD5E1"/>
+                      </a:solidFill>
+                      <a:prstDash val="solid"/>
+                      <a:round/>
+                      <a:headEnd type="none" w="med" len="med"/>
+                      <a:tailEnd type="none" w="med" len="med"/>
+                    </a:lnB>
+                    <a:solidFill>
+                      <a:srgbClr val="FFFFFF"/>
+                    </a:solidFill>
+                  </a:tcPr>
+                </a:tc>
+                <a:tc>
+                  <a:txBody>
+                    <a:bodyPr/>
+                    <a:lstStyle/>
+                    <a:p>
+                      <a:pPr algn="ctr" indent="0" marL="0">
+                        <a:buNone/>
+                      </a:pPr>
+                      <a:r>
+                        <a:rPr lang="en-US" sz="900" dirty="0">
+                          <a:solidFill>
+                            <a:srgbClr val="000000"/>
+                          </a:solidFill>
+                          <a:latin typeface="Arial" pitchFamily="34" charset="0"/>
+                          <a:ea typeface="Arial" pitchFamily="34" charset="-122"/>
+                          <a:cs typeface="Arial" pitchFamily="34" charset="-120"/>
+                        </a:rPr>
+                        <a:t>6.67</a:t>
+                      </a:r>
+                      <a:endParaRPr lang="en-US" sz="900" dirty="0">
+                        <a:latin typeface="Arial" charset="0"/>
+                        <a:ea typeface="Arial" charset="0"/>
+                        <a:cs typeface="Arial" charset="0"/>
+                      </a:endParaRPr>
+                    </a:p>
+                  </a:txBody>
+                  <a:tcPr marL="91440" marR="91440" marT="45720" marB="45720">
+                    <a:lnL w="6350" cap="flat" cmpd="sng" algn="ctr">
+                      <a:solidFill>
+                        <a:srgbClr val="CBD5E1"/>
+                      </a:solidFill>
+                      <a:prstDash val="solid"/>
+                      <a:round/>
+                      <a:headEnd type="none" w="med" len="med"/>
+                      <a:tailEnd type="none" w="med" len="med"/>
+                    </a:lnL>
+                    <a:lnR w="6350" cap="flat" cmpd="sng" algn="ctr">
+                      <a:solidFill>
+                        <a:srgbClr val="CBD5E1"/>
+                      </a:solidFill>
+                      <a:prstDash val="solid"/>
+                      <a:round/>
+                      <a:headEnd type="none" w="med" len="med"/>
+                      <a:tailEnd type="none" w="med" len="med"/>
+                    </a:lnR>
+                    <a:lnT w="6350" cap="flat" cmpd="sng" algn="ctr">
+                      <a:solidFill>
+                        <a:srgbClr val="CBD5E1"/>
+                      </a:solidFill>
+                      <a:prstDash val="solid"/>
+                      <a:round/>
+                      <a:headEnd type="none" w="med" len="med"/>
+                      <a:tailEnd type="none" w="med" len="med"/>
+                    </a:lnT>
+                    <a:lnB w="6350" cap="flat" cmpd="sng" algn="ctr">
+                      <a:solidFill>
+                        <a:srgbClr val="CBD5E1"/>
+                      </a:solidFill>
+                      <a:prstDash val="solid"/>
+                      <a:round/>
+                      <a:headEnd type="none" w="med" len="med"/>
+                      <a:tailEnd type="none" w="med" len="med"/>
+                    </a:lnB>
+                    <a:solidFill>
+                      <a:srgbClr val="FFFFFF"/>
+                    </a:solidFill>
+                  </a:tcPr>
+                </a:tc>
+              </a:tr>
+              <a:tr h="201168">
+                <a:tc>
+                  <a:txBody>
+                    <a:bodyPr/>
+                    <a:lstStyle/>
+                    <a:p>
+                      <a:pPr algn="ctr" indent="0" marL="0">
+                        <a:buNone/>
+                      </a:pPr>
+                      <a:r>
+                        <a:rPr lang="en-US" sz="900" dirty="0">
+                          <a:solidFill>
+                            <a:srgbClr val="000000"/>
+                          </a:solidFill>
+                          <a:latin typeface="Arial" pitchFamily="34" charset="0"/>
+                          <a:ea typeface="Arial" pitchFamily="34" charset="-122"/>
+                          <a:cs typeface="Arial" pitchFamily="34" charset="-120"/>
+                        </a:rPr>
+                        <a:t>Booking.com</a:t>
+                      </a:r>
+                      <a:endParaRPr lang="en-US" sz="900" dirty="0">
+                        <a:latin typeface="Arial" charset="0"/>
+                        <a:ea typeface="Arial" charset="0"/>
+                        <a:cs typeface="Arial" charset="0"/>
+                      </a:endParaRPr>
+                    </a:p>
+                  </a:txBody>
+                  <a:tcPr marL="91440" marR="91440" marT="45720" marB="45720">
+                    <a:lnL w="6350" cap="flat" cmpd="sng" algn="ctr">
+                      <a:solidFill>
+                        <a:srgbClr val="CBD5E1"/>
+                      </a:solidFill>
+                      <a:prstDash val="solid"/>
+                      <a:round/>
+                      <a:headEnd type="none" w="med" len="med"/>
+                      <a:tailEnd type="none" w="med" len="med"/>
+                    </a:lnL>
+                    <a:lnR w="6350" cap="flat" cmpd="sng" algn="ctr">
+                      <a:solidFill>
+                        <a:srgbClr val="CBD5E1"/>
+                      </a:solidFill>
+                      <a:prstDash val="solid"/>
+                      <a:round/>
+                      <a:headEnd type="none" w="med" len="med"/>
+                      <a:tailEnd type="none" w="med" len="med"/>
+                    </a:lnR>
+                    <a:lnT w="6350" cap="flat" cmpd="sng" algn="ctr">
+                      <a:solidFill>
+                        <a:srgbClr val="CBD5E1"/>
+                      </a:solidFill>
+                      <a:prstDash val="solid"/>
+                      <a:round/>
+                      <a:headEnd type="none" w="med" len="med"/>
+                      <a:tailEnd type="none" w="med" len="med"/>
+                    </a:lnT>
+                    <a:lnB w="6350" cap="flat" cmpd="sng" algn="ctr">
+                      <a:solidFill>
+                        <a:srgbClr val="CBD5E1"/>
+                      </a:solidFill>
+                      <a:prstDash val="solid"/>
+                      <a:round/>
+                      <a:headEnd type="none" w="med" len="med"/>
+                      <a:tailEnd type="none" w="med" len="med"/>
+                    </a:lnB>
+                    <a:solidFill>
+                      <a:srgbClr val="E8EFF8"/>
+                    </a:solidFill>
+                  </a:tcPr>
+                </a:tc>
+                <a:tc>
+                  <a:txBody>
+                    <a:bodyPr/>
+                    <a:lstStyle/>
+                    <a:p>
+                      <a:pPr algn="ctr" indent="0" marL="0">
+                        <a:buNone/>
+                      </a:pPr>
+                      <a:r>
+                        <a:rPr lang="en-US" sz="900" dirty="0">
+                          <a:solidFill>
+                            <a:srgbClr val="000000"/>
+                          </a:solidFill>
+                          <a:latin typeface="Arial" pitchFamily="34" charset="0"/>
+                          <a:ea typeface="Arial" pitchFamily="34" charset="-122"/>
+                          <a:cs typeface="Arial" pitchFamily="34" charset="-120"/>
+                        </a:rPr>
+                        <a:t>5</a:t>
+                      </a:r>
+                      <a:endParaRPr lang="en-US" sz="900" dirty="0">
+                        <a:latin typeface="Arial" charset="0"/>
+                        <a:ea typeface="Arial" charset="0"/>
+                        <a:cs typeface="Arial" charset="0"/>
+                      </a:endParaRPr>
+                    </a:p>
+                  </a:txBody>
+                  <a:tcPr marL="91440" marR="91440" marT="45720" marB="45720">
+                    <a:lnL w="6350" cap="flat" cmpd="sng" algn="ctr">
+                      <a:solidFill>
+                        <a:srgbClr val="CBD5E1"/>
+                      </a:solidFill>
+                      <a:prstDash val="solid"/>
+                      <a:round/>
+                      <a:headEnd type="none" w="med" len="med"/>
+                      <a:tailEnd type="none" w="med" len="med"/>
+                    </a:lnL>
+                    <a:lnR w="6350" cap="flat" cmpd="sng" algn="ctr">
+                      <a:solidFill>
+                        <a:srgbClr val="CBD5E1"/>
+                      </a:solidFill>
+                      <a:prstDash val="solid"/>
+                      <a:round/>
+                      <a:headEnd type="none" w="med" len="med"/>
+                      <a:tailEnd type="none" w="med" len="med"/>
+                    </a:lnR>
+                    <a:lnT w="6350" cap="flat" cmpd="sng" algn="ctr">
+                      <a:solidFill>
+                        <a:srgbClr val="CBD5E1"/>
+                      </a:solidFill>
+                      <a:prstDash val="solid"/>
+                      <a:round/>
+                      <a:headEnd type="none" w="med" len="med"/>
+                      <a:tailEnd type="none" w="med" len="med"/>
+                    </a:lnT>
+                    <a:lnB w="6350" cap="flat" cmpd="sng" algn="ctr">
+                      <a:solidFill>
+                        <a:srgbClr val="CBD5E1"/>
+                      </a:solidFill>
+                      <a:prstDash val="solid"/>
+                      <a:round/>
+                      <a:headEnd type="none" w="med" len="med"/>
+                      <a:tailEnd type="none" w="med" len="med"/>
+                    </a:lnB>
+                    <a:solidFill>
+                      <a:srgbClr val="E8EFF8"/>
+                    </a:solidFill>
+                  </a:tcPr>
+                </a:tc>
+                <a:tc>
+                  <a:txBody>
+                    <a:bodyPr/>
+                    <a:lstStyle/>
+                    <a:p>
+                      <a:pPr algn="ctr" indent="0" marL="0">
+                        <a:buNone/>
+                      </a:pPr>
+                      <a:r>
+                        <a:rPr lang="en-US" sz="900" dirty="0">
+                          <a:solidFill>
+                            <a:srgbClr val="000000"/>
+                          </a:solidFill>
+                          <a:latin typeface="Arial" pitchFamily="34" charset="0"/>
+                          <a:ea typeface="Arial" pitchFamily="34" charset="-122"/>
+                          <a:cs typeface="Arial" pitchFamily="34" charset="-120"/>
+                        </a:rPr>
+                        <a:t>6.6</a:t>
+                      </a:r>
+                      <a:endParaRPr lang="en-US" sz="900" dirty="0">
+                        <a:latin typeface="Arial" charset="0"/>
+                        <a:ea typeface="Arial" charset="0"/>
+                        <a:cs typeface="Arial" charset="0"/>
+                      </a:endParaRPr>
+                    </a:p>
+                  </a:txBody>
+                  <a:tcPr marL="91440" marR="91440" marT="45720" marB="45720">
+                    <a:lnL w="6350" cap="flat" cmpd="sng" algn="ctr">
+                      <a:solidFill>
+                        <a:srgbClr val="CBD5E1"/>
+                      </a:solidFill>
+                      <a:prstDash val="solid"/>
+                      <a:round/>
+                      <a:headEnd type="none" w="med" len="med"/>
+                      <a:tailEnd type="none" w="med" len="med"/>
+                    </a:lnL>
+                    <a:lnR w="6350" cap="flat" cmpd="sng" algn="ctr">
+                      <a:solidFill>
+                        <a:srgbClr val="CBD5E1"/>
+                      </a:solidFill>
+                      <a:prstDash val="solid"/>
+                      <a:round/>
+                      <a:headEnd type="none" w="med" len="med"/>
+                      <a:tailEnd type="none" w="med" len="med"/>
+                    </a:lnR>
+                    <a:lnT w="6350" cap="flat" cmpd="sng" algn="ctr">
+                      <a:solidFill>
+                        <a:srgbClr val="CBD5E1"/>
+                      </a:solidFill>
+                      <a:prstDash val="solid"/>
+                      <a:round/>
+                      <a:headEnd type="none" w="med" len="med"/>
+                      <a:tailEnd type="none" w="med" len="med"/>
+                    </a:lnT>
+                    <a:lnB w="6350" cap="flat" cmpd="sng" algn="ctr">
+                      <a:solidFill>
+                        <a:srgbClr val="CBD5E1"/>
+                      </a:solidFill>
+                      <a:prstDash val="solid"/>
+                      <a:round/>
+                      <a:headEnd type="none" w="med" len="med"/>
+                      <a:tailEnd type="none" w="med" len="med"/>
+                    </a:lnB>
+                    <a:solidFill>
+                      <a:srgbClr val="E8EFF8"/>
+                    </a:solidFill>
+                  </a:tcPr>
+                </a:tc>
+                <a:tc>
+                  <a:txBody>
+                    <a:bodyPr/>
+                    <a:lstStyle/>
+                    <a:p>
+                      <a:pPr algn="ctr" indent="0" marL="0">
+                        <a:buNone/>
+                      </a:pPr>
+                      <a:r>
+                        <a:rPr lang="en-US" sz="900" dirty="0">
+                          <a:solidFill>
+                            <a:srgbClr val="000000"/>
+                          </a:solidFill>
+                          <a:latin typeface="Arial" pitchFamily="34" charset="0"/>
+                          <a:ea typeface="Arial" pitchFamily="34" charset="-122"/>
+                          <a:cs typeface="Arial" pitchFamily="34" charset="-120"/>
+                        </a:rPr>
+                        <a:t>/10</a:t>
+                      </a:r>
+                      <a:endParaRPr lang="en-US" sz="900" dirty="0">
+                        <a:latin typeface="Arial" charset="0"/>
+                        <a:ea typeface="Arial" charset="0"/>
+                        <a:cs typeface="Arial" charset="0"/>
+                      </a:endParaRPr>
+                    </a:p>
+                  </a:txBody>
+                  <a:tcPr marL="91440" marR="91440" marT="45720" marB="45720">
+                    <a:lnL w="6350" cap="flat" cmpd="sng" algn="ctr">
+                      <a:solidFill>
+                        <a:srgbClr val="CBD5E1"/>
+                      </a:solidFill>
+                      <a:prstDash val="solid"/>
+                      <a:round/>
+                      <a:headEnd type="none" w="med" len="med"/>
+                      <a:tailEnd type="none" w="med" len="med"/>
+                    </a:lnL>
+                    <a:lnR w="6350" cap="flat" cmpd="sng" algn="ctr">
+                      <a:solidFill>
+                        <a:srgbClr val="CBD5E1"/>
+                      </a:solidFill>
+                      <a:prstDash val="solid"/>
+                      <a:round/>
+                      <a:headEnd type="none" w="med" len="med"/>
+                      <a:tailEnd type="none" w="med" len="med"/>
+                    </a:lnR>
+                    <a:lnT w="6350" cap="flat" cmpd="sng" algn="ctr">
+                      <a:solidFill>
+                        <a:srgbClr val="CBD5E1"/>
+                      </a:solidFill>
+                      <a:prstDash val="solid"/>
+                      <a:round/>
+                      <a:headEnd type="none" w="med" len="med"/>
+                      <a:tailEnd type="none" w="med" len="med"/>
+                    </a:lnT>
+                    <a:lnB w="6350" cap="flat" cmpd="sng" algn="ctr">
+                      <a:solidFill>
+                        <a:srgbClr val="CBD5E1"/>
+                      </a:solidFill>
+                      <a:prstDash val="solid"/>
+                      <a:round/>
+                      <a:headEnd type="none" w="med" len="med"/>
+                      <a:tailEnd type="none" w="med" len="med"/>
+                    </a:lnB>
+                    <a:solidFill>
+                      <a:srgbClr val="E8EFF8"/>
+                    </a:solidFill>
+                  </a:tcPr>
+                </a:tc>
+                <a:tc>
+                  <a:txBody>
+                    <a:bodyPr/>
+                    <a:lstStyle/>
+                    <a:p>
+                      <a:pPr algn="ctr" indent="0" marL="0">
+                        <a:buNone/>
+                      </a:pPr>
+                      <a:r>
+                        <a:rPr lang="en-US" sz="900" dirty="0">
+                          <a:solidFill>
+                            <a:srgbClr val="000000"/>
+                          </a:solidFill>
+                          <a:latin typeface="Arial" pitchFamily="34" charset="0"/>
+                          <a:ea typeface="Arial" pitchFamily="34" charset="-122"/>
+                          <a:cs typeface="Arial" pitchFamily="34" charset="-120"/>
+                        </a:rPr>
+                        <a:t>6.6</a:t>
+                      </a:r>
+                      <a:endParaRPr lang="en-US" sz="900" dirty="0">
+                        <a:latin typeface="Arial" charset="0"/>
+                        <a:ea typeface="Arial" charset="0"/>
+                        <a:cs typeface="Arial" charset="0"/>
+                      </a:endParaRPr>
+                    </a:p>
+                  </a:txBody>
+                  <a:tcPr marL="91440" marR="91440" marT="45720" marB="45720">
+                    <a:lnL w="6350" cap="flat" cmpd="sng" algn="ctr">
+                      <a:solidFill>
+                        <a:srgbClr val="CBD5E1"/>
+                      </a:solidFill>
+                      <a:prstDash val="solid"/>
+                      <a:round/>
+                      <a:headEnd type="none" w="med" len="med"/>
+                      <a:tailEnd type="none" w="med" len="med"/>
+                    </a:lnL>
+                    <a:lnR w="6350" cap="flat" cmpd="sng" algn="ctr">
+                      <a:solidFill>
+                        <a:srgbClr val="CBD5E1"/>
+                      </a:solidFill>
+                      <a:prstDash val="solid"/>
+                      <a:round/>
+                      <a:headEnd type="none" w="med" len="med"/>
+                      <a:tailEnd type="none" w="med" len="med"/>
+                    </a:lnR>
+                    <a:lnT w="6350" cap="flat" cmpd="sng" algn="ctr">
+                      <a:solidFill>
+                        <a:srgbClr val="CBD5E1"/>
+                      </a:solidFill>
+                      <a:prstDash val="solid"/>
+                      <a:round/>
+                      <a:headEnd type="none" w="med" len="med"/>
+                      <a:tailEnd type="none" w="med" len="med"/>
+                    </a:lnT>
+                    <a:lnB w="6350" cap="flat" cmpd="sng" algn="ctr">
+                      <a:solidFill>
+                        <a:srgbClr val="CBD5E1"/>
+                      </a:solidFill>
+                      <a:prstDash val="solid"/>
+                      <a:round/>
+                      <a:headEnd type="none" w="med" len="med"/>
+                      <a:tailEnd type="none" w="med" len="med"/>
+                    </a:lnB>
+                    <a:solidFill>
+                      <a:srgbClr val="E8EFF8"/>
+                    </a:solidFill>
+                  </a:tcPr>
+                </a:tc>
+              </a:tr>
+              <a:tr h="201168">
+                <a:tc>
+                  <a:txBody>
+                    <a:bodyPr/>
+                    <a:lstStyle/>
+                    <a:p>
+                      <a:pPr algn="ctr" indent="0" marL="0">
+                        <a:buNone/>
+                      </a:pPr>
+                      <a:r>
+                        <a:rPr lang="en-US" sz="900" dirty="0">
+                          <a:solidFill>
+                            <a:srgbClr val="000000"/>
+                          </a:solidFill>
+                          <a:latin typeface="Arial" pitchFamily="34" charset="0"/>
+                          <a:ea typeface="Arial" pitchFamily="34" charset="-122"/>
+                          <a:cs typeface="Arial" pitchFamily="34" charset="-120"/>
+                        </a:rPr>
+                        <a:t>楽天トラベル</a:t>
+                      </a:r>
+                      <a:endParaRPr lang="en-US" sz="900" dirty="0">
+                        <a:latin typeface="Arial" charset="0"/>
+                        <a:ea typeface="Arial" charset="0"/>
+                        <a:cs typeface="Arial" charset="0"/>
+                      </a:endParaRPr>
+                    </a:p>
+                  </a:txBody>
+                  <a:tcPr marL="91440" marR="91440" marT="45720" marB="45720">
+                    <a:lnL w="6350" cap="flat" cmpd="sng" algn="ctr">
+                      <a:solidFill>
+                        <a:srgbClr val="CBD5E1"/>
+                      </a:solidFill>
+                      <a:prstDash val="solid"/>
+                      <a:round/>
+                      <a:headEnd type="none" w="med" len="med"/>
+                      <a:tailEnd type="none" w="med" len="med"/>
+                    </a:lnL>
+                    <a:lnR w="6350" cap="flat" cmpd="sng" algn="ctr">
+                      <a:solidFill>
+                        <a:srgbClr val="CBD5E1"/>
+                      </a:solidFill>
+                      <a:prstDash val="solid"/>
+                      <a:round/>
+                      <a:headEnd type="none" w="med" len="med"/>
+                      <a:tailEnd type="none" w="med" len="med"/>
+                    </a:lnR>
+                    <a:lnT w="6350" cap="flat" cmpd="sng" algn="ctr">
+                      <a:solidFill>
+                        <a:srgbClr val="CBD5E1"/>
+                      </a:solidFill>
+                      <a:prstDash val="solid"/>
+                      <a:round/>
+                      <a:headEnd type="none" w="med" len="med"/>
+                      <a:tailEnd type="none" w="med" len="med"/>
+                    </a:lnT>
+                    <a:lnB w="6350" cap="flat" cmpd="sng" algn="ctr">
+                      <a:solidFill>
+                        <a:srgbClr val="CBD5E1"/>
+                      </a:solidFill>
+                      <a:prstDash val="solid"/>
+                      <a:round/>
+                      <a:headEnd type="none" w="med" len="med"/>
+                      <a:tailEnd type="none" w="med" len="med"/>
+                    </a:lnB>
+                    <a:solidFill>
+                      <a:srgbClr val="FFFFFF"/>
+                    </a:solidFill>
+                  </a:tcPr>
+                </a:tc>
+                <a:tc>
+                  <a:txBody>
+                    <a:bodyPr/>
+                    <a:lstStyle/>
+                    <a:p>
+                      <a:pPr algn="ctr" indent="0" marL="0">
+                        <a:buNone/>
+                      </a:pPr>
+                      <a:r>
+                        <a:rPr lang="en-US" sz="900" dirty="0">
+                          <a:solidFill>
+                            <a:srgbClr val="000000"/>
+                          </a:solidFill>
+                          <a:latin typeface="Arial" pitchFamily="34" charset="0"/>
+                          <a:ea typeface="Arial" pitchFamily="34" charset="-122"/>
+                          <a:cs typeface="Arial" pitchFamily="34" charset="-120"/>
+                        </a:rPr>
+                        <a:t>20</a:t>
+                      </a:r>
+                      <a:endParaRPr lang="en-US" sz="900" dirty="0">
+                        <a:latin typeface="Arial" charset="0"/>
+                        <a:ea typeface="Arial" charset="0"/>
+                        <a:cs typeface="Arial" charset="0"/>
+                      </a:endParaRPr>
+                    </a:p>
+                  </a:txBody>
+                  <a:tcPr marL="91440" marR="91440" marT="45720" marB="45720">
+                    <a:lnL w="6350" cap="flat" cmpd="sng" algn="ctr">
+                      <a:solidFill>
+                        <a:srgbClr val="CBD5E1"/>
+                      </a:solidFill>
+                      <a:prstDash val="solid"/>
+                      <a:round/>
+                      <a:headEnd type="none" w="med" len="med"/>
+                      <a:tailEnd type="none" w="med" len="med"/>
+                    </a:lnL>
+                    <a:lnR w="6350" cap="flat" cmpd="sng" algn="ctr">
+                      <a:solidFill>
+                        <a:srgbClr val="CBD5E1"/>
+                      </a:solidFill>
+                      <a:prstDash val="solid"/>
+                      <a:round/>
+                      <a:headEnd type="none" w="med" len="med"/>
+                      <a:tailEnd type="none" w="med" len="med"/>
+                    </a:lnR>
+                    <a:lnT w="6350" cap="flat" cmpd="sng" algn="ctr">
+                      <a:solidFill>
+                        <a:srgbClr val="CBD5E1"/>
+                      </a:solidFill>
+                      <a:prstDash val="solid"/>
+                      <a:round/>
+                      <a:headEnd type="none" w="med" len="med"/>
+                      <a:tailEnd type="none" w="med" len="med"/>
+                    </a:lnT>
+                    <a:lnB w="6350" cap="flat" cmpd="sng" algn="ctr">
+                      <a:solidFill>
+                        <a:srgbClr val="CBD5E1"/>
+                      </a:solidFill>
+                      <a:prstDash val="solid"/>
+                      <a:round/>
+                      <a:headEnd type="none" w="med" len="med"/>
+                      <a:tailEnd type="none" w="med" len="med"/>
+                    </a:lnB>
+                    <a:solidFill>
+                      <a:srgbClr val="FFFFFF"/>
+                    </a:solidFill>
+                  </a:tcPr>
+                </a:tc>
+                <a:tc>
+                  <a:txBody>
+                    <a:bodyPr/>
+                    <a:lstStyle/>
+                    <a:p>
+                      <a:pPr algn="ctr" indent="0" marL="0">
+                        <a:buNone/>
+                      </a:pPr>
+                      <a:r>
+                        <a:rPr lang="en-US" sz="900" dirty="0">
+                          <a:solidFill>
+                            <a:srgbClr val="000000"/>
+                          </a:solidFill>
+                          <a:latin typeface="Arial" pitchFamily="34" charset="0"/>
+                          <a:ea typeface="Arial" pitchFamily="34" charset="-122"/>
+                          <a:cs typeface="Arial" pitchFamily="34" charset="-120"/>
+                        </a:rPr>
+                        <a:t>3.2</a:t>
                       </a:r>
                       <a:endParaRPr lang="en-US" sz="900" dirty="0">
                         <a:latin typeface="Arial" charset="0"/>
@@ -8440,7 +9124,7 @@
                           <a:ea typeface="Arial" pitchFamily="34" charset="-122"/>
                           <a:cs typeface="Arial" pitchFamily="34" charset="-120"/>
                         </a:rPr>
-                        <a:t>6.71</a:t>
+                        <a:t>6.4</a:t>
                       </a:r>
                       <a:endParaRPr lang="en-US" sz="900" dirty="0">
                         <a:latin typeface="Arial" charset="0"/>
@@ -8510,7 +9194,7 @@
                           <a:ea typeface="Arial" pitchFamily="34" charset="-122"/>
                           <a:cs typeface="Arial" pitchFamily="34" charset="-120"/>
                         </a:rPr>
-                        <a:t>Agoda</a:t>
+                        <a:t>Google</a:t>
                       </a:r>
                       <a:endParaRPr lang="en-US" sz="900" dirty="0">
                         <a:latin typeface="Arial" charset="0"/>
@@ -8578,7 +9262,7 @@
                           <a:ea typeface="Arial" pitchFamily="34" charset="-122"/>
                           <a:cs typeface="Arial" pitchFamily="34" charset="-120"/>
                         </a:rPr>
-                        <a:t>9</a:t>
+                        <a:t>16</a:t>
                       </a:r>
                       <a:endParaRPr lang="en-US" sz="900" dirty="0">
                         <a:latin typeface="Arial" charset="0"/>
@@ -8646,691 +9330,7 @@
                           <a:ea typeface="Arial" pitchFamily="34" charset="-122"/>
                           <a:cs typeface="Arial" pitchFamily="34" charset="-120"/>
                         </a:rPr>
-                        <a:t>6.67</a:t>
-                      </a:r>
-                      <a:endParaRPr lang="en-US" sz="900" dirty="0">
-                        <a:latin typeface="Arial" charset="0"/>
-                        <a:ea typeface="Arial" charset="0"/>
-                        <a:cs typeface="Arial" charset="0"/>
-                      </a:endParaRPr>
-                    </a:p>
-                  </a:txBody>
-                  <a:tcPr marL="91440" marR="91440" marT="45720" marB="45720">
-                    <a:lnL w="6350" cap="flat" cmpd="sng" algn="ctr">
-                      <a:solidFill>
-                        <a:srgbClr val="CBD5E1"/>
-                      </a:solidFill>
-                      <a:prstDash val="solid"/>
-                      <a:round/>
-                      <a:headEnd type="none" w="med" len="med"/>
-                      <a:tailEnd type="none" w="med" len="med"/>
-                    </a:lnL>
-                    <a:lnR w="6350" cap="flat" cmpd="sng" algn="ctr">
-                      <a:solidFill>
-                        <a:srgbClr val="CBD5E1"/>
-                      </a:solidFill>
-                      <a:prstDash val="solid"/>
-                      <a:round/>
-                      <a:headEnd type="none" w="med" len="med"/>
-                      <a:tailEnd type="none" w="med" len="med"/>
-                    </a:lnR>
-                    <a:lnT w="6350" cap="flat" cmpd="sng" algn="ctr">
-                      <a:solidFill>
-                        <a:srgbClr val="CBD5E1"/>
-                      </a:solidFill>
-                      <a:prstDash val="solid"/>
-                      <a:round/>
-                      <a:headEnd type="none" w="med" len="med"/>
-                      <a:tailEnd type="none" w="med" len="med"/>
-                    </a:lnT>
-                    <a:lnB w="6350" cap="flat" cmpd="sng" algn="ctr">
-                      <a:solidFill>
-                        <a:srgbClr val="CBD5E1"/>
-                      </a:solidFill>
-                      <a:prstDash val="solid"/>
-                      <a:round/>
-                      <a:headEnd type="none" w="med" len="med"/>
-                      <a:tailEnd type="none" w="med" len="med"/>
-                    </a:lnB>
-                    <a:solidFill>
-                      <a:srgbClr val="E8EFF8"/>
-                    </a:solidFill>
-                  </a:tcPr>
-                </a:tc>
-                <a:tc>
-                  <a:txBody>
-                    <a:bodyPr/>
-                    <a:lstStyle/>
-                    <a:p>
-                      <a:pPr algn="ctr" indent="0" marL="0">
-                        <a:buNone/>
-                      </a:pPr>
-                      <a:r>
-                        <a:rPr lang="en-US" sz="900" dirty="0">
-                          <a:solidFill>
-                            <a:srgbClr val="000000"/>
-                          </a:solidFill>
-                          <a:latin typeface="Arial" pitchFamily="34" charset="0"/>
-                          <a:ea typeface="Arial" pitchFamily="34" charset="-122"/>
-                          <a:cs typeface="Arial" pitchFamily="34" charset="-120"/>
-                        </a:rPr>
-                        <a:t>/10</a:t>
-                      </a:r>
-                      <a:endParaRPr lang="en-US" sz="900" dirty="0">
-                        <a:latin typeface="Arial" charset="0"/>
-                        <a:ea typeface="Arial" charset="0"/>
-                        <a:cs typeface="Arial" charset="0"/>
-                      </a:endParaRPr>
-                    </a:p>
-                  </a:txBody>
-                  <a:tcPr marL="91440" marR="91440" marT="45720" marB="45720">
-                    <a:lnL w="6350" cap="flat" cmpd="sng" algn="ctr">
-                      <a:solidFill>
-                        <a:srgbClr val="CBD5E1"/>
-                      </a:solidFill>
-                      <a:prstDash val="solid"/>
-                      <a:round/>
-                      <a:headEnd type="none" w="med" len="med"/>
-                      <a:tailEnd type="none" w="med" len="med"/>
-                    </a:lnL>
-                    <a:lnR w="6350" cap="flat" cmpd="sng" algn="ctr">
-                      <a:solidFill>
-                        <a:srgbClr val="CBD5E1"/>
-                      </a:solidFill>
-                      <a:prstDash val="solid"/>
-                      <a:round/>
-                      <a:headEnd type="none" w="med" len="med"/>
-                      <a:tailEnd type="none" w="med" len="med"/>
-                    </a:lnR>
-                    <a:lnT w="6350" cap="flat" cmpd="sng" algn="ctr">
-                      <a:solidFill>
-                        <a:srgbClr val="CBD5E1"/>
-                      </a:solidFill>
-                      <a:prstDash val="solid"/>
-                      <a:round/>
-                      <a:headEnd type="none" w="med" len="med"/>
-                      <a:tailEnd type="none" w="med" len="med"/>
-                    </a:lnT>
-                    <a:lnB w="6350" cap="flat" cmpd="sng" algn="ctr">
-                      <a:solidFill>
-                        <a:srgbClr val="CBD5E1"/>
-                      </a:solidFill>
-                      <a:prstDash val="solid"/>
-                      <a:round/>
-                      <a:headEnd type="none" w="med" len="med"/>
-                      <a:tailEnd type="none" w="med" len="med"/>
-                    </a:lnB>
-                    <a:solidFill>
-                      <a:srgbClr val="E8EFF8"/>
-                    </a:solidFill>
-                  </a:tcPr>
-                </a:tc>
-                <a:tc>
-                  <a:txBody>
-                    <a:bodyPr/>
-                    <a:lstStyle/>
-                    <a:p>
-                      <a:pPr algn="ctr" indent="0" marL="0">
-                        <a:buNone/>
-                      </a:pPr>
-                      <a:r>
-                        <a:rPr lang="en-US" sz="900" dirty="0">
-                          <a:solidFill>
-                            <a:srgbClr val="000000"/>
-                          </a:solidFill>
-                          <a:latin typeface="Arial" pitchFamily="34" charset="0"/>
-                          <a:ea typeface="Arial" pitchFamily="34" charset="-122"/>
-                          <a:cs typeface="Arial" pitchFamily="34" charset="-120"/>
-                        </a:rPr>
-                        <a:t>6.67</a:t>
-                      </a:r>
-                      <a:endParaRPr lang="en-US" sz="900" dirty="0">
-                        <a:latin typeface="Arial" charset="0"/>
-                        <a:ea typeface="Arial" charset="0"/>
-                        <a:cs typeface="Arial" charset="0"/>
-                      </a:endParaRPr>
-                    </a:p>
-                  </a:txBody>
-                  <a:tcPr marL="91440" marR="91440" marT="45720" marB="45720">
-                    <a:lnL w="6350" cap="flat" cmpd="sng" algn="ctr">
-                      <a:solidFill>
-                        <a:srgbClr val="CBD5E1"/>
-                      </a:solidFill>
-                      <a:prstDash val="solid"/>
-                      <a:round/>
-                      <a:headEnd type="none" w="med" len="med"/>
-                      <a:tailEnd type="none" w="med" len="med"/>
-                    </a:lnL>
-                    <a:lnR w="6350" cap="flat" cmpd="sng" algn="ctr">
-                      <a:solidFill>
-                        <a:srgbClr val="CBD5E1"/>
-                      </a:solidFill>
-                      <a:prstDash val="solid"/>
-                      <a:round/>
-                      <a:headEnd type="none" w="med" len="med"/>
-                      <a:tailEnd type="none" w="med" len="med"/>
-                    </a:lnR>
-                    <a:lnT w="6350" cap="flat" cmpd="sng" algn="ctr">
-                      <a:solidFill>
-                        <a:srgbClr val="CBD5E1"/>
-                      </a:solidFill>
-                      <a:prstDash val="solid"/>
-                      <a:round/>
-                      <a:headEnd type="none" w="med" len="med"/>
-                      <a:tailEnd type="none" w="med" len="med"/>
-                    </a:lnT>
-                    <a:lnB w="6350" cap="flat" cmpd="sng" algn="ctr">
-                      <a:solidFill>
-                        <a:srgbClr val="CBD5E1"/>
-                      </a:solidFill>
-                      <a:prstDash val="solid"/>
-                      <a:round/>
-                      <a:headEnd type="none" w="med" len="med"/>
-                      <a:tailEnd type="none" w="med" len="med"/>
-                    </a:lnB>
-                    <a:solidFill>
-                      <a:srgbClr val="E8EFF8"/>
-                    </a:solidFill>
-                  </a:tcPr>
-                </a:tc>
-              </a:tr>
-              <a:tr h="201168">
-                <a:tc>
-                  <a:txBody>
-                    <a:bodyPr/>
-                    <a:lstStyle/>
-                    <a:p>
-                      <a:pPr algn="ctr" indent="0" marL="0">
-                        <a:buNone/>
-                      </a:pPr>
-                      <a:r>
-                        <a:rPr lang="en-US" sz="900" dirty="0">
-                          <a:solidFill>
-                            <a:srgbClr val="000000"/>
-                          </a:solidFill>
-                          <a:latin typeface="Arial" pitchFamily="34" charset="0"/>
-                          <a:ea typeface="Arial" pitchFamily="34" charset="-122"/>
-                          <a:cs typeface="Arial" pitchFamily="34" charset="-120"/>
-                        </a:rPr>
-                        <a:t>Booking.com</a:t>
-                      </a:r>
-                      <a:endParaRPr lang="en-US" sz="900" dirty="0">
-                        <a:latin typeface="Arial" charset="0"/>
-                        <a:ea typeface="Arial" charset="0"/>
-                        <a:cs typeface="Arial" charset="0"/>
-                      </a:endParaRPr>
-                    </a:p>
-                  </a:txBody>
-                  <a:tcPr marL="91440" marR="91440" marT="45720" marB="45720">
-                    <a:lnL w="6350" cap="flat" cmpd="sng" algn="ctr">
-                      <a:solidFill>
-                        <a:srgbClr val="CBD5E1"/>
-                      </a:solidFill>
-                      <a:prstDash val="solid"/>
-                      <a:round/>
-                      <a:headEnd type="none" w="med" len="med"/>
-                      <a:tailEnd type="none" w="med" len="med"/>
-                    </a:lnL>
-                    <a:lnR w="6350" cap="flat" cmpd="sng" algn="ctr">
-                      <a:solidFill>
-                        <a:srgbClr val="CBD5E1"/>
-                      </a:solidFill>
-                      <a:prstDash val="solid"/>
-                      <a:round/>
-                      <a:headEnd type="none" w="med" len="med"/>
-                      <a:tailEnd type="none" w="med" len="med"/>
-                    </a:lnR>
-                    <a:lnT w="6350" cap="flat" cmpd="sng" algn="ctr">
-                      <a:solidFill>
-                        <a:srgbClr val="CBD5E1"/>
-                      </a:solidFill>
-                      <a:prstDash val="solid"/>
-                      <a:round/>
-                      <a:headEnd type="none" w="med" len="med"/>
-                      <a:tailEnd type="none" w="med" len="med"/>
-                    </a:lnT>
-                    <a:lnB w="6350" cap="flat" cmpd="sng" algn="ctr">
-                      <a:solidFill>
-                        <a:srgbClr val="CBD5E1"/>
-                      </a:solidFill>
-                      <a:prstDash val="solid"/>
-                      <a:round/>
-                      <a:headEnd type="none" w="med" len="med"/>
-                      <a:tailEnd type="none" w="med" len="med"/>
-                    </a:lnB>
-                    <a:solidFill>
-                      <a:srgbClr val="FFFFFF"/>
-                    </a:solidFill>
-                  </a:tcPr>
-                </a:tc>
-                <a:tc>
-                  <a:txBody>
-                    <a:bodyPr/>
-                    <a:lstStyle/>
-                    <a:p>
-                      <a:pPr algn="ctr" indent="0" marL="0">
-                        <a:buNone/>
-                      </a:pPr>
-                      <a:r>
-                        <a:rPr lang="en-US" sz="900" dirty="0">
-                          <a:solidFill>
-                            <a:srgbClr val="000000"/>
-                          </a:solidFill>
-                          <a:latin typeface="Arial" pitchFamily="34" charset="0"/>
-                          <a:ea typeface="Arial" pitchFamily="34" charset="-122"/>
-                          <a:cs typeface="Arial" pitchFamily="34" charset="-120"/>
-                        </a:rPr>
-                        <a:t>5</a:t>
-                      </a:r>
-                      <a:endParaRPr lang="en-US" sz="900" dirty="0">
-                        <a:latin typeface="Arial" charset="0"/>
-                        <a:ea typeface="Arial" charset="0"/>
-                        <a:cs typeface="Arial" charset="0"/>
-                      </a:endParaRPr>
-                    </a:p>
-                  </a:txBody>
-                  <a:tcPr marL="91440" marR="91440" marT="45720" marB="45720">
-                    <a:lnL w="6350" cap="flat" cmpd="sng" algn="ctr">
-                      <a:solidFill>
-                        <a:srgbClr val="CBD5E1"/>
-                      </a:solidFill>
-                      <a:prstDash val="solid"/>
-                      <a:round/>
-                      <a:headEnd type="none" w="med" len="med"/>
-                      <a:tailEnd type="none" w="med" len="med"/>
-                    </a:lnL>
-                    <a:lnR w="6350" cap="flat" cmpd="sng" algn="ctr">
-                      <a:solidFill>
-                        <a:srgbClr val="CBD5E1"/>
-                      </a:solidFill>
-                      <a:prstDash val="solid"/>
-                      <a:round/>
-                      <a:headEnd type="none" w="med" len="med"/>
-                      <a:tailEnd type="none" w="med" len="med"/>
-                    </a:lnR>
-                    <a:lnT w="6350" cap="flat" cmpd="sng" algn="ctr">
-                      <a:solidFill>
-                        <a:srgbClr val="CBD5E1"/>
-                      </a:solidFill>
-                      <a:prstDash val="solid"/>
-                      <a:round/>
-                      <a:headEnd type="none" w="med" len="med"/>
-                      <a:tailEnd type="none" w="med" len="med"/>
-                    </a:lnT>
-                    <a:lnB w="6350" cap="flat" cmpd="sng" algn="ctr">
-                      <a:solidFill>
-                        <a:srgbClr val="CBD5E1"/>
-                      </a:solidFill>
-                      <a:prstDash val="solid"/>
-                      <a:round/>
-                      <a:headEnd type="none" w="med" len="med"/>
-                      <a:tailEnd type="none" w="med" len="med"/>
-                    </a:lnB>
-                    <a:solidFill>
-                      <a:srgbClr val="FFFFFF"/>
-                    </a:solidFill>
-                  </a:tcPr>
-                </a:tc>
-                <a:tc>
-                  <a:txBody>
-                    <a:bodyPr/>
-                    <a:lstStyle/>
-                    <a:p>
-                      <a:pPr algn="ctr" indent="0" marL="0">
-                        <a:buNone/>
-                      </a:pPr>
-                      <a:r>
-                        <a:rPr lang="en-US" sz="900" dirty="0">
-                          <a:solidFill>
-                            <a:srgbClr val="000000"/>
-                          </a:solidFill>
-                          <a:latin typeface="Arial" pitchFamily="34" charset="0"/>
-                          <a:ea typeface="Arial" pitchFamily="34" charset="-122"/>
-                          <a:cs typeface="Arial" pitchFamily="34" charset="-120"/>
-                        </a:rPr>
-                        <a:t>6.6</a:t>
-                      </a:r>
-                      <a:endParaRPr lang="en-US" sz="900" dirty="0">
-                        <a:latin typeface="Arial" charset="0"/>
-                        <a:ea typeface="Arial" charset="0"/>
-                        <a:cs typeface="Arial" charset="0"/>
-                      </a:endParaRPr>
-                    </a:p>
-                  </a:txBody>
-                  <a:tcPr marL="91440" marR="91440" marT="45720" marB="45720">
-                    <a:lnL w="6350" cap="flat" cmpd="sng" algn="ctr">
-                      <a:solidFill>
-                        <a:srgbClr val="CBD5E1"/>
-                      </a:solidFill>
-                      <a:prstDash val="solid"/>
-                      <a:round/>
-                      <a:headEnd type="none" w="med" len="med"/>
-                      <a:tailEnd type="none" w="med" len="med"/>
-                    </a:lnL>
-                    <a:lnR w="6350" cap="flat" cmpd="sng" algn="ctr">
-                      <a:solidFill>
-                        <a:srgbClr val="CBD5E1"/>
-                      </a:solidFill>
-                      <a:prstDash val="solid"/>
-                      <a:round/>
-                      <a:headEnd type="none" w="med" len="med"/>
-                      <a:tailEnd type="none" w="med" len="med"/>
-                    </a:lnR>
-                    <a:lnT w="6350" cap="flat" cmpd="sng" algn="ctr">
-                      <a:solidFill>
-                        <a:srgbClr val="CBD5E1"/>
-                      </a:solidFill>
-                      <a:prstDash val="solid"/>
-                      <a:round/>
-                      <a:headEnd type="none" w="med" len="med"/>
-                      <a:tailEnd type="none" w="med" len="med"/>
-                    </a:lnT>
-                    <a:lnB w="6350" cap="flat" cmpd="sng" algn="ctr">
-                      <a:solidFill>
-                        <a:srgbClr val="CBD5E1"/>
-                      </a:solidFill>
-                      <a:prstDash val="solid"/>
-                      <a:round/>
-                      <a:headEnd type="none" w="med" len="med"/>
-                      <a:tailEnd type="none" w="med" len="med"/>
-                    </a:lnB>
-                    <a:solidFill>
-                      <a:srgbClr val="FFFFFF"/>
-                    </a:solidFill>
-                  </a:tcPr>
-                </a:tc>
-                <a:tc>
-                  <a:txBody>
-                    <a:bodyPr/>
-                    <a:lstStyle/>
-                    <a:p>
-                      <a:pPr algn="ctr" indent="0" marL="0">
-                        <a:buNone/>
-                      </a:pPr>
-                      <a:r>
-                        <a:rPr lang="en-US" sz="900" dirty="0">
-                          <a:solidFill>
-                            <a:srgbClr val="000000"/>
-                          </a:solidFill>
-                          <a:latin typeface="Arial" pitchFamily="34" charset="0"/>
-                          <a:ea typeface="Arial" pitchFamily="34" charset="-122"/>
-                          <a:cs typeface="Arial" pitchFamily="34" charset="-120"/>
-                        </a:rPr>
-                        <a:t>/10</a:t>
-                      </a:r>
-                      <a:endParaRPr lang="en-US" sz="900" dirty="0">
-                        <a:latin typeface="Arial" charset="0"/>
-                        <a:ea typeface="Arial" charset="0"/>
-                        <a:cs typeface="Arial" charset="0"/>
-                      </a:endParaRPr>
-                    </a:p>
-                  </a:txBody>
-                  <a:tcPr marL="91440" marR="91440" marT="45720" marB="45720">
-                    <a:lnL w="6350" cap="flat" cmpd="sng" algn="ctr">
-                      <a:solidFill>
-                        <a:srgbClr val="CBD5E1"/>
-                      </a:solidFill>
-                      <a:prstDash val="solid"/>
-                      <a:round/>
-                      <a:headEnd type="none" w="med" len="med"/>
-                      <a:tailEnd type="none" w="med" len="med"/>
-                    </a:lnL>
-                    <a:lnR w="6350" cap="flat" cmpd="sng" algn="ctr">
-                      <a:solidFill>
-                        <a:srgbClr val="CBD5E1"/>
-                      </a:solidFill>
-                      <a:prstDash val="solid"/>
-                      <a:round/>
-                      <a:headEnd type="none" w="med" len="med"/>
-                      <a:tailEnd type="none" w="med" len="med"/>
-                    </a:lnR>
-                    <a:lnT w="6350" cap="flat" cmpd="sng" algn="ctr">
-                      <a:solidFill>
-                        <a:srgbClr val="CBD5E1"/>
-                      </a:solidFill>
-                      <a:prstDash val="solid"/>
-                      <a:round/>
-                      <a:headEnd type="none" w="med" len="med"/>
-                      <a:tailEnd type="none" w="med" len="med"/>
-                    </a:lnT>
-                    <a:lnB w="6350" cap="flat" cmpd="sng" algn="ctr">
-                      <a:solidFill>
-                        <a:srgbClr val="CBD5E1"/>
-                      </a:solidFill>
-                      <a:prstDash val="solid"/>
-                      <a:round/>
-                      <a:headEnd type="none" w="med" len="med"/>
-                      <a:tailEnd type="none" w="med" len="med"/>
-                    </a:lnB>
-                    <a:solidFill>
-                      <a:srgbClr val="FFFFFF"/>
-                    </a:solidFill>
-                  </a:tcPr>
-                </a:tc>
-                <a:tc>
-                  <a:txBody>
-                    <a:bodyPr/>
-                    <a:lstStyle/>
-                    <a:p>
-                      <a:pPr algn="ctr" indent="0" marL="0">
-                        <a:buNone/>
-                      </a:pPr>
-                      <a:r>
-                        <a:rPr lang="en-US" sz="900" dirty="0">
-                          <a:solidFill>
-                            <a:srgbClr val="000000"/>
-                          </a:solidFill>
-                          <a:latin typeface="Arial" pitchFamily="34" charset="0"/>
-                          <a:ea typeface="Arial" pitchFamily="34" charset="-122"/>
-                          <a:cs typeface="Arial" pitchFamily="34" charset="-120"/>
-                        </a:rPr>
-                        <a:t>6.6</a:t>
-                      </a:r>
-                      <a:endParaRPr lang="en-US" sz="900" dirty="0">
-                        <a:latin typeface="Arial" charset="0"/>
-                        <a:ea typeface="Arial" charset="0"/>
-                        <a:cs typeface="Arial" charset="0"/>
-                      </a:endParaRPr>
-                    </a:p>
-                  </a:txBody>
-                  <a:tcPr marL="91440" marR="91440" marT="45720" marB="45720">
-                    <a:lnL w="6350" cap="flat" cmpd="sng" algn="ctr">
-                      <a:solidFill>
-                        <a:srgbClr val="CBD5E1"/>
-                      </a:solidFill>
-                      <a:prstDash val="solid"/>
-                      <a:round/>
-                      <a:headEnd type="none" w="med" len="med"/>
-                      <a:tailEnd type="none" w="med" len="med"/>
-                    </a:lnL>
-                    <a:lnR w="6350" cap="flat" cmpd="sng" algn="ctr">
-                      <a:solidFill>
-                        <a:srgbClr val="CBD5E1"/>
-                      </a:solidFill>
-                      <a:prstDash val="solid"/>
-                      <a:round/>
-                      <a:headEnd type="none" w="med" len="med"/>
-                      <a:tailEnd type="none" w="med" len="med"/>
-                    </a:lnR>
-                    <a:lnT w="6350" cap="flat" cmpd="sng" algn="ctr">
-                      <a:solidFill>
-                        <a:srgbClr val="CBD5E1"/>
-                      </a:solidFill>
-                      <a:prstDash val="solid"/>
-                      <a:round/>
-                      <a:headEnd type="none" w="med" len="med"/>
-                      <a:tailEnd type="none" w="med" len="med"/>
-                    </a:lnT>
-                    <a:lnB w="6350" cap="flat" cmpd="sng" algn="ctr">
-                      <a:solidFill>
-                        <a:srgbClr val="CBD5E1"/>
-                      </a:solidFill>
-                      <a:prstDash val="solid"/>
-                      <a:round/>
-                      <a:headEnd type="none" w="med" len="med"/>
-                      <a:tailEnd type="none" w="med" len="med"/>
-                    </a:lnB>
-                    <a:solidFill>
-                      <a:srgbClr val="FFFFFF"/>
-                    </a:solidFill>
-                  </a:tcPr>
-                </a:tc>
-              </a:tr>
-              <a:tr h="201168">
-                <a:tc>
-                  <a:txBody>
-                    <a:bodyPr/>
-                    <a:lstStyle/>
-                    <a:p>
-                      <a:pPr algn="ctr" indent="0" marL="0">
-                        <a:buNone/>
-                      </a:pPr>
-                      <a:r>
-                        <a:rPr lang="en-US" sz="900" dirty="0">
-                          <a:solidFill>
-                            <a:srgbClr val="000000"/>
-                          </a:solidFill>
-                          <a:latin typeface="Arial" pitchFamily="34" charset="0"/>
-                          <a:ea typeface="Arial" pitchFamily="34" charset="-122"/>
-                          <a:cs typeface="Arial" pitchFamily="34" charset="-120"/>
-                        </a:rPr>
-                        <a:t>楽天トラベル</a:t>
-                      </a:r>
-                      <a:endParaRPr lang="en-US" sz="900" dirty="0">
-                        <a:latin typeface="Arial" charset="0"/>
-                        <a:ea typeface="Arial" charset="0"/>
-                        <a:cs typeface="Arial" charset="0"/>
-                      </a:endParaRPr>
-                    </a:p>
-                  </a:txBody>
-                  <a:tcPr marL="91440" marR="91440" marT="45720" marB="45720">
-                    <a:lnL w="6350" cap="flat" cmpd="sng" algn="ctr">
-                      <a:solidFill>
-                        <a:srgbClr val="CBD5E1"/>
-                      </a:solidFill>
-                      <a:prstDash val="solid"/>
-                      <a:round/>
-                      <a:headEnd type="none" w="med" len="med"/>
-                      <a:tailEnd type="none" w="med" len="med"/>
-                    </a:lnL>
-                    <a:lnR w="6350" cap="flat" cmpd="sng" algn="ctr">
-                      <a:solidFill>
-                        <a:srgbClr val="CBD5E1"/>
-                      </a:solidFill>
-                      <a:prstDash val="solid"/>
-                      <a:round/>
-                      <a:headEnd type="none" w="med" len="med"/>
-                      <a:tailEnd type="none" w="med" len="med"/>
-                    </a:lnR>
-                    <a:lnT w="6350" cap="flat" cmpd="sng" algn="ctr">
-                      <a:solidFill>
-                        <a:srgbClr val="CBD5E1"/>
-                      </a:solidFill>
-                      <a:prstDash val="solid"/>
-                      <a:round/>
-                      <a:headEnd type="none" w="med" len="med"/>
-                      <a:tailEnd type="none" w="med" len="med"/>
-                    </a:lnT>
-                    <a:lnB w="6350" cap="flat" cmpd="sng" algn="ctr">
-                      <a:solidFill>
-                        <a:srgbClr val="CBD5E1"/>
-                      </a:solidFill>
-                      <a:prstDash val="solid"/>
-                      <a:round/>
-                      <a:headEnd type="none" w="med" len="med"/>
-                      <a:tailEnd type="none" w="med" len="med"/>
-                    </a:lnB>
-                    <a:solidFill>
-                      <a:srgbClr val="E8EFF8"/>
-                    </a:solidFill>
-                  </a:tcPr>
-                </a:tc>
-                <a:tc>
-                  <a:txBody>
-                    <a:bodyPr/>
-                    <a:lstStyle/>
-                    <a:p>
-                      <a:pPr algn="ctr" indent="0" marL="0">
-                        <a:buNone/>
-                      </a:pPr>
-                      <a:r>
-                        <a:rPr lang="en-US" sz="900" dirty="0">
-                          <a:solidFill>
-                            <a:srgbClr val="000000"/>
-                          </a:solidFill>
-                          <a:latin typeface="Arial" pitchFamily="34" charset="0"/>
-                          <a:ea typeface="Arial" pitchFamily="34" charset="-122"/>
-                          <a:cs typeface="Arial" pitchFamily="34" charset="-120"/>
-                        </a:rPr>
-                        <a:t>20</a:t>
-                      </a:r>
-                      <a:endParaRPr lang="en-US" sz="900" dirty="0">
-                        <a:latin typeface="Arial" charset="0"/>
-                        <a:ea typeface="Arial" charset="0"/>
-                        <a:cs typeface="Arial" charset="0"/>
-                      </a:endParaRPr>
-                    </a:p>
-                  </a:txBody>
-                  <a:tcPr marL="91440" marR="91440" marT="45720" marB="45720">
-                    <a:lnL w="6350" cap="flat" cmpd="sng" algn="ctr">
-                      <a:solidFill>
-                        <a:srgbClr val="CBD5E1"/>
-                      </a:solidFill>
-                      <a:prstDash val="solid"/>
-                      <a:round/>
-                      <a:headEnd type="none" w="med" len="med"/>
-                      <a:tailEnd type="none" w="med" len="med"/>
-                    </a:lnL>
-                    <a:lnR w="6350" cap="flat" cmpd="sng" algn="ctr">
-                      <a:solidFill>
-                        <a:srgbClr val="CBD5E1"/>
-                      </a:solidFill>
-                      <a:prstDash val="solid"/>
-                      <a:round/>
-                      <a:headEnd type="none" w="med" len="med"/>
-                      <a:tailEnd type="none" w="med" len="med"/>
-                    </a:lnR>
-                    <a:lnT w="6350" cap="flat" cmpd="sng" algn="ctr">
-                      <a:solidFill>
-                        <a:srgbClr val="CBD5E1"/>
-                      </a:solidFill>
-                      <a:prstDash val="solid"/>
-                      <a:round/>
-                      <a:headEnd type="none" w="med" len="med"/>
-                      <a:tailEnd type="none" w="med" len="med"/>
-                    </a:lnT>
-                    <a:lnB w="6350" cap="flat" cmpd="sng" algn="ctr">
-                      <a:solidFill>
-                        <a:srgbClr val="CBD5E1"/>
-                      </a:solidFill>
-                      <a:prstDash val="solid"/>
-                      <a:round/>
-                      <a:headEnd type="none" w="med" len="med"/>
-                      <a:tailEnd type="none" w="med" len="med"/>
-                    </a:lnB>
-                    <a:solidFill>
-                      <a:srgbClr val="E8EFF8"/>
-                    </a:solidFill>
-                  </a:tcPr>
-                </a:tc>
-                <a:tc>
-                  <a:txBody>
-                    <a:bodyPr/>
-                    <a:lstStyle/>
-                    <a:p>
-                      <a:pPr algn="ctr" indent="0" marL="0">
-                        <a:buNone/>
-                      </a:pPr>
-                      <a:r>
-                        <a:rPr lang="en-US" sz="900" dirty="0">
-                          <a:solidFill>
-                            <a:srgbClr val="000000"/>
-                          </a:solidFill>
-                          <a:latin typeface="Arial" pitchFamily="34" charset="0"/>
-                          <a:ea typeface="Arial" pitchFamily="34" charset="-122"/>
-                          <a:cs typeface="Arial" pitchFamily="34" charset="-120"/>
-                        </a:rPr>
-                        <a:t>3.2</a:t>
+                        <a:t>3.19</a:t>
                       </a:r>
                       <a:endParaRPr lang="en-US" sz="900" dirty="0">
                         <a:latin typeface="Arial" charset="0"/>
@@ -9466,7 +9466,7 @@
                           <a:ea typeface="Arial" pitchFamily="34" charset="-122"/>
                           <a:cs typeface="Arial" pitchFamily="34" charset="-120"/>
                         </a:rPr>
-                        <a:t>6.4</a:t>
+                        <a:t>6.38</a:t>
                       </a:r>
                       <a:endParaRPr lang="en-US" sz="900" dirty="0">
                         <a:latin typeface="Arial" charset="0"/>
@@ -9604,7 +9604,7 @@
                           <a:ea typeface="Arial" pitchFamily="34" charset="-122"/>
                           <a:cs typeface="Arial" pitchFamily="34" charset="-120"/>
                         </a:rPr>
-                        <a:t>4</a:t>
+                        <a:t>6</a:t>
                       </a:r>
                       <a:endParaRPr lang="en-US" sz="900" dirty="0">
                         <a:latin typeface="Arial" charset="0"/>
@@ -10216,7 +10216,7 @@
                 <a:ea typeface="Arial" pitchFamily="34" charset="-122"/>
                 <a:cs typeface="Arial" pitchFamily="34" charset="-120"/>
               </a:rPr>
-              <a:t>27件（46.6%）</a:t>
+              <a:t>29件（46.0%）</a:t>
             </a:r>
             <a:endParaRPr lang="en-US" sz="1100" dirty="0"/>
           </a:p>
@@ -10314,7 +10314,7 @@
                 <a:ea typeface="Arial" pitchFamily="34" charset="-122"/>
                 <a:cs typeface="Arial" pitchFamily="34" charset="-120"/>
               </a:rPr>
-              <a:t>19件（32.8%）</a:t>
+              <a:t>19件（30.2%）</a:t>
             </a:r>
             <a:endParaRPr lang="en-US" sz="1100" dirty="0"/>
           </a:p>
@@ -10412,7 +10412,7 @@
                 <a:ea typeface="Arial" pitchFamily="34" charset="-122"/>
                 <a:cs typeface="Arial" pitchFamily="34" charset="-120"/>
               </a:rPr>
-              <a:t>12件（20.7%）</a:t>
+              <a:t>15件（23.8%）</a:t>
             </a:r>
             <a:endParaRPr lang="en-US" sz="1100" dirty="0"/>
           </a:p>
@@ -10824,7 +10824,7 @@
                 <a:ea typeface="Arial" pitchFamily="34" charset="-122"/>
                 <a:cs typeface="Arial" pitchFamily="34" charset="-120"/>
               </a:rPr>
-              <a:t>駅が近いのと、コンビニがすぐ近くにあるのが嬉しい</a:t>
+              <a:t>การเดินทางสะดวกมากๆและที่พักอยู่มนทำเลที่ดี พนักงานบริการ...</a:t>
             </a:r>
             <a:endParaRPr lang="en-US" sz="900" dirty="0"/>
           </a:p>
@@ -10863,7 +10863,7 @@
                 <a:ea typeface="Arial" pitchFamily="34" charset="-122"/>
                 <a:cs typeface="Arial" pitchFamily="34" charset="-120"/>
               </a:rPr>
-              <a:t>「駅からは行きやすいしわかりやすいし、スタッフの方の対応もよかったですが、音が気になる人にはおすすめしないです」</a:t>
+              <a:t>「駅が近いのと、コンビニがすぐ近くにあるのが嬉しい」</a:t>
             </a:r>
             <a:endParaRPr lang="en-US" sz="900" dirty="0"/>
           </a:p>
@@ -11270,7 +11270,7 @@
                 <a:ea typeface="Arial" pitchFamily="34" charset="-122"/>
                 <a:cs typeface="Arial" pitchFamily="34" charset="-120"/>
               </a:rPr>
-              <a:t>最低限のアメニティで手頃な価格で宿泊できるので良い</a:t>
+              <a:t>設備が古く、サービスも良くないです</a:t>
             </a:r>
             <a:endParaRPr lang="en-US" sz="900" dirty="0"/>
           </a:p>
@@ -11309,7 +11309,7 @@
                 <a:ea typeface="Arial" pitchFamily="34" charset="-122"/>
                 <a:cs typeface="Arial" pitchFamily="34" charset="-120"/>
               </a:rPr>
-              <a:t>「ベッドの下に子どもが入ってしまって出てきたら服も髪の毛もホコリまるけでした」</a:t>
+              <a:t>「最低限のアメニティで手頃な価格で宿泊できるので良い」</a:t>
             </a:r>
             <a:endParaRPr lang="en-US" sz="900" dirty="0"/>
           </a:p>
@@ -11454,6 +11454,229 @@
                 <a:ea typeface="Arial" pitchFamily="34" charset="-122"/>
                 <a:cs typeface="Arial" pitchFamily="34" charset="-120"/>
               </a:rPr>
+              <a:t>スタッフの対応</a:t>
+            </a:r>
+            <a:endParaRPr lang="en-US" sz="1300" dirty="0"/>
+          </a:p>
+        </p:txBody>
+      </p:sp>
+      <p:sp>
+        <p:nvSpPr>
+          <p:cNvPr id="31" name="Text 29"/>
+          <p:cNvSpPr/>
+          <p:nvPr/>
+        </p:nvSpPr>
+        <p:spPr>
+          <a:xfrm>
+            <a:off x="594360" y="3246120"/>
+            <a:ext cx="2377440" cy="365760"/>
+          </a:xfrm>
+          <a:prstGeom prst="rect">
+            <a:avLst/>
+          </a:prstGeom>
+          <a:noFill/>
+          <a:ln/>
+        </p:spPr>
+        <p:txBody>
+          <a:bodyPr wrap="square" lIns="0" tIns="0" rIns="0" bIns="0" rtlCol="0" anchor="ctr"/>
+          <a:lstStyle/>
+          <a:p>
+            <a:pPr indent="0" marL="0">
+              <a:buNone/>
+            </a:pPr>
+            <a:r>
+              <a:rPr lang="en-US" sz="900" dirty="0">
+                <a:solidFill>
+                  <a:srgbClr val="64748B"/>
+                </a:solidFill>
+                <a:latin typeface="Arial" pitchFamily="34" charset="0"/>
+                <a:ea typeface="Arial" pitchFamily="34" charset="-122"/>
+                <a:cs typeface="Arial" pitchFamily="34" charset="-120"/>
+              </a:rPr>
+              <a:t>スタッフのサービスも素晴らしかったです</a:t>
+            </a:r>
+            <a:endParaRPr lang="en-US" sz="900" dirty="0"/>
+          </a:p>
+        </p:txBody>
+      </p:sp>
+      <p:sp>
+        <p:nvSpPr>
+          <p:cNvPr id="32" name="Text 30"/>
+          <p:cNvSpPr/>
+          <p:nvPr/>
+        </p:nvSpPr>
+        <p:spPr>
+          <a:xfrm>
+            <a:off x="594360" y="3657600"/>
+            <a:ext cx="2377440" cy="640080"/>
+          </a:xfrm>
+          <a:prstGeom prst="rect">
+            <a:avLst/>
+          </a:prstGeom>
+          <a:noFill/>
+          <a:ln/>
+        </p:spPr>
+        <p:txBody>
+          <a:bodyPr wrap="square" lIns="0" tIns="0" rIns="0" bIns="0" rtlCol="0" anchor="ctr"/>
+          <a:lstStyle/>
+          <a:p>
+            <a:pPr indent="0" marL="0">
+              <a:buNone/>
+            </a:pPr>
+            <a:r>
+              <a:rPr lang="en-US" sz="900" i="1" dirty="0">
+                <a:solidFill>
+                  <a:srgbClr val="3B7DD8"/>
+                </a:solidFill>
+                <a:latin typeface="Arial" pitchFamily="34" charset="0"/>
+                <a:ea typeface="Arial" pitchFamily="34" charset="-122"/>
+                <a:cs typeface="Arial" pitchFamily="34" charset="-120"/>
+              </a:rPr>
+              <a:t>「設備が古く、サービスも良くないです」</a:t>
+            </a:r>
+            <a:endParaRPr lang="en-US" sz="900" dirty="0"/>
+          </a:p>
+        </p:txBody>
+      </p:sp>
+      <p:sp>
+        <p:nvSpPr>
+          <p:cNvPr id="33" name="Shape 31"/>
+          <p:cNvSpPr/>
+          <p:nvPr/>
+        </p:nvSpPr>
+        <p:spPr>
+          <a:xfrm>
+            <a:off x="3291840" y="2880360"/>
+            <a:ext cx="2651760" cy="1600200"/>
+          </a:xfrm>
+          <a:prstGeom prst="rect">
+            <a:avLst/>
+          </a:prstGeom>
+          <a:solidFill>
+            <a:srgbClr val="FFFFFF"/>
+          </a:solidFill>
+          <a:ln/>
+          <a:effectLst>
+            <a:outerShdw sx="100000" sy="100000" kx="0" ky="0" algn="bl" rotWithShape="0" blurRad="50800" dist="25400" dir="8100000">
+              <a:srgbClr val="000000">
+                <a:alpha val="10000"/>
+              </a:srgbClr>
+            </a:outerShdw>
+          </a:effectLst>
+        </p:spPr>
+      </p:sp>
+      <p:sp>
+        <p:nvSpPr>
+          <p:cNvPr id="34" name="Shape 32"/>
+          <p:cNvSpPr/>
+          <p:nvPr/>
+        </p:nvSpPr>
+        <p:spPr>
+          <a:xfrm>
+            <a:off x="3291840" y="2880360"/>
+            <a:ext cx="54864" cy="1600200"/>
+          </a:xfrm>
+          <a:prstGeom prst="rect">
+            <a:avLst/>
+          </a:prstGeom>
+          <a:solidFill>
+            <a:srgbClr val="16A34A"/>
+          </a:solidFill>
+          <a:ln/>
+        </p:spPr>
+      </p:sp>
+      <p:sp>
+        <p:nvSpPr>
+          <p:cNvPr id="35" name="Shape 33"/>
+          <p:cNvSpPr/>
+          <p:nvPr/>
+        </p:nvSpPr>
+        <p:spPr>
+          <a:xfrm>
+            <a:off x="5120640" y="2953512"/>
+            <a:ext cx="658368" cy="228600"/>
+          </a:xfrm>
+          <a:prstGeom prst="rect">
+            <a:avLst/>
+          </a:prstGeom>
+          <a:solidFill>
+            <a:srgbClr val="DCFCE7"/>
+          </a:solidFill>
+          <a:ln/>
+        </p:spPr>
+      </p:sp>
+      <p:sp>
+        <p:nvSpPr>
+          <p:cNvPr id="36" name="Text 34"/>
+          <p:cNvSpPr/>
+          <p:nvPr/>
+        </p:nvSpPr>
+        <p:spPr>
+          <a:xfrm>
+            <a:off x="5120640" y="2953512"/>
+            <a:ext cx="658368" cy="228600"/>
+          </a:xfrm>
+          <a:prstGeom prst="rect">
+            <a:avLst/>
+          </a:prstGeom>
+          <a:noFill/>
+          <a:ln/>
+        </p:spPr>
+        <p:txBody>
+          <a:bodyPr wrap="square" lIns="0" tIns="0" rIns="0" bIns="0" rtlCol="0" anchor="ctr"/>
+          <a:lstStyle/>
+          <a:p>
+            <a:pPr algn="ctr" indent="0" marL="0">
+              <a:buNone/>
+            </a:pPr>
+            <a:r>
+              <a:rPr lang="en-US" sz="900" b="1" dirty="0">
+                <a:solidFill>
+                  <a:srgbClr val="16A34A"/>
+                </a:solidFill>
+                <a:latin typeface="Arial" pitchFamily="34" charset="0"/>
+                <a:ea typeface="Arial" pitchFamily="34" charset="-122"/>
+                <a:cs typeface="Arial" pitchFamily="34" charset="-120"/>
+              </a:rPr>
+              <a:t>10件+</a:t>
+            </a:r>
+            <a:endParaRPr lang="en-US" sz="900" dirty="0"/>
+          </a:p>
+        </p:txBody>
+      </p:sp>
+      <p:sp>
+        <p:nvSpPr>
+          <p:cNvPr id="37" name="Text 35"/>
+          <p:cNvSpPr/>
+          <p:nvPr/>
+        </p:nvSpPr>
+        <p:spPr>
+          <a:xfrm>
+            <a:off x="3429000" y="2953512"/>
+            <a:ext cx="1645920" cy="274320"/>
+          </a:xfrm>
+          <a:prstGeom prst="rect">
+            <a:avLst/>
+          </a:prstGeom>
+          <a:noFill/>
+          <a:ln/>
+        </p:spPr>
+        <p:txBody>
+          <a:bodyPr wrap="square" lIns="0" tIns="0" rIns="0" bIns="0" rtlCol="0" anchor="ctr"/>
+          <a:lstStyle/>
+          <a:p>
+            <a:pPr indent="0" marL="0">
+              <a:buNone/>
+            </a:pPr>
+            <a:r>
+              <a:rPr lang="en-US" sz="1300" b="1" dirty="0">
+                <a:solidFill>
+                  <a:srgbClr val="1A2744"/>
+                </a:solidFill>
+                <a:latin typeface="Arial" pitchFamily="34" charset="0"/>
+                <a:ea typeface="Arial" pitchFamily="34" charset="-122"/>
+                <a:cs typeface="Arial" pitchFamily="34" charset="-120"/>
+              </a:rPr>
               <a:t>コストパフォーマンス</a:t>
             </a:r>
             <a:endParaRPr lang="en-US" sz="1300" dirty="0"/>
@@ -11462,13 +11685,13 @@
       </p:sp>
       <p:sp>
         <p:nvSpPr>
-          <p:cNvPr id="31" name="Text 29"/>
-          <p:cNvSpPr/>
-          <p:nvPr/>
-        </p:nvSpPr>
-        <p:spPr>
-          <a:xfrm>
-            <a:off x="594360" y="3246120"/>
+          <p:cNvPr id="38" name="Text 36"/>
+          <p:cNvSpPr/>
+          <p:nvPr/>
+        </p:nvSpPr>
+        <p:spPr>
+          <a:xfrm>
+            <a:off x="3429000" y="3246120"/>
             <a:ext cx="2377440" cy="365760"/>
           </a:xfrm>
           <a:prstGeom prst="rect">
@@ -11501,13 +11724,13 @@
       </p:sp>
       <p:sp>
         <p:nvSpPr>
-          <p:cNvPr id="32" name="Text 30"/>
-          <p:cNvSpPr/>
-          <p:nvPr/>
-        </p:nvSpPr>
-        <p:spPr>
-          <a:xfrm>
-            <a:off x="594360" y="3657600"/>
+          <p:cNvPr id="39" name="Text 37"/>
+          <p:cNvSpPr/>
+          <p:nvPr/>
+        </p:nvSpPr>
+        <p:spPr>
+          <a:xfrm>
+            <a:off x="3429000" y="3657600"/>
             <a:ext cx="2377440" cy="640080"/>
           </a:xfrm>
           <a:prstGeom prst="rect">
@@ -11540,13 +11763,13 @@
       </p:sp>
       <p:sp>
         <p:nvSpPr>
-          <p:cNvPr id="33" name="Shape 31"/>
-          <p:cNvSpPr/>
-          <p:nvPr/>
-        </p:nvSpPr>
-        <p:spPr>
-          <a:xfrm>
-            <a:off x="3291840" y="2880360"/>
+          <p:cNvPr id="40" name="Shape 38"/>
+          <p:cNvSpPr/>
+          <p:nvPr/>
+        </p:nvSpPr>
+        <p:spPr>
+          <a:xfrm>
+            <a:off x="6126480" y="2880360"/>
             <a:ext cx="2651760" cy="1600200"/>
           </a:xfrm>
           <a:prstGeom prst="rect">
@@ -11567,13 +11790,13 @@
       </p:sp>
       <p:sp>
         <p:nvSpPr>
-          <p:cNvPr id="34" name="Shape 32"/>
-          <p:cNvSpPr/>
-          <p:nvPr/>
-        </p:nvSpPr>
-        <p:spPr>
-          <a:xfrm>
-            <a:off x="3291840" y="2880360"/>
+          <p:cNvPr id="41" name="Shape 39"/>
+          <p:cNvSpPr/>
+          <p:nvPr/>
+        </p:nvSpPr>
+        <p:spPr>
+          <a:xfrm>
+            <a:off x="6126480" y="2880360"/>
             <a:ext cx="54864" cy="1600200"/>
           </a:xfrm>
           <a:prstGeom prst="rect">
@@ -11587,13 +11810,13 @@
       </p:sp>
       <p:sp>
         <p:nvSpPr>
-          <p:cNvPr id="35" name="Shape 33"/>
-          <p:cNvSpPr/>
-          <p:nvPr/>
-        </p:nvSpPr>
-        <p:spPr>
-          <a:xfrm>
-            <a:off x="5120640" y="2953512"/>
+          <p:cNvPr id="42" name="Shape 40"/>
+          <p:cNvSpPr/>
+          <p:nvPr/>
+        </p:nvSpPr>
+        <p:spPr>
+          <a:xfrm>
+            <a:off x="7955280" y="2953512"/>
             <a:ext cx="658368" cy="228600"/>
           </a:xfrm>
           <a:prstGeom prst="rect">
@@ -11607,13 +11830,13 @@
       </p:sp>
       <p:sp>
         <p:nvSpPr>
-          <p:cNvPr id="36" name="Text 34"/>
-          <p:cNvSpPr/>
-          <p:nvPr/>
-        </p:nvSpPr>
-        <p:spPr>
-          <a:xfrm>
-            <a:off x="5120640" y="2953512"/>
+          <p:cNvPr id="43" name="Text 41"/>
+          <p:cNvSpPr/>
+          <p:nvPr/>
+        </p:nvSpPr>
+        <p:spPr>
+          <a:xfrm>
+            <a:off x="7955280" y="2953512"/>
             <a:ext cx="658368" cy="228600"/>
           </a:xfrm>
           <a:prstGeom prst="rect">
@@ -11638,7 +11861,7 @@
                 <a:ea typeface="Arial" pitchFamily="34" charset="-122"/>
                 <a:cs typeface="Arial" pitchFamily="34" charset="-120"/>
               </a:rPr>
-              <a:t>9件</a:t>
+              <a:t>10件+</a:t>
             </a:r>
             <a:endParaRPr lang="en-US" sz="900" dirty="0"/>
           </a:p>
@@ -11646,13 +11869,13 @@
       </p:sp>
       <p:sp>
         <p:nvSpPr>
-          <p:cNvPr id="37" name="Text 35"/>
-          <p:cNvSpPr/>
-          <p:nvPr/>
-        </p:nvSpPr>
-        <p:spPr>
-          <a:xfrm>
-            <a:off x="3429000" y="2953512"/>
+          <p:cNvPr id="44" name="Text 42"/>
+          <p:cNvSpPr/>
+          <p:nvPr/>
+        </p:nvSpPr>
+        <p:spPr>
+          <a:xfrm>
+            <a:off x="6263640" y="2953512"/>
             <a:ext cx="1645920" cy="274320"/>
           </a:xfrm>
           <a:prstGeom prst="rect">
@@ -11685,13 +11908,13 @@
       </p:sp>
       <p:sp>
         <p:nvSpPr>
-          <p:cNvPr id="38" name="Text 36"/>
-          <p:cNvSpPr/>
-          <p:nvPr/>
-        </p:nvSpPr>
-        <p:spPr>
-          <a:xfrm>
-            <a:off x="3429000" y="3246120"/>
+          <p:cNvPr id="45" name="Text 43"/>
+          <p:cNvSpPr/>
+          <p:nvPr/>
+        </p:nvSpPr>
+        <p:spPr>
+          <a:xfrm>
+            <a:off x="6263640" y="3246120"/>
             <a:ext cx="2377440" cy="365760"/>
           </a:xfrm>
           <a:prstGeom prst="rect">
@@ -11716,7 +11939,7 @@
                 <a:ea typeface="Arial" pitchFamily="34" charset="-122"/>
                 <a:cs typeface="Arial" pitchFamily="34" charset="-120"/>
               </a:rPr>
-              <a:t>清潔なお部屋でした 浜松町駅から結構歩きました</a:t>
+              <a:t>部屋は清潔で気持ちよく過ごせました</a:t>
             </a:r>
             <a:endParaRPr lang="en-US" sz="900" dirty="0"/>
           </a:p>
@@ -11724,13 +11947,13 @@
       </p:sp>
       <p:sp>
         <p:nvSpPr>
-          <p:cNvPr id="39" name="Text 37"/>
-          <p:cNvSpPr/>
-          <p:nvPr/>
-        </p:nvSpPr>
-        <p:spPr>
-          <a:xfrm>
-            <a:off x="3429000" y="3657600"/>
+          <p:cNvPr id="46" name="Text 44"/>
+          <p:cNvSpPr/>
+          <p:nvPr/>
+        </p:nvSpPr>
+        <p:spPr>
+          <a:xfrm>
+            <a:off x="6263640" y="3657600"/>
             <a:ext cx="2377440" cy="640080"/>
           </a:xfrm>
           <a:prstGeom prst="rect">
@@ -11755,230 +11978,7 @@
                 <a:ea typeface="Arial" pitchFamily="34" charset="-122"/>
                 <a:cs typeface="Arial" pitchFamily="34" charset="-120"/>
               </a:rPr>
-              <a:t>「築年数を感じる室内でしたが、綺麗にされていました」</a:t>
-            </a:r>
-            <a:endParaRPr lang="en-US" sz="900" dirty="0"/>
-          </a:p>
-        </p:txBody>
-      </p:sp>
-      <p:sp>
-        <p:nvSpPr>
-          <p:cNvPr id="40" name="Shape 38"/>
-          <p:cNvSpPr/>
-          <p:nvPr/>
-        </p:nvSpPr>
-        <p:spPr>
-          <a:xfrm>
-            <a:off x="6126480" y="2880360"/>
-            <a:ext cx="2651760" cy="1600200"/>
-          </a:xfrm>
-          <a:prstGeom prst="rect">
-            <a:avLst/>
-          </a:prstGeom>
-          <a:solidFill>
-            <a:srgbClr val="FFFFFF"/>
-          </a:solidFill>
-          <a:ln/>
-          <a:effectLst>
-            <a:outerShdw sx="100000" sy="100000" kx="0" ky="0" algn="bl" rotWithShape="0" blurRad="50800" dist="25400" dir="8100000">
-              <a:srgbClr val="000000">
-                <a:alpha val="10000"/>
-              </a:srgbClr>
-            </a:outerShdw>
-          </a:effectLst>
-        </p:spPr>
-      </p:sp>
-      <p:sp>
-        <p:nvSpPr>
-          <p:cNvPr id="41" name="Shape 39"/>
-          <p:cNvSpPr/>
-          <p:nvPr/>
-        </p:nvSpPr>
-        <p:spPr>
-          <a:xfrm>
-            <a:off x="6126480" y="2880360"/>
-            <a:ext cx="54864" cy="1600200"/>
-          </a:xfrm>
-          <a:prstGeom prst="rect">
-            <a:avLst/>
-          </a:prstGeom>
-          <a:solidFill>
-            <a:srgbClr val="16A34A"/>
-          </a:solidFill>
-          <a:ln/>
-        </p:spPr>
-      </p:sp>
-      <p:sp>
-        <p:nvSpPr>
-          <p:cNvPr id="42" name="Shape 40"/>
-          <p:cNvSpPr/>
-          <p:nvPr/>
-        </p:nvSpPr>
-        <p:spPr>
-          <a:xfrm>
-            <a:off x="7955280" y="2953512"/>
-            <a:ext cx="658368" cy="228600"/>
-          </a:xfrm>
-          <a:prstGeom prst="rect">
-            <a:avLst/>
-          </a:prstGeom>
-          <a:solidFill>
-            <a:srgbClr val="DCFCE7"/>
-          </a:solidFill>
-          <a:ln/>
-        </p:spPr>
-      </p:sp>
-      <p:sp>
-        <p:nvSpPr>
-          <p:cNvPr id="43" name="Text 41"/>
-          <p:cNvSpPr/>
-          <p:nvPr/>
-        </p:nvSpPr>
-        <p:spPr>
-          <a:xfrm>
-            <a:off x="7955280" y="2953512"/>
-            <a:ext cx="658368" cy="228600"/>
-          </a:xfrm>
-          <a:prstGeom prst="rect">
-            <a:avLst/>
-          </a:prstGeom>
-          <a:noFill/>
-          <a:ln/>
-        </p:spPr>
-        <p:txBody>
-          <a:bodyPr wrap="square" lIns="0" tIns="0" rIns="0" bIns="0" rtlCol="0" anchor="ctr"/>
-          <a:lstStyle/>
-          <a:p>
-            <a:pPr algn="ctr" indent="0" marL="0">
-              <a:buNone/>
-            </a:pPr>
-            <a:r>
-              <a:rPr lang="en-US" sz="900" b="1" dirty="0">
-                <a:solidFill>
-                  <a:srgbClr val="16A34A"/>
-                </a:solidFill>
-                <a:latin typeface="Arial" pitchFamily="34" charset="0"/>
-                <a:ea typeface="Arial" pitchFamily="34" charset="-122"/>
-                <a:cs typeface="Arial" pitchFamily="34" charset="-120"/>
-              </a:rPr>
-              <a:t>9件</a:t>
-            </a:r>
-            <a:endParaRPr lang="en-US" sz="900" dirty="0"/>
-          </a:p>
-        </p:txBody>
-      </p:sp>
-      <p:sp>
-        <p:nvSpPr>
-          <p:cNvPr id="44" name="Text 42"/>
-          <p:cNvSpPr/>
-          <p:nvPr/>
-        </p:nvSpPr>
-        <p:spPr>
-          <a:xfrm>
-            <a:off x="6263640" y="2953512"/>
-            <a:ext cx="1645920" cy="274320"/>
-          </a:xfrm>
-          <a:prstGeom prst="rect">
-            <a:avLst/>
-          </a:prstGeom>
-          <a:noFill/>
-          <a:ln/>
-        </p:spPr>
-        <p:txBody>
-          <a:bodyPr wrap="square" lIns="0" tIns="0" rIns="0" bIns="0" rtlCol="0" anchor="ctr"/>
-          <a:lstStyle/>
-          <a:p>
-            <a:pPr indent="0" marL="0">
-              <a:buNone/>
-            </a:pPr>
-            <a:r>
-              <a:rPr lang="en-US" sz="1300" b="1" dirty="0">
-                <a:solidFill>
-                  <a:srgbClr val="1A2744"/>
-                </a:solidFill>
-                <a:latin typeface="Arial" pitchFamily="34" charset="0"/>
-                <a:ea typeface="Arial" pitchFamily="34" charset="-122"/>
-                <a:cs typeface="Arial" pitchFamily="34" charset="-120"/>
-              </a:rPr>
-              <a:t>スタッフの対応</a:t>
-            </a:r>
-            <a:endParaRPr lang="en-US" sz="1300" dirty="0"/>
-          </a:p>
-        </p:txBody>
-      </p:sp>
-      <p:sp>
-        <p:nvSpPr>
-          <p:cNvPr id="45" name="Text 43"/>
-          <p:cNvSpPr/>
-          <p:nvPr/>
-        </p:nvSpPr>
-        <p:spPr>
-          <a:xfrm>
-            <a:off x="6263640" y="3246120"/>
-            <a:ext cx="2377440" cy="365760"/>
-          </a:xfrm>
-          <a:prstGeom prst="rect">
-            <a:avLst/>
-          </a:prstGeom>
-          <a:noFill/>
-          <a:ln/>
-        </p:spPr>
-        <p:txBody>
-          <a:bodyPr wrap="square" lIns="0" tIns="0" rIns="0" bIns="0" rtlCol="0" anchor="ctr"/>
-          <a:lstStyle/>
-          <a:p>
-            <a:pPr indent="0" marL="0">
-              <a:buNone/>
-            </a:pPr>
-            <a:r>
-              <a:rPr lang="en-US" sz="900" dirty="0">
-                <a:solidFill>
-                  <a:srgbClr val="64748B"/>
-                </a:solidFill>
-                <a:latin typeface="Arial" pitchFamily="34" charset="0"/>
-                <a:ea typeface="Arial" pitchFamily="34" charset="-122"/>
-                <a:cs typeface="Arial" pitchFamily="34" charset="-120"/>
-              </a:rPr>
-              <a:t>駅からは行きやすいしわかりやすいし、スタッフの方の対応もよかったですが、音が気になる人にはおすすめしないです</a:t>
-            </a:r>
-            <a:endParaRPr lang="en-US" sz="900" dirty="0"/>
-          </a:p>
-        </p:txBody>
-      </p:sp>
-      <p:sp>
-        <p:nvSpPr>
-          <p:cNvPr id="46" name="Text 44"/>
-          <p:cNvSpPr/>
-          <p:nvPr/>
-        </p:nvSpPr>
-        <p:spPr>
-          <a:xfrm>
-            <a:off x="6263640" y="3657600"/>
-            <a:ext cx="2377440" cy="640080"/>
-          </a:xfrm>
-          <a:prstGeom prst="rect">
-            <a:avLst/>
-          </a:prstGeom>
-          <a:noFill/>
-          <a:ln/>
-        </p:spPr>
-        <p:txBody>
-          <a:bodyPr wrap="square" lIns="0" tIns="0" rIns="0" bIns="0" rtlCol="0" anchor="ctr"/>
-          <a:lstStyle/>
-          <a:p>
-            <a:pPr indent="0" marL="0">
-              <a:buNone/>
-            </a:pPr>
-            <a:r>
-              <a:rPr lang="en-US" sz="900" i="1" dirty="0">
-                <a:solidFill>
-                  <a:srgbClr val="3B7DD8"/>
-                </a:solidFill>
-                <a:latin typeface="Arial" pitchFamily="34" charset="0"/>
-                <a:ea typeface="Arial" pitchFamily="34" charset="-122"/>
-                <a:cs typeface="Arial" pitchFamily="34" charset="-120"/>
-              </a:rPr>
-              <a:t>「値段なりの内装、 外国人スタッフばかりです」</a:t>
+              <a:t>「清潔なお部屋でした 浜松町駅から結構歩きました」</a:t>
             </a:r>
             <a:endParaRPr lang="en-US" sz="900" dirty="0"/>
           </a:p>

--- a/納品レポート/ホテル別レポート/chisan_口コミ分析レポート.pptx
+++ b/納品レポート/ホテル別レポート/chisan_口コミ分析レポート.pptx
@@ -2801,7 +2801,7 @@
                 <a:ea typeface="Arial" pitchFamily="34" charset="-122"/>
                 <a:cs typeface="Arial" pitchFamily="34" charset="-120"/>
               </a:rPr>
-              <a:t>作成日：2026年4月6日</a:t>
+              <a:t>作成日：2026年4月7日</a:t>
             </a:r>
             <a:endParaRPr lang="en-US" sz="1000" dirty="0"/>
           </a:p>
@@ -5959,7 +5959,7 @@
                 <a:ea typeface="Arial" pitchFamily="34" charset="-122"/>
                 <a:cs typeface="Arial" pitchFamily="34" charset="-120"/>
               </a:rPr>
-              <a:t>  設備が古く、サービスも良くないです</a:t>
+              <a:t>  การเดินทางสะดวกมากๆและที่พักอยู่มนทำเลที่ดี พนักงานบริการ...</a:t>
             </a:r>
             <a:endParaRPr lang="en-US" sz="1100" dirty="0"/>
           </a:p>
@@ -11270,7 +11270,7 @@
                 <a:ea typeface="Arial" pitchFamily="34" charset="-122"/>
                 <a:cs typeface="Arial" pitchFamily="34" charset="-120"/>
               </a:rPr>
-              <a:t>設備が古く、サービスも良くないです</a:t>
+              <a:t>การเดินทางสะดวกมากๆและที่พักอยู่มนทำเลที่ดี พนักงานบริการ...</a:t>
             </a:r>
             <a:endParaRPr lang="en-US" sz="900" dirty="0"/>
           </a:p>
@@ -11309,7 +11309,7 @@
                 <a:ea typeface="Arial" pitchFamily="34" charset="-122"/>
                 <a:cs typeface="Arial" pitchFamily="34" charset="-120"/>
               </a:rPr>
-              <a:t>「最低限のアメニティで手頃な価格で宿泊できるので良い」</a:t>
+              <a:t>「設備が古く、サービスも良くないです」</a:t>
             </a:r>
             <a:endParaRPr lang="en-US" sz="900" dirty="0"/>
           </a:p>

--- a/納品レポート/ホテル別レポート/chisan_口コミ分析レポート.pptx
+++ b/納品レポート/ホテル別レポート/chisan_口コミ分析レポート.pptx
@@ -2801,7 +2801,7 @@
                 <a:ea typeface="Arial" pitchFamily="34" charset="-122"/>
                 <a:cs typeface="Arial" pitchFamily="34" charset="-120"/>
               </a:rPr>
-              <a:t>作成日：2026年4月7日</a:t>
+              <a:t>作成日：2026年4月8日</a:t>
             </a:r>
             <a:endParaRPr lang="en-US" sz="1000" dirty="0"/>
           </a:p>

--- a/納品レポート/ホテル別レポート/chisan_口コミ分析レポート.pptx
+++ b/納品レポート/ホテル別レポート/chisan_口コミ分析レポート.pptx
@@ -2801,7 +2801,7 @@
                 <a:ea typeface="Arial" pitchFamily="34" charset="-122"/>
                 <a:cs typeface="Arial" pitchFamily="34" charset="-120"/>
               </a:rPr>
-              <a:t>作成日：2026年4月10日</a:t>
+              <a:t>作成日：2026年4月11日</a:t>
             </a:r>
             <a:endParaRPr lang="en-US" sz="1000" dirty="0"/>
           </a:p>

--- a/納品レポート/ホテル別レポート/chisan_口コミ分析レポート.pptx
+++ b/納品レポート/ホテル別レポート/chisan_口コミ分析レポート.pptx
@@ -2801,7 +2801,7 @@
                 <a:ea typeface="Arial" pitchFamily="34" charset="-122"/>
                 <a:cs typeface="Arial" pitchFamily="34" charset="-120"/>
               </a:rPr>
-              <a:t>作成日：2026年4月11日</a:t>
+              <a:t>作成日：2026年4月13日</a:t>
             </a:r>
             <a:endParaRPr lang="en-US" sz="1000" dirty="0"/>
           </a:p>

--- a/納品レポート/ホテル別レポート/chisan_口コミ分析レポート.pptx
+++ b/納品レポート/ホテル別レポート/chisan_口コミ分析レポート.pptx
@@ -2801,7 +2801,7 @@
                 <a:ea typeface="Arial" pitchFamily="34" charset="-122"/>
                 <a:cs typeface="Arial" pitchFamily="34" charset="-120"/>
               </a:rPr>
-              <a:t>作成日：2026年4月13日</a:t>
+              <a:t>作成日：2026年4月15日</a:t>
             </a:r>
             <a:endParaRPr lang="en-US" sz="1000" dirty="0"/>
           </a:p>

--- a/納品レポート/ホテル別レポート/chisan_口コミ分析レポート.pptx
+++ b/納品レポート/ホテル別レポート/chisan_口コミ分析レポート.pptx
@@ -2801,7 +2801,7 @@
                 <a:ea typeface="Arial" pitchFamily="34" charset="-122"/>
                 <a:cs typeface="Arial" pitchFamily="34" charset="-120"/>
               </a:rPr>
-              <a:t>作成日：2026年4月16日</a:t>
+              <a:t>作成日：2026年4月20日</a:t>
             </a:r>
             <a:endParaRPr lang="en-US" sz="1000" dirty="0"/>
           </a:p>

--- a/納品レポート/ホテル別レポート/chisan_口コミ分析レポート.pptx
+++ b/納品レポート/ホテル別レポート/chisan_口コミ分析レポート.pptx
@@ -2719,7 +2719,7 @@
                 <a:ea typeface="Arial" pitchFamily="34" charset="-122"/>
                 <a:cs typeface="Arial" pitchFamily="34" charset="-120"/>
               </a:rPr>
-              <a:t>チサンホテル浜松町</a:t>
+              <a:t>チサングランド大阪</a:t>
             </a:r>
             <a:endParaRPr lang="en-US" sz="1600" dirty="0"/>
           </a:p>
@@ -2801,7 +2801,7 @@
                 <a:ea typeface="Arial" pitchFamily="34" charset="-122"/>
                 <a:cs typeface="Arial" pitchFamily="34" charset="-120"/>
               </a:rPr>
-              <a:t>作成日：2026年4月20日</a:t>
+              <a:t>作成日：2026年4月21日</a:t>
             </a:r>
             <a:endParaRPr lang="en-US" sz="1000" dirty="0"/>
           </a:p>

--- a/納品レポート/ホテル別レポート/chisan_口コミ分析レポート.pptx
+++ b/納品レポート/ホテル別レポート/chisan_口コミ分析レポート.pptx
@@ -2719,7 +2719,7 @@
                 <a:ea typeface="Arial" pitchFamily="34" charset="-122"/>
                 <a:cs typeface="Arial" pitchFamily="34" charset="-120"/>
               </a:rPr>
-              <a:t>チサングランド大阪</a:t>
+              <a:t>チサンホテル浜松町</a:t>
             </a:r>
             <a:endParaRPr lang="en-US" sz="1600" dirty="0"/>
           </a:p>
@@ -2801,7 +2801,7 @@
                 <a:ea typeface="Arial" pitchFamily="34" charset="-122"/>
                 <a:cs typeface="Arial" pitchFamily="34" charset="-120"/>
               </a:rPr>
-              <a:t>作成日：2026年4月21日</a:t>
+              <a:t>作成日：2026年4月22日</a:t>
             </a:r>
             <a:endParaRPr lang="en-US" sz="1000" dirty="0"/>
           </a:p>
